--- a/paper_figures/HIV immune model with time delay.pptx
+++ b/paper_figures/HIV immune model with time delay.pptx
@@ -5,13 +5,14 @@
     <p:sldMasterId id="2147483648" r:id="rId1"/>
   </p:sldMasterIdLst>
   <p:notesMasterIdLst>
-    <p:notesMasterId r:id="rId6"/>
+    <p:notesMasterId r:id="rId7"/>
   </p:notesMasterIdLst>
   <p:sldIdLst>
     <p:sldId id="256" r:id="rId2"/>
     <p:sldId id="258" r:id="rId3"/>
     <p:sldId id="259" r:id="rId4"/>
-    <p:sldId id="257" r:id="rId5"/>
+    <p:sldId id="260" r:id="rId5"/>
+    <p:sldId id="257" r:id="rId6"/>
   </p:sldIdLst>
   <p:sldSz cx="2160588" cy="2519363"/>
   <p:notesSz cx="2519363" cy="2160588"/>
@@ -545,6 +546,114 @@
   <p:cSld>
     <p:spTree>
       <p:nvGrpSpPr>
+        <p:cNvPr id="1" name="">
+          <a:extLst>
+            <a:ext uri="{FF2B5EF4-FFF2-40B4-BE49-F238E27FC236}">
+              <a16:creationId xmlns:a16="http://schemas.microsoft.com/office/drawing/2014/main" id="{55E59A92-24C9-2460-B3E3-7387DB90AAD1}"/>
+            </a:ext>
+          </a:extLst>
+        </p:cNvPr>
+        <p:cNvGrpSpPr/>
+        <p:nvPr/>
+      </p:nvGrpSpPr>
+      <p:grpSpPr>
+        <a:xfrm>
+          <a:off x="0" y="0"/>
+          <a:ext cx="0" cy="0"/>
+          <a:chOff x="0" y="0"/>
+          <a:chExt cx="0" cy="0"/>
+        </a:xfrm>
+      </p:grpSpPr>
+      <p:sp>
+        <p:nvSpPr>
+          <p:cNvPr id="2" name="Slide Image Placeholder 1">
+            <a:extLst>
+              <a:ext uri="{FF2B5EF4-FFF2-40B4-BE49-F238E27FC236}">
+                <a16:creationId xmlns:a16="http://schemas.microsoft.com/office/drawing/2014/main" id="{EB81015A-833A-DB5F-17D4-303D9A6CB78D}"/>
+              </a:ext>
+            </a:extLst>
+          </p:cNvPr>
+          <p:cNvSpPr>
+            <a:spLocks noGrp="1" noRot="1" noChangeAspect="1"/>
+          </p:cNvSpPr>
+          <p:nvPr>
+            <p:ph type="sldImg"/>
+          </p:nvPr>
+        </p:nvSpPr>
+        <p:spPr/>
+      </p:sp>
+      <p:sp>
+        <p:nvSpPr>
+          <p:cNvPr id="3" name="Notes Placeholder 2">
+            <a:extLst>
+              <a:ext uri="{FF2B5EF4-FFF2-40B4-BE49-F238E27FC236}">
+                <a16:creationId xmlns:a16="http://schemas.microsoft.com/office/drawing/2014/main" id="{7E97A108-35B8-2669-F94E-4606FECBCC59}"/>
+              </a:ext>
+            </a:extLst>
+          </p:cNvPr>
+          <p:cNvSpPr>
+            <a:spLocks noGrp="1"/>
+          </p:cNvSpPr>
+          <p:nvPr>
+            <p:ph type="body" idx="1"/>
+          </p:nvPr>
+        </p:nvSpPr>
+        <p:spPr/>
+        <p:txBody>
+          <a:bodyPr/>
+          <a:lstStyle/>
+          <a:p>
+            <a:endParaRPr lang="en-US" dirty="0"/>
+          </a:p>
+        </p:txBody>
+      </p:sp>
+      <p:sp>
+        <p:nvSpPr>
+          <p:cNvPr id="4" name="Slide Number Placeholder 3">
+            <a:extLst>
+              <a:ext uri="{FF2B5EF4-FFF2-40B4-BE49-F238E27FC236}">
+                <a16:creationId xmlns:a16="http://schemas.microsoft.com/office/drawing/2014/main" id="{3A787785-5D57-66A3-A2BF-0ECBA465ED56}"/>
+              </a:ext>
+            </a:extLst>
+          </p:cNvPr>
+          <p:cNvSpPr>
+            <a:spLocks noGrp="1"/>
+          </p:cNvSpPr>
+          <p:nvPr>
+            <p:ph type="sldNum" sz="quarter" idx="10"/>
+          </p:nvPr>
+        </p:nvSpPr>
+        <p:spPr/>
+        <p:txBody>
+          <a:bodyPr/>
+          <a:lstStyle/>
+          <a:p>
+            <a:fld id="{F7021451-1387-4CA6-816F-3879F97B5CBC}" type="slidenum">
+              <a:rPr lang="en-US"/>
+              <a:t>4</a:t>
+            </a:fld>
+            <a:endParaRPr lang="en-US"/>
+          </a:p>
+        </p:txBody>
+      </p:sp>
+    </p:spTree>
+    <p:extLst>
+      <p:ext uri="{BB962C8B-B14F-4D97-AF65-F5344CB8AC3E}">
+        <p14:creationId xmlns:p14="http://schemas.microsoft.com/office/powerpoint/2010/main" val="566573994"/>
+      </p:ext>
+    </p:extLst>
+  </p:cSld>
+  <p:clrMapOvr>
+    <a:masterClrMapping/>
+  </p:clrMapOvr>
+</p:notes>
+</file>
+
+<file path=ppt/notesSlides/notesSlide5.xml><?xml version="1.0" encoding="utf-8"?>
+<p:notes xmlns:a="http://schemas.openxmlformats.org/drawingml/2006/main" xmlns:r="http://schemas.openxmlformats.org/officeDocument/2006/relationships" xmlns:p="http://schemas.openxmlformats.org/presentationml/2006/main">
+  <p:cSld>
+    <p:spTree>
+      <p:nvGrpSpPr>
         <p:cNvPr id="1" name=""/>
         <p:cNvGrpSpPr/>
         <p:nvPr/>
@@ -605,7 +714,7 @@
           <a:p>
             <a:fld id="{F7021451-1387-4CA6-816F-3879F97B5CBC}" type="slidenum">
               <a:rPr lang="en-US"/>
-              <a:t>4</a:t>
+              <a:t>5</a:t>
             </a:fld>
             <a:endParaRPr lang="en-US"/>
           </a:p>
@@ -4892,8 +5001,8 @@
           </p:txBody>
         </p:sp>
       </p:grpSp>
-      <mc:AlternateContent xmlns:mc="http://schemas.openxmlformats.org/markup-compatibility/2006">
-        <mc:Choice xmlns:a14="http://schemas.microsoft.com/office/drawing/2010/main" Requires="a14">
+      <mc:AlternateContent xmlns:mc="http://schemas.openxmlformats.org/markup-compatibility/2006" xmlns:a14="http://schemas.microsoft.com/office/drawing/2010/main">
+        <mc:Choice Requires="a14">
           <p:sp>
             <p:nvSpPr>
               <p:cNvPr id="50" name="TextBox 49">
@@ -4922,6 +5031,7 @@
               </a:bodyPr>
               <a:lstStyle/>
               <a:p>
+                <a:pPr/>
                 <a14:m>
                   <m:oMathPara xmlns:m="http://schemas.openxmlformats.org/officeDocument/2006/math">
                     <m:oMathParaPr>
@@ -4974,7 +5084,7 @@
             </p:txBody>
           </p:sp>
         </mc:Choice>
-        <mc:Fallback>
+        <mc:Fallback xmlns="">
           <p:sp>
             <p:nvSpPr>
               <p:cNvPr id="50" name="TextBox 49">
@@ -5592,8 +5702,8 @@
           </a:fontRef>
         </p:style>
       </p:cxnSp>
-      <mc:AlternateContent xmlns:mc="http://schemas.openxmlformats.org/markup-compatibility/2006">
-        <mc:Choice xmlns:a14="http://schemas.microsoft.com/office/drawing/2010/main" Requires="a14">
+      <mc:AlternateContent xmlns:mc="http://schemas.openxmlformats.org/markup-compatibility/2006" xmlns:a14="http://schemas.microsoft.com/office/drawing/2010/main">
+        <mc:Choice Requires="a14">
           <p:sp>
             <p:nvSpPr>
               <p:cNvPr id="78" name="TextBox 77">
@@ -5622,6 +5732,7 @@
               </a:bodyPr>
               <a:lstStyle/>
               <a:p>
+                <a:pPr/>
                 <a14:m>
                   <m:oMathPara xmlns:m="http://schemas.openxmlformats.org/officeDocument/2006/math">
                     <m:oMathParaPr>
@@ -5643,7 +5754,7 @@
             </p:txBody>
           </p:sp>
         </mc:Choice>
-        <mc:Fallback>
+        <mc:Fallback xmlns="">
           <p:sp>
             <p:nvSpPr>
               <p:cNvPr id="78" name="TextBox 77">
@@ -8234,8 +8345,8 @@
             </p:txBody>
           </p:sp>
         </p:grpSp>
-        <mc:AlternateContent xmlns:mc="http://schemas.openxmlformats.org/markup-compatibility/2006">
-          <mc:Choice xmlns:a14="http://schemas.microsoft.com/office/drawing/2010/main" Requires="a14">
+        <mc:AlternateContent xmlns:mc="http://schemas.openxmlformats.org/markup-compatibility/2006" xmlns:a14="http://schemas.microsoft.com/office/drawing/2010/main">
+          <mc:Choice Requires="a14">
             <p:sp>
               <p:nvSpPr>
                 <p:cNvPr id="50" name="TextBox 49">
@@ -8264,6 +8375,7 @@
                 </a:bodyPr>
                 <a:lstStyle/>
                 <a:p>
+                  <a:pPr/>
                   <a14:m>
                     <m:oMathPara xmlns:m="http://schemas.openxmlformats.org/officeDocument/2006/math">
                       <m:oMathParaPr>
@@ -8316,7 +8428,7 @@
               </p:txBody>
             </p:sp>
           </mc:Choice>
-          <mc:Fallback>
+          <mc:Fallback xmlns="">
             <p:sp>
               <p:nvSpPr>
                 <p:cNvPr id="50" name="TextBox 49">
@@ -9467,8 +9579,8 @@
                 </a:prstGeom>
               </p:spPr>
             </p:pic>
-            <mc:AlternateContent xmlns:mc="http://schemas.openxmlformats.org/markup-compatibility/2006">
-              <mc:Choice xmlns:a14="http://schemas.microsoft.com/office/drawing/2010/main" Requires="a14">
+            <mc:AlternateContent xmlns:mc="http://schemas.openxmlformats.org/markup-compatibility/2006" xmlns:a14="http://schemas.microsoft.com/office/drawing/2010/main">
+              <mc:Choice Requires="a14">
                 <p:sp>
                   <p:nvSpPr>
                     <p:cNvPr id="78" name="TextBox 77">
@@ -9497,6 +9609,7 @@
                     </a:bodyPr>
                     <a:lstStyle/>
                     <a:p>
+                      <a:pPr/>
                       <a14:m>
                         <m:oMathPara xmlns:m="http://schemas.openxmlformats.org/officeDocument/2006/math">
                           <m:oMathParaPr>
@@ -9518,7 +9631,7 @@
                   </p:txBody>
                 </p:sp>
               </mc:Choice>
-              <mc:Fallback>
+              <mc:Fallback xmlns="">
                 <p:sp>
                   <p:nvSpPr>
                     <p:cNvPr id="78" name="TextBox 77">
@@ -9755,6 +9868,3387 @@
 </file>
 
 <file path=ppt/slides/slide4.xml><?xml version="1.0" encoding="utf-8"?>
+<p:sld xmlns:a="http://schemas.openxmlformats.org/drawingml/2006/main" xmlns:r="http://schemas.openxmlformats.org/officeDocument/2006/relationships" xmlns:p="http://schemas.openxmlformats.org/presentationml/2006/main">
+  <p:cSld>
+    <p:spTree>
+      <p:nvGrpSpPr>
+        <p:cNvPr id="1" name="">
+          <a:extLst>
+            <a:ext uri="{FF2B5EF4-FFF2-40B4-BE49-F238E27FC236}">
+              <a16:creationId xmlns:a16="http://schemas.microsoft.com/office/drawing/2014/main" id="{850026E4-9A5B-39D3-741D-3AC9E0C8DDFE}"/>
+            </a:ext>
+          </a:extLst>
+        </p:cNvPr>
+        <p:cNvGrpSpPr/>
+        <p:nvPr/>
+      </p:nvGrpSpPr>
+      <p:grpSpPr>
+        <a:xfrm>
+          <a:off x="0" y="0"/>
+          <a:ext cx="0" cy="0"/>
+          <a:chOff x="0" y="0"/>
+          <a:chExt cx="0" cy="0"/>
+        </a:xfrm>
+      </p:grpSpPr>
+      <p:sp>
+        <p:nvSpPr>
+          <p:cNvPr id="63" name="Rectangle 62">
+            <a:extLst>
+              <a:ext uri="{FF2B5EF4-FFF2-40B4-BE49-F238E27FC236}">
+                <a16:creationId xmlns:a16="http://schemas.microsoft.com/office/drawing/2014/main" id="{BC4E681E-F81D-2623-D467-0C67628CAE48}"/>
+              </a:ext>
+            </a:extLst>
+          </p:cNvPr>
+          <p:cNvSpPr/>
+          <p:nvPr/>
+        </p:nvSpPr>
+        <p:spPr>
+          <a:xfrm>
+            <a:off x="-45129" y="228600"/>
+            <a:ext cx="2495003" cy="1530461"/>
+          </a:xfrm>
+          <a:prstGeom prst="rect">
+            <a:avLst/>
+          </a:prstGeom>
+          <a:solidFill>
+            <a:schemeClr val="bg1">
+              <a:alpha val="55000"/>
+            </a:schemeClr>
+          </a:solidFill>
+          <a:ln>
+            <a:noFill/>
+          </a:ln>
+        </p:spPr>
+        <p:style>
+          <a:lnRef idx="2">
+            <a:schemeClr val="accent1">
+              <a:shade val="15000"/>
+            </a:schemeClr>
+          </a:lnRef>
+          <a:fillRef idx="1">
+            <a:schemeClr val="accent1"/>
+          </a:fillRef>
+          <a:effectRef idx="0">
+            <a:schemeClr val="accent1"/>
+          </a:effectRef>
+          <a:fontRef idx="minor">
+            <a:schemeClr val="lt1"/>
+          </a:fontRef>
+        </p:style>
+        <p:txBody>
+          <a:bodyPr rtlCol="0" anchor="ctr"/>
+          <a:lstStyle/>
+          <a:p>
+            <a:pPr algn="ctr"/>
+            <a:endParaRPr lang="en-US"/>
+          </a:p>
+        </p:txBody>
+      </p:sp>
+      <p:sp>
+        <p:nvSpPr>
+          <p:cNvPr id="54" name="Rectangle 53">
+            <a:extLst>
+              <a:ext uri="{FF2B5EF4-FFF2-40B4-BE49-F238E27FC236}">
+                <a16:creationId xmlns:a16="http://schemas.microsoft.com/office/drawing/2014/main" id="{D0AB91A3-C6C3-0E72-7CF4-B24E414D9F75}"/>
+              </a:ext>
+            </a:extLst>
+          </p:cNvPr>
+          <p:cNvSpPr/>
+          <p:nvPr/>
+        </p:nvSpPr>
+        <p:spPr>
+          <a:xfrm>
+            <a:off x="-45129" y="136498"/>
+            <a:ext cx="2535237" cy="1622574"/>
+          </a:xfrm>
+          <a:prstGeom prst="rect">
+            <a:avLst/>
+          </a:prstGeom>
+          <a:solidFill>
+            <a:schemeClr val="bg1"/>
+          </a:solidFill>
+          <a:ln>
+            <a:noFill/>
+          </a:ln>
+        </p:spPr>
+        <p:style>
+          <a:lnRef idx="2">
+            <a:schemeClr val="accent1">
+              <a:shade val="15000"/>
+            </a:schemeClr>
+          </a:lnRef>
+          <a:fillRef idx="1">
+            <a:schemeClr val="accent1"/>
+          </a:fillRef>
+          <a:effectRef idx="0">
+            <a:schemeClr val="accent1"/>
+          </a:effectRef>
+          <a:fontRef idx="minor">
+            <a:schemeClr val="lt1"/>
+          </a:fontRef>
+        </p:style>
+        <p:txBody>
+          <a:bodyPr rtlCol="0" anchor="ctr"/>
+          <a:lstStyle/>
+          <a:p>
+            <a:pPr algn="ctr"/>
+            <a:r>
+              <a:rPr lang="en-US" dirty="0"/>
+              <a:t> </a:t>
+            </a:r>
+          </a:p>
+        </p:txBody>
+      </p:sp>
+      <p:grpSp>
+        <p:nvGrpSpPr>
+          <p:cNvPr id="60" name="Group 59">
+            <a:extLst>
+              <a:ext uri="{FF2B5EF4-FFF2-40B4-BE49-F238E27FC236}">
+                <a16:creationId xmlns:a16="http://schemas.microsoft.com/office/drawing/2014/main" id="{4ED5B396-A6BA-87F1-BD2C-EA08B3B325B6}"/>
+              </a:ext>
+            </a:extLst>
+          </p:cNvPr>
+          <p:cNvGrpSpPr/>
+          <p:nvPr/>
+        </p:nvGrpSpPr>
+        <p:grpSpPr>
+          <a:xfrm>
+            <a:off x="-96226" y="293577"/>
+            <a:ext cx="2276972" cy="1465787"/>
+            <a:chOff x="-96226" y="293577"/>
+            <a:chExt cx="2276972" cy="1465787"/>
+          </a:xfrm>
+        </p:grpSpPr>
+        <p:pic>
+          <p:nvPicPr>
+            <p:cNvPr id="167" name="Image 11" descr="preencoded.png">
+              <a:extLst>
+                <a:ext uri="{FF2B5EF4-FFF2-40B4-BE49-F238E27FC236}">
+                  <a16:creationId xmlns:a16="http://schemas.microsoft.com/office/drawing/2014/main" id="{AD400A9D-010D-EE81-20D4-0FA92D6E66B3}"/>
+                </a:ext>
+              </a:extLst>
+            </p:cNvPr>
+            <p:cNvPicPr>
+              <a:picLocks noChangeAspect="1"/>
+            </p:cNvPicPr>
+            <p:nvPr>
+              <p:custDataLst>
+                <p:tags r:id="rId2"/>
+              </p:custDataLst>
+            </p:nvPr>
+          </p:nvPicPr>
+          <p:blipFill>
+            <a:blip r:embed="rId31"/>
+            <a:stretch>
+              <a:fillRect/>
+            </a:stretch>
+          </p:blipFill>
+          <p:spPr>
+            <a:xfrm>
+              <a:off x="-96226" y="647604"/>
+              <a:ext cx="362712" cy="161544"/>
+            </a:xfrm>
+            <a:prstGeom prst="rect">
+              <a:avLst/>
+            </a:prstGeom>
+          </p:spPr>
+        </p:pic>
+        <p:grpSp>
+          <p:nvGrpSpPr>
+            <p:cNvPr id="57" name="Group 56">
+              <a:extLst>
+                <a:ext uri="{FF2B5EF4-FFF2-40B4-BE49-F238E27FC236}">
+                  <a16:creationId xmlns:a16="http://schemas.microsoft.com/office/drawing/2014/main" id="{3C41C268-DCD2-69D1-F2E9-03FC21D7E4D2}"/>
+                </a:ext>
+              </a:extLst>
+            </p:cNvPr>
+            <p:cNvGrpSpPr/>
+            <p:nvPr/>
+          </p:nvGrpSpPr>
+          <p:grpSpPr>
+            <a:xfrm>
+              <a:off x="-34008" y="293577"/>
+              <a:ext cx="2214754" cy="1465787"/>
+              <a:chOff x="-34008" y="293577"/>
+              <a:chExt cx="2214754" cy="1465787"/>
+            </a:xfrm>
+          </p:grpSpPr>
+          <p:grpSp>
+            <p:nvGrpSpPr>
+              <p:cNvPr id="51" name="Group 50">
+                <a:extLst>
+                  <a:ext uri="{FF2B5EF4-FFF2-40B4-BE49-F238E27FC236}">
+                    <a16:creationId xmlns:a16="http://schemas.microsoft.com/office/drawing/2014/main" id="{A131EB86-7E76-CBDF-49F5-1D4FCC8D8852}"/>
+                  </a:ext>
+                </a:extLst>
+              </p:cNvPr>
+              <p:cNvGrpSpPr/>
+              <p:nvPr/>
+            </p:nvGrpSpPr>
+            <p:grpSpPr>
+              <a:xfrm>
+                <a:off x="-34008" y="293577"/>
+                <a:ext cx="2214754" cy="1465787"/>
+                <a:chOff x="11121" y="277702"/>
+                <a:chExt cx="2214754" cy="1465787"/>
+              </a:xfrm>
+            </p:grpSpPr>
+            <p:pic>
+              <p:nvPicPr>
+                <p:cNvPr id="2" name="Image 0" descr="preencoded.png">
+                  <a:extLst>
+                    <a:ext uri="{FF2B5EF4-FFF2-40B4-BE49-F238E27FC236}">
+                      <a16:creationId xmlns:a16="http://schemas.microsoft.com/office/drawing/2014/main" id="{66FD44F7-D3A7-D9C4-87DC-3A809C2619CE}"/>
+                    </a:ext>
+                  </a:extLst>
+                </p:cNvPr>
+                <p:cNvPicPr>
+                  <a:picLocks noChangeAspect="1"/>
+                </p:cNvPicPr>
+                <p:nvPr>
+                  <p:custDataLst>
+                    <p:tags r:id="rId4"/>
+                  </p:custDataLst>
+                </p:nvPr>
+              </p:nvPicPr>
+              <p:blipFill>
+                <a:blip r:embed="rId32"/>
+                <a:stretch>
+                  <a:fillRect/>
+                </a:stretch>
+              </p:blipFill>
+              <p:spPr>
+                <a:xfrm>
+                  <a:off x="1647999" y="549939"/>
+                  <a:ext cx="286512" cy="289560"/>
+                </a:xfrm>
+                <a:prstGeom prst="rect">
+                  <a:avLst/>
+                </a:prstGeom>
+              </p:spPr>
+            </p:pic>
+            <p:pic>
+              <p:nvPicPr>
+                <p:cNvPr id="3" name="Image 1" descr="preencoded.png">
+                  <a:extLst>
+                    <a:ext uri="{FF2B5EF4-FFF2-40B4-BE49-F238E27FC236}">
+                      <a16:creationId xmlns:a16="http://schemas.microsoft.com/office/drawing/2014/main" id="{727E71F5-F293-2D83-BB62-CF85AF58C325}"/>
+                    </a:ext>
+                  </a:extLst>
+                </p:cNvPr>
+                <p:cNvPicPr>
+                  <a:picLocks noChangeAspect="1"/>
+                </p:cNvPicPr>
+                <p:nvPr>
+                  <p:custDataLst>
+                    <p:tags r:id="rId5"/>
+                  </p:custDataLst>
+                </p:nvPr>
+              </p:nvPicPr>
+              <p:blipFill>
+                <a:blip r:embed="rId33"/>
+                <a:stretch>
+                  <a:fillRect/>
+                </a:stretch>
+              </p:blipFill>
+              <p:spPr>
+                <a:xfrm>
+                  <a:off x="234471" y="533746"/>
+                  <a:ext cx="393192" cy="393192"/>
+                </a:xfrm>
+                <a:prstGeom prst="rect">
+                  <a:avLst/>
+                </a:prstGeom>
+              </p:spPr>
+            </p:pic>
+            <p:pic>
+              <p:nvPicPr>
+                <p:cNvPr id="4" name="Image 2" descr="preencoded.png">
+                  <a:extLst>
+                    <a:ext uri="{FF2B5EF4-FFF2-40B4-BE49-F238E27FC236}">
+                      <a16:creationId xmlns:a16="http://schemas.microsoft.com/office/drawing/2014/main" id="{4D308CF7-586B-6038-AE0F-1984714B195A}"/>
+                    </a:ext>
+                  </a:extLst>
+                </p:cNvPr>
+                <p:cNvPicPr>
+                  <a:picLocks noChangeAspect="1"/>
+                </p:cNvPicPr>
+                <p:nvPr>
+                  <p:custDataLst>
+                    <p:tags r:id="rId6"/>
+                  </p:custDataLst>
+                </p:nvPr>
+              </p:nvPicPr>
+              <p:blipFill>
+                <a:blip r:embed="rId33"/>
+                <a:stretch>
+                  <a:fillRect/>
+                </a:stretch>
+              </p:blipFill>
+              <p:spPr>
+                <a:xfrm>
+                  <a:off x="1004971" y="533746"/>
+                  <a:ext cx="393192" cy="393192"/>
+                </a:xfrm>
+                <a:prstGeom prst="rect">
+                  <a:avLst/>
+                </a:prstGeom>
+              </p:spPr>
+            </p:pic>
+            <p:pic>
+              <p:nvPicPr>
+                <p:cNvPr id="5" name="Image 3" descr="preencoded.png">
+                  <a:extLst>
+                    <a:ext uri="{FF2B5EF4-FFF2-40B4-BE49-F238E27FC236}">
+                      <a16:creationId xmlns:a16="http://schemas.microsoft.com/office/drawing/2014/main" id="{76ABF027-D9E1-C8A8-507C-39ACDF9D1DF4}"/>
+                    </a:ext>
+                  </a:extLst>
+                </p:cNvPr>
+                <p:cNvPicPr>
+                  <a:picLocks noChangeAspect="1"/>
+                </p:cNvPicPr>
+                <p:nvPr>
+                  <p:custDataLst>
+                    <p:tags r:id="rId7"/>
+                  </p:custDataLst>
+                </p:nvPr>
+              </p:nvPicPr>
+              <p:blipFill>
+                <a:blip r:embed="rId34"/>
+                <a:stretch>
+                  <a:fillRect/>
+                </a:stretch>
+              </p:blipFill>
+              <p:spPr>
+                <a:xfrm>
+                  <a:off x="869596" y="1109053"/>
+                  <a:ext cx="499872" cy="512064"/>
+                </a:xfrm>
+                <a:prstGeom prst="rect">
+                  <a:avLst/>
+                </a:prstGeom>
+              </p:spPr>
+            </p:pic>
+            <p:pic>
+              <p:nvPicPr>
+                <p:cNvPr id="6" name="Image 4" descr="preencoded.png">
+                  <a:extLst>
+                    <a:ext uri="{FF2B5EF4-FFF2-40B4-BE49-F238E27FC236}">
+                      <a16:creationId xmlns:a16="http://schemas.microsoft.com/office/drawing/2014/main" id="{761E57EF-4FC9-EA64-CAA6-91AE5887F26E}"/>
+                    </a:ext>
+                  </a:extLst>
+                </p:cNvPr>
+                <p:cNvPicPr>
+                  <a:picLocks noChangeAspect="1"/>
+                </p:cNvPicPr>
+                <p:nvPr>
+                  <p:custDataLst>
+                    <p:tags r:id="rId8"/>
+                  </p:custDataLst>
+                </p:nvPr>
+              </p:nvPicPr>
+              <p:blipFill>
+                <a:blip r:embed="rId35"/>
+                <a:stretch>
+                  <a:fillRect/>
+                </a:stretch>
+              </p:blipFill>
+              <p:spPr>
+                <a:xfrm>
+                  <a:off x="1078001" y="1109102"/>
+                  <a:ext cx="484632" cy="509016"/>
+                </a:xfrm>
+                <a:prstGeom prst="rect">
+                  <a:avLst/>
+                </a:prstGeom>
+              </p:spPr>
+            </p:pic>
+            <p:pic>
+              <p:nvPicPr>
+                <p:cNvPr id="7" name="Image 5" descr="preencoded.png">
+                  <a:extLst>
+                    <a:ext uri="{FF2B5EF4-FFF2-40B4-BE49-F238E27FC236}">
+                      <a16:creationId xmlns:a16="http://schemas.microsoft.com/office/drawing/2014/main" id="{98F57F91-9FEE-54FE-6013-3DB87874031C}"/>
+                    </a:ext>
+                  </a:extLst>
+                </p:cNvPr>
+                <p:cNvPicPr>
+                  <a:picLocks noChangeAspect="1"/>
+                </p:cNvPicPr>
+                <p:nvPr>
+                  <p:custDataLst>
+                    <p:tags r:id="rId9"/>
+                  </p:custDataLst>
+                </p:nvPr>
+              </p:nvPicPr>
+              <p:blipFill>
+                <a:blip r:embed="rId36"/>
+                <a:stretch>
+                  <a:fillRect/>
+                </a:stretch>
+              </p:blipFill>
+              <p:spPr>
+                <a:xfrm>
+                  <a:off x="1644954" y="595662"/>
+                  <a:ext cx="292608" cy="198120"/>
+                </a:xfrm>
+                <a:prstGeom prst="rect">
+                  <a:avLst/>
+                </a:prstGeom>
+              </p:spPr>
+            </p:pic>
+            <p:pic>
+              <p:nvPicPr>
+                <p:cNvPr id="8" name="Image 6" descr="preencoded.png">
+                  <a:extLst>
+                    <a:ext uri="{FF2B5EF4-FFF2-40B4-BE49-F238E27FC236}">
+                      <a16:creationId xmlns:a16="http://schemas.microsoft.com/office/drawing/2014/main" id="{D55C45C5-CFB2-4720-C0A7-2B1B50BF5A7C}"/>
+                    </a:ext>
+                  </a:extLst>
+                </p:cNvPr>
+                <p:cNvPicPr>
+                  <a:picLocks noChangeAspect="1"/>
+                </p:cNvPicPr>
+                <p:nvPr>
+                  <p:custDataLst>
+                    <p:tags r:id="rId10"/>
+                  </p:custDataLst>
+                </p:nvPr>
+              </p:nvPicPr>
+              <p:blipFill>
+                <a:blip r:embed="rId37"/>
+                <a:stretch>
+                  <a:fillRect/>
+                </a:stretch>
+              </p:blipFill>
+              <p:spPr>
+                <a:xfrm>
+                  <a:off x="1025686" y="557517"/>
+                  <a:ext cx="195072" cy="195072"/>
+                </a:xfrm>
+                <a:prstGeom prst="rect">
+                  <a:avLst/>
+                </a:prstGeom>
+              </p:spPr>
+            </p:pic>
+            <p:pic>
+              <p:nvPicPr>
+                <p:cNvPr id="9" name="Image 7" descr="preencoded.png">
+                  <a:extLst>
+                    <a:ext uri="{FF2B5EF4-FFF2-40B4-BE49-F238E27FC236}">
+                      <a16:creationId xmlns:a16="http://schemas.microsoft.com/office/drawing/2014/main" id="{1DECF5EA-0D46-4963-F6E2-D8FF6D16B55E}"/>
+                    </a:ext>
+                  </a:extLst>
+                </p:cNvPr>
+                <p:cNvPicPr>
+                  <a:picLocks noChangeAspect="1"/>
+                </p:cNvPicPr>
+                <p:nvPr>
+                  <p:custDataLst>
+                    <p:tags r:id="rId11"/>
+                  </p:custDataLst>
+                </p:nvPr>
+              </p:nvPicPr>
+              <p:blipFill>
+                <a:blip r:embed="rId37"/>
+                <a:stretch>
+                  <a:fillRect/>
+                </a:stretch>
+              </p:blipFill>
+              <p:spPr>
+                <a:xfrm>
+                  <a:off x="1123624" y="511812"/>
+                  <a:ext cx="195072" cy="195072"/>
+                </a:xfrm>
+                <a:prstGeom prst="rect">
+                  <a:avLst/>
+                </a:prstGeom>
+              </p:spPr>
+            </p:pic>
+            <p:pic>
+              <p:nvPicPr>
+                <p:cNvPr id="10" name="Image 8" descr="preencoded.png">
+                  <a:extLst>
+                    <a:ext uri="{FF2B5EF4-FFF2-40B4-BE49-F238E27FC236}">
+                      <a16:creationId xmlns:a16="http://schemas.microsoft.com/office/drawing/2014/main" id="{FF70AA0A-40D3-512B-3C58-30669461F9FC}"/>
+                    </a:ext>
+                  </a:extLst>
+                </p:cNvPr>
+                <p:cNvPicPr>
+                  <a:picLocks noChangeAspect="1"/>
+                </p:cNvPicPr>
+                <p:nvPr>
+                  <p:custDataLst>
+                    <p:tags r:id="rId12"/>
+                  </p:custDataLst>
+                </p:nvPr>
+              </p:nvPicPr>
+              <p:blipFill>
+                <a:blip r:embed="rId37"/>
+                <a:stretch>
+                  <a:fillRect/>
+                </a:stretch>
+              </p:blipFill>
+              <p:spPr>
+                <a:xfrm>
+                  <a:off x="1064861" y="485695"/>
+                  <a:ext cx="195072" cy="195072"/>
+                </a:xfrm>
+                <a:prstGeom prst="rect">
+                  <a:avLst/>
+                </a:prstGeom>
+              </p:spPr>
+            </p:pic>
+            <p:pic>
+              <p:nvPicPr>
+                <p:cNvPr id="11" name="Image 9" descr="preencoded.png">
+                  <a:extLst>
+                    <a:ext uri="{FF2B5EF4-FFF2-40B4-BE49-F238E27FC236}">
+                      <a16:creationId xmlns:a16="http://schemas.microsoft.com/office/drawing/2014/main" id="{7D976A68-31D1-8C9E-77E3-90187A46DB06}"/>
+                    </a:ext>
+                  </a:extLst>
+                </p:cNvPr>
+                <p:cNvPicPr>
+                  <a:picLocks noChangeAspect="1"/>
+                </p:cNvPicPr>
+                <p:nvPr>
+                  <p:custDataLst>
+                    <p:tags r:id="rId13"/>
+                  </p:custDataLst>
+                </p:nvPr>
+              </p:nvPicPr>
+              <p:blipFill>
+                <a:blip r:embed="rId36"/>
+                <a:stretch>
+                  <a:fillRect/>
+                </a:stretch>
+              </p:blipFill>
+              <p:spPr>
+                <a:xfrm>
+                  <a:off x="1079626" y="647760"/>
+                  <a:ext cx="292608" cy="198120"/>
+                </a:xfrm>
+                <a:prstGeom prst="rect">
+                  <a:avLst/>
+                </a:prstGeom>
+              </p:spPr>
+            </p:pic>
+            <p:pic>
+              <p:nvPicPr>
+                <p:cNvPr id="12" name="Image 10" descr="preencoded.png">
+                  <a:extLst>
+                    <a:ext uri="{FF2B5EF4-FFF2-40B4-BE49-F238E27FC236}">
+                      <a16:creationId xmlns:a16="http://schemas.microsoft.com/office/drawing/2014/main" id="{60DBF1D2-ACB9-3512-7320-8C261B36001B}"/>
+                    </a:ext>
+                  </a:extLst>
+                </p:cNvPr>
+                <p:cNvPicPr>
+                  <a:picLocks noChangeAspect="1"/>
+                </p:cNvPicPr>
+                <p:nvPr>
+                  <p:custDataLst>
+                    <p:tags r:id="rId14"/>
+                  </p:custDataLst>
+                </p:nvPr>
+              </p:nvPicPr>
+              <p:blipFill>
+                <a:blip r:embed="rId38"/>
+                <a:stretch>
+                  <a:fillRect/>
+                </a:stretch>
+              </p:blipFill>
+              <p:spPr>
+                <a:xfrm>
+                  <a:off x="1673918" y="1178992"/>
+                  <a:ext cx="295656" cy="295656"/>
+                </a:xfrm>
+                <a:prstGeom prst="rect">
+                  <a:avLst/>
+                </a:prstGeom>
+              </p:spPr>
+            </p:pic>
+            <p:pic>
+              <p:nvPicPr>
+                <p:cNvPr id="15" name="Image 13" descr="preencoded.png">
+                  <a:extLst>
+                    <a:ext uri="{FF2B5EF4-FFF2-40B4-BE49-F238E27FC236}">
+                      <a16:creationId xmlns:a16="http://schemas.microsoft.com/office/drawing/2014/main" id="{E890B034-E089-E65E-9C63-51A2FC1B9A3A}"/>
+                    </a:ext>
+                  </a:extLst>
+                </p:cNvPr>
+                <p:cNvPicPr>
+                  <a:picLocks noChangeAspect="1"/>
+                </p:cNvPicPr>
+                <p:nvPr>
+                  <p:custDataLst>
+                    <p:tags r:id="rId15"/>
+                  </p:custDataLst>
+                </p:nvPr>
+              </p:nvPicPr>
+              <p:blipFill>
+                <a:blip r:embed="rId39"/>
+                <a:stretch>
+                  <a:fillRect/>
+                </a:stretch>
+              </p:blipFill>
+              <p:spPr>
+                <a:xfrm>
+                  <a:off x="1328377" y="594476"/>
+                  <a:ext cx="381000" cy="161544"/>
+                </a:xfrm>
+                <a:prstGeom prst="rect">
+                  <a:avLst/>
+                </a:prstGeom>
+              </p:spPr>
+            </p:pic>
+            <p:pic>
+              <p:nvPicPr>
+                <p:cNvPr id="16" name="Image 14" descr="preencoded.png">
+                  <a:extLst>
+                    <a:ext uri="{FF2B5EF4-FFF2-40B4-BE49-F238E27FC236}">
+                      <a16:creationId xmlns:a16="http://schemas.microsoft.com/office/drawing/2014/main" id="{C23E580A-011C-C95B-E34A-8C6283011DEE}"/>
+                    </a:ext>
+                  </a:extLst>
+                </p:cNvPr>
+                <p:cNvPicPr>
+                  <a:picLocks noChangeAspect="1"/>
+                </p:cNvPicPr>
+                <p:nvPr>
+                  <p:custDataLst>
+                    <p:tags r:id="rId16"/>
+                  </p:custDataLst>
+                </p:nvPr>
+              </p:nvPicPr>
+              <p:blipFill>
+                <a:blip r:embed="rId40"/>
+                <a:stretch>
+                  <a:fillRect/>
+                </a:stretch>
+              </p:blipFill>
+              <p:spPr>
+                <a:xfrm>
+                  <a:off x="1911931" y="1239640"/>
+                  <a:ext cx="313944" cy="164592"/>
+                </a:xfrm>
+                <a:prstGeom prst="rect">
+                  <a:avLst/>
+                </a:prstGeom>
+              </p:spPr>
+            </p:pic>
+            <p:pic>
+              <p:nvPicPr>
+                <p:cNvPr id="17" name="Image 15" descr="preencoded.png">
+                  <a:extLst>
+                    <a:ext uri="{FF2B5EF4-FFF2-40B4-BE49-F238E27FC236}">
+                      <a16:creationId xmlns:a16="http://schemas.microsoft.com/office/drawing/2014/main" id="{64ED82AF-AB3A-B033-19A5-397E6061CAFA}"/>
+                    </a:ext>
+                  </a:extLst>
+                </p:cNvPr>
+                <p:cNvPicPr>
+                  <a:picLocks noChangeAspect="1"/>
+                </p:cNvPicPr>
+                <p:nvPr>
+                  <p:custDataLst>
+                    <p:tags r:id="rId17"/>
+                  </p:custDataLst>
+                </p:nvPr>
+              </p:nvPicPr>
+              <p:blipFill>
+                <a:blip r:embed="rId41"/>
+                <a:stretch>
+                  <a:fillRect/>
+                </a:stretch>
+              </p:blipFill>
+              <p:spPr>
+                <a:xfrm>
+                  <a:off x="345534" y="860702"/>
+                  <a:ext cx="161544" cy="262128"/>
+                </a:xfrm>
+                <a:prstGeom prst="rect">
+                  <a:avLst/>
+                </a:prstGeom>
+              </p:spPr>
+            </p:pic>
+            <p:pic>
+              <p:nvPicPr>
+                <p:cNvPr id="18" name="Image 16" descr="preencoded.png">
+                  <a:extLst>
+                    <a:ext uri="{FF2B5EF4-FFF2-40B4-BE49-F238E27FC236}">
+                      <a16:creationId xmlns:a16="http://schemas.microsoft.com/office/drawing/2014/main" id="{3F59A21E-C360-30C0-9217-07126B3FBFB7}"/>
+                    </a:ext>
+                  </a:extLst>
+                </p:cNvPr>
+                <p:cNvPicPr>
+                  <a:picLocks noChangeAspect="1"/>
+                </p:cNvPicPr>
+                <p:nvPr>
+                  <p:custDataLst>
+                    <p:tags r:id="rId18"/>
+                  </p:custDataLst>
+                </p:nvPr>
+              </p:nvPicPr>
+              <p:blipFill>
+                <a:blip r:embed="rId41"/>
+                <a:stretch>
+                  <a:fillRect/>
+                </a:stretch>
+              </p:blipFill>
+              <p:spPr>
+                <a:xfrm>
+                  <a:off x="1137182" y="860702"/>
+                  <a:ext cx="161544" cy="262128"/>
+                </a:xfrm>
+                <a:prstGeom prst="rect">
+                  <a:avLst/>
+                </a:prstGeom>
+              </p:spPr>
+            </p:pic>
+            <p:pic>
+              <p:nvPicPr>
+                <p:cNvPr id="19" name="Image 17" descr="preencoded.png">
+                  <a:extLst>
+                    <a:ext uri="{FF2B5EF4-FFF2-40B4-BE49-F238E27FC236}">
+                      <a16:creationId xmlns:a16="http://schemas.microsoft.com/office/drawing/2014/main" id="{77DCAA1B-1F1B-7988-36E0-84F87DB6048C}"/>
+                    </a:ext>
+                  </a:extLst>
+                </p:cNvPr>
+                <p:cNvPicPr>
+                  <a:picLocks noChangeAspect="1"/>
+                </p:cNvPicPr>
+                <p:nvPr>
+                  <p:custDataLst>
+                    <p:tags r:id="rId19"/>
+                  </p:custDataLst>
+                </p:nvPr>
+              </p:nvPicPr>
+              <p:blipFill>
+                <a:blip r:embed="rId41"/>
+                <a:stretch>
+                  <a:fillRect/>
+                </a:stretch>
+              </p:blipFill>
+              <p:spPr>
+                <a:xfrm>
+                  <a:off x="1740971" y="1402608"/>
+                  <a:ext cx="161544" cy="262128"/>
+                </a:xfrm>
+                <a:prstGeom prst="rect">
+                  <a:avLst/>
+                </a:prstGeom>
+              </p:spPr>
+            </p:pic>
+            <p:pic>
+              <p:nvPicPr>
+                <p:cNvPr id="20" name="Image 18" descr="preencoded.png">
+                  <a:extLst>
+                    <a:ext uri="{FF2B5EF4-FFF2-40B4-BE49-F238E27FC236}">
+                      <a16:creationId xmlns:a16="http://schemas.microsoft.com/office/drawing/2014/main" id="{294D893D-A480-6430-FD7F-C03AF3894F39}"/>
+                    </a:ext>
+                  </a:extLst>
+                </p:cNvPr>
+                <p:cNvPicPr>
+                  <a:picLocks noChangeAspect="1"/>
+                </p:cNvPicPr>
+                <p:nvPr>
+                  <p:custDataLst>
+                    <p:tags r:id="rId20"/>
+                  </p:custDataLst>
+                </p:nvPr>
+              </p:nvPicPr>
+              <p:blipFill>
+                <a:blip r:embed="rId41"/>
+                <a:stretch>
+                  <a:fillRect/>
+                </a:stretch>
+              </p:blipFill>
+              <p:spPr>
+                <a:xfrm>
+                  <a:off x="1137182" y="1481361"/>
+                  <a:ext cx="161544" cy="262128"/>
+                </a:xfrm>
+                <a:prstGeom prst="rect">
+                  <a:avLst/>
+                </a:prstGeom>
+              </p:spPr>
+            </p:pic>
+            <p:pic>
+              <p:nvPicPr>
+                <p:cNvPr id="22" name="Image 20" descr="preencoded.png">
+                  <a:extLst>
+                    <a:ext uri="{FF2B5EF4-FFF2-40B4-BE49-F238E27FC236}">
+                      <a16:creationId xmlns:a16="http://schemas.microsoft.com/office/drawing/2014/main" id="{8B4874B9-DB73-4CB8-21AB-F0E5057397B2}"/>
+                    </a:ext>
+                  </a:extLst>
+                </p:cNvPr>
+                <p:cNvPicPr>
+                  <a:picLocks noChangeAspect="1"/>
+                </p:cNvPicPr>
+                <p:nvPr>
+                  <p:custDataLst>
+                    <p:tags r:id="rId21"/>
+                  </p:custDataLst>
+                </p:nvPr>
+              </p:nvPicPr>
+              <p:blipFill>
+                <a:blip r:embed="rId42"/>
+                <a:stretch>
+                  <a:fillRect/>
+                </a:stretch>
+              </p:blipFill>
+              <p:spPr>
+                <a:xfrm>
+                  <a:off x="688165" y="277702"/>
+                  <a:ext cx="252984" cy="252984"/>
+                </a:xfrm>
+                <a:prstGeom prst="rect">
+                  <a:avLst/>
+                </a:prstGeom>
+              </p:spPr>
+            </p:pic>
+            <p:pic>
+              <p:nvPicPr>
+                <p:cNvPr id="23" name="Image 21" descr="preencoded.png">
+                  <a:extLst>
+                    <a:ext uri="{FF2B5EF4-FFF2-40B4-BE49-F238E27FC236}">
+                      <a16:creationId xmlns:a16="http://schemas.microsoft.com/office/drawing/2014/main" id="{545F414B-4D6B-B1BC-E59E-08F40EF6C89C}"/>
+                    </a:ext>
+                  </a:extLst>
+                </p:cNvPr>
+                <p:cNvPicPr>
+                  <a:picLocks noChangeAspect="1"/>
+                </p:cNvPicPr>
+                <p:nvPr>
+                  <p:custDataLst>
+                    <p:tags r:id="rId22"/>
+                  </p:custDataLst>
+                </p:nvPr>
+              </p:nvPicPr>
+              <p:blipFill>
+                <a:blip r:embed="rId43"/>
+                <a:stretch>
+                  <a:fillRect/>
+                </a:stretch>
+              </p:blipFill>
+              <p:spPr>
+                <a:xfrm>
+                  <a:off x="855316" y="776658"/>
+                  <a:ext cx="280416" cy="475488"/>
+                </a:xfrm>
+                <a:prstGeom prst="rect">
+                  <a:avLst/>
+                </a:prstGeom>
+              </p:spPr>
+            </p:pic>
+            <p:pic>
+              <p:nvPicPr>
+                <p:cNvPr id="24" name="Image 22" descr="preencoded.png">
+                  <a:extLst>
+                    <a:ext uri="{FF2B5EF4-FFF2-40B4-BE49-F238E27FC236}">
+                      <a16:creationId xmlns:a16="http://schemas.microsoft.com/office/drawing/2014/main" id="{B19D4933-0670-2DF5-9C83-634F736C0A32}"/>
+                    </a:ext>
+                  </a:extLst>
+                </p:cNvPr>
+                <p:cNvPicPr>
+                  <a:picLocks noChangeAspect="1"/>
+                </p:cNvPicPr>
+                <p:nvPr>
+                  <p:custDataLst>
+                    <p:tags r:id="rId23"/>
+                  </p:custDataLst>
+                </p:nvPr>
+              </p:nvPicPr>
+              <p:blipFill>
+                <a:blip r:embed="rId44"/>
+                <a:stretch>
+                  <a:fillRect/>
+                </a:stretch>
+              </p:blipFill>
+              <p:spPr>
+                <a:xfrm>
+                  <a:off x="1281716" y="740303"/>
+                  <a:ext cx="384048" cy="387096"/>
+                </a:xfrm>
+                <a:prstGeom prst="rect">
+                  <a:avLst/>
+                </a:prstGeom>
+              </p:spPr>
+            </p:pic>
+            <p:pic>
+              <p:nvPicPr>
+                <p:cNvPr id="25" name="Image 23" descr="preencoded.png">
+                  <a:extLst>
+                    <a:ext uri="{FF2B5EF4-FFF2-40B4-BE49-F238E27FC236}">
+                      <a16:creationId xmlns:a16="http://schemas.microsoft.com/office/drawing/2014/main" id="{D3F5FF28-B4C9-E2E8-60AB-FC92CA5F2AF7}"/>
+                    </a:ext>
+                  </a:extLst>
+                </p:cNvPr>
+                <p:cNvPicPr>
+                  <a:picLocks noChangeAspect="1"/>
+                </p:cNvPicPr>
+                <p:nvPr>
+                  <p:custDataLst>
+                    <p:tags r:id="rId24"/>
+                  </p:custDataLst>
+                </p:nvPr>
+              </p:nvPicPr>
+              <p:blipFill>
+                <a:blip r:embed="rId45"/>
+                <a:stretch>
+                  <a:fillRect/>
+                </a:stretch>
+              </p:blipFill>
+              <p:spPr>
+                <a:xfrm>
+                  <a:off x="1410721" y="857778"/>
+                  <a:ext cx="539496" cy="539496"/>
+                </a:xfrm>
+                <a:prstGeom prst="rect">
+                  <a:avLst/>
+                </a:prstGeom>
+              </p:spPr>
+            </p:pic>
+            <p:pic>
+              <p:nvPicPr>
+                <p:cNvPr id="26" name="Image 24" descr="preencoded.png">
+                  <a:extLst>
+                    <a:ext uri="{FF2B5EF4-FFF2-40B4-BE49-F238E27FC236}">
+                      <a16:creationId xmlns:a16="http://schemas.microsoft.com/office/drawing/2014/main" id="{A65D7E3C-C43A-892B-1EFD-FF37F30F0E41}"/>
+                    </a:ext>
+                  </a:extLst>
+                </p:cNvPr>
+                <p:cNvPicPr>
+                  <a:picLocks noChangeAspect="1"/>
+                </p:cNvPicPr>
+                <p:nvPr>
+                  <p:custDataLst>
+                    <p:tags r:id="rId25"/>
+                  </p:custDataLst>
+                </p:nvPr>
+              </p:nvPicPr>
+              <p:blipFill>
+                <a:blip r:embed="rId46"/>
+                <a:stretch>
+                  <a:fillRect/>
+                </a:stretch>
+              </p:blipFill>
+              <p:spPr>
+                <a:xfrm>
+                  <a:off x="1346198" y="991976"/>
+                  <a:ext cx="316992" cy="286512"/>
+                </a:xfrm>
+                <a:prstGeom prst="rect">
+                  <a:avLst/>
+                </a:prstGeom>
+              </p:spPr>
+            </p:pic>
+            <p:sp>
+              <p:nvSpPr>
+                <p:cNvPr id="27" name="Text 0">
+                  <a:extLst>
+                    <a:ext uri="{FF2B5EF4-FFF2-40B4-BE49-F238E27FC236}">
+                      <a16:creationId xmlns:a16="http://schemas.microsoft.com/office/drawing/2014/main" id="{C600F44B-6213-1833-E58C-7A2013ACD6BB}"/>
+                    </a:ext>
+                  </a:extLst>
+                </p:cNvPr>
+                <p:cNvSpPr/>
+                <p:nvPr/>
+              </p:nvSpPr>
+              <p:spPr>
+                <a:xfrm>
+                  <a:off x="11121" y="610890"/>
+                  <a:ext cx="200170" cy="86106"/>
+                </a:xfrm>
+                <a:prstGeom prst="rect">
+                  <a:avLst/>
+                </a:prstGeom>
+                <a:noFill/>
+                <a:ln/>
+              </p:spPr>
+              <p:txBody>
+                <a:bodyPr wrap="square" lIns="0" tIns="0" rIns="0" bIns="0" rtlCol="0" anchor="t"/>
+                <a:lstStyle/>
+                <a:p>
+                  <a:pPr marL="0" indent="0" algn="ctr">
+                    <a:lnSpc>
+                      <a:spcPct val="97750"/>
+                    </a:lnSpc>
+                    <a:buNone/>
+                  </a:pPr>
+                  <a:r>
+                    <a:rPr lang="en-US" sz="600" dirty="0">
+                      <a:solidFill>
+                        <a:srgbClr val="232323"/>
+                      </a:solidFill>
+                      <a:latin typeface="Roboto" pitchFamily="34" charset="0"/>
+                      <a:ea typeface="Roboto" pitchFamily="34" charset="-122"/>
+                      <a:cs typeface="Roboto" pitchFamily="34" charset="-120"/>
+                    </a:rPr>
+                    <a:t>λ</a:t>
+                  </a:r>
+                  <a:endParaRPr lang="en-US" sz="600" dirty="0"/>
+                </a:p>
+              </p:txBody>
+            </p:sp>
+            <mc:AlternateContent xmlns:mc="http://schemas.openxmlformats.org/markup-compatibility/2006">
+              <mc:Choice xmlns:a14="http://schemas.microsoft.com/office/drawing/2010/main" Requires="a14">
+                <p:sp>
+                  <p:nvSpPr>
+                    <p:cNvPr id="28" name="Text 1">
+                      <a:extLst>
+                        <a:ext uri="{FF2B5EF4-FFF2-40B4-BE49-F238E27FC236}">
+                          <a16:creationId xmlns:a16="http://schemas.microsoft.com/office/drawing/2014/main" id="{7A3B3D57-D70C-C171-7E52-585DAEF7124F}"/>
+                        </a:ext>
+                      </a:extLst>
+                    </p:cNvPr>
+                    <p:cNvSpPr/>
+                    <p:nvPr/>
+                  </p:nvSpPr>
+                  <p:spPr>
+                    <a:xfrm>
+                      <a:off x="599464" y="744174"/>
+                      <a:ext cx="407039" cy="86106"/>
+                    </a:xfrm>
+                    <a:prstGeom prst="rect">
+                      <a:avLst/>
+                    </a:prstGeom>
+                    <a:noFill/>
+                    <a:ln/>
+                  </p:spPr>
+                  <p:txBody>
+                    <a:bodyPr wrap="square" lIns="0" tIns="0" rIns="0" bIns="0" rtlCol="0" anchor="t"/>
+                    <a:lstStyle/>
+                    <a:p>
+                      <a:pPr marL="0" indent="0" algn="ctr">
+                        <a:lnSpc>
+                          <a:spcPct val="97750"/>
+                        </a:lnSpc>
+                        <a:buNone/>
+                      </a:pPr>
+                      <a:r>
+                        <a:rPr lang="en-US" sz="600" dirty="0">
+                          <a:solidFill>
+                            <a:schemeClr val="tx1"/>
+                          </a:solidFill>
+                          <a:latin typeface="Roboto" pitchFamily="34" charset="0"/>
+                          <a:ea typeface="Roboto" pitchFamily="34" charset="-122"/>
+                          <a:cs typeface="Roboto" pitchFamily="34" charset="-120"/>
+                        </a:rPr>
+                        <a:t>β</a:t>
+                      </a:r>
+                      <a:r>
+                        <a:rPr lang="en-US" sz="600" i="1" dirty="0">
+                          <a:solidFill>
+                            <a:schemeClr val="tx1"/>
+                          </a:solidFill>
+                          <a:latin typeface="Roboto" pitchFamily="34" charset="0"/>
+                          <a:ea typeface="Roboto" pitchFamily="34" charset="-122"/>
+                          <a:cs typeface="Roboto" pitchFamily="34" charset="-120"/>
+                        </a:rPr>
+                        <a:t>(</a:t>
+                      </a:r>
+                      <a:r>
+                        <a:rPr lang="en-US" sz="600" i="1" dirty="0" err="1">
+                          <a:solidFill>
+                            <a:schemeClr val="tx1"/>
+                          </a:solidFill>
+                          <a:latin typeface="Roboto" pitchFamily="34" charset="0"/>
+                          <a:ea typeface="Roboto" pitchFamily="34" charset="-122"/>
+                          <a:cs typeface="Roboto" pitchFamily="34" charset="-120"/>
+                        </a:rPr>
+                        <a:t>E,N</a:t>
+                      </a:r>
+                      <a:r>
+                        <a:rPr lang="en-US" sz="602" i="1" baseline="-40000" dirty="0" err="1">
+                          <a:solidFill>
+                            <a:schemeClr val="tx1"/>
+                          </a:solidFill>
+                          <a:latin typeface="Roboto" pitchFamily="34" charset="0"/>
+                          <a:ea typeface="Roboto" pitchFamily="34" charset="-122"/>
+                          <a:cs typeface="Roboto" pitchFamily="34" charset="-120"/>
+                        </a:rPr>
+                        <a:t>E,</a:t>
+                      </a:r>
+                      <a:r>
+                        <a:rPr lang="en-US" sz="602" i="1" dirty="0" err="1">
+                          <a:solidFill>
+                            <a:schemeClr val="tx1"/>
+                          </a:solidFill>
+                          <a:latin typeface="Roboto" pitchFamily="34" charset="0"/>
+                          <a:ea typeface="Roboto" pitchFamily="34" charset="-122"/>
+                          <a:cs typeface="Roboto" pitchFamily="34" charset="-120"/>
+                        </a:rPr>
+                        <a:t>t</a:t>
+                      </a:r>
+                      <a:r>
+                        <a:rPr lang="en-US" sz="602" i="1" dirty="0">
+                          <a:solidFill>
+                            <a:schemeClr val="tx1"/>
+                          </a:solidFill>
+                          <a:latin typeface="Roboto" pitchFamily="34" charset="0"/>
+                          <a:ea typeface="Roboto" pitchFamily="34" charset="-122"/>
+                          <a:cs typeface="Roboto" pitchFamily="34" charset="-120"/>
+                        </a:rPr>
+                        <a:t>-</a:t>
+                      </a:r>
+                      <a14:m>
+                        <m:oMath xmlns:m="http://schemas.openxmlformats.org/officeDocument/2006/math">
+                          <m:sSub>
+                            <m:sSubPr>
+                              <m:ctrlPr>
+                                <a:rPr lang="en-US" sz="602" b="0" i="1" smtClean="0">
+                                  <a:solidFill>
+                                    <a:schemeClr val="tx1"/>
+                                  </a:solidFill>
+                                  <a:latin typeface="Cambria Math" panose="02040503050406030204" pitchFamily="18" charset="0"/>
+                                  <a:ea typeface="Roboto" pitchFamily="34" charset="-122"/>
+                                  <a:cs typeface="Roboto" pitchFamily="34" charset="-120"/>
+                                </a:rPr>
+                              </m:ctrlPr>
+                            </m:sSubPr>
+                            <m:e>
+                              <m:r>
+                                <a:rPr lang="en-US" sz="602" b="0" i="1" smtClean="0">
+                                  <a:solidFill>
+                                    <a:schemeClr val="tx1"/>
+                                  </a:solidFill>
+                                  <a:latin typeface="Cambria Math" panose="02040503050406030204" pitchFamily="18" charset="0"/>
+                                  <a:ea typeface="Roboto" pitchFamily="34" charset="-122"/>
+                                  <a:cs typeface="Roboto" pitchFamily="34" charset="-120"/>
+                                </a:rPr>
+                                <m:t>𝜏</m:t>
+                              </m:r>
+                            </m:e>
+                            <m:sub>
+                              <m:r>
+                                <a:rPr lang="en-US" sz="602" b="0" i="1" smtClean="0">
+                                  <a:solidFill>
+                                    <a:schemeClr val="tx1"/>
+                                  </a:solidFill>
+                                  <a:latin typeface="Cambria Math" panose="02040503050406030204" pitchFamily="18" charset="0"/>
+                                  <a:ea typeface="Roboto" pitchFamily="34" charset="-122"/>
+                                  <a:cs typeface="Roboto" pitchFamily="34" charset="-120"/>
+                                </a:rPr>
+                                <m:t>𝑞</m:t>
+                              </m:r>
+                            </m:sub>
+                          </m:sSub>
+                        </m:oMath>
+                      </a14:m>
+                      <a:r>
+                        <a:rPr lang="en-US" sz="600" i="1" dirty="0">
+                          <a:solidFill>
+                            <a:schemeClr val="tx1"/>
+                          </a:solidFill>
+                          <a:latin typeface="Roboto" pitchFamily="34" charset="0"/>
+                          <a:ea typeface="Roboto" pitchFamily="34" charset="-122"/>
+                          <a:cs typeface="Roboto" pitchFamily="34" charset="-120"/>
+                        </a:rPr>
+                        <a:t>)</a:t>
+                      </a:r>
+                      <a:endParaRPr lang="en-US" sz="600" dirty="0">
+                        <a:solidFill>
+                          <a:schemeClr val="tx1"/>
+                        </a:solidFill>
+                      </a:endParaRPr>
+                    </a:p>
+                  </p:txBody>
+                </p:sp>
+              </mc:Choice>
+              <mc:Fallback>
+                <p:sp>
+                  <p:nvSpPr>
+                    <p:cNvPr id="28" name="Text 1">
+                      <a:extLst>
+                        <a:ext uri="{FF2B5EF4-FFF2-40B4-BE49-F238E27FC236}">
+                          <a16:creationId xmlns:a16="http://schemas.microsoft.com/office/drawing/2014/main" id="{7A3B3D57-D70C-C171-7E52-585DAEF7124F}"/>
+                        </a:ext>
+                      </a:extLst>
+                    </p:cNvPr>
+                    <p:cNvSpPr>
+                      <a:spLocks noRot="1" noChangeAspect="1" noMove="1" noResize="1" noEditPoints="1" noAdjustHandles="1" noChangeArrowheads="1" noChangeShapeType="1" noTextEdit="1"/>
+                    </p:cNvSpPr>
+                    <p:nvPr/>
+                  </p:nvSpPr>
+                  <p:spPr>
+                    <a:xfrm>
+                      <a:off x="599464" y="744174"/>
+                      <a:ext cx="407039" cy="86106"/>
+                    </a:xfrm>
+                    <a:prstGeom prst="rect">
+                      <a:avLst/>
+                    </a:prstGeom>
+                    <a:blipFill>
+                      <a:blip r:embed="rId47"/>
+                      <a:stretch>
+                        <a:fillRect l="-6061" t="-28571" r="-6061" b="-71429"/>
+                      </a:stretch>
+                    </a:blipFill>
+                    <a:ln/>
+                  </p:spPr>
+                  <p:txBody>
+                    <a:bodyPr/>
+                    <a:lstStyle/>
+                    <a:p>
+                      <a:r>
+                        <a:rPr lang="en-US">
+                          <a:noFill/>
+                        </a:rPr>
+                        <a:t> </a:t>
+                      </a:r>
+                    </a:p>
+                  </p:txBody>
+                </p:sp>
+              </mc:Fallback>
+            </mc:AlternateContent>
+            <p:sp>
+              <p:nvSpPr>
+                <p:cNvPr id="29" name="Text 2">
+                  <a:extLst>
+                    <a:ext uri="{FF2B5EF4-FFF2-40B4-BE49-F238E27FC236}">
+                      <a16:creationId xmlns:a16="http://schemas.microsoft.com/office/drawing/2014/main" id="{E9082BA3-1505-38D9-F031-480447A6B8B3}"/>
+                    </a:ext>
+                  </a:extLst>
+                </p:cNvPr>
+                <p:cNvSpPr/>
+                <p:nvPr/>
+              </p:nvSpPr>
+              <p:spPr>
+                <a:xfrm>
+                  <a:off x="902686" y="379433"/>
+                  <a:ext cx="200170" cy="86106"/>
+                </a:xfrm>
+                <a:prstGeom prst="rect">
+                  <a:avLst/>
+                </a:prstGeom>
+                <a:noFill/>
+                <a:ln/>
+              </p:spPr>
+              <p:txBody>
+                <a:bodyPr wrap="square" lIns="0" tIns="0" rIns="0" bIns="0" rtlCol="0" anchor="t"/>
+                <a:lstStyle/>
+                <a:p>
+                  <a:pPr marL="0" indent="0" algn="ctr">
+                    <a:lnSpc>
+                      <a:spcPct val="97750"/>
+                    </a:lnSpc>
+                    <a:buNone/>
+                  </a:pPr>
+                  <a:r>
+                    <a:rPr lang="en-US" sz="600" i="1" dirty="0">
+                      <a:solidFill>
+                        <a:srgbClr val="232323"/>
+                      </a:solidFill>
+                      <a:latin typeface="Roboto" pitchFamily="34" charset="0"/>
+                      <a:ea typeface="Roboto" pitchFamily="34" charset="-122"/>
+                      <a:cs typeface="Roboto" pitchFamily="34" charset="-120"/>
+                    </a:rPr>
+                    <a:t>k</a:t>
+                  </a:r>
+                  <a:endParaRPr lang="en-US" sz="600" dirty="0"/>
+                </a:p>
+              </p:txBody>
+            </p:sp>
+            <p:pic>
+              <p:nvPicPr>
+                <p:cNvPr id="30" name="Image 25" descr="preencoded.png">
+                  <a:extLst>
+                    <a:ext uri="{FF2B5EF4-FFF2-40B4-BE49-F238E27FC236}">
+                      <a16:creationId xmlns:a16="http://schemas.microsoft.com/office/drawing/2014/main" id="{D48552C5-CFD2-73E6-5893-B844B68DE5A9}"/>
+                    </a:ext>
+                  </a:extLst>
+                </p:cNvPr>
+                <p:cNvPicPr>
+                  <a:picLocks noChangeAspect="1"/>
+                </p:cNvPicPr>
+                <p:nvPr>
+                  <p:custDataLst>
+                    <p:tags r:id="rId26"/>
+                  </p:custDataLst>
+                </p:nvPr>
+              </p:nvPicPr>
+              <p:blipFill>
+                <a:blip r:embed="rId41"/>
+                <a:stretch>
+                  <a:fillRect/>
+                </a:stretch>
+              </p:blipFill>
+              <p:spPr>
+                <a:xfrm>
+                  <a:off x="733884" y="431525"/>
+                  <a:ext cx="161544" cy="262128"/>
+                </a:xfrm>
+                <a:prstGeom prst="rect">
+                  <a:avLst/>
+                </a:prstGeom>
+              </p:spPr>
+            </p:pic>
+            <p:sp>
+              <p:nvSpPr>
+                <p:cNvPr id="31" name="Text 3">
+                  <a:extLst>
+                    <a:ext uri="{FF2B5EF4-FFF2-40B4-BE49-F238E27FC236}">
+                      <a16:creationId xmlns:a16="http://schemas.microsoft.com/office/drawing/2014/main" id="{3D204349-0525-4CAE-51CC-D2966F412FA1}"/>
+                    </a:ext>
+                  </a:extLst>
+                </p:cNvPr>
+                <p:cNvSpPr/>
+                <p:nvPr/>
+              </p:nvSpPr>
+              <p:spPr>
+                <a:xfrm>
+                  <a:off x="1493229" y="785311"/>
+                  <a:ext cx="200170" cy="86106"/>
+                </a:xfrm>
+                <a:prstGeom prst="rect">
+                  <a:avLst/>
+                </a:prstGeom>
+                <a:noFill/>
+                <a:ln/>
+              </p:spPr>
+              <p:txBody>
+                <a:bodyPr wrap="square" lIns="0" tIns="0" rIns="0" bIns="0" rtlCol="0" anchor="t"/>
+                <a:lstStyle/>
+                <a:p>
+                  <a:pPr marL="0" indent="0" algn="ctr">
+                    <a:lnSpc>
+                      <a:spcPct val="97750"/>
+                    </a:lnSpc>
+                    <a:buNone/>
+                  </a:pPr>
+                  <a:r>
+                    <a:rPr lang="en-US" sz="600" i="1" dirty="0">
+                      <a:solidFill>
+                        <a:srgbClr val="232323"/>
+                      </a:solidFill>
+                      <a:latin typeface="Roboto" pitchFamily="34" charset="0"/>
+                      <a:ea typeface="Roboto" pitchFamily="34" charset="-122"/>
+                      <a:cs typeface="Roboto" pitchFamily="34" charset="-120"/>
+                    </a:rPr>
+                    <a:t>t</a:t>
+                  </a:r>
+                  <a:r>
+                    <a:rPr lang="en-US" sz="600" i="1" baseline="-40000" dirty="0">
+                      <a:solidFill>
+                        <a:srgbClr val="232323"/>
+                      </a:solidFill>
+                      <a:latin typeface="Roboto" pitchFamily="34" charset="0"/>
+                      <a:ea typeface="Roboto" pitchFamily="34" charset="-122"/>
+                      <a:cs typeface="Roboto" pitchFamily="34" charset="-120"/>
+                    </a:rPr>
+                    <a:t>a</a:t>
+                  </a:r>
+                  <a:endParaRPr lang="en-US" sz="600" dirty="0"/>
+                </a:p>
+              </p:txBody>
+            </p:sp>
+            <p:sp>
+              <p:nvSpPr>
+                <p:cNvPr id="32" name="Text 4">
+                  <a:extLst>
+                    <a:ext uri="{FF2B5EF4-FFF2-40B4-BE49-F238E27FC236}">
+                      <a16:creationId xmlns:a16="http://schemas.microsoft.com/office/drawing/2014/main" id="{9AE91ED1-56AF-6F0D-D481-C164A734C4D0}"/>
+                    </a:ext>
+                  </a:extLst>
+                </p:cNvPr>
+                <p:cNvSpPr/>
+                <p:nvPr/>
+              </p:nvSpPr>
+              <p:spPr>
+                <a:xfrm>
+                  <a:off x="1967323" y="1200354"/>
+                  <a:ext cx="200170" cy="86106"/>
+                </a:xfrm>
+                <a:prstGeom prst="rect">
+                  <a:avLst/>
+                </a:prstGeom>
+                <a:noFill/>
+                <a:ln/>
+              </p:spPr>
+              <p:txBody>
+                <a:bodyPr wrap="square" lIns="0" tIns="0" rIns="0" bIns="0" rtlCol="0" anchor="t"/>
+                <a:lstStyle/>
+                <a:p>
+                  <a:pPr marL="0" indent="0" algn="ctr">
+                    <a:lnSpc>
+                      <a:spcPct val="97750"/>
+                    </a:lnSpc>
+                    <a:buNone/>
+                  </a:pPr>
+                  <a:r>
+                    <a:rPr lang="en-US" sz="600" i="1" dirty="0">
+                      <a:solidFill>
+                        <a:srgbClr val="232323"/>
+                      </a:solidFill>
+                      <a:latin typeface="Roboto" pitchFamily="34" charset="0"/>
+                      <a:ea typeface="Roboto" pitchFamily="34" charset="-122"/>
+                      <a:cs typeface="Roboto" pitchFamily="34" charset="-120"/>
+                    </a:rPr>
+                    <a:t>m</a:t>
+                  </a:r>
+                  <a:endParaRPr lang="en-US" sz="600" dirty="0"/>
+                </a:p>
+              </p:txBody>
+            </p:sp>
+            <p:sp>
+              <p:nvSpPr>
+                <p:cNvPr id="33" name="Text 5">
+                  <a:extLst>
+                    <a:ext uri="{FF2B5EF4-FFF2-40B4-BE49-F238E27FC236}">
+                      <a16:creationId xmlns:a16="http://schemas.microsoft.com/office/drawing/2014/main" id="{122A25A4-E416-6109-9CAE-280C91E3B642}"/>
+                    </a:ext>
+                  </a:extLst>
+                </p:cNvPr>
+                <p:cNvSpPr/>
+                <p:nvPr/>
+              </p:nvSpPr>
+              <p:spPr>
+                <a:xfrm>
+                  <a:off x="758735" y="517783"/>
+                  <a:ext cx="200170" cy="86106"/>
+                </a:xfrm>
+                <a:prstGeom prst="rect">
+                  <a:avLst/>
+                </a:prstGeom>
+                <a:noFill/>
+                <a:ln/>
+              </p:spPr>
+              <p:txBody>
+                <a:bodyPr wrap="square" lIns="0" tIns="0" rIns="0" bIns="0" rtlCol="0" anchor="t"/>
+                <a:lstStyle/>
+                <a:p>
+                  <a:pPr marL="0" indent="0" algn="ctr">
+                    <a:lnSpc>
+                      <a:spcPct val="97750"/>
+                    </a:lnSpc>
+                    <a:buNone/>
+                  </a:pPr>
+                  <a:r>
+                    <a:rPr lang="en-US" sz="600" i="1" dirty="0">
+                      <a:solidFill>
+                        <a:srgbClr val="232323"/>
+                      </a:solidFill>
+                      <a:latin typeface="Roboto" pitchFamily="34" charset="0"/>
+                      <a:ea typeface="Roboto" pitchFamily="34" charset="-122"/>
+                      <a:cs typeface="Roboto" pitchFamily="34" charset="-120"/>
+                    </a:rPr>
+                    <a:t>c</a:t>
+                  </a:r>
+                  <a:endParaRPr lang="en-US" sz="600" dirty="0"/>
+                </a:p>
+              </p:txBody>
+            </p:sp>
+            <p:sp>
+              <p:nvSpPr>
+                <p:cNvPr id="38" name="Text 10">
+                  <a:extLst>
+                    <a:ext uri="{FF2B5EF4-FFF2-40B4-BE49-F238E27FC236}">
+                      <a16:creationId xmlns:a16="http://schemas.microsoft.com/office/drawing/2014/main" id="{E140A02A-67F3-E4CB-7E79-08DCC75F7FE0}"/>
+                    </a:ext>
+                  </a:extLst>
+                </p:cNvPr>
+                <p:cNvSpPr/>
+                <p:nvPr/>
+              </p:nvSpPr>
+              <p:spPr>
+                <a:xfrm>
+                  <a:off x="1546804" y="918634"/>
+                  <a:ext cx="337989" cy="86106"/>
+                </a:xfrm>
+                <a:prstGeom prst="rect">
+                  <a:avLst/>
+                </a:prstGeom>
+                <a:noFill/>
+                <a:ln/>
+              </p:spPr>
+              <p:txBody>
+                <a:bodyPr wrap="square" lIns="0" tIns="0" rIns="0" bIns="0" rtlCol="0" anchor="t"/>
+                <a:lstStyle/>
+                <a:p>
+                  <a:pPr marL="0" indent="0" algn="ctr">
+                    <a:lnSpc>
+                      <a:spcPct val="97750"/>
+                    </a:lnSpc>
+                    <a:buNone/>
+                  </a:pPr>
+                  <a:r>
+                    <a:rPr lang="en-US" sz="600" i="1" dirty="0">
+                      <a:solidFill>
+                        <a:srgbClr val="232323"/>
+                      </a:solidFill>
+                      <a:latin typeface="Roboto" pitchFamily="34" charset="0"/>
+                      <a:ea typeface="Roboto" pitchFamily="34" charset="-122"/>
+                      <a:cs typeface="Roboto" pitchFamily="34" charset="-120"/>
+                    </a:rPr>
+                    <a:t>p(V,N</a:t>
+                  </a:r>
+                  <a:r>
+                    <a:rPr lang="en-US" sz="602" i="1" baseline="-40000" dirty="0">
+                      <a:solidFill>
+                        <a:srgbClr val="232323"/>
+                      </a:solidFill>
+                      <a:latin typeface="Roboto" pitchFamily="34" charset="0"/>
+                      <a:ea typeface="Roboto" pitchFamily="34" charset="-122"/>
+                      <a:cs typeface="Roboto" pitchFamily="34" charset="-120"/>
+                    </a:rPr>
+                    <a:t>P</a:t>
+                  </a:r>
+                  <a:r>
+                    <a:rPr lang="en-US" sz="600" i="1" dirty="0">
+                      <a:solidFill>
+                        <a:srgbClr val="232323"/>
+                      </a:solidFill>
+                      <a:latin typeface="Roboto" pitchFamily="34" charset="0"/>
+                      <a:ea typeface="Roboto" pitchFamily="34" charset="-122"/>
+                      <a:cs typeface="Roboto" pitchFamily="34" charset="-120"/>
+                    </a:rPr>
+                    <a:t>)</a:t>
+                  </a:r>
+                  <a:endParaRPr lang="en-US" sz="600" dirty="0"/>
+                </a:p>
+              </p:txBody>
+            </p:sp>
+            <p:sp>
+              <p:nvSpPr>
+                <p:cNvPr id="39" name="Text 11">
+                  <a:extLst>
+                    <a:ext uri="{FF2B5EF4-FFF2-40B4-BE49-F238E27FC236}">
+                      <a16:creationId xmlns:a16="http://schemas.microsoft.com/office/drawing/2014/main" id="{7D79FC02-3F28-8509-97AC-C369CAE50133}"/>
+                    </a:ext>
+                  </a:extLst>
+                </p:cNvPr>
+                <p:cNvSpPr/>
+                <p:nvPr/>
+              </p:nvSpPr>
+              <p:spPr>
+                <a:xfrm>
+                  <a:off x="1343341" y="1066061"/>
+                  <a:ext cx="200170" cy="86106"/>
+                </a:xfrm>
+                <a:prstGeom prst="rect">
+                  <a:avLst/>
+                </a:prstGeom>
+                <a:noFill/>
+                <a:ln/>
+              </p:spPr>
+              <p:txBody>
+                <a:bodyPr wrap="square" lIns="0" tIns="0" rIns="0" bIns="0" rtlCol="0" anchor="t"/>
+                <a:lstStyle/>
+                <a:p>
+                  <a:pPr marL="0" indent="0" algn="ctr">
+                    <a:lnSpc>
+                      <a:spcPct val="97750"/>
+                    </a:lnSpc>
+                    <a:buNone/>
+                  </a:pPr>
+                  <a:r>
+                    <a:rPr lang="en-US" sz="600" i="1" dirty="0">
+                      <a:solidFill>
+                        <a:srgbClr val="232323"/>
+                      </a:solidFill>
+                      <a:latin typeface="Roboto" pitchFamily="34" charset="0"/>
+                      <a:ea typeface="Roboto" pitchFamily="34" charset="-122"/>
+                      <a:cs typeface="Roboto" pitchFamily="34" charset="-120"/>
+                    </a:rPr>
+                    <a:t>f</a:t>
+                  </a:r>
+                  <a:endParaRPr lang="en-US" sz="600" dirty="0"/>
+                </a:p>
+              </p:txBody>
+            </p:sp>
+            <p:sp>
+              <p:nvSpPr>
+                <p:cNvPr id="40" name="Text 12">
+                  <a:extLst>
+                    <a:ext uri="{FF2B5EF4-FFF2-40B4-BE49-F238E27FC236}">
+                      <a16:creationId xmlns:a16="http://schemas.microsoft.com/office/drawing/2014/main" id="{293001A7-6D73-3768-A02A-AC64D7692897}"/>
+                    </a:ext>
+                  </a:extLst>
+                </p:cNvPr>
+                <p:cNvSpPr/>
+                <p:nvPr/>
+              </p:nvSpPr>
+              <p:spPr>
+                <a:xfrm>
+                  <a:off x="1546804" y="1097837"/>
+                  <a:ext cx="200170" cy="86106"/>
+                </a:xfrm>
+                <a:prstGeom prst="rect">
+                  <a:avLst/>
+                </a:prstGeom>
+                <a:noFill/>
+                <a:ln/>
+              </p:spPr>
+              <p:txBody>
+                <a:bodyPr wrap="square" lIns="0" tIns="0" rIns="0" bIns="0" rtlCol="0" anchor="t"/>
+                <a:lstStyle/>
+                <a:p>
+                  <a:pPr marL="0" indent="0" algn="ctr">
+                    <a:lnSpc>
+                      <a:spcPct val="97750"/>
+                    </a:lnSpc>
+                    <a:buNone/>
+                  </a:pPr>
+                  <a:r>
+                    <a:rPr lang="en-US" sz="600" i="1" dirty="0">
+                      <a:solidFill>
+                        <a:srgbClr val="232323"/>
+                      </a:solidFill>
+                      <a:latin typeface="Roboto" pitchFamily="34" charset="0"/>
+                      <a:ea typeface="Roboto" pitchFamily="34" charset="-122"/>
+                      <a:cs typeface="Roboto" pitchFamily="34" charset="-120"/>
+                    </a:rPr>
+                    <a:t>1-f</a:t>
+                  </a:r>
+                  <a:endParaRPr lang="en-US" sz="600" dirty="0"/>
+                </a:p>
+              </p:txBody>
+            </p:sp>
+            <p:sp>
+              <p:nvSpPr>
+                <p:cNvPr id="41" name="Text 13">
+                  <a:extLst>
+                    <a:ext uri="{FF2B5EF4-FFF2-40B4-BE49-F238E27FC236}">
+                      <a16:creationId xmlns:a16="http://schemas.microsoft.com/office/drawing/2014/main" id="{ABC2AC00-E3F8-5F18-2EC4-DCC923AA1839}"/>
+                    </a:ext>
+                  </a:extLst>
+                </p:cNvPr>
+                <p:cNvSpPr/>
+                <p:nvPr/>
+              </p:nvSpPr>
+              <p:spPr>
+                <a:xfrm>
+                  <a:off x="220109" y="672088"/>
+                  <a:ext cx="190732" cy="114808"/>
+                </a:xfrm>
+                <a:prstGeom prst="rect">
+                  <a:avLst/>
+                </a:prstGeom>
+                <a:noFill/>
+                <a:ln/>
+              </p:spPr>
+              <p:txBody>
+                <a:bodyPr wrap="square" lIns="0" tIns="0" rIns="0" bIns="0" rtlCol="0" anchor="t"/>
+                <a:lstStyle/>
+                <a:p>
+                  <a:pPr marL="0" indent="0" algn="ctr">
+                    <a:lnSpc>
+                      <a:spcPct val="97750"/>
+                    </a:lnSpc>
+                    <a:buNone/>
+                  </a:pPr>
+                  <a:r>
+                    <a:rPr lang="en-US" sz="800" b="1" dirty="0">
+                      <a:solidFill>
+                        <a:srgbClr val="FEFEFE"/>
+                      </a:solidFill>
+                      <a:latin typeface="Liberation Serif" pitchFamily="34" charset="0"/>
+                      <a:ea typeface="Liberation Serif" pitchFamily="34" charset="-122"/>
+                      <a:cs typeface="Liberation Serif" pitchFamily="34" charset="-120"/>
+                    </a:rPr>
+                    <a:t>T</a:t>
+                  </a:r>
+                  <a:endParaRPr lang="en-US" sz="800" dirty="0"/>
+                </a:p>
+              </p:txBody>
+            </p:sp>
+            <p:sp>
+              <p:nvSpPr>
+                <p:cNvPr id="42" name="Text 14">
+                  <a:extLst>
+                    <a:ext uri="{FF2B5EF4-FFF2-40B4-BE49-F238E27FC236}">
+                      <a16:creationId xmlns:a16="http://schemas.microsoft.com/office/drawing/2014/main" id="{C00E015F-780E-8C9F-DCA7-F88BF90E2DFC}"/>
+                    </a:ext>
+                  </a:extLst>
+                </p:cNvPr>
+                <p:cNvSpPr/>
+                <p:nvPr/>
+              </p:nvSpPr>
+              <p:spPr>
+                <a:xfrm>
+                  <a:off x="978990" y="675394"/>
+                  <a:ext cx="190732" cy="114808"/>
+                </a:xfrm>
+                <a:prstGeom prst="rect">
+                  <a:avLst/>
+                </a:prstGeom>
+                <a:noFill/>
+                <a:ln/>
+              </p:spPr>
+              <p:txBody>
+                <a:bodyPr wrap="square" lIns="0" tIns="0" rIns="0" bIns="0" rtlCol="0" anchor="t"/>
+                <a:lstStyle/>
+                <a:p>
+                  <a:pPr marL="0" indent="0" algn="ctr">
+                    <a:lnSpc>
+                      <a:spcPct val="97750"/>
+                    </a:lnSpc>
+                    <a:buNone/>
+                  </a:pPr>
+                  <a:r>
+                    <a:rPr lang="en-US" sz="800" b="1" dirty="0">
+                      <a:solidFill>
+                        <a:srgbClr val="FEFEFE"/>
+                      </a:solidFill>
+                      <a:latin typeface="Liberation Serif" pitchFamily="34" charset="0"/>
+                      <a:ea typeface="Liberation Serif" pitchFamily="34" charset="-122"/>
+                      <a:cs typeface="Liberation Serif" pitchFamily="34" charset="-120"/>
+                    </a:rPr>
+                    <a:t>I</a:t>
+                  </a:r>
+                  <a:endParaRPr lang="en-US" sz="800" dirty="0"/>
+                </a:p>
+              </p:txBody>
+            </p:sp>
+            <p:sp>
+              <p:nvSpPr>
+                <p:cNvPr id="43" name="Text 15">
+                  <a:extLst>
+                    <a:ext uri="{FF2B5EF4-FFF2-40B4-BE49-F238E27FC236}">
+                      <a16:creationId xmlns:a16="http://schemas.microsoft.com/office/drawing/2014/main" id="{00FC68C5-C4A3-5290-EC61-EA0CD89B5D25}"/>
+                    </a:ext>
+                  </a:extLst>
+                </p:cNvPr>
+                <p:cNvSpPr/>
+                <p:nvPr/>
+              </p:nvSpPr>
+              <p:spPr>
+                <a:xfrm>
+                  <a:off x="1721617" y="1279050"/>
+                  <a:ext cx="190732" cy="114808"/>
+                </a:xfrm>
+                <a:prstGeom prst="rect">
+                  <a:avLst/>
+                </a:prstGeom>
+                <a:noFill/>
+                <a:ln/>
+              </p:spPr>
+              <p:txBody>
+                <a:bodyPr wrap="square" lIns="0" tIns="0" rIns="0" bIns="0" rtlCol="0" anchor="t"/>
+                <a:lstStyle/>
+                <a:p>
+                  <a:pPr marL="0" indent="0" algn="ctr">
+                    <a:lnSpc>
+                      <a:spcPct val="97750"/>
+                    </a:lnSpc>
+                    <a:buNone/>
+                  </a:pPr>
+                  <a:r>
+                    <a:rPr lang="en-US" sz="800" b="1" dirty="0">
+                      <a:solidFill>
+                        <a:srgbClr val="FEFEFE"/>
+                      </a:solidFill>
+                      <a:latin typeface="Liberation Serif" pitchFamily="34" charset="0"/>
+                      <a:ea typeface="Liberation Serif" pitchFamily="34" charset="-122"/>
+                      <a:cs typeface="Liberation Serif" pitchFamily="34" charset="-120"/>
+                    </a:rPr>
+                    <a:t>P</a:t>
+                  </a:r>
+                  <a:endParaRPr lang="en-US" sz="800" dirty="0"/>
+                </a:p>
+              </p:txBody>
+            </p:sp>
+            <p:sp>
+              <p:nvSpPr>
+                <p:cNvPr id="44" name="Text 16">
+                  <a:extLst>
+                    <a:ext uri="{FF2B5EF4-FFF2-40B4-BE49-F238E27FC236}">
+                      <a16:creationId xmlns:a16="http://schemas.microsoft.com/office/drawing/2014/main" id="{8E96D66B-5970-EBE0-F80F-BF56FCA27E91}"/>
+                    </a:ext>
+                  </a:extLst>
+                </p:cNvPr>
+                <p:cNvSpPr/>
+                <p:nvPr/>
+              </p:nvSpPr>
+              <p:spPr>
+                <a:xfrm>
+                  <a:off x="1093024" y="1313911"/>
+                  <a:ext cx="190732" cy="114808"/>
+                </a:xfrm>
+                <a:prstGeom prst="rect">
+                  <a:avLst/>
+                </a:prstGeom>
+                <a:noFill/>
+                <a:ln/>
+              </p:spPr>
+              <p:txBody>
+                <a:bodyPr wrap="square" lIns="0" tIns="0" rIns="0" bIns="0" rtlCol="0" anchor="t"/>
+                <a:lstStyle/>
+                <a:p>
+                  <a:pPr marL="0" indent="0" algn="ctr">
+                    <a:lnSpc>
+                      <a:spcPct val="97750"/>
+                    </a:lnSpc>
+                    <a:buNone/>
+                  </a:pPr>
+                  <a:r>
+                    <a:rPr lang="en-US" sz="800" b="1" dirty="0">
+                      <a:solidFill>
+                        <a:srgbClr val="FEFEFE"/>
+                      </a:solidFill>
+                      <a:latin typeface="Liberation Serif" pitchFamily="34" charset="0"/>
+                      <a:ea typeface="Liberation Serif" pitchFamily="34" charset="-122"/>
+                      <a:cs typeface="Liberation Serif" pitchFamily="34" charset="-120"/>
+                    </a:rPr>
+                    <a:t>E</a:t>
+                  </a:r>
+                  <a:endParaRPr lang="en-US" sz="800" dirty="0"/>
+                </a:p>
+              </p:txBody>
+            </p:sp>
+            <p:sp>
+              <p:nvSpPr>
+                <p:cNvPr id="45" name="Text 17">
+                  <a:extLst>
+                    <a:ext uri="{FF2B5EF4-FFF2-40B4-BE49-F238E27FC236}">
+                      <a16:creationId xmlns:a16="http://schemas.microsoft.com/office/drawing/2014/main" id="{C4C6D8F7-F671-9030-D534-5FEFF801027B}"/>
+                    </a:ext>
+                  </a:extLst>
+                </p:cNvPr>
+                <p:cNvSpPr/>
+                <p:nvPr/>
+              </p:nvSpPr>
+              <p:spPr>
+                <a:xfrm>
+                  <a:off x="577912" y="322807"/>
+                  <a:ext cx="190732" cy="114808"/>
+                </a:xfrm>
+                <a:prstGeom prst="rect">
+                  <a:avLst/>
+                </a:prstGeom>
+                <a:noFill/>
+                <a:ln/>
+              </p:spPr>
+              <p:txBody>
+                <a:bodyPr wrap="square" lIns="0" tIns="0" rIns="0" bIns="0" rtlCol="0" anchor="t"/>
+                <a:lstStyle/>
+                <a:p>
+                  <a:pPr marL="0" indent="0" algn="ctr">
+                    <a:lnSpc>
+                      <a:spcPct val="97750"/>
+                    </a:lnSpc>
+                    <a:buNone/>
+                  </a:pPr>
+                  <a:r>
+                    <a:rPr lang="en-US" sz="800" b="1" dirty="0">
+                      <a:solidFill>
+                        <a:srgbClr val="171717"/>
+                      </a:solidFill>
+                      <a:latin typeface="Liberation Serif" pitchFamily="34" charset="0"/>
+                      <a:ea typeface="Liberation Serif" pitchFamily="34" charset="-122"/>
+                      <a:cs typeface="Liberation Serif" pitchFamily="34" charset="-120"/>
+                    </a:rPr>
+                    <a:t>V</a:t>
+                  </a:r>
+                  <a:endParaRPr lang="en-US" sz="800" dirty="0"/>
+                </a:p>
+              </p:txBody>
+            </p:sp>
+            <p:sp>
+              <p:nvSpPr>
+                <p:cNvPr id="46" name="Text 18">
+                  <a:extLst>
+                    <a:ext uri="{FF2B5EF4-FFF2-40B4-BE49-F238E27FC236}">
+                      <a16:creationId xmlns:a16="http://schemas.microsoft.com/office/drawing/2014/main" id="{6F025678-338E-F69B-E4F0-57BBC8E0D591}"/>
+                    </a:ext>
+                  </a:extLst>
+                </p:cNvPr>
+                <p:cNvSpPr/>
+                <p:nvPr/>
+              </p:nvSpPr>
+              <p:spPr>
+                <a:xfrm>
+                  <a:off x="1693405" y="715297"/>
+                  <a:ext cx="190732" cy="114808"/>
+                </a:xfrm>
+                <a:prstGeom prst="rect">
+                  <a:avLst/>
+                </a:prstGeom>
+                <a:noFill/>
+                <a:ln/>
+              </p:spPr>
+              <p:txBody>
+                <a:bodyPr wrap="square" lIns="0" tIns="0" rIns="0" bIns="0" rtlCol="0" anchor="t"/>
+                <a:lstStyle/>
+                <a:p>
+                  <a:pPr marL="0" indent="0" algn="ctr">
+                    <a:lnSpc>
+                      <a:spcPct val="97750"/>
+                    </a:lnSpc>
+                    <a:buNone/>
+                  </a:pPr>
+                  <a:r>
+                    <a:rPr lang="en-US" sz="800" b="1" dirty="0">
+                      <a:solidFill>
+                        <a:srgbClr val="FEFEFE"/>
+                      </a:solidFill>
+                      <a:latin typeface="Liberation Serif" pitchFamily="34" charset="0"/>
+                      <a:ea typeface="Liberation Serif" pitchFamily="34" charset="-122"/>
+                      <a:cs typeface="Liberation Serif" pitchFamily="34" charset="-120"/>
+                    </a:rPr>
+                    <a:t>L</a:t>
+                  </a:r>
+                  <a:endParaRPr lang="en-US" sz="800" dirty="0"/>
+                </a:p>
+              </p:txBody>
+            </p:sp>
+            <p:pic>
+              <p:nvPicPr>
+                <p:cNvPr id="47" name="Image 26" descr="preencoded.png">
+                  <a:extLst>
+                    <a:ext uri="{FF2B5EF4-FFF2-40B4-BE49-F238E27FC236}">
+                      <a16:creationId xmlns:a16="http://schemas.microsoft.com/office/drawing/2014/main" id="{F806AA27-2D55-BA77-28F0-4446DFDED616}"/>
+                    </a:ext>
+                  </a:extLst>
+                </p:cNvPr>
+                <p:cNvPicPr>
+                  <a:picLocks noChangeAspect="1"/>
+                </p:cNvPicPr>
+                <p:nvPr>
+                  <p:custDataLst>
+                    <p:tags r:id="rId27"/>
+                  </p:custDataLst>
+                </p:nvPr>
+              </p:nvPicPr>
+              <p:blipFill>
+                <a:blip r:embed="rId48"/>
+                <a:stretch>
+                  <a:fillRect/>
+                </a:stretch>
+              </p:blipFill>
+              <p:spPr>
+                <a:xfrm>
+                  <a:off x="1333889" y="651169"/>
+                  <a:ext cx="381000" cy="161544"/>
+                </a:xfrm>
+                <a:prstGeom prst="rect">
+                  <a:avLst/>
+                </a:prstGeom>
+              </p:spPr>
+            </p:pic>
+            <p:pic>
+              <p:nvPicPr>
+                <p:cNvPr id="48" name="Image 27" descr="preencoded.png">
+                  <a:extLst>
+                    <a:ext uri="{FF2B5EF4-FFF2-40B4-BE49-F238E27FC236}">
+                      <a16:creationId xmlns:a16="http://schemas.microsoft.com/office/drawing/2014/main" id="{2D14A14A-E09C-3543-8832-290356B6EB3B}"/>
+                    </a:ext>
+                  </a:extLst>
+                </p:cNvPr>
+                <p:cNvPicPr>
+                  <a:picLocks noChangeAspect="1"/>
+                </p:cNvPicPr>
+                <p:nvPr>
+                  <p:custDataLst>
+                    <p:tags r:id="rId28"/>
+                  </p:custDataLst>
+                </p:nvPr>
+              </p:nvPicPr>
+              <p:blipFill>
+                <a:blip r:embed="rId49"/>
+                <a:stretch>
+                  <a:fillRect/>
+                </a:stretch>
+              </p:blipFill>
+              <p:spPr>
+                <a:xfrm>
+                  <a:off x="1430346" y="637828"/>
+                  <a:ext cx="210312" cy="210312"/>
+                </a:xfrm>
+                <a:prstGeom prst="rect">
+                  <a:avLst/>
+                </a:prstGeom>
+              </p:spPr>
+            </p:pic>
+            <p:sp>
+              <p:nvSpPr>
+                <p:cNvPr id="49" name="Text 19">
+                  <a:extLst>
+                    <a:ext uri="{FF2B5EF4-FFF2-40B4-BE49-F238E27FC236}">
+                      <a16:creationId xmlns:a16="http://schemas.microsoft.com/office/drawing/2014/main" id="{E760BED4-B2C8-E8EB-A608-51A98CEF6B15}"/>
+                    </a:ext>
+                  </a:extLst>
+                </p:cNvPr>
+                <p:cNvSpPr/>
+                <p:nvPr/>
+              </p:nvSpPr>
+              <p:spPr>
+                <a:xfrm>
+                  <a:off x="1432242" y="584383"/>
+                  <a:ext cx="200170" cy="86106"/>
+                </a:xfrm>
+                <a:prstGeom prst="rect">
+                  <a:avLst/>
+                </a:prstGeom>
+                <a:noFill/>
+                <a:ln/>
+              </p:spPr>
+              <p:txBody>
+                <a:bodyPr wrap="square" lIns="0" tIns="0" rIns="0" bIns="0" rtlCol="0" anchor="t"/>
+                <a:lstStyle/>
+                <a:p>
+                  <a:pPr marL="0" indent="0" algn="ctr">
+                    <a:lnSpc>
+                      <a:spcPct val="97750"/>
+                    </a:lnSpc>
+                    <a:buNone/>
+                  </a:pPr>
+                  <a:r>
+                    <a:rPr lang="en-US" sz="600" i="1" dirty="0">
+                      <a:solidFill>
+                        <a:srgbClr val="232323"/>
+                      </a:solidFill>
+                      <a:latin typeface="Roboto" pitchFamily="34" charset="0"/>
+                      <a:ea typeface="Roboto" pitchFamily="34" charset="-122"/>
+                      <a:cs typeface="Roboto" pitchFamily="34" charset="-120"/>
+                    </a:rPr>
+                    <a:t>a</a:t>
+                  </a:r>
+                  <a:endParaRPr lang="en-US" sz="600" dirty="0"/>
+                </a:p>
+              </p:txBody>
+            </p:sp>
+          </p:grpSp>
+          <p:pic>
+            <p:nvPicPr>
+              <p:cNvPr id="56" name="Image 11" descr="preencoded.png">
+                <a:extLst>
+                  <a:ext uri="{FF2B5EF4-FFF2-40B4-BE49-F238E27FC236}">
+                    <a16:creationId xmlns:a16="http://schemas.microsoft.com/office/drawing/2014/main" id="{7E2537EA-FCB6-2628-393A-3D09DD0CE391}"/>
+                  </a:ext>
+                </a:extLst>
+              </p:cNvPr>
+              <p:cNvPicPr>
+                <a:picLocks noChangeAspect="1"/>
+              </p:cNvPicPr>
+              <p:nvPr>
+                <p:custDataLst>
+                  <p:tags r:id="rId3"/>
+                </p:custDataLst>
+              </p:nvPr>
+            </p:nvPicPr>
+            <p:blipFill>
+              <a:blip r:embed="rId31"/>
+              <a:stretch>
+                <a:fillRect/>
+              </a:stretch>
+            </p:blipFill>
+            <p:spPr>
+              <a:xfrm>
+                <a:off x="517174" y="647604"/>
+                <a:ext cx="529138" cy="161544"/>
+              </a:xfrm>
+              <a:prstGeom prst="rect">
+                <a:avLst/>
+              </a:prstGeom>
+            </p:spPr>
+          </p:pic>
+        </p:grpSp>
+      </p:grpSp>
+      <p:sp>
+        <p:nvSpPr>
+          <p:cNvPr id="129" name="TextBox 128">
+            <a:extLst>
+              <a:ext uri="{FF2B5EF4-FFF2-40B4-BE49-F238E27FC236}">
+                <a16:creationId xmlns:a16="http://schemas.microsoft.com/office/drawing/2014/main" id="{A94F9E6D-6021-98BB-F339-6AD0238AA195}"/>
+              </a:ext>
+            </a:extLst>
+          </p:cNvPr>
+          <p:cNvSpPr txBox="1"/>
+          <p:nvPr/>
+        </p:nvSpPr>
+        <p:spPr>
+          <a:xfrm>
+            <a:off x="2007508" y="1366837"/>
+            <a:ext cx="269875" cy="169277"/>
+          </a:xfrm>
+          <a:prstGeom prst="rect">
+            <a:avLst/>
+          </a:prstGeom>
+          <a:noFill/>
+        </p:spPr>
+        <p:txBody>
+          <a:bodyPr wrap="square" rtlCol="0">
+            <a:spAutoFit/>
+          </a:bodyPr>
+          <a:lstStyle/>
+          <a:p>
+            <a:r>
+              <a:rPr lang="en-US" sz="500" i="1" dirty="0">
+                <a:solidFill>
+                  <a:schemeClr val="tx1">
+                    <a:lumMod val="50000"/>
+                    <a:lumOff val="50000"/>
+                  </a:schemeClr>
+                </a:solidFill>
+              </a:rPr>
+              <a:t>S3</a:t>
+            </a:r>
+          </a:p>
+        </p:txBody>
+      </p:sp>
+      <p:cxnSp>
+        <p:nvCxnSpPr>
+          <p:cNvPr id="55" name="Straight Arrow Connector 54">
+            <a:extLst>
+              <a:ext uri="{FF2B5EF4-FFF2-40B4-BE49-F238E27FC236}">
+                <a16:creationId xmlns:a16="http://schemas.microsoft.com/office/drawing/2014/main" id="{A808BA6A-792A-AC63-B660-4BD4406E7F95}"/>
+              </a:ext>
+            </a:extLst>
+          </p:cNvPr>
+          <p:cNvCxnSpPr>
+            <a:cxnSpLocks/>
+          </p:cNvCxnSpPr>
+          <p:nvPr/>
+        </p:nvCxnSpPr>
+        <p:spPr>
+          <a:xfrm flipH="1" flipV="1">
+            <a:off x="48533" y="777875"/>
+            <a:ext cx="192939" cy="601488"/>
+          </a:xfrm>
+          <a:prstGeom prst="straightConnector1">
+            <a:avLst/>
+          </a:prstGeom>
+          <a:ln w="6350">
+            <a:solidFill>
+              <a:schemeClr val="tx1">
+                <a:alpha val="40000"/>
+              </a:schemeClr>
+            </a:solidFill>
+            <a:prstDash val="sysDash"/>
+            <a:tailEnd type="triangle" w="sm" len="sm"/>
+          </a:ln>
+        </p:spPr>
+        <p:style>
+          <a:lnRef idx="1">
+            <a:schemeClr val="accent1"/>
+          </a:lnRef>
+          <a:fillRef idx="0">
+            <a:schemeClr val="accent1"/>
+          </a:fillRef>
+          <a:effectRef idx="0">
+            <a:schemeClr val="accent1"/>
+          </a:effectRef>
+          <a:fontRef idx="minor">
+            <a:schemeClr val="tx1"/>
+          </a:fontRef>
+        </p:style>
+      </p:cxnSp>
+      <p:cxnSp>
+        <p:nvCxnSpPr>
+          <p:cNvPr id="68" name="Straight Arrow Connector 67">
+            <a:extLst>
+              <a:ext uri="{FF2B5EF4-FFF2-40B4-BE49-F238E27FC236}">
+                <a16:creationId xmlns:a16="http://schemas.microsoft.com/office/drawing/2014/main" id="{F9D2D2AB-3249-C73F-8D5E-DD6BB642CA2F}"/>
+              </a:ext>
+            </a:extLst>
+          </p:cNvPr>
+          <p:cNvCxnSpPr>
+            <a:cxnSpLocks/>
+          </p:cNvCxnSpPr>
+          <p:nvPr/>
+        </p:nvCxnSpPr>
+        <p:spPr>
+          <a:xfrm flipV="1">
+            <a:off x="2072131" y="1357419"/>
+            <a:ext cx="0" cy="157590"/>
+          </a:xfrm>
+          <a:prstGeom prst="straightConnector1">
+            <a:avLst/>
+          </a:prstGeom>
+          <a:ln w="6350">
+            <a:solidFill>
+              <a:schemeClr val="tx1">
+                <a:alpha val="40000"/>
+              </a:schemeClr>
+            </a:solidFill>
+            <a:prstDash val="sysDash"/>
+            <a:tailEnd type="triangle" w="sm" len="sm"/>
+          </a:ln>
+        </p:spPr>
+        <p:style>
+          <a:lnRef idx="1">
+            <a:schemeClr val="accent1"/>
+          </a:lnRef>
+          <a:fillRef idx="0">
+            <a:schemeClr val="accent1"/>
+          </a:fillRef>
+          <a:effectRef idx="0">
+            <a:schemeClr val="accent1"/>
+          </a:effectRef>
+          <a:fontRef idx="minor">
+            <a:schemeClr val="tx1"/>
+          </a:fontRef>
+        </p:style>
+      </p:cxnSp>
+      <p:cxnSp>
+        <p:nvCxnSpPr>
+          <p:cNvPr id="70" name="Straight Arrow Connector 69">
+            <a:extLst>
+              <a:ext uri="{FF2B5EF4-FFF2-40B4-BE49-F238E27FC236}">
+                <a16:creationId xmlns:a16="http://schemas.microsoft.com/office/drawing/2014/main" id="{831FA0B4-ACA7-D096-0DD4-80AD331606FF}"/>
+              </a:ext>
+            </a:extLst>
+          </p:cNvPr>
+          <p:cNvCxnSpPr>
+            <a:cxnSpLocks/>
+          </p:cNvCxnSpPr>
+          <p:nvPr/>
+        </p:nvCxnSpPr>
+        <p:spPr>
+          <a:xfrm>
+            <a:off x="1483906" y="443374"/>
+            <a:ext cx="0" cy="142780"/>
+          </a:xfrm>
+          <a:prstGeom prst="straightConnector1">
+            <a:avLst/>
+          </a:prstGeom>
+          <a:ln w="6350">
+            <a:solidFill>
+              <a:schemeClr val="tx1">
+                <a:alpha val="40000"/>
+              </a:schemeClr>
+            </a:solidFill>
+            <a:tailEnd type="none" w="sm" len="sm"/>
+          </a:ln>
+        </p:spPr>
+        <p:style>
+          <a:lnRef idx="1">
+            <a:schemeClr val="accent1"/>
+          </a:lnRef>
+          <a:fillRef idx="0">
+            <a:schemeClr val="accent1"/>
+          </a:fillRef>
+          <a:effectRef idx="0">
+            <a:schemeClr val="accent1"/>
+          </a:effectRef>
+          <a:fontRef idx="minor">
+            <a:schemeClr val="tx1"/>
+          </a:fontRef>
+        </p:style>
+      </p:cxnSp>
+      <p:sp>
+        <p:nvSpPr>
+          <p:cNvPr id="75" name="Rounded Rectangle 74">
+            <a:extLst>
+              <a:ext uri="{FF2B5EF4-FFF2-40B4-BE49-F238E27FC236}">
+                <a16:creationId xmlns:a16="http://schemas.microsoft.com/office/drawing/2014/main" id="{943FFA78-5A02-6E34-18ED-8180C555060E}"/>
+              </a:ext>
+            </a:extLst>
+          </p:cNvPr>
+          <p:cNvSpPr/>
+          <p:nvPr/>
+        </p:nvSpPr>
+        <p:spPr>
+          <a:xfrm>
+            <a:off x="1080099" y="128860"/>
+            <a:ext cx="807614" cy="314514"/>
+          </a:xfrm>
+          <a:prstGeom prst="roundRect">
+            <a:avLst/>
+          </a:prstGeom>
+          <a:noFill/>
+          <a:ln w="6350">
+            <a:solidFill>
+              <a:schemeClr val="tx1">
+                <a:alpha val="40000"/>
+              </a:schemeClr>
+            </a:solidFill>
+          </a:ln>
+        </p:spPr>
+        <p:style>
+          <a:lnRef idx="2">
+            <a:schemeClr val="accent1">
+              <a:shade val="15000"/>
+            </a:schemeClr>
+          </a:lnRef>
+          <a:fillRef idx="1">
+            <a:schemeClr val="accent1"/>
+          </a:fillRef>
+          <a:effectRef idx="0">
+            <a:schemeClr val="accent1"/>
+          </a:effectRef>
+          <a:fontRef idx="minor">
+            <a:schemeClr val="lt1"/>
+          </a:fontRef>
+        </p:style>
+        <p:txBody>
+          <a:bodyPr rtlCol="0" anchor="ctr"/>
+          <a:lstStyle/>
+          <a:p>
+            <a:pPr algn="ctr"/>
+            <a:endParaRPr lang="en-US" dirty="0"/>
+          </a:p>
+        </p:txBody>
+      </p:sp>
+      <p:cxnSp>
+        <p:nvCxnSpPr>
+          <p:cNvPr id="77" name="Straight Arrow Connector 76">
+            <a:extLst>
+              <a:ext uri="{FF2B5EF4-FFF2-40B4-BE49-F238E27FC236}">
+                <a16:creationId xmlns:a16="http://schemas.microsoft.com/office/drawing/2014/main" id="{835898E5-7898-EC03-67B6-3FF9677CD052}"/>
+              </a:ext>
+            </a:extLst>
+          </p:cNvPr>
+          <p:cNvCxnSpPr>
+            <a:cxnSpLocks/>
+          </p:cNvCxnSpPr>
+          <p:nvPr/>
+        </p:nvCxnSpPr>
+        <p:spPr>
+          <a:xfrm flipV="1">
+            <a:off x="537542" y="879475"/>
+            <a:ext cx="199966" cy="485472"/>
+          </a:xfrm>
+          <a:prstGeom prst="straightConnector1">
+            <a:avLst/>
+          </a:prstGeom>
+          <a:ln w="6350">
+            <a:solidFill>
+              <a:schemeClr val="tx1">
+                <a:alpha val="40000"/>
+              </a:schemeClr>
+            </a:solidFill>
+            <a:prstDash val="sysDash"/>
+            <a:tailEnd type="none" w="sm" len="sm"/>
+          </a:ln>
+        </p:spPr>
+        <p:style>
+          <a:lnRef idx="1">
+            <a:schemeClr val="accent1"/>
+          </a:lnRef>
+          <a:fillRef idx="0">
+            <a:schemeClr val="accent1"/>
+          </a:fillRef>
+          <a:effectRef idx="0">
+            <a:schemeClr val="accent1"/>
+          </a:effectRef>
+          <a:fontRef idx="minor">
+            <a:schemeClr val="tx1"/>
+          </a:fontRef>
+        </p:style>
+      </p:cxnSp>
+      <p:cxnSp>
+        <p:nvCxnSpPr>
+          <p:cNvPr id="81" name="Straight Arrow Connector 80">
+            <a:extLst>
+              <a:ext uri="{FF2B5EF4-FFF2-40B4-BE49-F238E27FC236}">
+                <a16:creationId xmlns:a16="http://schemas.microsoft.com/office/drawing/2014/main" id="{BEC3A683-9415-C499-0233-DD3B9F5ABA19}"/>
+              </a:ext>
+            </a:extLst>
+          </p:cNvPr>
+          <p:cNvCxnSpPr>
+            <a:cxnSpLocks/>
+          </p:cNvCxnSpPr>
+          <p:nvPr/>
+        </p:nvCxnSpPr>
+        <p:spPr>
+          <a:xfrm flipH="1" flipV="1">
+            <a:off x="718456" y="871402"/>
+            <a:ext cx="45720" cy="2151"/>
+          </a:xfrm>
+          <a:prstGeom prst="straightConnector1">
+            <a:avLst/>
+          </a:prstGeom>
+          <a:ln w="6350">
+            <a:solidFill>
+              <a:schemeClr val="tx1">
+                <a:alpha val="40000"/>
+              </a:schemeClr>
+            </a:solidFill>
+            <a:tailEnd type="none" w="sm" len="sm"/>
+          </a:ln>
+        </p:spPr>
+        <p:style>
+          <a:lnRef idx="1">
+            <a:schemeClr val="accent1"/>
+          </a:lnRef>
+          <a:fillRef idx="0">
+            <a:schemeClr val="accent1"/>
+          </a:fillRef>
+          <a:effectRef idx="0">
+            <a:schemeClr val="accent1"/>
+          </a:effectRef>
+          <a:fontRef idx="minor">
+            <a:schemeClr val="tx1"/>
+          </a:fontRef>
+        </p:style>
+      </p:cxnSp>
+      <p:cxnSp>
+        <p:nvCxnSpPr>
+          <p:cNvPr id="83" name="Straight Arrow Connector 82">
+            <a:extLst>
+              <a:ext uri="{FF2B5EF4-FFF2-40B4-BE49-F238E27FC236}">
+                <a16:creationId xmlns:a16="http://schemas.microsoft.com/office/drawing/2014/main" id="{7FBF81E6-A916-B3C0-B52E-1483EA4C1AAC}"/>
+              </a:ext>
+            </a:extLst>
+          </p:cNvPr>
+          <p:cNvCxnSpPr>
+            <a:cxnSpLocks/>
+          </p:cNvCxnSpPr>
+          <p:nvPr/>
+        </p:nvCxnSpPr>
+        <p:spPr>
+          <a:xfrm rot="16200000">
+            <a:off x="1483906" y="564983"/>
+            <a:ext cx="0" cy="45720"/>
+          </a:xfrm>
+          <a:prstGeom prst="straightConnector1">
+            <a:avLst/>
+          </a:prstGeom>
+          <a:ln w="6350">
+            <a:solidFill>
+              <a:schemeClr val="tx1">
+                <a:alpha val="40000"/>
+              </a:schemeClr>
+            </a:solidFill>
+            <a:tailEnd type="none" w="sm" len="sm"/>
+          </a:ln>
+        </p:spPr>
+        <p:style>
+          <a:lnRef idx="1">
+            <a:schemeClr val="accent1"/>
+          </a:lnRef>
+          <a:fillRef idx="0">
+            <a:schemeClr val="accent1"/>
+          </a:fillRef>
+          <a:effectRef idx="0">
+            <a:schemeClr val="accent1"/>
+          </a:effectRef>
+          <a:fontRef idx="minor">
+            <a:schemeClr val="tx1"/>
+          </a:fontRef>
+        </p:style>
+      </p:cxnSp>
+      <p:cxnSp>
+        <p:nvCxnSpPr>
+          <p:cNvPr id="96" name="Straight Arrow Connector 95">
+            <a:extLst>
+              <a:ext uri="{FF2B5EF4-FFF2-40B4-BE49-F238E27FC236}">
+                <a16:creationId xmlns:a16="http://schemas.microsoft.com/office/drawing/2014/main" id="{930A60B7-B2F9-5E4E-28F0-058814141355}"/>
+              </a:ext>
+            </a:extLst>
+          </p:cNvPr>
+          <p:cNvCxnSpPr>
+            <a:cxnSpLocks/>
+          </p:cNvCxnSpPr>
+          <p:nvPr/>
+        </p:nvCxnSpPr>
+        <p:spPr>
+          <a:xfrm flipH="1">
+            <a:off x="77093" y="776824"/>
+            <a:ext cx="45720" cy="0"/>
+          </a:xfrm>
+          <a:prstGeom prst="straightConnector1">
+            <a:avLst/>
+          </a:prstGeom>
+          <a:ln w="6350">
+            <a:solidFill>
+              <a:schemeClr val="tx1">
+                <a:alpha val="40000"/>
+              </a:schemeClr>
+            </a:solidFill>
+            <a:tailEnd type="none" w="sm" len="sm"/>
+          </a:ln>
+        </p:spPr>
+        <p:style>
+          <a:lnRef idx="1">
+            <a:schemeClr val="accent1"/>
+          </a:lnRef>
+          <a:fillRef idx="0">
+            <a:schemeClr val="accent1"/>
+          </a:fillRef>
+          <a:effectRef idx="0">
+            <a:schemeClr val="accent1"/>
+          </a:effectRef>
+          <a:fontRef idx="minor">
+            <a:schemeClr val="tx1"/>
+          </a:fontRef>
+        </p:style>
+      </p:cxnSp>
+      <p:cxnSp>
+        <p:nvCxnSpPr>
+          <p:cNvPr id="59" name="Straight Arrow Connector 58">
+            <a:extLst>
+              <a:ext uri="{FF2B5EF4-FFF2-40B4-BE49-F238E27FC236}">
+                <a16:creationId xmlns:a16="http://schemas.microsoft.com/office/drawing/2014/main" id="{67B6A116-E684-F61F-2121-E59872556950}"/>
+              </a:ext>
+            </a:extLst>
+          </p:cNvPr>
+          <p:cNvCxnSpPr>
+            <a:cxnSpLocks/>
+          </p:cNvCxnSpPr>
+          <p:nvPr/>
+        </p:nvCxnSpPr>
+        <p:spPr>
+          <a:xfrm flipV="1">
+            <a:off x="241472" y="869950"/>
+            <a:ext cx="435711" cy="509413"/>
+          </a:xfrm>
+          <a:prstGeom prst="straightConnector1">
+            <a:avLst/>
+          </a:prstGeom>
+          <a:ln w="6350">
+            <a:solidFill>
+              <a:schemeClr val="tx1">
+                <a:alpha val="40000"/>
+              </a:schemeClr>
+            </a:solidFill>
+            <a:prstDash val="sysDash"/>
+            <a:tailEnd type="triangle" w="sm" len="sm"/>
+          </a:ln>
+        </p:spPr>
+        <p:style>
+          <a:lnRef idx="1">
+            <a:schemeClr val="accent1"/>
+          </a:lnRef>
+          <a:fillRef idx="0">
+            <a:schemeClr val="accent1"/>
+          </a:fillRef>
+          <a:effectRef idx="0">
+            <a:schemeClr val="accent1"/>
+          </a:effectRef>
+          <a:fontRef idx="minor">
+            <a:schemeClr val="tx1"/>
+          </a:fontRef>
+        </p:style>
+      </p:cxnSp>
+      <p:cxnSp>
+        <p:nvCxnSpPr>
+          <p:cNvPr id="74" name="Straight Arrow Connector 73">
+            <a:extLst>
+              <a:ext uri="{FF2B5EF4-FFF2-40B4-BE49-F238E27FC236}">
+                <a16:creationId xmlns:a16="http://schemas.microsoft.com/office/drawing/2014/main" id="{377E6B25-7AE3-5B83-1516-5405EBF964DA}"/>
+              </a:ext>
+            </a:extLst>
+          </p:cNvPr>
+          <p:cNvCxnSpPr>
+            <a:cxnSpLocks/>
+          </p:cNvCxnSpPr>
+          <p:nvPr/>
+        </p:nvCxnSpPr>
+        <p:spPr>
+          <a:xfrm flipH="1" flipV="1">
+            <a:off x="99333" y="784225"/>
+            <a:ext cx="438209" cy="580722"/>
+          </a:xfrm>
+          <a:prstGeom prst="straightConnector1">
+            <a:avLst/>
+          </a:prstGeom>
+          <a:ln w="6350">
+            <a:solidFill>
+              <a:schemeClr val="tx1">
+                <a:alpha val="40000"/>
+              </a:schemeClr>
+            </a:solidFill>
+            <a:prstDash val="sysDash"/>
+            <a:tailEnd type="none" w="sm" len="sm"/>
+          </a:ln>
+        </p:spPr>
+        <p:style>
+          <a:lnRef idx="1">
+            <a:schemeClr val="accent1"/>
+          </a:lnRef>
+          <a:fillRef idx="0">
+            <a:schemeClr val="accent1"/>
+          </a:fillRef>
+          <a:effectRef idx="0">
+            <a:schemeClr val="accent1"/>
+          </a:effectRef>
+          <a:fontRef idx="minor">
+            <a:schemeClr val="tx1"/>
+          </a:fontRef>
+        </p:style>
+      </p:cxnSp>
+      <p:cxnSp>
+        <p:nvCxnSpPr>
+          <p:cNvPr id="115" name="Straight Connector 114">
+            <a:extLst>
+              <a:ext uri="{FF2B5EF4-FFF2-40B4-BE49-F238E27FC236}">
+                <a16:creationId xmlns:a16="http://schemas.microsoft.com/office/drawing/2014/main" id="{350607E0-7EB2-A55F-6EFC-8774D53F0405}"/>
+              </a:ext>
+            </a:extLst>
+          </p:cNvPr>
+          <p:cNvCxnSpPr>
+            <a:cxnSpLocks/>
+          </p:cNvCxnSpPr>
+          <p:nvPr/>
+        </p:nvCxnSpPr>
+        <p:spPr>
+          <a:xfrm>
+            <a:off x="1484059" y="145806"/>
+            <a:ext cx="0" cy="292100"/>
+          </a:xfrm>
+          <a:prstGeom prst="line">
+            <a:avLst/>
+          </a:prstGeom>
+          <a:ln w="3175">
+            <a:solidFill>
+              <a:schemeClr val="tx1">
+                <a:alpha val="50000"/>
+              </a:schemeClr>
+            </a:solidFill>
+            <a:prstDash val="sysDot"/>
+          </a:ln>
+        </p:spPr>
+        <p:style>
+          <a:lnRef idx="1">
+            <a:schemeClr val="accent1"/>
+          </a:lnRef>
+          <a:fillRef idx="0">
+            <a:schemeClr val="accent1"/>
+          </a:fillRef>
+          <a:effectRef idx="0">
+            <a:schemeClr val="accent1"/>
+          </a:effectRef>
+          <a:fontRef idx="minor">
+            <a:schemeClr val="tx1"/>
+          </a:fontRef>
+        </p:style>
+      </p:cxnSp>
+      <p:sp>
+        <p:nvSpPr>
+          <p:cNvPr id="125" name="TextBox 124">
+            <a:extLst>
+              <a:ext uri="{FF2B5EF4-FFF2-40B4-BE49-F238E27FC236}">
+                <a16:creationId xmlns:a16="http://schemas.microsoft.com/office/drawing/2014/main" id="{031F7B2E-3D0B-9706-A629-17C53C08CBB1}"/>
+              </a:ext>
+            </a:extLst>
+          </p:cNvPr>
+          <p:cNvSpPr txBox="1"/>
+          <p:nvPr/>
+        </p:nvSpPr>
+        <p:spPr>
+          <a:xfrm>
+            <a:off x="5059" y="1061794"/>
+            <a:ext cx="269875" cy="169277"/>
+          </a:xfrm>
+          <a:prstGeom prst="rect">
+            <a:avLst/>
+          </a:prstGeom>
+          <a:noFill/>
+        </p:spPr>
+        <p:txBody>
+          <a:bodyPr wrap="square" rtlCol="0">
+            <a:spAutoFit/>
+          </a:bodyPr>
+          <a:lstStyle/>
+          <a:p>
+            <a:r>
+              <a:rPr lang="en-US" sz="500" i="1" dirty="0">
+                <a:solidFill>
+                  <a:schemeClr val="tx1">
+                    <a:lumMod val="50000"/>
+                    <a:lumOff val="50000"/>
+                  </a:schemeClr>
+                </a:solidFill>
+              </a:rPr>
+              <a:t>S1</a:t>
+            </a:r>
+          </a:p>
+        </p:txBody>
+      </p:sp>
+      <p:sp>
+        <p:nvSpPr>
+          <p:cNvPr id="126" name="TextBox 125">
+            <a:extLst>
+              <a:ext uri="{FF2B5EF4-FFF2-40B4-BE49-F238E27FC236}">
+                <a16:creationId xmlns:a16="http://schemas.microsoft.com/office/drawing/2014/main" id="{FD55F029-FF2D-0DC2-866A-75C74077B4B4}"/>
+              </a:ext>
+            </a:extLst>
+          </p:cNvPr>
+          <p:cNvSpPr txBox="1"/>
+          <p:nvPr/>
+        </p:nvSpPr>
+        <p:spPr>
+          <a:xfrm>
+            <a:off x="549693" y="1061794"/>
+            <a:ext cx="269875" cy="169277"/>
+          </a:xfrm>
+          <a:prstGeom prst="rect">
+            <a:avLst/>
+          </a:prstGeom>
+          <a:noFill/>
+        </p:spPr>
+        <p:txBody>
+          <a:bodyPr wrap="square" rtlCol="0">
+            <a:spAutoFit/>
+          </a:bodyPr>
+          <a:lstStyle/>
+          <a:p>
+            <a:r>
+              <a:rPr lang="en-US" sz="500" i="1" dirty="0">
+                <a:solidFill>
+                  <a:schemeClr val="tx1">
+                    <a:lumMod val="50000"/>
+                    <a:lumOff val="50000"/>
+                  </a:schemeClr>
+                </a:solidFill>
+              </a:rPr>
+              <a:t>S3</a:t>
+            </a:r>
+          </a:p>
+        </p:txBody>
+      </p:sp>
+      <p:sp>
+        <p:nvSpPr>
+          <p:cNvPr id="127" name="TextBox 126">
+            <a:extLst>
+              <a:ext uri="{FF2B5EF4-FFF2-40B4-BE49-F238E27FC236}">
+                <a16:creationId xmlns:a16="http://schemas.microsoft.com/office/drawing/2014/main" id="{FD2B9098-6137-1367-9876-45C45F4CE290}"/>
+              </a:ext>
+            </a:extLst>
+          </p:cNvPr>
+          <p:cNvSpPr txBox="1"/>
+          <p:nvPr/>
+        </p:nvSpPr>
+        <p:spPr>
+          <a:xfrm>
+            <a:off x="196292" y="1061794"/>
+            <a:ext cx="269875" cy="169277"/>
+          </a:xfrm>
+          <a:prstGeom prst="rect">
+            <a:avLst/>
+          </a:prstGeom>
+          <a:noFill/>
+        </p:spPr>
+        <p:txBody>
+          <a:bodyPr wrap="square" rtlCol="0">
+            <a:spAutoFit/>
+          </a:bodyPr>
+          <a:lstStyle/>
+          <a:p>
+            <a:r>
+              <a:rPr lang="en-US" sz="500" i="1" dirty="0">
+                <a:solidFill>
+                  <a:schemeClr val="tx1">
+                    <a:lumMod val="50000"/>
+                    <a:lumOff val="50000"/>
+                  </a:schemeClr>
+                </a:solidFill>
+              </a:rPr>
+              <a:t>S4</a:t>
+            </a:r>
+          </a:p>
+        </p:txBody>
+      </p:sp>
+      <p:sp>
+        <p:nvSpPr>
+          <p:cNvPr id="128" name="TextBox 127">
+            <a:extLst>
+              <a:ext uri="{FF2B5EF4-FFF2-40B4-BE49-F238E27FC236}">
+                <a16:creationId xmlns:a16="http://schemas.microsoft.com/office/drawing/2014/main" id="{91D989E3-9F58-3DCA-9D73-9FC3C2652F1C}"/>
+              </a:ext>
+            </a:extLst>
+          </p:cNvPr>
+          <p:cNvSpPr txBox="1"/>
+          <p:nvPr/>
+        </p:nvSpPr>
+        <p:spPr>
+          <a:xfrm>
+            <a:off x="383617" y="1061794"/>
+            <a:ext cx="269875" cy="169277"/>
+          </a:xfrm>
+          <a:prstGeom prst="rect">
+            <a:avLst/>
+          </a:prstGeom>
+          <a:noFill/>
+        </p:spPr>
+        <p:txBody>
+          <a:bodyPr wrap="square" rtlCol="0">
+            <a:spAutoFit/>
+          </a:bodyPr>
+          <a:lstStyle/>
+          <a:p>
+            <a:r>
+              <a:rPr lang="en-US" sz="500" i="1" dirty="0">
+                <a:solidFill>
+                  <a:schemeClr val="tx1">
+                    <a:lumMod val="50000"/>
+                    <a:lumOff val="50000"/>
+                  </a:schemeClr>
+                </a:solidFill>
+              </a:rPr>
+              <a:t>S4</a:t>
+            </a:r>
+          </a:p>
+        </p:txBody>
+      </p:sp>
+      <p:grpSp>
+        <p:nvGrpSpPr>
+          <p:cNvPr id="154" name="Group 153">
+            <a:extLst>
+              <a:ext uri="{FF2B5EF4-FFF2-40B4-BE49-F238E27FC236}">
+                <a16:creationId xmlns:a16="http://schemas.microsoft.com/office/drawing/2014/main" id="{EDD19758-40CA-0D08-C99A-401DA098B512}"/>
+              </a:ext>
+            </a:extLst>
+          </p:cNvPr>
+          <p:cNvGrpSpPr/>
+          <p:nvPr/>
+        </p:nvGrpSpPr>
+        <p:grpSpPr>
+          <a:xfrm>
+            <a:off x="1791608" y="384175"/>
+            <a:ext cx="664544" cy="803275"/>
+            <a:chOff x="1752600" y="419100"/>
+            <a:chExt cx="664544" cy="803275"/>
+          </a:xfrm>
+        </p:grpSpPr>
+        <p:cxnSp>
+          <p:nvCxnSpPr>
+            <p:cNvPr id="62" name="Straight Arrow Connector 61">
+              <a:extLst>
+                <a:ext uri="{FF2B5EF4-FFF2-40B4-BE49-F238E27FC236}">
+                  <a16:creationId xmlns:a16="http://schemas.microsoft.com/office/drawing/2014/main" id="{81944927-9BFC-D4E4-0DF9-D2BFC59C5FAF}"/>
+                </a:ext>
+              </a:extLst>
+            </p:cNvPr>
+            <p:cNvCxnSpPr>
+              <a:cxnSpLocks/>
+              <a:stCxn id="64" idx="1"/>
+            </p:cNvCxnSpPr>
+            <p:nvPr/>
+          </p:nvCxnSpPr>
+          <p:spPr>
+            <a:xfrm flipH="1">
+              <a:off x="1752600" y="820738"/>
+              <a:ext cx="227014" cy="163512"/>
+            </a:xfrm>
+            <a:prstGeom prst="straightConnector1">
+              <a:avLst/>
+            </a:prstGeom>
+            <a:ln w="6350">
+              <a:solidFill>
+                <a:schemeClr val="tx1">
+                  <a:alpha val="40000"/>
+                </a:schemeClr>
+              </a:solidFill>
+              <a:tailEnd type="triangle" w="sm" len="sm"/>
+            </a:ln>
+          </p:spPr>
+          <p:style>
+            <a:lnRef idx="1">
+              <a:schemeClr val="accent1"/>
+            </a:lnRef>
+            <a:fillRef idx="0">
+              <a:schemeClr val="accent1"/>
+            </a:fillRef>
+            <a:effectRef idx="0">
+              <a:schemeClr val="accent1"/>
+            </a:effectRef>
+            <a:fontRef idx="minor">
+              <a:schemeClr val="tx1"/>
+            </a:fontRef>
+          </p:style>
+        </p:cxnSp>
+        <p:sp>
+          <p:nvSpPr>
+            <p:cNvPr id="64" name="Rounded Rectangle 63">
+              <a:extLst>
+                <a:ext uri="{FF2B5EF4-FFF2-40B4-BE49-F238E27FC236}">
+                  <a16:creationId xmlns:a16="http://schemas.microsoft.com/office/drawing/2014/main" id="{9BBAB214-647B-AB3C-4CFC-B045DE3BED7B}"/>
+                </a:ext>
+              </a:extLst>
+            </p:cNvPr>
+            <p:cNvSpPr/>
+            <p:nvPr/>
+          </p:nvSpPr>
+          <p:spPr>
+            <a:xfrm>
+              <a:off x="1979614" y="419100"/>
+              <a:ext cx="437530" cy="803275"/>
+            </a:xfrm>
+            <a:prstGeom prst="roundRect">
+              <a:avLst/>
+            </a:prstGeom>
+            <a:noFill/>
+            <a:ln w="6350">
+              <a:solidFill>
+                <a:schemeClr val="tx1">
+                  <a:alpha val="40000"/>
+                </a:schemeClr>
+              </a:solidFill>
+            </a:ln>
+          </p:spPr>
+          <p:style>
+            <a:lnRef idx="2">
+              <a:schemeClr val="accent1">
+                <a:shade val="15000"/>
+              </a:schemeClr>
+            </a:lnRef>
+            <a:fillRef idx="1">
+              <a:schemeClr val="accent1"/>
+            </a:fillRef>
+            <a:effectRef idx="0">
+              <a:schemeClr val="accent1"/>
+            </a:effectRef>
+            <a:fontRef idx="minor">
+              <a:schemeClr val="lt1"/>
+            </a:fontRef>
+          </p:style>
+          <p:txBody>
+            <a:bodyPr rtlCol="0" anchor="ctr"/>
+            <a:lstStyle/>
+            <a:p>
+              <a:pPr algn="ctr"/>
+              <a:endParaRPr lang="en-US"/>
+            </a:p>
+          </p:txBody>
+        </p:sp>
+        <mc:AlternateContent xmlns:mc="http://schemas.openxmlformats.org/markup-compatibility/2006">
+          <mc:Choice xmlns:a14="http://schemas.microsoft.com/office/drawing/2010/main" Requires="a14">
+            <p:sp>
+              <p:nvSpPr>
+                <p:cNvPr id="78" name="TextBox 77">
+                  <a:extLst>
+                    <a:ext uri="{FF2B5EF4-FFF2-40B4-BE49-F238E27FC236}">
+                      <a16:creationId xmlns:a16="http://schemas.microsoft.com/office/drawing/2014/main" id="{EA8A6382-3918-CC66-D775-7186421F7443}"/>
+                    </a:ext>
+                  </a:extLst>
+                </p:cNvPr>
+                <p:cNvSpPr txBox="1"/>
+                <p:nvPr/>
+              </p:nvSpPr>
+              <p:spPr>
+                <a:xfrm>
+                  <a:off x="2181669" y="904869"/>
+                  <a:ext cx="49693" cy="61555"/>
+                </a:xfrm>
+                <a:prstGeom prst="rect">
+                  <a:avLst/>
+                </a:prstGeom>
+                <a:noFill/>
+              </p:spPr>
+              <p:txBody>
+                <a:bodyPr wrap="none" lIns="0" tIns="0" rIns="0" bIns="0" rtlCol="0">
+                  <a:spAutoFit/>
+                </a:bodyPr>
+                <a:lstStyle/>
+                <a:p>
+                  <a:pPr/>
+                  <a14:m>
+                    <m:oMathPara xmlns:m="http://schemas.openxmlformats.org/officeDocument/2006/math">
+                      <m:oMathParaPr>
+                        <m:jc m:val="centerGroup"/>
+                      </m:oMathParaPr>
+                      <m:oMath xmlns:m="http://schemas.openxmlformats.org/officeDocument/2006/math">
+                        <m:r>
+                          <a:rPr lang="en-US" sz="400" i="1" smtClean="0">
+                            <a:latin typeface="Cambria Math" panose="02040503050406030204" pitchFamily="18" charset="0"/>
+                            <a:ea typeface="Cambria Math" panose="02040503050406030204" pitchFamily="18" charset="0"/>
+                          </a:rPr>
+                          <m:t>±</m:t>
+                        </m:r>
+                      </m:oMath>
+                    </m:oMathPara>
+                  </a14:m>
+                  <a:endParaRPr lang="en-US" sz="600" dirty="0"/>
+                </a:p>
+              </p:txBody>
+            </p:sp>
+          </mc:Choice>
+          <mc:Fallback>
+            <p:sp>
+              <p:nvSpPr>
+                <p:cNvPr id="78" name="TextBox 77">
+                  <a:extLst>
+                    <a:ext uri="{FF2B5EF4-FFF2-40B4-BE49-F238E27FC236}">
+                      <a16:creationId xmlns:a16="http://schemas.microsoft.com/office/drawing/2014/main" id="{EA8A6382-3918-CC66-D775-7186421F7443}"/>
+                    </a:ext>
+                  </a:extLst>
+                </p:cNvPr>
+                <p:cNvSpPr txBox="1">
+                  <a:spLocks noRot="1" noChangeAspect="1" noMove="1" noResize="1" noEditPoints="1" noAdjustHandles="1" noChangeArrowheads="1" noChangeShapeType="1" noTextEdit="1"/>
+                </p:cNvSpPr>
+                <p:nvPr/>
+              </p:nvSpPr>
+              <p:spPr>
+                <a:xfrm>
+                  <a:off x="2181669" y="904869"/>
+                  <a:ext cx="49693" cy="61555"/>
+                </a:xfrm>
+                <a:prstGeom prst="rect">
+                  <a:avLst/>
+                </a:prstGeom>
+                <a:blipFill>
+                  <a:blip r:embed="rId50"/>
+                  <a:stretch>
+                    <a:fillRect l="-20000" r="-20000" b="-16667"/>
+                  </a:stretch>
+                </a:blipFill>
+              </p:spPr>
+              <p:txBody>
+                <a:bodyPr/>
+                <a:lstStyle/>
+                <a:p>
+                  <a:r>
+                    <a:rPr lang="en-US">
+                      <a:noFill/>
+                    </a:rPr>
+                    <a:t> </a:t>
+                  </a:r>
+                </a:p>
+              </p:txBody>
+            </p:sp>
+          </mc:Fallback>
+        </mc:AlternateContent>
+        <p:cxnSp>
+          <p:nvCxnSpPr>
+            <p:cNvPr id="117" name="Straight Connector 116">
+              <a:extLst>
+                <a:ext uri="{FF2B5EF4-FFF2-40B4-BE49-F238E27FC236}">
+                  <a16:creationId xmlns:a16="http://schemas.microsoft.com/office/drawing/2014/main" id="{42328C68-2D51-E468-DB3C-9052CD2A553B}"/>
+                </a:ext>
+              </a:extLst>
+            </p:cNvPr>
+            <p:cNvCxnSpPr>
+              <a:cxnSpLocks/>
+            </p:cNvCxnSpPr>
+            <p:nvPr/>
+          </p:nvCxnSpPr>
+          <p:spPr>
+            <a:xfrm flipH="1">
+              <a:off x="1990725" y="706525"/>
+              <a:ext cx="421985" cy="0"/>
+            </a:xfrm>
+            <a:prstGeom prst="line">
+              <a:avLst/>
+            </a:prstGeom>
+            <a:ln w="3175">
+              <a:solidFill>
+                <a:schemeClr val="tx1">
+                  <a:alpha val="50000"/>
+                </a:schemeClr>
+              </a:solidFill>
+              <a:prstDash val="sysDot"/>
+            </a:ln>
+          </p:spPr>
+          <p:style>
+            <a:lnRef idx="1">
+              <a:schemeClr val="accent1"/>
+            </a:lnRef>
+            <a:fillRef idx="0">
+              <a:schemeClr val="accent1"/>
+            </a:fillRef>
+            <a:effectRef idx="0">
+              <a:schemeClr val="accent1"/>
+            </a:effectRef>
+            <a:fontRef idx="minor">
+              <a:schemeClr val="tx1"/>
+            </a:fontRef>
+          </p:style>
+        </p:cxnSp>
+      </p:grpSp>
+      <p:sp>
+        <p:nvSpPr>
+          <p:cNvPr id="13" name="TextBox 12">
+            <a:extLst>
+              <a:ext uri="{FF2B5EF4-FFF2-40B4-BE49-F238E27FC236}">
+                <a16:creationId xmlns:a16="http://schemas.microsoft.com/office/drawing/2014/main" id="{423B6048-3455-EAB3-3242-D9D3BA0EF79D}"/>
+              </a:ext>
+            </a:extLst>
+          </p:cNvPr>
+          <p:cNvSpPr txBox="1"/>
+          <p:nvPr/>
+        </p:nvSpPr>
+        <p:spPr>
+          <a:xfrm>
+            <a:off x="-20793" y="1361903"/>
+            <a:ext cx="519632" cy="169277"/>
+          </a:xfrm>
+          <a:prstGeom prst="rect">
+            <a:avLst/>
+          </a:prstGeom>
+          <a:noFill/>
+        </p:spPr>
+        <p:txBody>
+          <a:bodyPr wrap="square" rtlCol="0">
+            <a:spAutoFit/>
+          </a:bodyPr>
+          <a:lstStyle/>
+          <a:p>
+            <a:r>
+              <a:rPr lang="en-US" sz="500" dirty="0"/>
+              <a:t>TLR7-agonist</a:t>
+            </a:r>
+          </a:p>
+        </p:txBody>
+      </p:sp>
+      <p:sp>
+        <p:nvSpPr>
+          <p:cNvPr id="53" name="TextBox 52">
+            <a:extLst>
+              <a:ext uri="{FF2B5EF4-FFF2-40B4-BE49-F238E27FC236}">
+                <a16:creationId xmlns:a16="http://schemas.microsoft.com/office/drawing/2014/main" id="{4EB4390A-4453-32DB-0B9D-02D45A19A9F0}"/>
+              </a:ext>
+            </a:extLst>
+          </p:cNvPr>
+          <p:cNvSpPr txBox="1"/>
+          <p:nvPr/>
+        </p:nvSpPr>
+        <p:spPr>
+          <a:xfrm>
+            <a:off x="376104" y="1362612"/>
+            <a:ext cx="336775" cy="169277"/>
+          </a:xfrm>
+          <a:prstGeom prst="rect">
+            <a:avLst/>
+          </a:prstGeom>
+          <a:noFill/>
+        </p:spPr>
+        <p:txBody>
+          <a:bodyPr wrap="square" rtlCol="0">
+            <a:spAutoFit/>
+          </a:bodyPr>
+          <a:lstStyle/>
+          <a:p>
+            <a:r>
+              <a:rPr lang="en-US" sz="500" dirty="0" err="1"/>
+              <a:t>bNAb</a:t>
+            </a:r>
+            <a:endParaRPr lang="en-US" sz="500" dirty="0"/>
+          </a:p>
+        </p:txBody>
+      </p:sp>
+      <p:sp>
+        <p:nvSpPr>
+          <p:cNvPr id="66" name="TextBox 65">
+            <a:extLst>
+              <a:ext uri="{FF2B5EF4-FFF2-40B4-BE49-F238E27FC236}">
+                <a16:creationId xmlns:a16="http://schemas.microsoft.com/office/drawing/2014/main" id="{1C7ABB9B-2114-A464-ABE4-60C29D1234BC}"/>
+              </a:ext>
+            </a:extLst>
+          </p:cNvPr>
+          <p:cNvSpPr txBox="1"/>
+          <p:nvPr/>
+        </p:nvSpPr>
+        <p:spPr>
+          <a:xfrm>
+            <a:off x="998077" y="115114"/>
+            <a:ext cx="546779" cy="246221"/>
+          </a:xfrm>
+          <a:prstGeom prst="rect">
+            <a:avLst/>
+          </a:prstGeom>
+          <a:noFill/>
+        </p:spPr>
+        <p:txBody>
+          <a:bodyPr wrap="square" rtlCol="0">
+            <a:spAutoFit/>
+          </a:bodyPr>
+          <a:lstStyle/>
+          <a:p>
+            <a:r>
+              <a:rPr lang="en-US" sz="500" dirty="0"/>
+              <a:t>TLR7-agonist </a:t>
+            </a:r>
+            <a:r>
+              <a:rPr lang="en-US" sz="500" i="1" dirty="0"/>
+              <a:t>(S1)</a:t>
+            </a:r>
+          </a:p>
+        </p:txBody>
+      </p:sp>
+      <p:sp>
+        <p:nvSpPr>
+          <p:cNvPr id="72" name="TextBox 71">
+            <a:extLst>
+              <a:ext uri="{FF2B5EF4-FFF2-40B4-BE49-F238E27FC236}">
+                <a16:creationId xmlns:a16="http://schemas.microsoft.com/office/drawing/2014/main" id="{CD8D4A5A-7667-6A34-D1F1-7C00BD6EAD14}"/>
+              </a:ext>
+            </a:extLst>
+          </p:cNvPr>
+          <p:cNvSpPr txBox="1"/>
+          <p:nvPr/>
+        </p:nvSpPr>
+        <p:spPr>
+          <a:xfrm>
+            <a:off x="1838811" y="1478159"/>
+            <a:ext cx="519632" cy="169277"/>
+          </a:xfrm>
+          <a:prstGeom prst="rect">
+            <a:avLst/>
+          </a:prstGeom>
+          <a:noFill/>
+        </p:spPr>
+        <p:txBody>
+          <a:bodyPr wrap="square" rtlCol="0">
+            <a:spAutoFit/>
+          </a:bodyPr>
+          <a:lstStyle/>
+          <a:p>
+            <a:r>
+              <a:rPr lang="en-US" sz="500" dirty="0"/>
+              <a:t>TLR7-agonist</a:t>
+            </a:r>
+          </a:p>
+        </p:txBody>
+      </p:sp>
+      <p:sp>
+        <p:nvSpPr>
+          <p:cNvPr id="73" name="TextBox 72">
+            <a:extLst>
+              <a:ext uri="{FF2B5EF4-FFF2-40B4-BE49-F238E27FC236}">
+                <a16:creationId xmlns:a16="http://schemas.microsoft.com/office/drawing/2014/main" id="{1CEAAE67-5E12-8201-F750-F43823EFCFDE}"/>
+              </a:ext>
+            </a:extLst>
+          </p:cNvPr>
+          <p:cNvSpPr txBox="1"/>
+          <p:nvPr/>
+        </p:nvSpPr>
+        <p:spPr>
+          <a:xfrm>
+            <a:off x="1983152" y="668091"/>
+            <a:ext cx="536337" cy="246221"/>
+          </a:xfrm>
+          <a:prstGeom prst="rect">
+            <a:avLst/>
+          </a:prstGeom>
+          <a:noFill/>
+        </p:spPr>
+        <p:txBody>
+          <a:bodyPr wrap="square" rtlCol="0">
+            <a:spAutoFit/>
+          </a:bodyPr>
+          <a:lstStyle/>
+          <a:p>
+            <a:r>
+              <a:rPr lang="en-US" sz="500" dirty="0"/>
+              <a:t>Therapeutic Vaccine</a:t>
+            </a:r>
+          </a:p>
+        </p:txBody>
+      </p:sp>
+      <p:sp>
+        <p:nvSpPr>
+          <p:cNvPr id="79" name="TextBox 78">
+            <a:extLst>
+              <a:ext uri="{FF2B5EF4-FFF2-40B4-BE49-F238E27FC236}">
+                <a16:creationId xmlns:a16="http://schemas.microsoft.com/office/drawing/2014/main" id="{DC1CB175-4160-9609-AF53-C34123154386}"/>
+              </a:ext>
+            </a:extLst>
+          </p:cNvPr>
+          <p:cNvSpPr txBox="1"/>
+          <p:nvPr/>
+        </p:nvSpPr>
+        <p:spPr>
+          <a:xfrm>
+            <a:off x="1471171" y="167756"/>
+            <a:ext cx="536337" cy="246221"/>
+          </a:xfrm>
+          <a:prstGeom prst="rect">
+            <a:avLst/>
+          </a:prstGeom>
+          <a:noFill/>
+        </p:spPr>
+        <p:txBody>
+          <a:bodyPr wrap="square" rtlCol="0">
+            <a:spAutoFit/>
+          </a:bodyPr>
+          <a:lstStyle/>
+          <a:p>
+            <a:r>
+              <a:rPr lang="en-US" sz="500" dirty="0"/>
+              <a:t>Therapeutic Vaccine </a:t>
+            </a:r>
+          </a:p>
+        </p:txBody>
+      </p:sp>
+      <p:sp>
+        <p:nvSpPr>
+          <p:cNvPr id="80" name="TextBox 79">
+            <a:extLst>
+              <a:ext uri="{FF2B5EF4-FFF2-40B4-BE49-F238E27FC236}">
+                <a16:creationId xmlns:a16="http://schemas.microsoft.com/office/drawing/2014/main" id="{39D034A8-A99A-B0B9-023F-3ABC67870FA0}"/>
+              </a:ext>
+            </a:extLst>
+          </p:cNvPr>
+          <p:cNvSpPr txBox="1"/>
+          <p:nvPr/>
+        </p:nvSpPr>
+        <p:spPr>
+          <a:xfrm>
+            <a:off x="1975774" y="945303"/>
+            <a:ext cx="546779" cy="246221"/>
+          </a:xfrm>
+          <a:prstGeom prst="rect">
+            <a:avLst/>
+          </a:prstGeom>
+          <a:noFill/>
+        </p:spPr>
+        <p:txBody>
+          <a:bodyPr wrap="square" rtlCol="0">
+            <a:spAutoFit/>
+          </a:bodyPr>
+          <a:lstStyle/>
+          <a:p>
+            <a:r>
+              <a:rPr lang="en-US" sz="500" dirty="0"/>
+              <a:t>TLR7-agonist (</a:t>
+            </a:r>
+            <a:r>
+              <a:rPr lang="en-US" sz="500" i="1" dirty="0"/>
+              <a:t>S2,S4</a:t>
+            </a:r>
+            <a:r>
+              <a:rPr lang="en-US" sz="500" dirty="0"/>
+              <a:t>)</a:t>
+            </a:r>
+          </a:p>
+        </p:txBody>
+      </p:sp>
+      <p:sp>
+        <p:nvSpPr>
+          <p:cNvPr id="82" name="TextBox 81">
+            <a:extLst>
+              <a:ext uri="{FF2B5EF4-FFF2-40B4-BE49-F238E27FC236}">
+                <a16:creationId xmlns:a16="http://schemas.microsoft.com/office/drawing/2014/main" id="{04FCDC1C-522C-5685-262E-9993F613659C}"/>
+              </a:ext>
+            </a:extLst>
+          </p:cNvPr>
+          <p:cNvSpPr txBox="1"/>
+          <p:nvPr/>
+        </p:nvSpPr>
+        <p:spPr>
+          <a:xfrm>
+            <a:off x="2035696" y="450845"/>
+            <a:ext cx="336775" cy="169277"/>
+          </a:xfrm>
+          <a:prstGeom prst="rect">
+            <a:avLst/>
+          </a:prstGeom>
+          <a:noFill/>
+        </p:spPr>
+        <p:txBody>
+          <a:bodyPr wrap="square" rtlCol="0">
+            <a:spAutoFit/>
+          </a:bodyPr>
+          <a:lstStyle/>
+          <a:p>
+            <a:r>
+              <a:rPr lang="en-US" sz="500" dirty="0" err="1"/>
+              <a:t>bNAb</a:t>
+            </a:r>
+            <a:endParaRPr lang="en-US" sz="500" dirty="0"/>
+          </a:p>
+        </p:txBody>
+      </p:sp>
+    </p:spTree>
+    <p:custDataLst>
+      <p:tags r:id="rId1"/>
+    </p:custDataLst>
+    <p:extLst>
+      <p:ext uri="{BB962C8B-B14F-4D97-AF65-F5344CB8AC3E}">
+        <p14:creationId xmlns:p14="http://schemas.microsoft.com/office/powerpoint/2010/main" val="2241548245"/>
+      </p:ext>
+    </p:extLst>
+  </p:cSld>
+  <p:clrMapOvr>
+    <a:masterClrMapping/>
+  </p:clrMapOvr>
+</p:sld>
+</file>
+
+<file path=ppt/slides/slide5.xml><?xml version="1.0" encoding="utf-8"?>
 <p:sld xmlns:a="http://schemas.openxmlformats.org/drawingml/2006/main" xmlns:r="http://schemas.openxmlformats.org/officeDocument/2006/relationships" xmlns:p="http://schemas.openxmlformats.org/presentationml/2006/main">
   <p:cSld name="Slide 2">
     <p:spTree>
@@ -10504,6 +13998,156 @@
 </p:tagLst>
 </file>
 
+<file path=ppt/tags/tag100.xml><?xml version="1.0" encoding="utf-8"?>
+<p:tagLst xmlns:a="http://schemas.openxmlformats.org/drawingml/2006/main" xmlns:r="http://schemas.openxmlformats.org/officeDocument/2006/relationships" xmlns:p="http://schemas.openxmlformats.org/presentationml/2006/main">
+  <p:tag name="ID" val="68efc908cb5715304cea89b6"/>
+  <p:tag name="FIGURESLIDEID" val="04b6aa6f-31a0-4c7b-be78-12f520f06f49"/>
+  <p:tag name="SELECTIONIDS" val="397d5702-462a-4767-aec6-4d3220f0f1af"/>
+  <p:tag name="TRANSPARENTBACKGROUND" val="true"/>
+  <p:tag name="VERSION" val="1760545859457"/>
+  <p:tag name="TITLE" val="HIV immune model with time delay"/>
+  <p:tag name="CREATORNAME" val="Alison Hill"/>
+  <p:tag name="DATEINSERTED" val="1760545859599"/>
+  <p:tag name="DPI" val="300"/>
+  <p:tag name="BIOJSON" val="{&quot;id&quot;:&quot;bddf6853-7300-4144-9f56-b62277887ef7&quot;,&quot;objects&quot;:{&quot;397d5702-462a-4767-aec6-4d3220f0f1af&quot;:{&quot;type&quot;:&quot;FIGURE_OBJECT&quot;,&quot;id&quot;:&quot;397d5702-462a-4767-aec6-4d3220f0f1af&quot;,&quot;name&quot;:&quot;HIV (genome 1)&quot;,&quot;relativeTransform&quot;:{&quot;translate&quot;:{&quot;x&quot;:15.320760636884968,&quot;y&quot;:-53.87717738558866},&quot;rotate&quot;:-1.5707963267948966,&quot;skewX&quot;:0,&quot;scale&quot;:{&quot;x&quot;:0.0780115647919339,&quot;y&quot;:0.0780115647919339}},&quot;opacity&quot;:1,&quot;image&quot;:{&quot;url&quot;:&quot;https://icons.biorender.com/biorender/5cf1809048bc020400d6b414/hiv-genome-1.png&quot;,&quot;size&quot;:{&quot;x&quot;:125,&quot;y&quot;:250},&quot;isPremium&quot;:false},&quot;source&quot;:{&quot;id&quot;:&quot;5cf1805348bc020400d6b40b&quot;,&quot;type&quot;:&quot;ASSETS&quot;},&quot;pathStyles&quot;:[{&quot;type&quot;:&quot;FILL&quot;,&quot;fillStyle&quot;:&quot;rgb(0,0,0)&quot;}],&quot;isLocked&quot;:false,&quot;parent&quot;:{&quot;type&quot;:&quot;CHILD&quot;,&quot;parentId&quot;:&quot;04b6aa6f-31a0-4c7b-be78-12f520f06f49&quot;,&quot;order&quot;:&quot;16&quot;}},&quot;04b6aa6f-31a0-4c7b-be78-12f520f06f49&quot;:{&quot;type&quot;:&quot;FIGURE_OBJECT&quot;,&quot;id&quot;:&quot;04b6aa6f-31a0-4c7b-be78-12f520f06f49&quot;,&quot;document&quot;:{&quot;type&quot;:&quot;FIGURE&quot;,&quot;canvasType&quot;:&quot;FIGURE&quot;,&quot;units&quot;:&quot;cm&quot;},&quot;relativeTransform&quot;:{&quot;translate&quot;:{&quot;x&quot;:0,&quot;y&quot;:0},&quot;rotate&quot;:0,&quot;skewX&quot;:0,&quot;scale&quot;:{&quot;x&quot;:1,&quot;y&quot;:1}},&quot;isLocked&quot;:false,&quot;parent&quot;:{&quot;type&quot;:&quot;DOCUMENT&quot;,&quot;parentId&quot;:&quot;bddf6853-7300-4144-9f56-b62277887ef7&quot;,&quot;order&quot;:&quot;5&quot;}},&quot;bddf6853-7300-4144-9f56-b62277887ef7&quot;:{&quot;id&quot;:&quot;bddf6853-7300-4144-9f56-b62277887ef7&quot;,&quot;type&quot;:&quot;FIGURE_OBJECT&quot;,&quot;document&quot;:{&quot;type&quot;:&quot;DOCUMENT_GROUP&quot;,&quot;canvasType&quot;:&quot;FIGURE&quot;,&quot;units&quot;:&quot;cm&quot;}}}}"/>
+</p:tagLst>
+</file>
+
+<file path=ppt/tags/tag101.xml><?xml version="1.0" encoding="utf-8"?>
+<p:tagLst xmlns:a="http://schemas.openxmlformats.org/drawingml/2006/main" xmlns:r="http://schemas.openxmlformats.org/officeDocument/2006/relationships" xmlns:p="http://schemas.openxmlformats.org/presentationml/2006/main">
+  <p:tag name="ID" val="68efc908cb5715304cea89b6"/>
+  <p:tag name="FIGURESLIDEID" val="04b6aa6f-31a0-4c7b-be78-12f520f06f49"/>
+  <p:tag name="SELECTIONIDS" val="d72a4f6d-3b51-4799-a061-8a6a4bfa2302"/>
+  <p:tag name="TRANSPARENTBACKGROUND" val="true"/>
+  <p:tag name="VERSION" val="1760545859457"/>
+  <p:tag name="TITLE" val="HIV immune model with time delay"/>
+  <p:tag name="CREATORNAME" val="Alison Hill"/>
+  <p:tag name="DATEINSERTED" val="1760545859599"/>
+  <p:tag name="DPI" val="300"/>
+  <p:tag name="BIOJSON" val="{&quot;id&quot;:&quot;bddf6853-7300-4144-9f56-b62277887ef7&quot;,&quot;objects&quot;:{&quot;d72a4f6d-3b51-4799-a061-8a6a4bfa2302&quot;:{&quot;type&quot;:&quot;FIGURE_OBJECT&quot;,&quot;id&quot;:&quot;d72a4f6d-3b51-4799-a061-8a6a4bfa2302&quot;,&quot;name&quot;:&quot;Stem cell (hematopoietic)&quot;,&quot;relativeTransform&quot;:{&quot;translate&quot;:{&quot;x&quot;:77.87363087323605,&quot;y&quot;:7.0151904902952325},&quot;rotate&quot;:0,&quot;skewX&quot;:0,&quot;scale&quot;:{&quot;x&quot;:0.0606584820906398,&quot;y&quot;:0.0606584820906398}},&quot;opacity&quot;:1,&quot;image&quot;:{&quot;url&quot;:&quot;https://icons.biorender.com/biorender/5b4df95d4f626900144a414e/20181107171134/image/stem-cell-hematopoietic.png&quot;,&quot;size&quot;:{&quot;x&quot;:493,&quot;y&quot;:494},&quot;isPremium&quot;:false},&quot;source&quot;:{&quot;id&quot;:&quot;5b4df95d4f626900144a414e&quot;,&quot;type&quot;:&quot;ASSETS&quot;},&quot;pathStyles&quot;:[{&quot;type&quot;:&quot;FILL&quot;,&quot;fillStyle&quot;:&quot;rgb(0,0,0)&quot;}],&quot;isLocked&quot;:false,&quot;parent&quot;:{&quot;type&quot;:&quot;CHILD&quot;,&quot;parentId&quot;:&quot;04b6aa6f-31a0-4c7b-be78-12f520f06f49&quot;,&quot;order&quot;:&quot;17&quot;}},&quot;04b6aa6f-31a0-4c7b-be78-12f520f06f49&quot;:{&quot;type&quot;:&quot;FIGURE_OBJECT&quot;,&quot;id&quot;:&quot;04b6aa6f-31a0-4c7b-be78-12f520f06f49&quot;,&quot;document&quot;:{&quot;type&quot;:&quot;FIGURE&quot;,&quot;canvasType&quot;:&quot;FIGURE&quot;,&quot;units&quot;:&quot;cm&quot;},&quot;relativeTransform&quot;:{&quot;translate&quot;:{&quot;x&quot;:0,&quot;y&quot;:0},&quot;rotate&quot;:0,&quot;skewX&quot;:0,&quot;scale&quot;:{&quot;x&quot;:1,&quot;y&quot;:1}},&quot;isLocked&quot;:false,&quot;parent&quot;:{&quot;type&quot;:&quot;DOCUMENT&quot;,&quot;parentId&quot;:&quot;bddf6853-7300-4144-9f56-b62277887ef7&quot;,&quot;order&quot;:&quot;5&quot;}},&quot;bddf6853-7300-4144-9f56-b62277887ef7&quot;:{&quot;id&quot;:&quot;bddf6853-7300-4144-9f56-b62277887ef7&quot;,&quot;type&quot;:&quot;FIGURE_OBJECT&quot;,&quot;document&quot;:{&quot;type&quot;:&quot;DOCUMENT_GROUP&quot;,&quot;canvasType&quot;:&quot;FIGURE&quot;,&quot;units&quot;:&quot;cm&quot;}}}}"/>
+</p:tagLst>
+</file>
+
+<file path=ppt/tags/tag102.xml><?xml version="1.0" encoding="utf-8"?>
+<p:tagLst xmlns:a="http://schemas.openxmlformats.org/drawingml/2006/main" xmlns:r="http://schemas.openxmlformats.org/officeDocument/2006/relationships" xmlns:p="http://schemas.openxmlformats.org/presentationml/2006/main">
+  <p:tag name="ID" val="68efc908cb5715304cea89b6"/>
+  <p:tag name="FIGURESLIDEID" val="04b6aa6f-31a0-4c7b-be78-12f520f06f49"/>
+  <p:tag name="SELECTIONIDS" val="44b6eee6-4c78-479e-9fa2-95b63f15fe6c"/>
+  <p:tag name="TRANSPARENTBACKGROUND" val="true"/>
+  <p:tag name="VERSION" val="1760545859457"/>
+  <p:tag name="TITLE" val="HIV immune model with time delay"/>
+  <p:tag name="CREATORNAME" val="Alison Hill"/>
+  <p:tag name="DATEINSERTED" val="1760545859599"/>
+  <p:tag name="DPI" val="300"/>
+  <p:tag name="BIOJSON" val="{&quot;id&quot;:&quot;bddf6853-7300-4144-9f56-b62277887ef7&quot;,&quot;objects&quot;:{&quot;44b6eee6-4c78-479e-9fa2-95b63f15fe6c&quot;:{&quot;type&quot;:&quot;FIGURE_OBJECT&quot;,&quot;id&quot;:&quot;44b6eee6-4c78-479e-9fa2-95b63f15fe6c&quot;,&quot;relativeTransform&quot;:{&quot;translate&quot;:{&quot;x&quot;:46.07630292229357,&quot;y&quot;:-61.39129445552365},&quot;rotate&quot;:0,&quot;skewX&quot;:0,&quot;scale&quot;:{&quot;x&quot;:1,&quot;y&quot;:1}},&quot;opacity&quot;:1,&quot;path&quot;:{&quot;type&quot;:&quot;POLY_LINE&quot;,&quot;points&quot;:[{&quot;x&quot;:11.420447431298726,&quot;y&quot;:0},{&quot;x&quot;:-11.420447431298726,&quot;y&quot;:0}],&quot;closed&quot;:false},&quot;pathStyles&quot;:[{&quot;type&quot;:&quot;FILL&quot;,&quot;fillStyle&quot;:&quot;transparent&quot;},{&quot;type&quot;:&quot;STROKE&quot;,&quot;strokeStyle&quot;:&quot;#232323&quot;,&quot;lineWidth&quot;:1,&quot;lineJoin&quot;:&quot;round&quot;}],&quot;pathMarkers&quot;:{&quot;markerEnd&quot;:{&quot;type&quot;:&quot;PATH&quot;,&quot;units&quot;:{&quot;type&quot;:&quot;STROKE_WIDTH&quot;,&quot;scale&quot;:0.7},&quot;orient&quot;:{&quot;type&quot;:&quot;CLIPPED_CHORD&quot;},&quot;clipDistance&quot;:4,&quot;name&quot;:&quot;arrow&quot;,&quot;relativeTransform&quot;:{&quot;translate&quot;:{&quot;x&quot;:0,&quot;y&quot;:0},&quot;rotate&quot;:0,&quot;skewX&quot;:0,&quot;scale&quot;:{&quot;x&quot;:1,&quot;y&quot;:1}},&quot;path&quot;:{&quot;type&quot;:&quot;SPLINE&quot;,&quot;spline&quot;:{&quot;points&quot;:[{&quot;x&quot;:0,&quot;y&quot;:0,&quot;isEndPoint&quot;:true},{&quot;x&quot;:-5,&quot;y&quot;:-2.5,&quot;isEndPoint&quot;:true},{&quot;x&quot;:-5,&quot;y&quot;:2.5,&quot;isEndPoint&quot;:true}],&quot;closed&quot;:true}},&quot;pathStyles&quot;:[{&quot;type&quot;:&quot;FILL&quot;,&quot;fillStyle&quot;:&quot;context-stroke-flat&quot;}]}},&quot;isLocked&quot;:false,&quot;parent&quot;:{&quot;type&quot;:&quot;CHILD&quot;,&quot;parentId&quot;:&quot;04b6aa6f-31a0-4c7b-be78-12f520f06f49&quot;,&quot;order&quot;:&quot;22&quot;}},&quot;04b6aa6f-31a0-4c7b-be78-12f520f06f49&quot;:{&quot;type&quot;:&quot;FIGURE_OBJECT&quot;,&quot;id&quot;:&quot;04b6aa6f-31a0-4c7b-be78-12f520f06f49&quot;,&quot;document&quot;:{&quot;type&quot;:&quot;FIGURE&quot;,&quot;canvasType&quot;:&quot;FIGURE&quot;,&quot;units&quot;:&quot;cm&quot;},&quot;relativeTransform&quot;:{&quot;translate&quot;:{&quot;x&quot;:0,&quot;y&quot;:0},&quot;rotate&quot;:0,&quot;skewX&quot;:0,&quot;scale&quot;:{&quot;x&quot;:1,&quot;y&quot;:1}},&quot;isLocked&quot;:false,&quot;parent&quot;:{&quot;type&quot;:&quot;DOCUMENT&quot;,&quot;parentId&quot;:&quot;bddf6853-7300-4144-9f56-b62277887ef7&quot;,&quot;order&quot;:&quot;5&quot;}},&quot;bddf6853-7300-4144-9f56-b62277887ef7&quot;:{&quot;id&quot;:&quot;bddf6853-7300-4144-9f56-b62277887ef7&quot;,&quot;type&quot;:&quot;FIGURE_OBJECT&quot;,&quot;document&quot;:{&quot;type&quot;:&quot;DOCUMENT_GROUP&quot;,&quot;canvasType&quot;:&quot;FIGURE&quot;,&quot;units&quot;:&quot;cm&quot;}}}}"/>
+</p:tagLst>
+</file>
+
+<file path=ppt/tags/tag103.xml><?xml version="1.0" encoding="utf-8"?>
+<p:tagLst xmlns:a="http://schemas.openxmlformats.org/drawingml/2006/main" xmlns:r="http://schemas.openxmlformats.org/officeDocument/2006/relationships" xmlns:p="http://schemas.openxmlformats.org/presentationml/2006/main">
+  <p:tag name="ID" val="68efc908cb5715304cea89b6"/>
+  <p:tag name="FIGURESLIDEID" val="04b6aa6f-31a0-4c7b-be78-12f520f06f49"/>
+  <p:tag name="SELECTIONIDS" val="6e7a1eda-a85f-4386-8a25-3f58e0fa156a"/>
+  <p:tag name="TRANSPARENTBACKGROUND" val="true"/>
+  <p:tag name="VERSION" val="1760545859457"/>
+  <p:tag name="TITLE" val="HIV immune model with time delay"/>
+  <p:tag name="CREATORNAME" val="Alison Hill"/>
+  <p:tag name="DATEINSERTED" val="1760545859599"/>
+  <p:tag name="DPI" val="300"/>
+  <p:tag name="BIOJSON" val="{&quot;id&quot;:&quot;bddf6853-7300-4144-9f56-b62277887ef7&quot;,&quot;objects&quot;:{&quot;6e7a1eda-a85f-4386-8a25-3f58e0fa156a&quot;:{&quot;type&quot;:&quot;FIGURE_OBJECT&quot;,&quot;id&quot;:&quot;6e7a1eda-a85f-4386-8a25-3f58e0fa156a&quot;,&quot;relativeTransform&quot;:{&quot;translate&quot;:{&quot;x&quot;:103.82182715349346,&quot;y&quot;:6.502499999999827},&quot;rotate&quot;:0,&quot;skewX&quot;:0,&quot;scale&quot;:{&quot;x&quot;:1,&quot;y&quot;:1}},&quot;opacity&quot;:1,&quot;path&quot;:{&quot;type&quot;:&quot;POLY_LINE&quot;,&quot;points&quot;:[{&quot;x&quot;:7.968366514805211,&quot;y&quot;:0},{&quot;x&quot;:-7.968366514804984,&quot;y&quot;:0}],&quot;closed&quot;:false},&quot;pathStyles&quot;:[{&quot;type&quot;:&quot;FILL&quot;,&quot;fillStyle&quot;:&quot;transparent&quot;},{&quot;type&quot;:&quot;STROKE&quot;,&quot;strokeStyle&quot;:&quot;#232323&quot;,&quot;lineWidth&quot;:1.1284461152882206,&quot;lineJoin&quot;:&quot;round&quot;}],&quot;pathMarkers&quot;:{&quot;markerEnd&quot;:{&quot;type&quot;:&quot;PATH&quot;,&quot;units&quot;:{&quot;type&quot;:&quot;STROKE_WIDTH&quot;,&quot;scale&quot;:0.7},&quot;orient&quot;:{&quot;type&quot;:&quot;CLIPPED_CHORD&quot;},&quot;clipDistance&quot;:4,&quot;name&quot;:&quot;arrow&quot;,&quot;relativeTransform&quot;:{&quot;translate&quot;:{&quot;x&quot;:0,&quot;y&quot;:0},&quot;rotate&quot;:0,&quot;skewX&quot;:0,&quot;scale&quot;:{&quot;x&quot;:1,&quot;y&quot;:1}},&quot;path&quot;:{&quot;type&quot;:&quot;SPLINE&quot;,&quot;spline&quot;:{&quot;points&quot;:[{&quot;x&quot;:0,&quot;y&quot;:0,&quot;isEndPoint&quot;:true},{&quot;x&quot;:-5,&quot;y&quot;:-2.5,&quot;isEndPoint&quot;:true},{&quot;x&quot;:-5,&quot;y&quot;:2.5,&quot;isEndPoint&quot;:true}],&quot;closed&quot;:true}},&quot;pathStyles&quot;:[{&quot;type&quot;:&quot;FILL&quot;,&quot;fillStyle&quot;:&quot;context-stroke-flat&quot;}]}},&quot;isLocked&quot;:false,&quot;parent&quot;:{&quot;type&quot;:&quot;CHILD&quot;,&quot;parentId&quot;:&quot;04b6aa6f-31a0-4c7b-be78-12f520f06f49&quot;,&quot;order&quot;:&quot;25&quot;}},&quot;04b6aa6f-31a0-4c7b-be78-12f520f06f49&quot;:{&quot;type&quot;:&quot;FIGURE_OBJECT&quot;,&quot;id&quot;:&quot;04b6aa6f-31a0-4c7b-be78-12f520f06f49&quot;,&quot;document&quot;:{&quot;type&quot;:&quot;FIGURE&quot;,&quot;canvasType&quot;:&quot;FIGURE&quot;,&quot;units&quot;:&quot;cm&quot;},&quot;relativeTransform&quot;:{&quot;translate&quot;:{&quot;x&quot;:0,&quot;y&quot;:0},&quot;rotate&quot;:0,&quot;skewX&quot;:0,&quot;scale&quot;:{&quot;x&quot;:1,&quot;y&quot;:1}},&quot;isLocked&quot;:false,&quot;parent&quot;:{&quot;type&quot;:&quot;DOCUMENT&quot;,&quot;parentId&quot;:&quot;bddf6853-7300-4144-9f56-b62277887ef7&quot;,&quot;order&quot;:&quot;5&quot;}},&quot;bddf6853-7300-4144-9f56-b62277887ef7&quot;:{&quot;id&quot;:&quot;bddf6853-7300-4144-9f56-b62277887ef7&quot;,&quot;type&quot;:&quot;FIGURE_OBJECT&quot;,&quot;document&quot;:{&quot;type&quot;:&quot;DOCUMENT_GROUP&quot;,&quot;canvasType&quot;:&quot;FIGURE&quot;,&quot;units&quot;:&quot;cm&quot;}}}}"/>
+</p:tagLst>
+</file>
+
+<file path=ppt/tags/tag104.xml><?xml version="1.0" encoding="utf-8"?>
+<p:tagLst xmlns:a="http://schemas.openxmlformats.org/drawingml/2006/main" xmlns:r="http://schemas.openxmlformats.org/officeDocument/2006/relationships" xmlns:p="http://schemas.openxmlformats.org/presentationml/2006/main">
+  <p:tag name="ID" val="68efc908cb5715304cea89b6"/>
+  <p:tag name="FIGURESLIDEID" val="04b6aa6f-31a0-4c7b-be78-12f520f06f49"/>
+  <p:tag name="SELECTIONIDS" val="e10aaeea-391c-4eaf-ae99-1e87398b6583"/>
+  <p:tag name="TRANSPARENTBACKGROUND" val="true"/>
+  <p:tag name="VERSION" val="1760545859457"/>
+  <p:tag name="TITLE" val="HIV immune model with time delay"/>
+  <p:tag name="CREATORNAME" val="Alison Hill"/>
+  <p:tag name="DATEINSERTED" val="1760545859599"/>
+  <p:tag name="DPI" val="300"/>
+  <p:tag name="BIOJSON" val="{&quot;id&quot;:&quot;bddf6853-7300-4144-9f56-b62277887ef7&quot;,&quot;objects&quot;:{&quot;e10aaeea-391c-4eaf-ae99-1e87398b6583&quot;:{&quot;type&quot;:&quot;FIGURE_OBJECT&quot;,&quot;id&quot;:&quot;e10aaeea-391c-4eaf-ae99-1e87398b6583&quot;,&quot;relativeTransform&quot;:{&quot;translate&quot;:{&quot;x&quot;:-68.62931503789353,&quot;y&quot;:-28.160999999999945},&quot;rotate&quot;:0,&quot;skewX&quot;:0,&quot;scale&quot;:{&quot;x&quot;:1,&quot;y&quot;:1}},&quot;opacity&quot;:1,&quot;path&quot;:{&quot;type&quot;:&quot;POLY_LINE&quot;,&quot;points&quot;:[{&quot;x&quot;:0,&quot;y&quot;:-5.246052677750754},{&quot;x&quot;:0,&quot;y&quot;:5.246052677750754}],&quot;closed&quot;:false},&quot;pathStyles&quot;:[{&quot;type&quot;:&quot;FILL&quot;,&quot;fillStyle&quot;:&quot;transparent&quot;},{&quot;type&quot;:&quot;STROKE&quot;,&quot;strokeStyle&quot;:&quot;#232323&quot;,&quot;lineWidth&quot;:1.0027568922305852,&quot;lineJoin&quot;:&quot;round&quot;}],&quot;pathMarkers&quot;:{&quot;markerEnd&quot;:{&quot;type&quot;:&quot;PATH&quot;,&quot;units&quot;:{&quot;type&quot;:&quot;STROKE_WIDTH&quot;,&quot;scale&quot;:0.7},&quot;orient&quot;:{&quot;type&quot;:&quot;CLIPPED_CHORD&quot;},&quot;clipDistance&quot;:4,&quot;name&quot;:&quot;arrow&quot;,&quot;relativeTransform&quot;:{&quot;translate&quot;:{&quot;x&quot;:0,&quot;y&quot;:0},&quot;rotate&quot;:0,&quot;skewX&quot;:0,&quot;scale&quot;:{&quot;x&quot;:1,&quot;y&quot;:1}},&quot;path&quot;:{&quot;type&quot;:&quot;SPLINE&quot;,&quot;spline&quot;:{&quot;points&quot;:[{&quot;x&quot;:0,&quot;y&quot;:0,&quot;isEndPoint&quot;:true},{&quot;x&quot;:-5,&quot;y&quot;:-2.5,&quot;isEndPoint&quot;:true},{&quot;x&quot;:-5,&quot;y&quot;:2.5,&quot;isEndPoint&quot;:true}],&quot;closed&quot;:true}},&quot;pathStyles&quot;:[{&quot;type&quot;:&quot;FILL&quot;,&quot;fillStyle&quot;:&quot;context-stroke-flat&quot;}]}},&quot;isLocked&quot;:false,&quot;parent&quot;:{&quot;type&quot;:&quot;CHILD&quot;,&quot;parentId&quot;:&quot;04b6aa6f-31a0-4c7b-be78-12f520f06f49&quot;,&quot;order&quot;:&quot;26&quot;}},&quot;04b6aa6f-31a0-4c7b-be78-12f520f06f49&quot;:{&quot;type&quot;:&quot;FIGURE_OBJECT&quot;,&quot;id&quot;:&quot;04b6aa6f-31a0-4c7b-be78-12f520f06f49&quot;,&quot;document&quot;:{&quot;type&quot;:&quot;FIGURE&quot;,&quot;canvasType&quot;:&quot;FIGURE&quot;,&quot;units&quot;:&quot;cm&quot;},&quot;relativeTransform&quot;:{&quot;translate&quot;:{&quot;x&quot;:0,&quot;y&quot;:0},&quot;rotate&quot;:0,&quot;skewX&quot;:0,&quot;scale&quot;:{&quot;x&quot;:1,&quot;y&quot;:1}},&quot;isLocked&quot;:false,&quot;parent&quot;:{&quot;type&quot;:&quot;DOCUMENT&quot;,&quot;parentId&quot;:&quot;bddf6853-7300-4144-9f56-b62277887ef7&quot;,&quot;order&quot;:&quot;5&quot;}},&quot;bddf6853-7300-4144-9f56-b62277887ef7&quot;:{&quot;id&quot;:&quot;bddf6853-7300-4144-9f56-b62277887ef7&quot;,&quot;type&quot;:&quot;FIGURE_OBJECT&quot;,&quot;document&quot;:{&quot;type&quot;:&quot;DOCUMENT_GROUP&quot;,&quot;canvasType&quot;:&quot;FIGURE&quot;,&quot;units&quot;:&quot;cm&quot;}}}}"/>
+</p:tagLst>
+</file>
+
+<file path=ppt/tags/tag105.xml><?xml version="1.0" encoding="utf-8"?>
+<p:tagLst xmlns:a="http://schemas.openxmlformats.org/drawingml/2006/main" xmlns:r="http://schemas.openxmlformats.org/officeDocument/2006/relationships" xmlns:p="http://schemas.openxmlformats.org/presentationml/2006/main">
+  <p:tag name="ID" val="68efc908cb5715304cea89b6"/>
+  <p:tag name="FIGURESLIDEID" val="04b6aa6f-31a0-4c7b-be78-12f520f06f49"/>
+  <p:tag name="SELECTIONIDS" val="51d1e211-b335-4517-a829-1ea250a029a0"/>
+  <p:tag name="TRANSPARENTBACKGROUND" val="true"/>
+  <p:tag name="VERSION" val="1760545859457"/>
+  <p:tag name="TITLE" val="HIV immune model with time delay"/>
+  <p:tag name="CREATORNAME" val="Alison Hill"/>
+  <p:tag name="DATEINSERTED" val="1760545859599"/>
+  <p:tag name="DPI" val="300"/>
+  <p:tag name="BIOJSON" val="{&quot;id&quot;:&quot;bddf6853-7300-4144-9f56-b62277887ef7&quot;,&quot;objects&quot;:{&quot;51d1e211-b335-4517-a829-1ea250a029a0&quot;:{&quot;type&quot;:&quot;FIGURE_OBJECT&quot;,&quot;id&quot;:&quot;51d1e211-b335-4517-a829-1ea250a029a0&quot;,&quot;relativeTransform&quot;:{&quot;translate&quot;:{&quot;x&quot;:14.483315037893446,&quot;y&quot;:-28.160999999999945},&quot;rotate&quot;:0,&quot;skewX&quot;:0,&quot;scale&quot;:{&quot;x&quot;:1,&quot;y&quot;:1}},&quot;opacity&quot;:1,&quot;path&quot;:{&quot;type&quot;:&quot;POLY_LINE&quot;,&quot;points&quot;:[{&quot;x&quot;:0,&quot;y&quot;:-5.246052677750754},{&quot;x&quot;:0,&quot;y&quot;:5.246052677750754}],&quot;closed&quot;:false},&quot;pathStyles&quot;:[{&quot;type&quot;:&quot;FILL&quot;,&quot;fillStyle&quot;:&quot;transparent&quot;},{&quot;type&quot;:&quot;STROKE&quot;,&quot;strokeStyle&quot;:&quot;#232323&quot;,&quot;lineWidth&quot;:1.0027568922305852,&quot;lineJoin&quot;:&quot;round&quot;}],&quot;pathMarkers&quot;:{&quot;markerEnd&quot;:{&quot;type&quot;:&quot;PATH&quot;,&quot;units&quot;:{&quot;type&quot;:&quot;STROKE_WIDTH&quot;,&quot;scale&quot;:0.7},&quot;orient&quot;:{&quot;type&quot;:&quot;CLIPPED_CHORD&quot;},&quot;clipDistance&quot;:4,&quot;name&quot;:&quot;arrow&quot;,&quot;relativeTransform&quot;:{&quot;translate&quot;:{&quot;x&quot;:0,&quot;y&quot;:0},&quot;rotate&quot;:0,&quot;skewX&quot;:0,&quot;scale&quot;:{&quot;x&quot;:1,&quot;y&quot;:1}},&quot;path&quot;:{&quot;type&quot;:&quot;SPLINE&quot;,&quot;spline&quot;:{&quot;points&quot;:[{&quot;x&quot;:0,&quot;y&quot;:0,&quot;isEndPoint&quot;:true},{&quot;x&quot;:-5,&quot;y&quot;:-2.5,&quot;isEndPoint&quot;:true},{&quot;x&quot;:-5,&quot;y&quot;:2.5,&quot;isEndPoint&quot;:true}],&quot;closed&quot;:true}},&quot;pathStyles&quot;:[{&quot;type&quot;:&quot;FILL&quot;,&quot;fillStyle&quot;:&quot;context-stroke-flat&quot;}]}},&quot;isLocked&quot;:false,&quot;parent&quot;:{&quot;type&quot;:&quot;CHILD&quot;,&quot;parentId&quot;:&quot;04b6aa6f-31a0-4c7b-be78-12f520f06f49&quot;,&quot;order&quot;:&quot;27&quot;}},&quot;04b6aa6f-31a0-4c7b-be78-12f520f06f49&quot;:{&quot;type&quot;:&quot;FIGURE_OBJECT&quot;,&quot;id&quot;:&quot;04b6aa6f-31a0-4c7b-be78-12f520f06f49&quot;,&quot;document&quot;:{&quot;type&quot;:&quot;FIGURE&quot;,&quot;canvasType&quot;:&quot;FIGURE&quot;,&quot;units&quot;:&quot;cm&quot;},&quot;relativeTransform&quot;:{&quot;translate&quot;:{&quot;x&quot;:0,&quot;y&quot;:0},&quot;rotate&quot;:0,&quot;skewX&quot;:0,&quot;scale&quot;:{&quot;x&quot;:1,&quot;y&quot;:1}},&quot;isLocked&quot;:false,&quot;parent&quot;:{&quot;type&quot;:&quot;DOCUMENT&quot;,&quot;parentId&quot;:&quot;bddf6853-7300-4144-9f56-b62277887ef7&quot;,&quot;order&quot;:&quot;5&quot;}},&quot;bddf6853-7300-4144-9f56-b62277887ef7&quot;:{&quot;id&quot;:&quot;bddf6853-7300-4144-9f56-b62277887ef7&quot;,&quot;type&quot;:&quot;FIGURE_OBJECT&quot;,&quot;document&quot;:{&quot;type&quot;:&quot;DOCUMENT_GROUP&quot;,&quot;canvasType&quot;:&quot;FIGURE&quot;,&quot;units&quot;:&quot;cm&quot;}}}}"/>
+</p:tagLst>
+</file>
+
+<file path=ppt/tags/tag106.xml><?xml version="1.0" encoding="utf-8"?>
+<p:tagLst xmlns:a="http://schemas.openxmlformats.org/drawingml/2006/main" xmlns:r="http://schemas.openxmlformats.org/officeDocument/2006/relationships" xmlns:p="http://schemas.openxmlformats.org/presentationml/2006/main">
+  <p:tag name="ID" val="68efc908cb5715304cea89b6"/>
+  <p:tag name="FIGURESLIDEID" val="04b6aa6f-31a0-4c7b-be78-12f520f06f49"/>
+  <p:tag name="SELECTIONIDS" val="810e58f3-df9f-40c1-b248-f0b043409964"/>
+  <p:tag name="TRANSPARENTBACKGROUND" val="true"/>
+  <p:tag name="VERSION" val="1760545859457"/>
+  <p:tag name="TITLE" val="HIV immune model with time delay"/>
+  <p:tag name="CREATORNAME" val="Alison Hill"/>
+  <p:tag name="DATEINSERTED" val="1760545859599"/>
+  <p:tag name="DPI" val="300"/>
+  <p:tag name="BIOJSON" val="{&quot;id&quot;:&quot;bddf6853-7300-4144-9f56-b62277887ef7&quot;,&quot;objects&quot;:{&quot;810e58f3-df9f-40c1-b248-f0b043409964&quot;:{&quot;type&quot;:&quot;FIGURE_OBJECT&quot;,&quot;id&quot;:&quot;810e58f3-df9f-40c1-b248-f0b043409964&quot;,&quot;relativeTransform&quot;:{&quot;translate&quot;:{&quot;x&quot;:77.87331503789356,&quot;y&quot;:28.73199999999997},&quot;rotate&quot;:0,&quot;skewX&quot;:0,&quot;scale&quot;:{&quot;x&quot;:1,&quot;y&quot;:1}},&quot;opacity&quot;:1,&quot;path&quot;:{&quot;type&quot;:&quot;POLY_LINE&quot;,&quot;points&quot;:[{&quot;x&quot;:0,&quot;y&quot;:-5.246052677750754},{&quot;x&quot;:0,&quot;y&quot;:5.246052677750754}],&quot;closed&quot;:false},&quot;pathStyles&quot;:[{&quot;type&quot;:&quot;FILL&quot;,&quot;fillStyle&quot;:&quot;transparent&quot;},{&quot;type&quot;:&quot;STROKE&quot;,&quot;strokeStyle&quot;:&quot;#232323&quot;,&quot;lineWidth&quot;:1.0027568922305852,&quot;lineJoin&quot;:&quot;round&quot;}],&quot;pathMarkers&quot;:{&quot;markerEnd&quot;:{&quot;type&quot;:&quot;PATH&quot;,&quot;units&quot;:{&quot;type&quot;:&quot;STROKE_WIDTH&quot;,&quot;scale&quot;:0.7},&quot;orient&quot;:{&quot;type&quot;:&quot;CLIPPED_CHORD&quot;},&quot;clipDistance&quot;:4,&quot;name&quot;:&quot;arrow&quot;,&quot;relativeTransform&quot;:{&quot;translate&quot;:{&quot;x&quot;:0,&quot;y&quot;:0},&quot;rotate&quot;:0,&quot;skewX&quot;:0,&quot;scale&quot;:{&quot;x&quot;:1,&quot;y&quot;:1}},&quot;path&quot;:{&quot;type&quot;:&quot;SPLINE&quot;,&quot;spline&quot;:{&quot;points&quot;:[{&quot;x&quot;:0,&quot;y&quot;:0,&quot;isEndPoint&quot;:true},{&quot;x&quot;:-5,&quot;y&quot;:-2.5,&quot;isEndPoint&quot;:true},{&quot;x&quot;:-5,&quot;y&quot;:2.5,&quot;isEndPoint&quot;:true}],&quot;closed&quot;:true}},&quot;pathStyles&quot;:[{&quot;type&quot;:&quot;FILL&quot;,&quot;fillStyle&quot;:&quot;context-stroke-flat&quot;}]}},&quot;isLocked&quot;:false,&quot;parent&quot;:{&quot;type&quot;:&quot;CHILD&quot;,&quot;parentId&quot;:&quot;04b6aa6f-31a0-4c7b-be78-12f520f06f49&quot;,&quot;order&quot;:&quot;3&quot;}},&quot;04b6aa6f-31a0-4c7b-be78-12f520f06f49&quot;:{&quot;type&quot;:&quot;FIGURE_OBJECT&quot;,&quot;id&quot;:&quot;04b6aa6f-31a0-4c7b-be78-12f520f06f49&quot;,&quot;document&quot;:{&quot;type&quot;:&quot;FIGURE&quot;,&quot;canvasType&quot;:&quot;FIGURE&quot;,&quot;units&quot;:&quot;cm&quot;},&quot;relativeTransform&quot;:{&quot;translate&quot;:{&quot;x&quot;:0,&quot;y&quot;:0},&quot;rotate&quot;:0,&quot;skewX&quot;:0,&quot;scale&quot;:{&quot;x&quot;:1,&quot;y&quot;:1}},&quot;isLocked&quot;:false,&quot;parent&quot;:{&quot;type&quot;:&quot;DOCUMENT&quot;,&quot;parentId&quot;:&quot;bddf6853-7300-4144-9f56-b62277887ef7&quot;,&quot;order&quot;:&quot;5&quot;}},&quot;bddf6853-7300-4144-9f56-b62277887ef7&quot;:{&quot;id&quot;:&quot;bddf6853-7300-4144-9f56-b62277887ef7&quot;,&quot;type&quot;:&quot;FIGURE_OBJECT&quot;,&quot;document&quot;:{&quot;type&quot;:&quot;DOCUMENT_GROUP&quot;,&quot;canvasType&quot;:&quot;FIGURE&quot;,&quot;units&quot;:&quot;cm&quot;}}}}"/>
+</p:tagLst>
+</file>
+
+<file path=ppt/tags/tag107.xml><?xml version="1.0" encoding="utf-8"?>
+<p:tagLst xmlns:a="http://schemas.openxmlformats.org/drawingml/2006/main" xmlns:r="http://schemas.openxmlformats.org/officeDocument/2006/relationships" xmlns:p="http://schemas.openxmlformats.org/presentationml/2006/main">
+  <p:tag name="ID" val="68efc908cb5715304cea89b6"/>
+  <p:tag name="FIGURESLIDEID" val="04b6aa6f-31a0-4c7b-be78-12f520f06f49"/>
+  <p:tag name="SELECTIONIDS" val="f48dc465-06f9-482e-b6ae-13c34906d07d"/>
+  <p:tag name="TRANSPARENTBACKGROUND" val="true"/>
+  <p:tag name="VERSION" val="1760545859457"/>
+  <p:tag name="TITLE" val="HIV immune model with time delay"/>
+  <p:tag name="CREATORNAME" val="Alison Hill"/>
+  <p:tag name="DATEINSERTED" val="1760545859599"/>
+  <p:tag name="DPI" val="300"/>
+  <p:tag name="BIOJSON" val="{&quot;id&quot;:&quot;bddf6853-7300-4144-9f56-b62277887ef7&quot;,&quot;objects&quot;:{&quot;f48dc465-06f9-482e-b6ae-13c34906d07d&quot;:{&quot;type&quot;:&quot;FIGURE_OBJECT&quot;,&quot;id&quot;:&quot;f48dc465-06f9-482e-b6ae-13c34906d07d&quot;,&quot;relativeTransform&quot;:{&quot;translate&quot;:{&quot;x&quot;:14.483315037893446,&quot;y&quot;:37},&quot;rotate&quot;:0,&quot;skewX&quot;:0,&quot;scale&quot;:{&quot;x&quot;:1,&quot;y&quot;:1}},&quot;opacity&quot;:1,&quot;path&quot;:{&quot;type&quot;:&quot;POLY_LINE&quot;,&quot;points&quot;:[{&quot;x&quot;:0,&quot;y&quot;:-5.246052677750754},{&quot;x&quot;:0,&quot;y&quot;:5.246052677750754}],&quot;closed&quot;:false},&quot;pathStyles&quot;:[{&quot;type&quot;:&quot;FILL&quot;,&quot;fillStyle&quot;:&quot;transparent&quot;},{&quot;type&quot;:&quot;STROKE&quot;,&quot;strokeStyle&quot;:&quot;#232323&quot;,&quot;lineWidth&quot;:1.0027568922305852,&quot;lineJoin&quot;:&quot;round&quot;}],&quot;pathMarkers&quot;:{&quot;markerEnd&quot;:{&quot;type&quot;:&quot;PATH&quot;,&quot;units&quot;:{&quot;type&quot;:&quot;STROKE_WIDTH&quot;,&quot;scale&quot;:0.7},&quot;orient&quot;:{&quot;type&quot;:&quot;CLIPPED_CHORD&quot;},&quot;clipDistance&quot;:4,&quot;name&quot;:&quot;arrow&quot;,&quot;relativeTransform&quot;:{&quot;translate&quot;:{&quot;x&quot;:0,&quot;y&quot;:0},&quot;rotate&quot;:0,&quot;skewX&quot;:0,&quot;scale&quot;:{&quot;x&quot;:1,&quot;y&quot;:1}},&quot;path&quot;:{&quot;type&quot;:&quot;SPLINE&quot;,&quot;spline&quot;:{&quot;points&quot;:[{&quot;x&quot;:0,&quot;y&quot;:0,&quot;isEndPoint&quot;:true},{&quot;x&quot;:-5,&quot;y&quot;:-2.5,&quot;isEndPoint&quot;:true},{&quot;x&quot;:-5,&quot;y&quot;:2.5,&quot;isEndPoint&quot;:true}],&quot;closed&quot;:true}},&quot;pathStyles&quot;:[{&quot;type&quot;:&quot;FILL&quot;,&quot;fillStyle&quot;:&quot;context-stroke-flat&quot;}]}},&quot;isLocked&quot;:false,&quot;parent&quot;:{&quot;type&quot;:&quot;CHILD&quot;,&quot;parentId&quot;:&quot;04b6aa6f-31a0-4c7b-be78-12f520f06f49&quot;,&quot;order&quot;:&quot;32&quot;}},&quot;04b6aa6f-31a0-4c7b-be78-12f520f06f49&quot;:{&quot;type&quot;:&quot;FIGURE_OBJECT&quot;,&quot;id&quot;:&quot;04b6aa6f-31a0-4c7b-be78-12f520f06f49&quot;,&quot;document&quot;:{&quot;type&quot;:&quot;FIGURE&quot;,&quot;canvasType&quot;:&quot;FIGURE&quot;,&quot;units&quot;:&quot;cm&quot;},&quot;relativeTransform&quot;:{&quot;translate&quot;:{&quot;x&quot;:0,&quot;y&quot;:0},&quot;rotate&quot;:0,&quot;skewX&quot;:0,&quot;scale&quot;:{&quot;x&quot;:1,&quot;y&quot;:1}},&quot;isLocked&quot;:false,&quot;parent&quot;:{&quot;type&quot;:&quot;DOCUMENT&quot;,&quot;parentId&quot;:&quot;bddf6853-7300-4144-9f56-b62277887ef7&quot;,&quot;order&quot;:&quot;5&quot;}},&quot;bddf6853-7300-4144-9f56-b62277887ef7&quot;:{&quot;id&quot;:&quot;bddf6853-7300-4144-9f56-b62277887ef7&quot;,&quot;type&quot;:&quot;FIGURE_OBJECT&quot;,&quot;document&quot;:{&quot;type&quot;:&quot;DOCUMENT_GROUP&quot;,&quot;canvasType&quot;:&quot;FIGURE&quot;,&quot;units&quot;:&quot;cm&quot;}}}}"/>
+</p:tagLst>
+</file>
+
+<file path=ppt/tags/tag108.xml><?xml version="1.0" encoding="utf-8"?>
+<p:tagLst xmlns:a="http://schemas.openxmlformats.org/drawingml/2006/main" xmlns:r="http://schemas.openxmlformats.org/officeDocument/2006/relationships" xmlns:p="http://schemas.openxmlformats.org/presentationml/2006/main">
+  <p:tag name="ID" val="68efc908cb5715304cea89b6"/>
+  <p:tag name="FIGURESLIDEID" val="04b6aa6f-31a0-4c7b-be78-12f520f06f49"/>
+  <p:tag name="SELECTIONIDS" val="a6a8e401-3f92-46f0-a5db-9ce7e0fe1e7c"/>
+  <p:tag name="TRANSPARENTBACKGROUND" val="true"/>
+  <p:tag name="VERSION" val="1760545859457"/>
+  <p:tag name="TITLE" val="HIV immune model with time delay"/>
+  <p:tag name="CREATORNAME" val="Alison Hill"/>
+  <p:tag name="DATEINSERTED" val="1760545859599"/>
+  <p:tag name="DPI" val="300"/>
+  <p:tag name="BIOJSON" val="{&quot;id&quot;:&quot;bddf6853-7300-4144-9f56-b62277887ef7&quot;,&quot;objects&quot;:{&quot;a6a8e401-3f92-46f0-a5db-9ce7e0fe1e7c&quot;:{&quot;type&quot;:&quot;FIGURE_OBJECT&quot;,&quot;id&quot;:&quot;a6a8e401-3f92-46f0-a5db-9ce7e0fe1e7c&quot;,&quot;name&quot;:&quot;HIV 2&quot;,&quot;relativeTransform&quot;:{&quot;translate&quot;:{&quot;x&quot;:-27.857555571061344,&quot;y&quot;:-89.848366215655},&quot;rotate&quot;:0,&quot;skewX&quot;:0,&quot;scale&quot;:{&quot;x&quot;:1,&quot;y&quot;:1}},&quot;opacity&quot;:1,&quot;source&quot;:{&quot;type&quot;:&quot;ASSETS&quot;},&quot;pathStyles&quot;:[{&quot;type&quot;:&quot;FILL&quot;,&quot;fillStyle&quot;:&quot;rgb(0,0,0)&quot;}],&quot;isLocked&quot;:false,&quot;parent&quot;:{&quot;type&quot;:&quot;CHILD&quot;,&quot;parentId&quot;:&quot;04b6aa6f-31a0-4c7b-be78-12f520f06f49&quot;,&quot;order&quot;:&quot;4&quot;}},&quot;9983c715-e2f5-47e3-8a33-f3fa929a0f68&quot;:{&quot;type&quot;:&quot;FIGURE_OBJECT&quot;,&quot;id&quot;:&quot;9983c715-e2f5-47e3-8a33-f3fa929a0f68&quot;,&quot;relativeTransform&quot;:{&quot;translate&quot;:{&quot;x&quot;:-0.11244456019253679,&quot;y&quot;:-0.13634843511258854},&quot;rotate&quot;:0,&quot;skewX&quot;:0,&quot;scale&quot;:{&quot;x&quot;:1,&quot;y&quot;:1}},&quot;opacity&quot;:1,&quot;path&quot;:{&quot;type&quot;:&quot;ELLIPSE&quot;,&quot;size&quot;:{&quot;x&quot;:14.974819511426444,&quot;y&quot;:14.974819511426444}},&quot;pathStyles&quot;:[{&quot;type&quot;:&quot;FILL&quot;,&quot;fillStyle&quot;:&quot;rgba(255,235,235,1)&quot;},{&quot;type&quot;:&quot;STROKE&quot;,&quot;strokeStyle&quot;:&quot;transparent&quot;,&quot;lineWidth&quot;:0,&quot;lineJoin&quot;:&quot;round&quot;}],&quot;isLocked&quot;:false,&quot;parent&quot;:{&quot;type&quot;:&quot;CHILD&quot;,&quot;parentId&quot;:&quot;a6a8e401-3f92-46f0-a5db-9ce7e0fe1e7c&quot;,&quot;order&quot;:&quot;05&quot;}},&quot;d0fd1ede-3a79-4c0d-ae0e-3d0b638f4293&quot;:{&quot;type&quot;:&quot;FIGURE_OBJECT&quot;,&quot;id&quot;:&quot;d0fd1ede-3a79-4c0d-ae0e-3d0b638f4293&quot;,&quot;name&quot;:&quot;Viral envelope 2&quot;,&quot;relativeTransform&quot;:{&quot;translate&quot;:{&quot;x&quot;:0.030165332107646492,&quot;y&quot;:-0.05406920702789009},&quot;rotate&quot;:0,&quot;skewX&quot;:0,&quot;scale&quot;:{&quot;x&quot;:0.045821361887397,&quot;y&quot;:0.045821361887397}},&quot;opacity&quot;:1,&quot;image&quot;:{&quot;url&quot;:&quot;https://icons.biorender.com/biorender/5d3f050e4d6c910004dc43b0/viral-envelope-2.png&quot;,&quot;size&quot;:{&quot;x&quot;:354,&quot;y&quot;:354},&quot;isPremium&quot;:false},&quot;source&quot;:{&quot;id&quot;:&quot;5a5fe6b379d76e0014432c83&quot;,&quot;type&quot;:&quot;ASSETS&quot;},&quot;pathStyles&quot;:[{&quot;type&quot;:&quot;FILL&quot;,&quot;fillStyle&quot;:&quot;rgb(0,0,0)&quot;}],&quot;isLocked&quot;:false,&quot;parent&quot;:{&quot;type&quot;:&quot;CHILD&quot;,&quot;parentId&quot;:&quot;a6a8e401-3f92-46f0-a5db-9ce7e0fe1e7c&quot;,&quot;order&quot;:&quot;1&quot;}},&quot;7f1cc686-e967-416b-9b44-2d3f7c37e122&quot;:{&quot;type&quot;:&quot;FIGURE_OBJECT&quot;,&quot;id&quot;:&quot;7f1cc686-e967-416b-9b44-2d3f7c37e122&quot;,&quot;name&quot;:&quot;Viral glycoprotein (gp120-gp41)&quot;,&quot;relativeTransform&quot;:{&quot;translate&quot;:{&quot;x&quot;:0.05536033412986274,&quot;y&quot;:-8.748389686416456},&quot;rotate&quot;:0,&quot;skewX&quot;:0,&quot;scale&quot;:{&quot;x&quot;:0.0111955535172267,&quot;y&quot;:0.0111955535172267}},&quot;opacity&quot;:1,&quot;image&quot;:{&quot;url&quot;:&quot;https://icons.biorender.com/biorender/5a5fae0079d76e0014432c70/viral-glycoprotein-gp120-gp41.png&quot;,&quot;size&quot;:{&quot;x&quot;:217,&quot;y&quot;:340},&quot;isPremium&quot;:false},&quot;source&quot;:{&quot;id&quot;:&quot;5a5fadde79d76e0014432c64&quot;,&quot;type&quot;:&quot;ASSETS&quot;},&quot;pathStyles&quot;:[{&quot;type&quot;:&quot;FILL&quot;,&quot;fillStyle&quot;:&quot;rgb(0,0,0)&quot;}],&quot;isLocked&quot;:false,&quot;parent&quot;:{&quot;type&quot;:&quot;CHILD&quot;,&quot;parentId&quot;:&quot;a6a8e401-3f92-46f0-a5db-9ce7e0fe1e7c&quot;,&quot;order&quot;:&quot;15&quot;}},&quot;ffcf3d47-b216-4821-abc3-ddb111e9bedf&quot;:{&quot;type&quot;:&quot;FIGURE_OBJECT&quot;,&quot;id&quot;:&quot;ffcf3d47-b216-4821-abc3-ddb111e9bedf&quot;,&quot;name&quot;:&quot;Viral glycoprotein (gp120-gp41)&quot;,&quot;relativeTransform&quot;:{&quot;translate&quot;:{&quot;x&quot;:6.773885951567568,&quot;y&quot;:-5.460061126375523},&quot;rotate&quot;:0.9945917742805775,&quot;skewX&quot;:5.410520681182421e-17,&quot;scale&quot;:{&quot;x&quot;:0.0111955535172267,&quot;y&quot;:0.0111955535172267}},&quot;opacity&quot;:1,&quot;image&quot;:{&quot;url&quot;:&quot;https://icons.biorender.com/biorender/5a5fae0079d76e0014432c70/viral-glycoprotein-gp120-gp41.png&quot;,&quot;size&quot;:{&quot;x&quot;:217,&quot;y&quot;:340},&quot;isPremium&quot;:false},&quot;source&quot;:{&quot;id&quot;:&quot;5a5fadde79d76e0014432c64&quot;,&quot;type&quot;:&quot;ASSETS&quot;},&quot;pathStyles&quot;:[{&quot;type&quot;:&quot;FILL&quot;,&quot;fillStyle&quot;:&quot;rgb(0,0,0)&quot;}],&quot;isLocked&quot;:false,&quot;parent&quot;:{&quot;type&quot;:&quot;CHILD&quot;,&quot;parentId&quot;:&quot;a6a8e401-3f92-46f0-a5db-9ce7e0fe1e7c&quot;,&quot;order&quot;:&quot;2&quot;}},&quot;c67751d3-5a8a-48f9-b0d7-4e038e946343&quot;:{&quot;type&quot;:&quot;FIGURE_OBJECT&quot;,&quot;id&quot;:&quot;c67751d3-5a8a-48f9-b0d7-4e038e946343&quot;,&quot;name&quot;:&quot;Viral glycoprotein (gp120-gp41)&quot;,&quot;relativeTransform&quot;:{&quot;translate&quot;:{&quot;x&quot;:8.465576366890016,&quot;y&quot;:1.8939523517295949},&quot;rotate&quot;:1.8466724621533726,&quot;skewX&quot;:1.6231562043547263e-16,&quot;scale&quot;:{&quot;x&quot;:0.0111955535172267,&quot;y&quot;:0.0111955535172266}},&quot;opacity&quot;:1,&quot;image&quot;:{&quot;url&quot;:&quot;https://icons.biorender.com/biorender/5a5fae0079d76e0014432c70/viral-glycoprotein-gp120-gp41.png&quot;,&quot;size&quot;:{&quot;x&quot;:217,&quot;y&quot;:340},&quot;isPremium&quot;:false},&quot;source&quot;:{&quot;id&quot;:&quot;5a5fadde79d76e0014432c64&quot;,&quot;type&quot;:&quot;ASSETS&quot;},&quot;pathStyles&quot;:[{&quot;type&quot;:&quot;FILL&quot;,&quot;fillStyle&quot;:&quot;rgb(0,0,0)&quot;}],&quot;isLocked&quot;:false,&quot;parent&quot;:{&quot;type&quot;:&quot;CHILD&quot;,&quot;parentId&quot;:&quot;a6a8e401-3f92-46f0-a5db-9ce7e0fe1e7c&quot;,&quot;order&quot;:&quot;25&quot;}},&quot;f3a5fa3a-9544-4e4d-a8f4-a9cb1115067a&quot;:{&quot;type&quot;:&quot;FIGURE_OBJECT&quot;,&quot;id&quot;:&quot;f3a5fa3a-9544-4e4d-a8f4-a9cb1115067a&quot;,&quot;name&quot;:&quot;Viral glycoprotein (gp120-gp41)&quot;,&quot;relativeTransform&quot;:{&quot;translate&quot;:{&quot;x&quot;:4.4667697272366755,&quot;y&quot;:7.76259147872502},&quot;rotate&quot;:2.569499875935172,&quot;skewX&quot;:-5.410520681182421e-17,&quot;scale&quot;:{&quot;x&quot;:0.0111955535172267,&quot;y&quot;:0.0111955535172267}},&quot;opacity&quot;:1,&quot;image&quot;:{&quot;url&quot;:&quot;https://icons.biorender.com/biorender/5a5fae0079d76e0014432c70/viral-glycoprotein-gp120-gp41.png&quot;,&quot;size&quot;:{&quot;x&quot;:217,&quot;y&quot;:340},&quot;isPremium&quot;:false},&quot;source&quot;:{&quot;id&quot;:&quot;5a5fadde79d76e0014432c64&quot;,&quot;type&quot;:&quot;ASSETS&quot;},&quot;pathStyles&quot;:[{&quot;type&quot;:&quot;FILL&quot;,&quot;fillStyle&quot;:&quot;rgb(0,0,0)&quot;}],&quot;isLocked&quot;:false,&quot;parent&quot;:{&quot;type&quot;:&quot;CHILD&quot;,&quot;parentId&quot;:&quot;a6a8e401-3f92-46f0-a5db-9ce7e0fe1e7c&quot;,&quot;order&quot;:&quot;3&quot;}},&quot;e18141c3-64c1-4d31-abce-61e7c944676f&quot;:{&quot;type&quot;:&quot;FIGURE_OBJECT&quot;,&quot;id&quot;:&quot;e18141c3-64c1-4d31-abce-61e7c944676f&quot;,&quot;name&quot;:&quot;Viral glycoprotein (gp120-gp41)&quot;,&quot;relativeTransform&quot;:{&quot;translate&quot;:{&quot;x&quot;:-2.784514026200389,&quot;y&quot;:8.417663480899426},&quot;rotate&quot;:-2.7190936569638366,&quot;skewX&quot;:5.410520681182421e-17,&quot;scale&quot;:{&quot;x&quot;:0.0111955535172267,&quot;y&quot;:0.0111955535172267}},&quot;opacity&quot;:1,&quot;image&quot;:{&quot;url&quot;:&quot;https://icons.biorender.com/biorender/5a5fae0079d76e0014432c70/viral-glycoprotein-gp120-gp41.png&quot;,&quot;size&quot;:{&quot;x&quot;:217,&quot;y&quot;:340},&quot;isPremium&quot;:false},&quot;source&quot;:{&quot;id&quot;:&quot;5a5fadde79d76e0014432c64&quot;,&quot;type&quot;:&quot;ASSETS&quot;},&quot;pathStyles&quot;:[{&quot;type&quot;:&quot;FILL&quot;,&quot;fillStyle&quot;:&quot;rgb(0,0,0)&quot;}],&quot;isLocked&quot;:false,&quot;parent&quot;:{&quot;type&quot;:&quot;CHILD&quot;,&quot;parentId&quot;:&quot;a6a8e401-3f92-46f0-a5db-9ce7e0fe1e7c&quot;,&quot;order&quot;:&quot;5&quot;}},&quot;7ee7ca6f-f906-4352-ba38-4275cf5f1849&quot;:{&quot;type&quot;:&quot;FIGURE_OBJECT&quot;,&quot;id&quot;:&quot;7ee7ca6f-f906-4352-ba38-4275cf5f1849&quot;,&quot;name&quot;:&quot;Viral glycoprotein (gp120-gp41)&quot;,&quot;relativeTransform&quot;:{&quot;translate&quot;:{&quot;x&quot;:-8.452795880170907,&quot;y&quot;:2.9866431552006087},&quot;rotate&quot;:-1.8670129690910418,&quot;skewX&quot;:0,&quot;scale&quot;:{&quot;x&quot;:0.0111955535172267,&quot;y&quot;:0.0111955535172267}},&quot;opacity&quot;:1,&quot;image&quot;:{&quot;url&quot;:&quot;https://icons.biorender.com/biorender/5a5fae0079d76e0014432c70/viral-glycoprotein-gp120-gp41.png&quot;,&quot;size&quot;:{&quot;x&quot;:217,&quot;y&quot;:340},&quot;isPremium&quot;:false},&quot;source&quot;:{&quot;id&quot;:&quot;5a5fadde79d76e0014432c64&quot;,&quot;type&quot;:&quot;ASSETS&quot;},&quot;pathStyles&quot;:[{&quot;type&quot;:&quot;FILL&quot;,&quot;fillStyle&quot;:&quot;rgb(0,0,0)&quot;}],&quot;isLocked&quot;:false,&quot;parent&quot;:{&quot;type&quot;:&quot;CHILD&quot;,&quot;parentId&quot;:&quot;a6a8e401-3f92-46f0-a5db-9ce7e0fe1e7c&quot;,&quot;order&quot;:&quot;55&quot;}},&quot;2aabe3e7-e46d-428d-86c9-a2d7e6238ded&quot;:{&quot;type&quot;:&quot;FIGURE_OBJECT&quot;,&quot;id&quot;:&quot;2aabe3e7-e46d-428d-86c9-a2d7e6238ded&quot;,&quot;name&quot;:&quot;Viral glycoprotein (gp120-gp41)&quot;,&quot;relativeTransform&quot;:{&quot;translate&quot;:{&quot;x&quot;:-7.887522300687056,&quot;y&quot;:-4.597355342105644},&quot;rotate&quot;:-1.0993273943372315,&quot;skewX&quot;:-7.033676885537148e-16,&quot;scale&quot;:{&quot;x&quot;:0.0111955535172267,&quot;y&quot;:0.0111955535172267}},&quot;opacity&quot;:1,&quot;image&quot;:{&quot;url&quot;:&quot;https://icons.biorender.com/biorender/5a5fae0079d76e0014432c70/viral-glycoprotein-gp120-gp41.png&quot;,&quot;size&quot;:{&quot;x&quot;:217,&quot;y&quot;:340},&quot;isPremium&quot;:false},&quot;source&quot;:{&quot;id&quot;:&quot;5a5fadde79d76e0014432c64&quot;,&quot;type&quot;:&quot;ASSETS&quot;},&quot;pathStyles&quot;:[{&quot;type&quot;:&quot;FILL&quot;,&quot;fillStyle&quot;:&quot;rgb(0,0,0)&quot;}],&quot;isLocked&quot;:false,&quot;parent&quot;:{&quot;type&quot;:&quot;CHILD&quot;,&quot;parentId&quot;:&quot;a6a8e401-3f92-46f0-a5db-9ce7e0fe1e7c&quot;,&quot;order&quot;:&quot;6&quot;}},&quot;98e1d53b-6567-4305-929a-cabf80c3dce4&quot;:{&quot;type&quot;:&quot;FIGURE_OBJECT&quot;,&quot;id&quot;:&quot;98e1d53b-6567-4305-929a-cabf80c3dce4&quot;,&quot;name&quot;:&quot;Viral capsid (with organelles)&quot;,&quot;relativeTransform&quot;:{&quot;translate&quot;:{&quot;x&quot;:0.1307627589387912,&quot;y&quot;:-0.20069141956608316},&quot;rotate&quot;:0,&quot;skewX&quot;:0,&quot;scale&quot;:{&quot;x&quot;:0.0249973922080835,&quot;y&quot;:0.0249973922080835}},&quot;opacity&quot;:1,&quot;image&quot;:{&quot;url&quot;:&quot;https://icons.biorender.com/biorender/5a5faecde2cabd001483dbc3/viral-capsid-with-organelles.png&quot;,&quot;size&quot;:{&quot;x&quot;:233,&quot;y&quot;:343},&quot;isPremium&quot;:false},&quot;source&quot;:{&quot;id&quot;:&quot;5a5fae72e2cabd001483dbbd&quot;,&quot;type&quot;:&quot;ASSETS&quot;},&quot;pathStyles&quot;:[{&quot;type&quot;:&quot;FILL&quot;,&quot;fillStyle&quot;:&quot;rgb(0,0,0)&quot;}],&quot;isLocked&quot;:false,&quot;parent&quot;:{&quot;type&quot;:&quot;CHILD&quot;,&quot;parentId&quot;:&quot;a6a8e401-3f92-46f0-a5db-9ce7e0fe1e7c&quot;,&quot;order&quot;:&quot;65&quot;}},&quot;e8b99651-9f94-4db9-a244-0e1f20fef99b&quot;:{&quot;type&quot;:&quot;FIGURE_OBJECT&quot;,&quot;id&quot;:&quot;e8b99651-9f94-4db9-a244-0e1f20fef99b&quot;,&quot;name&quot;:&quot;HIV (protease)&quot;,&quot;relativeTransform&quot;:{&quot;translate&quot;:{&quot;x&quot;:4.146881383106334,&quot;y&quot;:-2.4545566820323006},&quot;rotate&quot;:0,&quot;skewX&quot;:0,&quot;scale&quot;:{&quot;x&quot;:0.0054814838720823,&quot;y&quot;:0.0054814838720823}},&quot;opacity&quot;:1,&quot;image&quot;:{&quot;url&quot;:&quot;https://icons.biorender.com/biorender/5cf1811848bc020400d6b439/hiv-protease.png&quot;,&quot;size&quot;:{&quot;x&quot;:200,&quot;y&quot;:150},&quot;isPremium&quot;:false},&quot;source&quot;:{&quot;id&quot;:&quot;5cf180e848bc020400d6b42f&quot;,&quot;type&quot;:&quot;ASSETS&quot;},&quot;pathStyles&quot;:[{&quot;type&quot;:&quot;FILL&quot;,&quot;fillStyle&quot;:&quot;rgb(0,0,0)&quot;}],&quot;isLocked&quot;:false,&quot;parent&quot;:{&quot;type&quot;:&quot;CHILD&quot;,&quot;parentId&quot;:&quot;a6a8e401-3f92-46f0-a5db-9ce7e0fe1e7c&quot;,&quot;order&quot;:&quot;7&quot;}},&quot;8be68505-30e7-48d9-809d-b46d39514230&quot;:{&quot;type&quot;:&quot;FIGURE_OBJECT&quot;,&quot;id&quot;:&quot;8be68505-30e7-48d9-809d-b46d39514230&quot;,&quot;name&quot;:&quot;HIV (protease)&quot;,&quot;relativeTransform&quot;:{&quot;translate&quot;:{&quot;x&quot;:-4.39605332717987,&quot;y&quot;:-1.9138646117611802},&quot;rotate&quot;:0,&quot;skewX&quot;:0,&quot;scale&quot;:{&quot;x&quot;:0.0054814838720823,&quot;y&quot;:0.0054814838720823}},&quot;opacity&quot;:1,&quot;image&quot;:{&quot;url&quot;:&quot;https://icons.biorender.com/biorender/5cf1811848bc020400d6b439/hiv-protease.png&quot;,&quot;size&quot;:{&quot;x&quot;:200,&quot;y&quot;:150},&quot;isPremium&quot;:false},&quot;source&quot;:{&quot;id&quot;:&quot;5cf180e848bc020400d6b42f&quot;,&quot;type&quot;:&quot;ASSETS&quot;},&quot;pathStyles&quot;:[{&quot;type&quot;:&quot;FILL&quot;,&quot;fillStyle&quot;:&quot;rgb(0,0,0)&quot;}],&quot;isLocked&quot;:false,&quot;parent&quot;:{&quot;type&quot;:&quot;CHILD&quot;,&quot;parentId&quot;:&quot;a6a8e401-3f92-46f0-a5db-9ce7e0fe1e7c&quot;,&quot;order&quot;:&quot;75&quot;}},&quot;e0fcef8c-f45c-43ef-b10f-d3bea0ddbb9c&quot;:{&quot;type&quot;:&quot;FIGURE_OBJECT&quot;,&quot;id&quot;:&quot;e0fcef8c-f45c-43ef-b10f-d3bea0ddbb9c&quot;,&quot;name&quot;:&quot;HIV integrase&quot;,&quot;relativeTransform&quot;:{&quot;translate&quot;:{&quot;x&quot;:-3.7723190726999403,&quot;y&quot;:3.4044424206700272},&quot;rotate&quot;:0,&quot;skewX&quot;:0,&quot;scale&quot;:{&quot;x&quot;:0.0073932898547115,&quot;y&quot;:0.0073932898547115}},&quot;opacity&quot;:1,&quot;image&quot;:{&quot;url&quot;:&quot;https://icons.biorender.com/biorender/5cf180e848bc020400d6b42d/hiv-integrase.png&quot;,&quot;size&quot;:{&quot;x&quot;:200,&quot;y&quot;:175},&quot;isPremium&quot;:false},&quot;source&quot;:{&quot;id&quot;:&quot;5cf180b348bc020400d6b423&quot;,&quot;type&quot;:&quot;ASSETS&quot;},&quot;pathStyles&quot;:[{&quot;type&quot;:&quot;FILL&quot;,&quot;fillStyle&quot;:&quot;rgb(0,0,0)&quot;}],&quot;isLocked&quot;:false,&quot;parent&quot;:{&quot;type&quot;:&quot;CHILD&quot;,&quot;parentId&quot;:&quot;a6a8e401-3f92-46f0-a5db-9ce7e0fe1e7c&quot;,&quot;order&quot;:&quot;8&quot;}},&quot;04b6aa6f-31a0-4c7b-be78-12f520f06f49&quot;:{&quot;type&quot;:&quot;FIGURE_OBJECT&quot;,&quot;id&quot;:&quot;04b6aa6f-31a0-4c7b-be78-12f520f06f49&quot;,&quot;document&quot;:{&quot;type&quot;:&quot;FIGURE&quot;,&quot;canvasType&quot;:&quot;FIGURE&quot;,&quot;units&quot;:&quot;cm&quot;},&quot;relativeTransform&quot;:{&quot;translate&quot;:{&quot;x&quot;:0,&quot;y&quot;:0},&quot;rotate&quot;:0,&quot;skewX&quot;:0,&quot;scale&quot;:{&quot;x&quot;:1,&quot;y&quot;:1}},&quot;isLocked&quot;:false,&quot;parent&quot;:{&quot;type&quot;:&quot;DOCUMENT&quot;,&quot;parentId&quot;:&quot;bddf6853-7300-4144-9f56-b62277887ef7&quot;,&quot;order&quot;:&quot;5&quot;}},&quot;bddf6853-7300-4144-9f56-b62277887ef7&quot;:{&quot;id&quot;:&quot;bddf6853-7300-4144-9f56-b62277887ef7&quot;,&quot;type&quot;:&quot;FIGURE_OBJECT&quot;,&quot;document&quot;:{&quot;type&quot;:&quot;DOCUMENT_GROUP&quot;,&quot;canvasType&quot;:&quot;FIGURE&quot;,&quot;units&quot;:&quot;cm&quot;}}}}"/>
+</p:tagLst>
+</file>
+
+<file path=ppt/tags/tag109.xml><?xml version="1.0" encoding="utf-8"?>
+<p:tagLst xmlns:a="http://schemas.openxmlformats.org/drawingml/2006/main" xmlns:r="http://schemas.openxmlformats.org/officeDocument/2006/relationships" xmlns:p="http://schemas.openxmlformats.org/presentationml/2006/main">
+  <p:tag name="ID" val="68efc908cb5715304cea89b6"/>
+  <p:tag name="FIGURESLIDEID" val="04b6aa6f-31a0-4c7b-be78-12f520f06f49"/>
+  <p:tag name="SELECTIONIDS" val="d1cab169-877b-4150-a9dd-193428cf0070"/>
+  <p:tag name="TRANSPARENTBACKGROUND" val="true"/>
+  <p:tag name="VERSION" val="1760545859457"/>
+  <p:tag name="TITLE" val="HIV immune model with time delay"/>
+  <p:tag name="CREATORNAME" val="Alison Hill"/>
+  <p:tag name="DATEINSERTED" val="1760545859599"/>
+  <p:tag name="DPI" val="300"/>
+  <p:tag name="BIOJSON" val="{&quot;id&quot;:&quot;bddf6853-7300-4144-9f56-b62277887ef7&quot;,&quot;objects&quot;:{&quot;d1cab169-877b-4150-a9dd-193428cf0070&quot;:{&quot;type&quot;:&quot;FIGURE_OBJECT&quot;,&quot;id&quot;:&quot;d1cab169-877b-4150-a9dd-193428cf0070&quot;,&quot;relativeTransform&quot;:{&quot;translate&quot;:{&quot;x&quot;:-10.932684962106494,&quot;y&quot;:-28.101893830709173},&quot;rotate&quot;:0,&quot;skewX&quot;:0,&quot;scale&quot;:{&quot;x&quot;:1,&quot;y&quot;:1}},&quot;opacity&quot;:1,&quot;path&quot;:{&quot;type&quot;:&quot;POLY_LINE&quot;,&quot;points&quot;:[{&quot;x&quot;:2.75,&quot;y&quot;:18.813541861580006},{&quot;x&quot;:-2.75,&quot;y&quot;:0.0021591257157069776},{&quot;x&quot;:8.253623084530147,&quot;y&quot;:-14.178911895659866}],&quot;closed&quot;:false},&quot;pathStyles&quot;:[{&quot;type&quot;:&quot;FILL&quot;,&quot;fillStyle&quot;:&quot;transparent&quot;},{&quot;type&quot;:&quot;STROKE&quot;,&quot;strokeStyle&quot;:&quot;rgba(192,56,48,1)&quot;,&quot;lineWidth&quot;:1,&quot;lineJoin&quot;:&quot;round&quot;,&quot;dashArray&quot;:[1,1]}],&quot;pathSmoothing&quot;:{&quot;type&quot;:&quot;CATMULL_SMOOTHING&quot;,&quot;smoothing&quot;:0.2},&quot;pathMarkers&quot;:{&quot;markerEnd&quot;:{&quot;type&quot;:&quot;PATH&quot;,&quot;units&quot;:{&quot;type&quot;:&quot;STROKE_WIDTH&quot;,&quot;scale&quot;:1.4},&quot;orient&quot;:{&quot;type&quot;:&quot;AUTO_START_REVERSE&quot;},&quot;name&quot;:&quot;inhib&quot;,&quot;relativeTransform&quot;:{&quot;translate&quot;:{&quot;x&quot;:0,&quot;y&quot;:0},&quot;rotate&quot;:0,&quot;skewX&quot;:0,&quot;scale&quot;:{&quot;x&quot;:1,&quot;y&quot;:1}},&quot;path&quot;:{&quot;type&quot;:&quot;SPLINE&quot;,&quot;spline&quot;:{&quot;points&quot;:[{&quot;x&quot;:0,&quot;y&quot;:3,&quot;isEndPoint&quot;:true},{&quot;x&quot;:0,&quot;y&quot;:-3,&quot;isEndPoint&quot;:true}],&quot;closed&quot;:false}},&quot;pathStyles&quot;:[{&quot;type&quot;:&quot;STROKE&quot;,&quot;strokeStyle&quot;:&quot;context-stroke-flat&quot;,&quot;lineWidth&quot;:1,&quot;lineJoin&quot;:&quot;round&quot;}]}},&quot;isLocked&quot;:false,&quot;parent&quot;:{&quot;type&quot;:&quot;CHILD&quot;,&quot;parentId&quot;:&quot;04b6aa6f-31a0-4c7b-be78-12f520f06f49&quot;,&quot;order&quot;:&quot;45&quot;}},&quot;04b6aa6f-31a0-4c7b-be78-12f520f06f49&quot;:{&quot;type&quot;:&quot;FIGURE_OBJECT&quot;,&quot;id&quot;:&quot;04b6aa6f-31a0-4c7b-be78-12f520f06f49&quot;,&quot;document&quot;:{&quot;type&quot;:&quot;FIGURE&quot;,&quot;canvasType&quot;:&quot;FIGURE&quot;,&quot;units&quot;:&quot;cm&quot;},&quot;relativeTransform&quot;:{&quot;translate&quot;:{&quot;x&quot;:0,&quot;y&quot;:0},&quot;rotate&quot;:0,&quot;skewX&quot;:0,&quot;scale&quot;:{&quot;x&quot;:1,&quot;y&quot;:1}},&quot;isLocked&quot;:false,&quot;parent&quot;:{&quot;type&quot;:&quot;DOCUMENT&quot;,&quot;parentId&quot;:&quot;bddf6853-7300-4144-9f56-b62277887ef7&quot;,&quot;order&quot;:&quot;5&quot;}},&quot;bddf6853-7300-4144-9f56-b62277887ef7&quot;:{&quot;id&quot;:&quot;bddf6853-7300-4144-9f56-b62277887ef7&quot;,&quot;type&quot;:&quot;FIGURE_OBJECT&quot;,&quot;document&quot;:{&quot;type&quot;:&quot;DOCUMENT_GROUP&quot;,&quot;canvasType&quot;:&quot;FIGURE&quot;,&quot;units&quot;:&quot;cm&quot;}}}}"/>
+</p:tagLst>
+</file>
+
 <file path=ppt/tags/tag11.xml><?xml version="1.0" encoding="utf-8"?>
 <p:tagLst xmlns:a="http://schemas.openxmlformats.org/drawingml/2006/main" xmlns:r="http://schemas.openxmlformats.org/officeDocument/2006/relationships" xmlns:p="http://schemas.openxmlformats.org/presentationml/2006/main">
   <p:tag name="ID" val="68efc908cb5715304cea89b6"/>
@@ -10516,6 +14160,96 @@
   <p:tag name="DATEINSERTED" val="1760545859599"/>
   <p:tag name="DPI" val="300"/>
   <p:tag name="BIOJSON" val="{&quot;id&quot;:&quot;bddf6853-7300-4144-9f56-b62277887ef7&quot;,&quot;objects&quot;:{&quot;8dcd8037-107a-4432-8dfd-cc4cf98d3d1f&quot;:{&quot;type&quot;:&quot;FIGURE_OBJECT&quot;,&quot;id&quot;:&quot;8dcd8037-107a-4432-8dfd-cc4cf98d3d1f&quot;,&quot;name&quot;:&quot;Virus (round 2)&quot;,&quot;relativeTransform&quot;:{&quot;translate&quot;:{&quot;x&quot;:8.650601447018387,&quot;y&quot;:-71.05181913767306},&quot;rotate&quot;:0,&quot;skewX&quot;:0,&quot;scale&quot;:{&quot;x&quot;:0.0903741294160818,&quot;y&quot;:0.0903741294160818}},&quot;opacity&quot;:1,&quot;image&quot;:{&quot;url&quot;:&quot;https://icons.biorender.com/biorender/5a32c43541f3060014913ac5/20180308183409/image/virus-round-2.png&quot;,&quot;size&quot;:{&quot;x&quot;:96,&quot;y&quot;:96},&quot;isPremium&quot;:false},&quot;source&quot;:{&quot;id&quot;:&quot;5a32c43541f3060014913ac5&quot;,&quot;type&quot;:&quot;ASSETS&quot;},&quot;pathStyles&quot;:[{&quot;type&quot;:&quot;FILL&quot;,&quot;fillStyle&quot;:&quot;rgb(0,0,0)&quot;}],&quot;isLocked&quot;:false,&quot;parent&quot;:{&quot;type&quot;:&quot;CHILD&quot;,&quot;parentId&quot;:&quot;04b6aa6f-31a0-4c7b-be78-12f520f06f49&quot;,&quot;order&quot;:&quot;15&quot;}},&quot;04b6aa6f-31a0-4c7b-be78-12f520f06f49&quot;:{&quot;type&quot;:&quot;FIGURE_OBJECT&quot;,&quot;id&quot;:&quot;04b6aa6f-31a0-4c7b-be78-12f520f06f49&quot;,&quot;document&quot;:{&quot;type&quot;:&quot;FIGURE&quot;,&quot;canvasType&quot;:&quot;FIGURE&quot;,&quot;units&quot;:&quot;cm&quot;},&quot;relativeTransform&quot;:{&quot;translate&quot;:{&quot;x&quot;:0,&quot;y&quot;:0},&quot;rotate&quot;:0,&quot;skewX&quot;:0,&quot;scale&quot;:{&quot;x&quot;:1,&quot;y&quot;:1}},&quot;isLocked&quot;:false,&quot;parent&quot;:{&quot;type&quot;:&quot;DOCUMENT&quot;,&quot;parentId&quot;:&quot;bddf6853-7300-4144-9f56-b62277887ef7&quot;,&quot;order&quot;:&quot;5&quot;}},&quot;bddf6853-7300-4144-9f56-b62277887ef7&quot;:{&quot;id&quot;:&quot;bddf6853-7300-4144-9f56-b62277887ef7&quot;,&quot;type&quot;:&quot;FIGURE_OBJECT&quot;,&quot;document&quot;:{&quot;type&quot;:&quot;DOCUMENT_GROUP&quot;,&quot;canvasType&quot;:&quot;FIGURE&quot;,&quot;units&quot;:&quot;cm&quot;}}}}"/>
+</p:tagLst>
+</file>
+
+<file path=ppt/tags/tag110.xml><?xml version="1.0" encoding="utf-8"?>
+<p:tagLst xmlns:a="http://schemas.openxmlformats.org/drawingml/2006/main" xmlns:r="http://schemas.openxmlformats.org/officeDocument/2006/relationships" xmlns:p="http://schemas.openxmlformats.org/presentationml/2006/main">
+  <p:tag name="ID" val="68efc908cb5715304cea89b6"/>
+  <p:tag name="FIGURESLIDEID" val="04b6aa6f-31a0-4c7b-be78-12f520f06f49"/>
+  <p:tag name="SELECTIONIDS" val="60fb3899-836e-4437-a003-5adf8650d656"/>
+  <p:tag name="TRANSPARENTBACKGROUND" val="true"/>
+  <p:tag name="VERSION" val="1760545859457"/>
+  <p:tag name="TITLE" val="HIV immune model with time delay"/>
+  <p:tag name="CREATORNAME" val="Alison Hill"/>
+  <p:tag name="DATEINSERTED" val="1760545859599"/>
+  <p:tag name="DPI" val="300"/>
+  <p:tag name="BIOJSON" val="{&quot;id&quot;:&quot;bddf6853-7300-4144-9f56-b62277887ef7&quot;,&quot;objects&quot;:{&quot;60fb3899-836e-4437-a003-5adf8650d656&quot;:{&quot;type&quot;:&quot;FIGURE_OBJECT&quot;,&quot;id&quot;:&quot;60fb3899-836e-4437-a003-5adf8650d656&quot;,&quot;relativeTransform&quot;:{&quot;translate&quot;:{&quot;x&quot;:41.15567859047116,&quot;y&quot;:-33.910828959080845},&quot;rotate&quot;:0,&quot;skewX&quot;:0,&quot;scale&quot;:{&quot;x&quot;:1,&quot;y&quot;:1}},&quot;opacity&quot;:1,&quot;path&quot;:{&quot;type&quot;:&quot;POLY_LINE&quot;,&quot;points&quot;:[{&quot;x&quot;:-11.450989879940607,&quot;y&quot;:-10.520314573570772},{&quot;x&quot;:6.161636447422325,&quot;y&quot;:-6.589171040919155},{&quot;x&quot;:11.161636447422325,&quot;y&quot;:11.410828959080845}],&quot;closed&quot;:false},&quot;pathStyles&quot;:[{&quot;type&quot;:&quot;FILL&quot;,&quot;fillStyle&quot;:&quot;transparent&quot;},{&quot;type&quot;:&quot;STROKE&quot;,&quot;strokeStyle&quot;:&quot;rgba(90,170,70,1)&quot;,&quot;lineWidth&quot;:1,&quot;lineJoin&quot;:&quot;round&quot;,&quot;dashArray&quot;:[1,1]}],&quot;pathSmoothing&quot;:{&quot;type&quot;:&quot;CATMULL_SMOOTHING&quot;,&quot;smoothing&quot;:0.2},&quot;pathMarkers&quot;:{&quot;markerEnd&quot;:{&quot;type&quot;:&quot;PATH&quot;,&quot;units&quot;:{&quot;type&quot;:&quot;STROKE_WIDTH&quot;,&quot;scale&quot;:0.7},&quot;orient&quot;:{&quot;type&quot;:&quot;CLIPPED_CHORD&quot;},&quot;clipDistance&quot;:4,&quot;name&quot;:&quot;arrow&quot;,&quot;relativeTransform&quot;:{&quot;translate&quot;:{&quot;x&quot;:0,&quot;y&quot;:0},&quot;rotate&quot;:0,&quot;skewX&quot;:0,&quot;scale&quot;:{&quot;x&quot;:1,&quot;y&quot;:1}},&quot;path&quot;:{&quot;type&quot;:&quot;SPLINE&quot;,&quot;spline&quot;:{&quot;points&quot;:[{&quot;x&quot;:0,&quot;y&quot;:0,&quot;isEndPoint&quot;:true},{&quot;x&quot;:-5,&quot;y&quot;:-2.5,&quot;isEndPoint&quot;:true},{&quot;x&quot;:-5,&quot;y&quot;:2.5,&quot;isEndPoint&quot;:true}],&quot;closed&quot;:true}},&quot;pathStyles&quot;:[{&quot;type&quot;:&quot;FILL&quot;,&quot;fillStyle&quot;:&quot;context-stroke-flat&quot;}]}},&quot;isLocked&quot;:false,&quot;parent&quot;:{&quot;type&quot;:&quot;CHILD&quot;,&quot;parentId&quot;:&quot;04b6aa6f-31a0-4c7b-be78-12f520f06f49&quot;,&quot;order&quot;:&quot;5&quot;}},&quot;04b6aa6f-31a0-4c7b-be78-12f520f06f49&quot;:{&quot;type&quot;:&quot;FIGURE_OBJECT&quot;,&quot;id&quot;:&quot;04b6aa6f-31a0-4c7b-be78-12f520f06f49&quot;,&quot;document&quot;:{&quot;type&quot;:&quot;FIGURE&quot;,&quot;canvasType&quot;:&quot;FIGURE&quot;,&quot;units&quot;:&quot;cm&quot;},&quot;relativeTransform&quot;:{&quot;translate&quot;:{&quot;x&quot;:0,&quot;y&quot;:0},&quot;rotate&quot;:0,&quot;skewX&quot;:0,&quot;scale&quot;:{&quot;x&quot;:1,&quot;y&quot;:1}},&quot;isLocked&quot;:false,&quot;parent&quot;:{&quot;type&quot;:&quot;DOCUMENT&quot;,&quot;parentId&quot;:&quot;bddf6853-7300-4144-9f56-b62277887ef7&quot;,&quot;order&quot;:&quot;5&quot;}},&quot;bddf6853-7300-4144-9f56-b62277887ef7&quot;:{&quot;id&quot;:&quot;bddf6853-7300-4144-9f56-b62277887ef7&quot;,&quot;type&quot;:&quot;FIGURE_OBJECT&quot;,&quot;document&quot;:{&quot;type&quot;:&quot;DOCUMENT_GROUP&quot;,&quot;canvasType&quot;:&quot;FIGURE&quot;,&quot;units&quot;:&quot;cm&quot;}}}}"/>
+</p:tagLst>
+</file>
+
+<file path=ppt/tags/tag111.xml><?xml version="1.0" encoding="utf-8"?>
+<p:tagLst xmlns:a="http://schemas.openxmlformats.org/drawingml/2006/main" xmlns:r="http://schemas.openxmlformats.org/officeDocument/2006/relationships" xmlns:p="http://schemas.openxmlformats.org/presentationml/2006/main">
+  <p:tag name="ID" val="68efc908cb5715304cea89b6"/>
+  <p:tag name="FIGURESLIDEID" val="04b6aa6f-31a0-4c7b-be78-12f520f06f49"/>
+  <p:tag name="SELECTIONIDS" val="07c4cb08-0ce6-42f3-8ab8-de6230e3a698"/>
+  <p:tag name="TRANSPARENTBACKGROUND" val="true"/>
+  <p:tag name="VERSION" val="1760545859457"/>
+  <p:tag name="TITLE" val="HIV immune model with time delay"/>
+  <p:tag name="CREATORNAME" val="Alison Hill"/>
+  <p:tag name="DATEINSERTED" val="1760545859599"/>
+  <p:tag name="DPI" val="300"/>
+  <p:tag name="BIOJSON" val="{&quot;id&quot;:&quot;bddf6853-7300-4144-9f56-b62277887ef7&quot;,&quot;objects&quot;:{&quot;07c4cb08-0ce6-42f3-8ab8-de6230e3a698&quot;:{&quot;type&quot;:&quot;FIGURE_OBJECT&quot;,&quot;id&quot;:&quot;07c4cb08-0ce6-42f3-8ab8-de6230e3a698&quot;,&quot;relativeTransform&quot;:{&quot;translate&quot;:{&quot;x&quot;:63.04131503789342,&quot;y&quot;:-13.908000000000015},&quot;rotate&quot;:-0.8415544190416225,&quot;skewX&quot;:0,&quot;scale&quot;:{&quot;x&quot;:0.9999999999999999,&quot;y&quot;:1}},&quot;opacity&quot;:1,&quot;path&quot;:{&quot;type&quot;:&quot;ARC&quot;,&quot;size&quot;:{&quot;x&quot;:23.084401781962974,&quot;y&quot;:23.084401781962974},&quot;startAngle&quot;:2.412350745836501,&quot;sweepAngle&quot;:4.918032112539683},&quot;pathStyles&quot;:[{&quot;type&quot;:&quot;FILL&quot;,&quot;fillStyle&quot;:&quot;transparent&quot;},{&quot;type&quot;:&quot;STROKE&quot;,&quot;strokeStyle&quot;:&quot;#232323&quot;,&quot;lineWidth&quot;:1,&quot;lineJoin&quot;:&quot;round&quot;}],&quot;pathMarkers&quot;:{&quot;markerStart&quot;:{&quot;type&quot;:&quot;PATH&quot;,&quot;units&quot;:{&quot;type&quot;:&quot;STROKE_WIDTH&quot;,&quot;scale&quot;:0.7},&quot;orient&quot;:{&quot;type&quot;:&quot;CLIPPED_CHORD&quot;},&quot;clipDistance&quot;:4,&quot;name&quot;:&quot;arrow&quot;,&quot;relativeTransform&quot;:{&quot;translate&quot;:{&quot;x&quot;:0,&quot;y&quot;:0},&quot;rotate&quot;:0,&quot;skewX&quot;:0,&quot;scale&quot;:{&quot;x&quot;:1,&quot;y&quot;:1}},&quot;path&quot;:{&quot;type&quot;:&quot;SPLINE&quot;,&quot;spline&quot;:{&quot;points&quot;:[{&quot;x&quot;:0,&quot;y&quot;:0,&quot;isEndPoint&quot;:true},{&quot;x&quot;:-5,&quot;y&quot;:-2.5,&quot;isEndPoint&quot;:true},{&quot;x&quot;:-5,&quot;y&quot;:2.5,&quot;isEndPoint&quot;:true}],&quot;closed&quot;:true}},&quot;pathStyles&quot;:[{&quot;type&quot;:&quot;FILL&quot;,&quot;fillStyle&quot;:&quot;context-stroke-flat&quot;}]}},&quot;isLocked&quot;:false,&quot;parent&quot;:{&quot;type&quot;:&quot;CHILD&quot;,&quot;parentId&quot;:&quot;04b6aa6f-31a0-4c7b-be78-12f520f06f49&quot;,&quot;order&quot;:&quot;51&quot;}},&quot;04b6aa6f-31a0-4c7b-be78-12f520f06f49&quot;:{&quot;type&quot;:&quot;FIGURE_OBJECT&quot;,&quot;id&quot;:&quot;04b6aa6f-31a0-4c7b-be78-12f520f06f49&quot;,&quot;document&quot;:{&quot;type&quot;:&quot;FIGURE&quot;,&quot;canvasType&quot;:&quot;FIGURE&quot;,&quot;units&quot;:&quot;cm&quot;},&quot;relativeTransform&quot;:{&quot;translate&quot;:{&quot;x&quot;:0,&quot;y&quot;:0},&quot;rotate&quot;:0,&quot;skewX&quot;:0,&quot;scale&quot;:{&quot;x&quot;:1,&quot;y&quot;:1}},&quot;isLocked&quot;:false,&quot;parent&quot;:{&quot;type&quot;:&quot;DOCUMENT&quot;,&quot;parentId&quot;:&quot;bddf6853-7300-4144-9f56-b62277887ef7&quot;,&quot;order&quot;:&quot;5&quot;}},&quot;bddf6853-7300-4144-9f56-b62277887ef7&quot;:{&quot;id&quot;:&quot;bddf6853-7300-4144-9f56-b62277887ef7&quot;,&quot;type&quot;:&quot;FIGURE_OBJECT&quot;,&quot;document&quot;:{&quot;type&quot;:&quot;DOCUMENT_GROUP&quot;,&quot;canvasType&quot;:&quot;FIGURE&quot;,&quot;units&quot;:&quot;cm&quot;}}}}"/>
+</p:tagLst>
+</file>
+
+<file path=ppt/tags/tag112.xml><?xml version="1.0" encoding="utf-8"?>
+<p:tagLst xmlns:a="http://schemas.openxmlformats.org/drawingml/2006/main" xmlns:r="http://schemas.openxmlformats.org/officeDocument/2006/relationships" xmlns:p="http://schemas.openxmlformats.org/presentationml/2006/main">
+  <p:tag name="ID" val="68efc908cb5715304cea89b6"/>
+  <p:tag name="FIGURESLIDEID" val="04b6aa6f-31a0-4c7b-be78-12f520f06f49"/>
+  <p:tag name="SELECTIONIDS" val="f6c734f4-b2be-454d-8742-9fa551a1669e"/>
+  <p:tag name="TRANSPARENTBACKGROUND" val="true"/>
+  <p:tag name="VERSION" val="1760545859457"/>
+  <p:tag name="TITLE" val="HIV immune model with time delay"/>
+  <p:tag name="CREATORNAME" val="Alison Hill"/>
+  <p:tag name="DATEINSERTED" val="1760545859599"/>
+  <p:tag name="DPI" val="300"/>
+  <p:tag name="BIOJSON" val="{&quot;id&quot;:&quot;bddf6853-7300-4144-9f56-b62277887ef7&quot;,&quot;objects&quot;:{&quot;f6c734f4-b2be-454d-8742-9fa551a1669e&quot;:{&quot;type&quot;:&quot;FIGURE_OBJECT&quot;,&quot;id&quot;:&quot;f6c734f4-b2be-454d-8742-9fa551a1669e&quot;,&quot;relativeTransform&quot;:{&quot;translate&quot;:{&quot;x&quot;:44.58731503789347,&quot;y&quot;:-13.099000000000046},&quot;rotate&quot;:0,&quot;skewX&quot;:0,&quot;scale&quot;:{&quot;x&quot;:1,&quot;y&quot;:1}},&quot;opacity&quot;:1,&quot;path&quot;:{&quot;type&quot;:&quot;POLY_LINE&quot;,&quot;points&quot;:[{&quot;x&quot;:8.162856656817667,&quot;y&quot;:-6.6091051739437034},{&quot;x&quot;:-8.162856656817667,&quot;y&quot;:6.60910517394359}],&quot;closed&quot;:false},&quot;pathStyles&quot;:[{&quot;type&quot;:&quot;FILL&quot;,&quot;fillStyle&quot;:&quot;transparent&quot;},{&quot;type&quot;:&quot;STROKE&quot;,&quot;strokeStyle&quot;:&quot;#232323&quot;,&quot;lineWidth&quot;:1,&quot;lineJoin&quot;:&quot;round&quot;}],&quot;pathMarkers&quot;:{&quot;markerEnd&quot;:{&quot;type&quot;:&quot;PATH&quot;,&quot;units&quot;:{&quot;type&quot;:&quot;STROKE_WIDTH&quot;,&quot;scale&quot;:0.7},&quot;orient&quot;:{&quot;type&quot;:&quot;CLIPPED_CHORD&quot;},&quot;clipDistance&quot;:4,&quot;name&quot;:&quot;arrow&quot;,&quot;relativeTransform&quot;:{&quot;translate&quot;:{&quot;x&quot;:0,&quot;y&quot;:0},&quot;rotate&quot;:0,&quot;skewX&quot;:0,&quot;scale&quot;:{&quot;x&quot;:1,&quot;y&quot;:1}},&quot;path&quot;:{&quot;type&quot;:&quot;SPLINE&quot;,&quot;spline&quot;:{&quot;points&quot;:[{&quot;x&quot;:0,&quot;y&quot;:0,&quot;isEndPoint&quot;:true},{&quot;x&quot;:-5,&quot;y&quot;:-2.5,&quot;isEndPoint&quot;:true},{&quot;x&quot;:-5,&quot;y&quot;:2.5,&quot;isEndPoint&quot;:true}],&quot;closed&quot;:true}},&quot;pathStyles&quot;:[{&quot;type&quot;:&quot;FILL&quot;,&quot;fillStyle&quot;:&quot;context-stroke-flat&quot;}]}},&quot;isLocked&quot;:false,&quot;parent&quot;:{&quot;type&quot;:&quot;CHILD&quot;,&quot;parentId&quot;:&quot;04b6aa6f-31a0-4c7b-be78-12f520f06f49&quot;,&quot;order&quot;:&quot;52&quot;}},&quot;04b6aa6f-31a0-4c7b-be78-12f520f06f49&quot;:{&quot;type&quot;:&quot;FIGURE_OBJECT&quot;,&quot;id&quot;:&quot;04b6aa6f-31a0-4c7b-be78-12f520f06f49&quot;,&quot;document&quot;:{&quot;type&quot;:&quot;FIGURE&quot;,&quot;canvasType&quot;:&quot;FIGURE&quot;,&quot;units&quot;:&quot;cm&quot;},&quot;relativeTransform&quot;:{&quot;translate&quot;:{&quot;x&quot;:0,&quot;y&quot;:0},&quot;rotate&quot;:0,&quot;skewX&quot;:0,&quot;scale&quot;:{&quot;x&quot;:1,&quot;y&quot;:1}},&quot;isLocked&quot;:false,&quot;parent&quot;:{&quot;type&quot;:&quot;DOCUMENT&quot;,&quot;parentId&quot;:&quot;bddf6853-7300-4144-9f56-b62277887ef7&quot;,&quot;order&quot;:&quot;5&quot;}},&quot;bddf6853-7300-4144-9f56-b62277887ef7&quot;:{&quot;id&quot;:&quot;bddf6853-7300-4144-9f56-b62277887ef7&quot;,&quot;type&quot;:&quot;FIGURE_OBJECT&quot;,&quot;document&quot;:{&quot;type&quot;:&quot;DOCUMENT_GROUP&quot;,&quot;canvasType&quot;:&quot;FIGURE&quot;,&quot;units&quot;:&quot;cm&quot;}}}}"/>
+</p:tagLst>
+</file>
+
+<file path=ppt/tags/tag113.xml><?xml version="1.0" encoding="utf-8"?>
+<p:tagLst xmlns:a="http://schemas.openxmlformats.org/drawingml/2006/main" xmlns:r="http://schemas.openxmlformats.org/officeDocument/2006/relationships" xmlns:p="http://schemas.openxmlformats.org/presentationml/2006/main">
+  <p:tag name="ID" val="68efc908cb5715304cea89b6"/>
+  <p:tag name="FIGURESLIDEID" val="04b6aa6f-31a0-4c7b-be78-12f520f06f49"/>
+  <p:tag name="SELECTIONIDS" val="4a9a9543-ea86-458e-af1a-218522d74410"/>
+  <p:tag name="TRANSPARENTBACKGROUND" val="true"/>
+  <p:tag name="VERSION" val="1760545859457"/>
+  <p:tag name="TITLE" val="HIV immune model with time delay"/>
+  <p:tag name="CREATORNAME" val="Alison Hill"/>
+  <p:tag name="DATEINSERTED" val="1760545859599"/>
+  <p:tag name="DPI" val="300"/>
+  <p:tag name="BIOJSON" val="{&quot;id&quot;:&quot;bddf6853-7300-4144-9f56-b62277887ef7&quot;,&quot;objects&quot;:{&quot;4a9a9543-ea86-458e-af1a-218522d74410&quot;:{&quot;type&quot;:&quot;FIGURE_OBJECT&quot;,&quot;id&quot;:&quot;4a9a9543-ea86-458e-af1a-218522d74410&quot;,&quot;relativeTransform&quot;:{&quot;translate&quot;:{&quot;x&quot;:-27.8576575189467,&quot;y&quot;:-73.21899999999994},&quot;rotate&quot;:0,&quot;skewX&quot;:0,&quot;scale&quot;:{&quot;x&quot;:1,&quot;y&quot;:1}},&quot;opacity&quot;:1,&quot;path&quot;:{&quot;type&quot;:&quot;POLY_LINE&quot;,&quot;points&quot;:[{&quot;x&quot;:0,&quot;y&quot;:-5.246052677750754},{&quot;x&quot;:0,&quot;y&quot;:5.246052677750754}],&quot;closed&quot;:false},&quot;pathStyles&quot;:[{&quot;type&quot;:&quot;FILL&quot;,&quot;fillStyle&quot;:&quot;transparent&quot;},{&quot;type&quot;:&quot;STROKE&quot;,&quot;strokeStyle&quot;:&quot;#232323&quot;,&quot;lineWidth&quot;:1.0027568922305852,&quot;lineJoin&quot;:&quot;round&quot;}],&quot;pathMarkers&quot;:{&quot;markerEnd&quot;:{&quot;type&quot;:&quot;PATH&quot;,&quot;units&quot;:{&quot;type&quot;:&quot;STROKE_WIDTH&quot;,&quot;scale&quot;:0.7},&quot;orient&quot;:{&quot;type&quot;:&quot;CLIPPED_CHORD&quot;},&quot;clipDistance&quot;:4,&quot;name&quot;:&quot;arrow&quot;,&quot;relativeTransform&quot;:{&quot;translate&quot;:{&quot;x&quot;:0,&quot;y&quot;:0},&quot;rotate&quot;:0,&quot;skewX&quot;:0,&quot;scale&quot;:{&quot;x&quot;:1,&quot;y&quot;:1}},&quot;path&quot;:{&quot;type&quot;:&quot;SPLINE&quot;,&quot;spline&quot;:{&quot;points&quot;:[{&quot;x&quot;:0,&quot;y&quot;:0,&quot;isEndPoint&quot;:true},{&quot;x&quot;:-5,&quot;y&quot;:-2.5,&quot;isEndPoint&quot;:true},{&quot;x&quot;:-5,&quot;y&quot;:2.5,&quot;isEndPoint&quot;:true}],&quot;closed&quot;:true}},&quot;pathStyles&quot;:[{&quot;type&quot;:&quot;FILL&quot;,&quot;fillStyle&quot;:&quot;context-stroke-flat&quot;}]}},&quot;isLocked&quot;:false,&quot;parent&quot;:{&quot;type&quot;:&quot;CHILD&quot;,&quot;parentId&quot;:&quot;04b6aa6f-31a0-4c7b-be78-12f520f06f49&quot;,&quot;order&quot;:&quot;6&quot;}},&quot;04b6aa6f-31a0-4c7b-be78-12f520f06f49&quot;:{&quot;type&quot;:&quot;FIGURE_OBJECT&quot;,&quot;id&quot;:&quot;04b6aa6f-31a0-4c7b-be78-12f520f06f49&quot;,&quot;document&quot;:{&quot;type&quot;:&quot;FIGURE&quot;,&quot;canvasType&quot;:&quot;FIGURE&quot;,&quot;units&quot;:&quot;cm&quot;},&quot;relativeTransform&quot;:{&quot;translate&quot;:{&quot;x&quot;:0,&quot;y&quot;:0},&quot;rotate&quot;:0,&quot;skewX&quot;:0,&quot;scale&quot;:{&quot;x&quot;:1,&quot;y&quot;:1}},&quot;isLocked&quot;:false,&quot;parent&quot;:{&quot;type&quot;:&quot;DOCUMENT&quot;,&quot;parentId&quot;:&quot;bddf6853-7300-4144-9f56-b62277887ef7&quot;,&quot;order&quot;:&quot;5&quot;}},&quot;bddf6853-7300-4144-9f56-b62277887ef7&quot;:{&quot;id&quot;:&quot;bddf6853-7300-4144-9f56-b62277887ef7&quot;,&quot;type&quot;:&quot;FIGURE_OBJECT&quot;,&quot;document&quot;:{&quot;type&quot;:&quot;DOCUMENT_GROUP&quot;,&quot;canvasType&quot;:&quot;FIGURE&quot;,&quot;units&quot;:&quot;cm&quot;}}}}"/>
+</p:tagLst>
+</file>
+
+<file path=ppt/tags/tag114.xml><?xml version="1.0" encoding="utf-8"?>
+<p:tagLst xmlns:a="http://schemas.openxmlformats.org/drawingml/2006/main" xmlns:r="http://schemas.openxmlformats.org/officeDocument/2006/relationships" xmlns:p="http://schemas.openxmlformats.org/presentationml/2006/main">
+  <p:tag name="ID" val="68efc908cb5715304cea89b6"/>
+  <p:tag name="FIGURESLIDEID" val="04b6aa6f-31a0-4c7b-be78-12f520f06f49"/>
+  <p:tag name="SELECTIONIDS" val="0fea4203-9a7c-4834-a03e-7a2072ed6587"/>
+  <p:tag name="TRANSPARENTBACKGROUND" val="true"/>
+  <p:tag name="VERSION" val="1760545859457"/>
+  <p:tag name="TITLE" val="HIV immune model with time delay"/>
+  <p:tag name="CREATORNAME" val="Alison Hill"/>
+  <p:tag name="DATEINSERTED" val="1760545859599"/>
+  <p:tag name="DPI" val="300"/>
+  <p:tag name="BIOJSON" val="{&quot;id&quot;:&quot;bddf6853-7300-4144-9f56-b62277887ef7&quot;,&quot;objects&quot;:{&quot;0fea4203-9a7c-4834-a03e-7a2072ed6587&quot;:{&quot;type&quot;:&quot;FIGURE_OBJECT&quot;,&quot;id&quot;:&quot;0fea4203-9a7c-4834-a03e-7a2072ed6587&quot;,&quot;relativeTransform&quot;:{&quot;translate&quot;:{&quot;x&quot;:46.655042770719554,&quot;y&quot;:-55.43925329078401},&quot;rotate&quot;:0,&quot;skewX&quot;:0,&quot;scale&quot;:{&quot;x&quot;:1,&quot;y&quot;:1}},&quot;opacity&quot;:1,&quot;path&quot;:{&quot;type&quot;:&quot;POLY_LINE&quot;,&quot;points&quot;:[{&quot;x&quot;:11.420447431298726,&quot;y&quot;:0},{&quot;x&quot;:-11.420447431298726,&quot;y&quot;:0}],&quot;closed&quot;:false},&quot;pathStyles&quot;:[{&quot;type&quot;:&quot;FILL&quot;,&quot;fillStyle&quot;:&quot;transparent&quot;},{&quot;type&quot;:&quot;STROKE&quot;,&quot;strokeStyle&quot;:&quot;#232323&quot;,&quot;lineWidth&quot;:1,&quot;lineJoin&quot;:&quot;round&quot;}],&quot;pathMarkers&quot;:{&quot;markerEnd&quot;:{&quot;type&quot;:&quot;PATH&quot;,&quot;units&quot;:{&quot;type&quot;:&quot;STROKE_WIDTH&quot;,&quot;scale&quot;:0.7},&quot;orient&quot;:{&quot;type&quot;:&quot;AUTO_START_REVERSE&quot;},&quot;name&quot;:&quot;inhib&quot;,&quot;relativeTransform&quot;:{&quot;translate&quot;:{&quot;x&quot;:0,&quot;y&quot;:0},&quot;rotate&quot;:0,&quot;skewX&quot;:0,&quot;scale&quot;:{&quot;x&quot;:1,&quot;y&quot;:1}},&quot;path&quot;:{&quot;type&quot;:&quot;SPLINE&quot;,&quot;spline&quot;:{&quot;points&quot;:[{&quot;x&quot;:0,&quot;y&quot;:3,&quot;isEndPoint&quot;:true},{&quot;x&quot;:0,&quot;y&quot;:-3,&quot;isEndPoint&quot;:true}],&quot;closed&quot;:false}},&quot;pathStyles&quot;:[{&quot;type&quot;:&quot;STROKE&quot;,&quot;strokeStyle&quot;:&quot;context-stroke-flat&quot;,&quot;lineWidth&quot;:1,&quot;lineJoin&quot;:&quot;round&quot;}]},&quot;markerStart&quot;:{&quot;type&quot;:&quot;PATH&quot;,&quot;units&quot;:{&quot;type&quot;:&quot;STROKE_WIDTH&quot;,&quot;scale&quot;:0.7},&quot;orient&quot;:{&quot;type&quot;:&quot;AUTO_START_REVERSE&quot;},&quot;name&quot;:&quot;inhib&quot;,&quot;relativeTransform&quot;:{&quot;translate&quot;:{&quot;x&quot;:0,&quot;y&quot;:0},&quot;rotate&quot;:0,&quot;skewX&quot;:0,&quot;scale&quot;:{&quot;x&quot;:1,&quot;y&quot;:1}},&quot;path&quot;:{&quot;type&quot;:&quot;SPLINE&quot;,&quot;spline&quot;:{&quot;points&quot;:[{&quot;x&quot;:0,&quot;y&quot;:3,&quot;isEndPoint&quot;:true},{&quot;x&quot;:0,&quot;y&quot;:-3,&quot;isEndPoint&quot;:true}],&quot;closed&quot;:false}},&quot;pathStyles&quot;:[{&quot;type&quot;:&quot;STROKE&quot;,&quot;strokeStyle&quot;:&quot;context-stroke-flat&quot;,&quot;lineWidth&quot;:1,&quot;lineJoin&quot;:&quot;round&quot;}]}},&quot;isLocked&quot;:false,&quot;parent&quot;:{&quot;type&quot;:&quot;CHILD&quot;,&quot;parentId&quot;:&quot;04b6aa6f-31a0-4c7b-be78-12f520f06f49&quot;,&quot;order&quot;:&quot;98&quot;}},&quot;04b6aa6f-31a0-4c7b-be78-12f520f06f49&quot;:{&quot;type&quot;:&quot;FIGURE_OBJECT&quot;,&quot;id&quot;:&quot;04b6aa6f-31a0-4c7b-be78-12f520f06f49&quot;,&quot;document&quot;:{&quot;type&quot;:&quot;FIGURE&quot;,&quot;canvasType&quot;:&quot;FIGURE&quot;,&quot;units&quot;:&quot;cm&quot;},&quot;relativeTransform&quot;:{&quot;translate&quot;:{&quot;x&quot;:0,&quot;y&quot;:0},&quot;rotate&quot;:0,&quot;skewX&quot;:0,&quot;scale&quot;:{&quot;x&quot;:1,&quot;y&quot;:1}},&quot;isLocked&quot;:false,&quot;parent&quot;:{&quot;type&quot;:&quot;DOCUMENT&quot;,&quot;parentId&quot;:&quot;bddf6853-7300-4144-9f56-b62277887ef7&quot;,&quot;order&quot;:&quot;5&quot;}},&quot;bddf6853-7300-4144-9f56-b62277887ef7&quot;:{&quot;id&quot;:&quot;bddf6853-7300-4144-9f56-b62277887ef7&quot;,&quot;type&quot;:&quot;FIGURE_OBJECT&quot;,&quot;document&quot;:{&quot;type&quot;:&quot;DOCUMENT_GROUP&quot;,&quot;canvasType&quot;:&quot;FIGURE&quot;,&quot;units&quot;:&quot;cm&quot;}}}}"/>
+</p:tagLst>
+</file>
+
+<file path=ppt/tags/tag115.xml><?xml version="1.0" encoding="utf-8"?>
+<p:tagLst xmlns:a="http://schemas.openxmlformats.org/drawingml/2006/main" xmlns:r="http://schemas.openxmlformats.org/officeDocument/2006/relationships" xmlns:p="http://schemas.openxmlformats.org/presentationml/2006/main">
+  <p:tag name="ID" val="68efc908cb5715304cea89b6"/>
+  <p:tag name="FIGURESLIDEID" val="04b6aa6f-31a0-4c7b-be78-12f520f06f49"/>
+  <p:tag name="SELECTIONIDS" val="3703ec26-016c-409d-8979-563faa83a516"/>
+  <p:tag name="TRANSPARENTBACKGROUND" val="true"/>
+  <p:tag name="VERSION" val="1760545859457"/>
+  <p:tag name="TITLE" val="HIV immune model with time delay"/>
+  <p:tag name="CREATORNAME" val="Alison Hill"/>
+  <p:tag name="DATEINSERTED" val="1760545859599"/>
+  <p:tag name="DPI" val="300"/>
+  <p:tag name="BIOJSON" val="{&quot;id&quot;:&quot;bddf6853-7300-4144-9f56-b62277887ef7&quot;,&quot;objects&quot;:{&quot;3703ec26-016c-409d-8979-563faa83a516&quot;:{&quot;type&quot;:&quot;FIGURE_OBJECT&quot;,&quot;id&quot;:&quot;3703ec26-016c-409d-8979-563faa83a516&quot;,&quot;name&quot;:&quot;Clock&quot;,&quot;relativeTransform&quot;:{&quot;translate&quot;:{&quot;x&quot;:47.82173597453488,&quot;y&quot;:-54.279928405201936},&quot;rotate&quot;:0,&quot;skewX&quot;:0,&quot;scale&quot;:{&quot;x&quot;:0.0335447122929452,&quot;y&quot;:0.0335447122929452}},&quot;opacity&quot;:1,&quot;image&quot;:{&quot;url&quot;:&quot;https://icons.biorender.com/biorender/5a6f5847b5d37c00144d92d2/20180129172254/image/clock.png&quot;,&quot;size&quot;:{&quot;x&quot;:354,&quot;y&quot;:354},&quot;isPremium&quot;:false},&quot;source&quot;:{&quot;id&quot;:&quot;5a6f5847b5d37c00144d92d2&quot;,&quot;type&quot;:&quot;ASSETS&quot;},&quot;pathStyles&quot;:[{&quot;type&quot;:&quot;FILL&quot;,&quot;fillStyle&quot;:&quot;rgb(0,0,0)&quot;}],&quot;isLocked&quot;:false,&quot;parent&quot;:{&quot;type&quot;:&quot;CHILD&quot;,&quot;parentId&quot;:&quot;04b6aa6f-31a0-4c7b-be78-12f520f06f49&quot;,&quot;order&quot;:&quot;99&quot;}},&quot;04b6aa6f-31a0-4c7b-be78-12f520f06f49&quot;:{&quot;type&quot;:&quot;FIGURE_OBJECT&quot;,&quot;id&quot;:&quot;04b6aa6f-31a0-4c7b-be78-12f520f06f49&quot;,&quot;document&quot;:{&quot;type&quot;:&quot;FIGURE&quot;,&quot;canvasType&quot;:&quot;FIGURE&quot;,&quot;units&quot;:&quot;cm&quot;},&quot;relativeTransform&quot;:{&quot;translate&quot;:{&quot;x&quot;:0,&quot;y&quot;:0},&quot;rotate&quot;:0,&quot;skewX&quot;:0,&quot;scale&quot;:{&quot;x&quot;:1,&quot;y&quot;:1}},&quot;isLocked&quot;:false,&quot;parent&quot;:{&quot;type&quot;:&quot;DOCUMENT&quot;,&quot;parentId&quot;:&quot;bddf6853-7300-4144-9f56-b62277887ef7&quot;,&quot;order&quot;:&quot;5&quot;}},&quot;bddf6853-7300-4144-9f56-b62277887ef7&quot;:{&quot;id&quot;:&quot;bddf6853-7300-4144-9f56-b62277887ef7&quot;,&quot;type&quot;:&quot;FIGURE_OBJECT&quot;,&quot;document&quot;:{&quot;type&quot;:&quot;DOCUMENT_GROUP&quot;,&quot;canvasType&quot;:&quot;FIGURE&quot;,&quot;units&quot;:&quot;cm&quot;}}}}"/>
 </p:tagLst>
 </file>
 
@@ -11762,6 +15496,35 @@
 </p:tagLst>
 </file>
 
+<file path=ppt/tags/tag88.xml><?xml version="1.0" encoding="utf-8"?>
+<p:tagLst xmlns:a="http://schemas.openxmlformats.org/drawingml/2006/main" xmlns:r="http://schemas.openxmlformats.org/officeDocument/2006/relationships" xmlns:p="http://schemas.openxmlformats.org/presentationml/2006/main">
+  <p:tag name="EXPORTMETHOD" val="pptx_export_from_biorender"/>
+  <p:tag name="ILLUSTRATIONID" val="68efc908cb5715304cea89b6"/>
+  <p:tag name="SLIDEID" val="04b6aa6f-31a0-4c7b-be78-12f520f06f49"/>
+  <p:tag name="VERSION" val="1760545859457"/>
+  <p:tag name="TITLE" val="HIV immune model with time delay"/>
+  <p:tag name="CREATORNAME" val="Alison Hill"/>
+  <p:tag name="DATEINSERTED" val="1760545859599"/>
+  <p:tag name="DPI" val="300"/>
+  <p:tag name="BIOJSON" val="{&quot;id&quot;:&quot;bddf6853-7300-4144-9f56-b62277887ef7&quot;,&quot;objects&quot;:{&quot;04b6aa6f-31a0-4c7b-be78-12f520f06f49&quot;:{&quot;type&quot;:&quot;FIGURE_OBJECT&quot;,&quot;id&quot;:&quot;04b6aa6f-31a0-4c7b-be78-12f520f06f49&quot;,&quot;document&quot;:{&quot;type&quot;:&quot;FIGURE&quot;,&quot;canvasType&quot;:&quot;FIGURE&quot;,&quot;units&quot;:&quot;cm&quot;},&quot;relativeTransform&quot;:{&quot;translate&quot;:{&quot;x&quot;:0,&quot;y&quot;:0},&quot;rotate&quot;:0,&quot;skewX&quot;:0,&quot;scale&quot;:{&quot;x&quot;:1,&quot;y&quot;:1}},&quot;isLocked&quot;:false,&quot;parent&quot;:{&quot;type&quot;:&quot;DOCUMENT&quot;,&quot;parentId&quot;:&quot;bddf6853-7300-4144-9f56-b62277887ef7&quot;,&quot;order&quot;:&quot;5&quot;}},&quot;288426fa-6f46-492a-b902-28e01152cfe3&quot;:{&quot;type&quot;:&quot;FIGURE_OBJECT&quot;,&quot;id&quot;:&quot;288426fa-6f46-492a-b902-28e01152cfe3&quot;,&quot;name&quot;:&quot;Stem cell (hematopoietic)&quot;,&quot;relativeTransform&quot;:{&quot;translate&quot;:{&quot;x&quot;:74.67248732370832,&quot;y&quot;:-59.34713234633817},&quot;rotate&quot;:0,&quot;skewX&quot;:0,&quot;scale&quot;:{&quot;x&quot;:0.0575463378734887,&quot;y&quot;:0.0575463378734887}},&quot;opacity&quot;:1,&quot;image&quot;:{&quot;url&quot;:&quot;https://icons.biorender.com/biorender/5be31cc96f3d0b12005a9ca4/stem-cell-hematopoietic.png&quot;,&quot;size&quot;:{&quot;x&quot;:493,&quot;y&quot;:494},&quot;isPremium&quot;:false},&quot;source&quot;:{&quot;id&quot;:&quot;5b4df95d4f626900144a414e&quot;,&quot;type&quot;:&quot;ASSETS&quot;},&quot;pathStyles&quot;:[{&quot;type&quot;:&quot;FILL&quot;,&quot;fillStyle&quot;:&quot;rgb(0,0,0)&quot;}],&quot;isLocked&quot;:false,&quot;parent&quot;:{&quot;type&quot;:&quot;CHILD&quot;,&quot;parentId&quot;:&quot;04b6aa6f-31a0-4c7b-be78-12f520f06f49&quot;,&quot;order&quot;:&quot;01&quot;}},&quot;1a1c6c70-961b-464a-962f-5ab84984cd3e&quot;:{&quot;type&quot;:&quot;FIGURE_OBJECT&quot;,&quot;id&quot;:&quot;1a1c6c70-961b-464a-962f-5ab84984cd3e&quot;,&quot;name&quot;:&quot;T-cell&quot;,&quot;relativeTransform&quot;:{&quot;translate&quot;:{&quot;x&quot;:-68.12941817911282,&quot;y&quot;:-55.60714422874835},&quot;rotate&quot;:0,&quot;skewX&quot;:0,&quot;scale&quot;:{&quot;x&quot;:0.2687396314554266,&quot;y&quot;:0.2687396314554266}},&quot;opacity&quot;:1,&quot;image&quot;:{&quot;url&quot;:&quot;https://icons.biorender.com/biorender/5d8a294d977db30004d0ce2d/lymphocyte-t-cell-1.png&quot;,&quot;size&quot;:{&quot;x&quot;:154,&quot;y&quot;:154},&quot;isPremium&quot;:false},&quot;source&quot;:{&quot;id&quot;:&quot;5be1c5ed779980120020cbbe&quot;,&quot;type&quot;:&quot;ASSETS&quot;},&quot;pathStyles&quot;:[{&quot;type&quot;:&quot;FILL&quot;,&quot;fillStyle&quot;:&quot;rgb(0,0,0)&quot;}],&quot;isLocked&quot;:false,&quot;parent&quot;:{&quot;type&quot;:&quot;CHILD&quot;,&quot;parentId&quot;:&quot;04b6aa6f-31a0-4c7b-be78-12f520f06f49&quot;,&quot;order&quot;:&quot;02&quot;}},&quot;14bb4d4a-a0c7-4ed5-9298-6290b47e86d6&quot;:{&quot;type&quot;:&quot;FIGURE_OBJECT&quot;,&quot;id&quot;:&quot;14bb4d4a-a0c7-4ed5-9298-6290b47e86d6&quot;,&quot;name&quot;:&quot;T-cell&quot;,&quot;relativeTransform&quot;:{&quot;translate&quot;:{&quot;x&quot;:12.762907785639692,&quot;y&quot;:-55.60714422874835},&quot;rotate&quot;:0,&quot;skewX&quot;:0,&quot;scale&quot;:{&quot;x&quot;:0.2687396314554266,&quot;y&quot;:0.2687396314554266}},&quot;opacity&quot;:1,&quot;image&quot;:{&quot;url&quot;:&quot;https://icons.biorender.com/biorender/5d8a294d977db30004d0ce2d/lymphocyte-t-cell-1.png&quot;,&quot;size&quot;:{&quot;x&quot;:154,&quot;y&quot;:154},&quot;isPremium&quot;:false},&quot;source&quot;:{&quot;id&quot;:&quot;5be1c5ed779980120020cbbe&quot;,&quot;type&quot;:&quot;ASSETS&quot;},&quot;pathStyles&quot;:[{&quot;type&quot;:&quot;FILL&quot;,&quot;fillStyle&quot;:&quot;rgb(0,0,0)&quot;}],&quot;isLocked&quot;:false,&quot;parent&quot;:{&quot;type&quot;:&quot;CHILD&quot;,&quot;parentId&quot;:&quot;04b6aa6f-31a0-4c7b-be78-12f520f06f49&quot;,&quot;order&quot;:&quot;05&quot;}},&quot;0d6f7d38-39a3-4597-b305-0d8642dbc2fb&quot;:{&quot;type&quot;:&quot;FIGURE_OBJECT&quot;,&quot;id&quot;:&quot;0d6f7d38-39a3-4597-b305-0d8642dbc2fb&quot;,&quot;relativeTransform&quot;:{&quot;translate&quot;:{&quot;x&quot;:4.150315037892902,&quot;y&quot;:11.0325454139072},&quot;rotate&quot;:0,&quot;skewX&quot;:0,&quot;scale&quot;:{&quot;x&quot;:1,&quot;y&quot;:1}},&quot;opacity&quot;:1,&quot;source&quot;:{&quot;type&quot;:&quot;ASSETS&quot;},&quot;pathStyles&quot;:[{&quot;type&quot;:&quot;FILL&quot;,&quot;fillStyle&quot;:&quot;rgb(0,0,0)&quot;}],&quot;isLocked&quot;:false,&quot;parent&quot;:{&quot;type&quot;:&quot;CHILD&quot;,&quot;parentId&quot;:&quot;04b6aa6f-31a0-4c7b-be78-12f520f06f49&quot;,&quot;order&quot;:&quot;06&quot;}},&quot;6fa71bee-ffac-46bb-8ef4-8e7ce849a4c8&quot;:{&quot;type&quot;:&quot;FIGURE_OBJECT&quot;,&quot;id&quot;:&quot;6fa71bee-ffac-46bb-8ef4-8e7ce849a4c8&quot;,&quot;name&quot;:&quot;T-cell&quot;,&quot;relativeTransform&quot;:{&quot;translate&quot;:{&quot;x&quot;:0.3119725496105623,&quot;y&quot;:-0.12685726317057444},&quot;rotate&quot;:0,&quot;skewX&quot;:0,&quot;scale&quot;:{&quot;x&quot;:0.2424211863090582,&quot;y&quot;:0.2424211863090582}},&quot;opacity&quot;:1,&quot;image&quot;:{&quot;url&quot;:&quot;https://icons.biorender.com/biorender/5d8a294d977db30004d0ce2a/lymphocyte-t-cell-1.png&quot;,&quot;size&quot;:{&quot;x&quot;:154,&quot;y&quot;:154},&quot;isPremium&quot;:false},&quot;source&quot;:{&quot;id&quot;:&quot;5be1c5ed779980120020cbbe&quot;,&quot;type&quot;:&quot;ASSETS&quot;},&quot;pathStyles&quot;:[{&quot;type&quot;:&quot;FILL&quot;,&quot;fillStyle&quot;:&quot;rgb(0,0,0)&quot;}],&quot;isLocked&quot;:false,&quot;parent&quot;:{&quot;type&quot;:&quot;CHILD&quot;,&quot;parentId&quot;:&quot;0d6f7d38-39a3-4597-b305-0d8642dbc2fb&quot;,&quot;order&quot;:&quot;1&quot;}},&quot;dde7720a-1432-4954-8e38-9acd37df52e9&quot;:{&quot;type&quot;:&quot;FIGURE_OBJECT&quot;,&quot;id&quot;:&quot;dde7720a-1432-4954-8e38-9acd37df52e9&quot;,&quot;name&quot;:&quot;T cell receptor (TCR)&quot;,&quot;relativeTransform&quot;:{&quot;translate&quot;:{&quot;x&quot;:-0.8852936010236063,&quot;y&quot;:-18.68175793088635},&quot;rotate&quot;:0,&quot;skewX&quot;:0,&quot;scale&quot;:{&quot;x&quot;:0.0661215623963933,&quot;y&quot;:0.0661215623963932}},&quot;opacity&quot;:1,&quot;image&quot;:{&quot;url&quot;:&quot;https://icons.biorender.com/biorender/5d9b3f39dd52690004bb5493/20191007134110/image/t-cell-receptor.png&quot;,&quot;size&quot;:{&quot;x&quot;:88,&quot;y&quot;:250},&quot;isPremium&quot;:false},&quot;source&quot;:{&quot;id&quot;:&quot;5d9b3f39dd52690004bb5493&quot;,&quot;type&quot;:&quot;ASSETS&quot;},&quot;pathStyles&quot;:[{&quot;type&quot;:&quot;FILL&quot;,&quot;fillStyle&quot;:&quot;rgb(0,0,0)&quot;}],&quot;isLocked&quot;:false,&quot;parent&quot;:{&quot;type&quot;:&quot;CHILD&quot;,&quot;parentId&quot;:&quot;0d6f7d38-39a3-4597-b305-0d8642dbc2fb&quot;,&quot;order&quot;:&quot;2&quot;}},&quot;78fe3484-d96e-4893-8e20-25d8ef751870&quot;:{&quot;type&quot;:&quot;FIGURE_OBJECT&quot;,&quot;id&quot;:&quot;78fe3484-d96e-4893-8e20-25d8ef751870&quot;,&quot;name&quot;:&quot;T cell receptor (TCR)&quot;,&quot;relativeTransform&quot;:{&quot;translate&quot;:{&quot;x&quot;:-1.2974534754998883,&quot;y&quot;:18.79207397509158},&quot;rotate&quot;:0,&quot;skewX&quot;:0,&quot;scale&quot;:{&quot;x&quot;:0.0652390340427497,&quot;y&quot;:-0.0652390340427497}},&quot;opacity&quot;:1,&quot;image&quot;:{&quot;url&quot;:&quot;https://icons.biorender.com/biorender/5d9b3f39dd52690004bb5493/20191007134110/image/t-cell-receptor.png&quot;,&quot;size&quot;:{&quot;x&quot;:88,&quot;y&quot;:250},&quot;isPremium&quot;:false},&quot;source&quot;:{&quot;id&quot;:&quot;5d9b3f39dd52690004bb5493&quot;,&quot;type&quot;:&quot;ASSETS&quot;},&quot;pathStyles&quot;:[{&quot;type&quot;:&quot;FILL&quot;,&quot;fillStyle&quot;:&quot;rgb(0,0,0)&quot;}],&quot;isLocked&quot;:false,&quot;parent&quot;:{&quot;type&quot;:&quot;CHILD&quot;,&quot;parentId&quot;:&quot;0d6f7d38-39a3-4597-b305-0d8642dbc2fb&quot;,&quot;order&quot;:&quot;3&quot;}},&quot;79ad385e-20f7-40d7-8174-ab1252db91c0&quot;:{&quot;type&quot;:&quot;FIGURE_OBJECT&quot;,&quot;id&quot;:&quot;79ad385e-20f7-40d7-8174-ab1252db91c0&quot;,&quot;name&quot;:&quot;T cell receptor (TCR)&quot;,&quot;relativeTransform&quot;:{&quot;translate&quot;:{&quot;x&quot;:16.75570208020622,&quot;y&quot;:11.95709645647959},&quot;rotate&quot;:-1.0370071059922472,&quot;skewX&quot;:-2.3038346126325146e-16,&quot;scale&quot;:{&quot;x&quot;:0.0613637741540065,&quot;y&quot;:-0.0613637741540065}},&quot;opacity&quot;:1,&quot;image&quot;:{&quot;url&quot;:&quot;https://icons.biorender.com/biorender/5d9b3f39dd52690004bb5493/20191007134110/image/t-cell-receptor.png&quot;,&quot;size&quot;:{&quot;x&quot;:88,&quot;y&quot;:250},&quot;isPremium&quot;:false},&quot;source&quot;:{&quot;id&quot;:&quot;5d9b3f39dd52690004bb5493&quot;,&quot;type&quot;:&quot;ASSETS&quot;},&quot;pathStyles&quot;:[{&quot;type&quot;:&quot;FILL&quot;,&quot;fillStyle&quot;:&quot;rgb(0,0,0)&quot;}],&quot;isLocked&quot;:false,&quot;parent&quot;:{&quot;type&quot;:&quot;CHILD&quot;,&quot;parentId&quot;:&quot;0d6f7d38-39a3-4597-b305-0d8642dbc2fb&quot;,&quot;order&quot;:&quot;5&quot;}},&quot;1f28497b-f730-4008-8a67-5ae76742bea6&quot;:{&quot;type&quot;:&quot;FIGURE_OBJECT&quot;,&quot;id&quot;:&quot;1f28497b-f730-4008-8a67-5ae76742bea6&quot;,&quot;name&quot;:&quot;T cell receptor (TCR)&quot;,&quot;relativeTransform&quot;:{&quot;translate&quot;:{&quot;x&quot;:-16.644707784699733,&quot;y&quot;:9.715382074685863},&quot;rotate&quot;:-2.104585547597546,&quot;skewX&quot;:-5.061454830783556e-16,&quot;scale&quot;:{&quot;x&quot;:0.0621305387747826,&quot;y&quot;:0.0621305387747826}},&quot;opacity&quot;:1,&quot;image&quot;:{&quot;url&quot;:&quot;https://icons.biorender.com/biorender/5d9b3f39dd52690004bb5493/20191007134110/image/t-cell-receptor.png&quot;,&quot;size&quot;:{&quot;x&quot;:88,&quot;y&quot;:250},&quot;isPremium&quot;:false},&quot;source&quot;:{&quot;id&quot;:&quot;5d9b3f39dd52690004bb5493&quot;,&quot;type&quot;:&quot;ASSETS&quot;},&quot;pathStyles&quot;:[{&quot;type&quot;:&quot;FILL&quot;,&quot;fillStyle&quot;:&quot;rgb(0,0,0)&quot;}],&quot;isLocked&quot;:false,&quot;parent&quot;:{&quot;type&quot;:&quot;CHILD&quot;,&quot;parentId&quot;:&quot;0d6f7d38-39a3-4597-b305-0d8642dbc2fb&quot;,&quot;order&quot;:&quot;6&quot;}},&quot;51018087-a224-4b7a-a519-633ccb0d4ab0&quot;:{&quot;type&quot;:&quot;FIGURE_OBJECT&quot;,&quot;id&quot;:&quot;51018087-a224-4b7a-a519-633ccb0d4ab0&quot;,&quot;name&quot;:&quot;T cell receptor (TCR)&quot;,&quot;relativeTransform&quot;:{&quot;translate&quot;:{&quot;x&quot;:17.321252694012962,&quot;y&quot;:-10.962832032887846},&quot;rotate&quot;:1.0370071059922465,&quot;skewX&quot;:0,&quot;scale&quot;:{&quot;x&quot;:0.0689416604822267,&quot;y&quot;:0.0689416604822267}},&quot;opacity&quot;:1,&quot;image&quot;:{&quot;url&quot;:&quot;/api/legacy-url/tr7ui1snneahevcecp6v/1570455670/svg&quot;,&quot;size&quot;:{&quot;x&quot;:88,&quot;y&quot;:250},&quot;isPremium&quot;:false,&quot;isSignedURL&quot;:true},&quot;source&quot;:{&quot;id&quot;:&quot;5d9b3f39dd52690004bb5493&quot;,&quot;type&quot;:&quot;UNKNOWN&quot;,&quot;version&quot;:&quot;1570455670&quot;,&quot;legacyId&quot;:&quot;tr7ui1snneahevcecp6v&quot;,&quot;format&quot;:&quot;svg&quot;},&quot;pathStyles&quot;:[{&quot;type&quot;:&quot;FILL&quot;,&quot;fillStyle&quot;:&quot;rgb(0,0,0)&quot;}],&quot;isLocked&quot;:false,&quot;parent&quot;:{&quot;type&quot;:&quot;CHILD&quot;,&quot;parentId&quot;:&quot;0d6f7d38-39a3-4597-b305-0d8642dbc2fb&quot;,&quot;order&quot;:&quot;7&quot;}},&quot;61c8c969-1a7e-4bcc-a21c-bd31bf0c6240&quot;:{&quot;type&quot;:&quot;FIGURE_OBJECT&quot;,&quot;id&quot;:&quot;61c8c969-1a7e-4bcc-a21c-bd31bf0c6240&quot;,&quot;name&quot;:&quot;T cell receptor (TCR)&quot;,&quot;relativeTransform&quot;:{&quot;translate&quot;:{&quot;x&quot;:-17.61381825840124,&quot;y&quot;:-9.229769614009845},&quot;rotate&quot;:2.1045855475975466,&quot;skewX&quot;:3.8920842319473546e-16,&quot;scale&quot;:{&quot;x&quot;:0.0666911184362663,&quot;y&quot;:-0.0666911184362664}},&quot;opacity&quot;:1,&quot;image&quot;:{&quot;url&quot;:&quot;https://icons.biorender.com/biorender/5d9b3f39dd52690004bb5493/20191007134110/image/t-cell-receptor.png&quot;,&quot;size&quot;:{&quot;x&quot;:88,&quot;y&quot;:250},&quot;isPremium&quot;:false},&quot;source&quot;:{&quot;id&quot;:&quot;5d9b3f39dd52690004bb5493&quot;,&quot;type&quot;:&quot;ASSETS&quot;},&quot;pathStyles&quot;:[{&quot;type&quot;:&quot;FILL&quot;,&quot;fillStyle&quot;:&quot;rgb(0,0,0)&quot;}],&quot;isLocked&quot;:false,&quot;parent&quot;:{&quot;type&quot;:&quot;CHILD&quot;,&quot;parentId&quot;:&quot;0d6f7d38-39a3-4597-b305-0d8642dbc2fb&quot;,&quot;order&quot;:&quot;8&quot;}},&quot;876312f1-7fa9-45d0-9976-e81a9e92f805&quot;:{&quot;type&quot;:&quot;FIGURE_OBJECT&quot;,&quot;id&quot;:&quot;876312f1-7fa9-45d0-9976-e81a9e92f805&quot;,&quot;name&quot;:&quot;Lymphocyte (B-cell, with antibodies)&quot;,&quot;relativeTransform&quot;:{&quot;translate&quot;:{&quot;x&quot;:25.230111897938485,&quot;y&quot;:10.877659394450689},&quot;rotate&quot;:0,&quot;skewX&quot;:0,&quot;scale&quot;:{&quot;x&quot;:1.0333278524933518,&quot;y&quot;:1.0333278524933518}},&quot;opacity&quot;:1,&quot;source&quot;:{&quot;type&quot;:&quot;ASSETS&quot;},&quot;pathStyles&quot;:[{&quot;type&quot;:&quot;FILL&quot;,&quot;fillStyle&quot;:&quot;rgb(0,0,0)&quot;}],&quot;isLocked&quot;:false,&quot;parent&quot;:{&quot;type&quot;:&quot;CHILD&quot;,&quot;parentId&quot;:&quot;04b6aa6f-31a0-4c7b-be78-12f520f06f49&quot;,&quot;order&quot;:&quot;07&quot;}},&quot;72e89f1b-fb3d-46be-a3a5-5d1c755890c4&quot;:{&quot;type&quot;:&quot;FIGURE_OBJECT&quot;,&quot;id&quot;:&quot;72e89f1b-fb3d-46be-a3a5-5d1c755890c4&quot;,&quot;name&quot;:&quot;B-cell&quot;,&quot;relativeTransform&quot;:{&quot;translate&quot;:{&quot;x&quot;:-0.550257629908824,&quot;y&quot;:-0.253333238293024},&quot;rotate&quot;:0,&quot;skewX&quot;:0,&quot;scale&quot;:{&quot;x&quot;:0.2111110319108605,&quot;y&quot;:0.2111110319108606}},&quot;opacity&quot;:1,&quot;image&quot;:{&quot;url&quot;:&quot;https://icons.biorender.com/biorender/5d8a2bc2977db30004d0ce75/lymphocyte-b-cell-1.png&quot;,&quot;size&quot;:{&quot;x&quot;:154,&quot;y&quot;:154},&quot;isPremium&quot;:false},&quot;source&quot;:{&quot;id&quot;:&quot;5be1c4badf7f0b120034ba5b&quot;,&quot;type&quot;:&quot;ASSETS&quot;},&quot;pathStyles&quot;:[{&quot;type&quot;:&quot;FILL&quot;,&quot;fillStyle&quot;:&quot;rgb(0,0,0)&quot;}],&quot;isLocked&quot;:false,&quot;parent&quot;:{&quot;type&quot;:&quot;CHILD&quot;,&quot;parentId&quot;:&quot;876312f1-7fa9-45d0-9976-e81a9e92f805&quot;,&quot;order&quot;:&quot;1&quot;}},&quot;17ef2fb8-202d-42cf-8380-d24cc28408aa&quot;:{&quot;type&quot;:&quot;FIGURE_OBJECT&quot;,&quot;id&quot;:&quot;17ef2fb8-202d-42cf-8380-d24cc28408aa&quot;,&quot;name&quot;:&quot;Antibody (membrane-bound)&quot;,&quot;relativeTransform&quot;:{&quot;translate&quot;:{&quot;x&quot;:1.4601689662885016,&quot;y&quot;:-19.811958379326988},&quot;rotate&quot;:0,&quot;skewX&quot;:0,&quot;scale&quot;:{&quot;x&quot;:0.0422222063821721,&quot;y&quot;:0.04547006841157}},&quot;opacity&quot;:1,&quot;image&quot;:{&quot;url&quot;:&quot;https://icons.cdn.biorender.com/biorender/5b43adeb813b770014a88b5a/5b43ad65813b770014a88b4e.png&quot;,&quot;size&quot;:{&quot;x&quot;:182,&quot;y&quot;:269},&quot;isPremium&quot;:false},&quot;source&quot;:{&quot;type&quot;:&quot;ASSETS&quot;,&quot;id&quot;:&quot;5b43adeb813b770014a88b5a&quot;},&quot;pathStyles&quot;:[{&quot;type&quot;:&quot;FILL&quot;,&quot;fillStyle&quot;:&quot;rgb(0,0,0)&quot;}],&quot;isLocked&quot;:false,&quot;parent&quot;:{&quot;type&quot;:&quot;CHILD&quot;,&quot;parentId&quot;:&quot;876312f1-7fa9-45d0-9976-e81a9e92f805&quot;,&quot;order&quot;:&quot;2&quot;}},&quot;ba96c701-90b6-4ebd-a687-580ff38632fb&quot;:{&quot;type&quot;:&quot;FIGURE_OBJECT&quot;,&quot;id&quot;:&quot;ba96c701-90b6-4ebd-a687-580ff38632fb&quot;,&quot;name&quot;:&quot;Antibody (membrane-bound)&quot;,&quot;relativeTransform&quot;:{&quot;translate&quot;:{&quot;x&quot;:17.37606798753494,&quot;y&quot;:-9.254894171066649},&quot;rotate&quot;:1.023112007519076,&quot;skewX&quot;:0,&quot;scale&quot;:{&quot;x&quot;:0.0422222063821721,&quot;y&quot;:0.04547006841157}},&quot;opacity&quot;:1,&quot;image&quot;:{&quot;url&quot;:&quot;https://icons.cdn.biorender.com/biorender/5b43adeb813b770014a88b5a/5b43ad65813b770014a88b4e.png&quot;,&quot;size&quot;:{&quot;x&quot;:182,&quot;y&quot;:269},&quot;isPremium&quot;:false},&quot;source&quot;:{&quot;type&quot;:&quot;ASSETS&quot;,&quot;id&quot;:&quot;5b43adeb813b770014a88b5a&quot;},&quot;pathStyles&quot;:[{&quot;type&quot;:&quot;FILL&quot;,&quot;fillStyle&quot;:&quot;rgb(0,0,0)&quot;}],&quot;isLocked&quot;:false,&quot;parent&quot;:{&quot;type&quot;:&quot;CHILD&quot;,&quot;parentId&quot;:&quot;876312f1-7fa9-45d0-9976-e81a9e92f805&quot;,&quot;order&quot;:&quot;3&quot;}},&quot;0135405e-7640-48c5-81d7-3bca8c49fb79&quot;:{&quot;type&quot;:&quot;FIGURE_OBJECT&quot;,&quot;id&quot;:&quot;0135405e-7640-48c5-81d7-3bca8c49fb79&quot;,&quot;name&quot;:&quot;Antibody (membrane-bound)&quot;,&quot;relativeTransform&quot;:{&quot;translate&quot;:{&quot;x&quot;:15.100188238976168,&quot;y&quot;:12.668364972609636},&quot;rotate&quot;:2.2080160366980266,&quot;skewX&quot;:-2.426007660272118e-16,&quot;scale&quot;:{&quot;x&quot;:0.0422222063821721,&quot;y&quot;:0.04547006841157}},&quot;opacity&quot;:1,&quot;image&quot;:{&quot;url&quot;:&quot;https://icons.cdn.biorender.com/biorender/5b43adeb813b770014a88b5a/5b43ad65813b770014a88b4e.png&quot;,&quot;size&quot;:{&quot;x&quot;:182,&quot;y&quot;:269},&quot;isPremium&quot;:false},&quot;source&quot;:{&quot;type&quot;:&quot;ASSETS&quot;,&quot;id&quot;:&quot;5b43adeb813b770014a88b5a&quot;},&quot;pathStyles&quot;:[{&quot;type&quot;:&quot;FILL&quot;,&quot;fillStyle&quot;:&quot;rgb(0,0,0)&quot;}],&quot;isLocked&quot;:false,&quot;parent&quot;:{&quot;type&quot;:&quot;CHILD&quot;,&quot;parentId&quot;:&quot;876312f1-7fa9-45d0-9976-e81a9e92f805&quot;,&quot;order&quot;:&quot;5&quot;}},&quot;fe992898-3c7a-458f-8069-6cb728fda7d3&quot;:{&quot;type&quot;:&quot;FIGURE_OBJECT&quot;,&quot;id&quot;:&quot;fe992898-3c7a-458f-8069-6cb728fda7d3&quot;,&quot;name&quot;:&quot;Antibody (membrane-bound)&quot;,&quot;relativeTransform&quot;:{&quot;translate&quot;:{&quot;x&quot;:0.81059656040873,&quot;y&quot;:19.811958379326875},&quot;rotate&quot;:3.141592653589793,&quot;skewX&quot;:0,&quot;scale&quot;:{&quot;x&quot;:0.0422222063821721,&quot;y&quot;:0.04547006841157}},&quot;opacity&quot;:1,&quot;image&quot;:{&quot;url&quot;:&quot;https://icons.cdn.biorender.com/biorender/5b43adeb813b770014a88b5a/5b43ad65813b770014a88b4e.png&quot;,&quot;size&quot;:{&quot;x&quot;:182,&quot;y&quot;:269},&quot;isPremium&quot;:false},&quot;source&quot;:{&quot;type&quot;:&quot;ASSETS&quot;,&quot;id&quot;:&quot;5b43adeb813b770014a88b5a&quot;},&quot;pathStyles&quot;:[{&quot;type&quot;:&quot;FILL&quot;,&quot;fillStyle&quot;:&quot;rgb(0,0,0)&quot;}],&quot;isLocked&quot;:false,&quot;parent&quot;:{&quot;type&quot;:&quot;CHILD&quot;,&quot;parentId&quot;:&quot;876312f1-7fa9-45d0-9976-e81a9e92f805&quot;,&quot;order&quot;:&quot;6&quot;}},&quot;56be51c1-dbd5-4e6f-a628-89f29372d92d&quot;:{&quot;type&quot;:&quot;FIGURE_OBJECT&quot;,&quot;id&quot;:&quot;56be51c1-dbd5-4e6f-a628-89f29372d92d&quot;,&quot;name&quot;:&quot;Antibody (membrane-bound)&quot;,&quot;relativeTransform&quot;:{&quot;translate&quot;:{&quot;x&quot;:-17.376067987535023,&quot;y&quot;:-9.25489446820495},&quot;rotate&quot;:2.1184806460707173,&quot;skewX&quot;:6.108652381980153e-17,&quot;scale&quot;:{&quot;x&quot;:0.0422222063821721,&quot;y&quot;:-0.04547006841157}},&quot;opacity&quot;:1,&quot;image&quot;:{&quot;url&quot;:&quot;https://icons.cdn.biorender.com/biorender/5b43adeb813b770014a88b5a/5b43ad65813b770014a88b4e.png&quot;,&quot;size&quot;:{&quot;x&quot;:182,&quot;y&quot;:269},&quot;isPremium&quot;:false},&quot;source&quot;:{&quot;type&quot;:&quot;ASSETS&quot;,&quot;id&quot;:&quot;5b43adeb813b770014a88b5a&quot;},&quot;pathStyles&quot;:[{&quot;type&quot;:&quot;FILL&quot;,&quot;fillStyle&quot;:&quot;rgb(0,0,0)&quot;}],&quot;isLocked&quot;:false,&quot;parent&quot;:{&quot;type&quot;:&quot;CHILD&quot;,&quot;parentId&quot;:&quot;876312f1-7fa9-45d0-9976-e81a9e92f805&quot;,&quot;order&quot;:&quot;7&quot;}},&quot;c72ed26e-6181-47b2-877f-bf06e0750649&quot;:{&quot;type&quot;:&quot;FIGURE_OBJECT&quot;,&quot;id&quot;:&quot;c72ed26e-6181-47b2-877f-bf06e0750649&quot;,&quot;name&quot;:&quot;Antibody (membrane-bound)&quot;,&quot;relativeTransform&quot;:{&quot;translate&quot;:{&quot;x&quot;:-16.405104185699972,&quot;y&quot;:12.34238014183602},&quot;rotate&quot;:0.9335766168917671,&quot;skewX&quot;:-8.517206749732328e-16,&quot;scale&quot;:{&quot;x&quot;:0.0422222063821721,&quot;y&quot;:-0.04547006841157}},&quot;opacity&quot;:1,&quot;image&quot;:{&quot;url&quot;:&quot;https://icons.cdn.biorender.com/biorender/5b43adeb813b770014a88b5a/5b43ad65813b770014a88b4e.png&quot;,&quot;size&quot;:{&quot;x&quot;:182,&quot;y&quot;:269},&quot;isPremium&quot;:false},&quot;source&quot;:{&quot;type&quot;:&quot;ASSETS&quot;,&quot;id&quot;:&quot;5b43adeb813b770014a88b5a&quot;},&quot;pathStyles&quot;:[{&quot;type&quot;:&quot;FILL&quot;,&quot;fillStyle&quot;:&quot;rgb(0,0,0)&quot;}],&quot;isLocked&quot;:false,&quot;parent&quot;:{&quot;type&quot;:&quot;CHILD&quot;,&quot;parentId&quot;:&quot;876312f1-7fa9-45d0-9976-e81a9e92f805&quot;,&quot;order&quot;:&quot;8&quot;}},&quot;8832a431-aedd-48e5-a0b4-fbab37677e06&quot;:{&quot;type&quot;:&quot;FIGURE_OBJECT&quot;,&quot;id&quot;:&quot;8832a431-aedd-48e5-a0b4-fbab37677e06&quot;,&quot;name&quot;:&quot;HIV (genome 1)&quot;,&quot;relativeTransform&quot;:{&quot;translate&quot;:{&quot;x&quot;:74.67276063688507,&quot;y&quot;:-59.346800600585716},&quot;rotate&quot;:-1.5707963267948966,&quot;skewX&quot;:0,&quot;scale&quot;:{&quot;x&quot;:0.0780115647919339,&quot;y&quot;:0.0780115647919339}},&quot;opacity&quot;:1,&quot;image&quot;:{&quot;url&quot;:&quot;https://icons.biorender.com/biorender/5cf1809048bc020400d6b414/hiv-genome-1.png&quot;,&quot;size&quot;:{&quot;x&quot;:125,&quot;y&quot;:250},&quot;isPremium&quot;:false},&quot;source&quot;:{&quot;id&quot;:&quot;5cf1805348bc020400d6b40b&quot;,&quot;type&quot;:&quot;ASSETS&quot;},&quot;pathStyles&quot;:[{&quot;type&quot;:&quot;FILL&quot;,&quot;fillStyle&quot;:&quot;rgb(0,0,0)&quot;}],&quot;isLocked&quot;:false,&quot;parent&quot;:{&quot;type&quot;:&quot;CHILD&quot;,&quot;parentId&quot;:&quot;04b6aa6f-31a0-4c7b-be78-12f520f06f49&quot;,&quot;order&quot;:&quot;1&quot;}},&quot;fe804b54-45fb-422b-b258-593c973b3aa3&quot;:{&quot;type&quot;:&quot;FIGURE_OBJECT&quot;,&quot;id&quot;:&quot;fe804b54-45fb-422b-b258-593c973b3aa3&quot;,&quot;name&quot;:&quot;Virus (round 2)&quot;,&quot;relativeTransform&quot;:{&quot;translate&quot;:{&quot;x&quot;:4.537716652569866,&quot;y&quot;:-63.511530347851235},&quot;rotate&quot;:0,&quot;skewX&quot;:0,&quot;scale&quot;:{&quot;x&quot;:0.0903741294160818,&quot;y&quot;:0.0903741294160818}},&quot;opacity&quot;:1,&quot;image&quot;:{&quot;url&quot;:&quot;https://icons.biorender.com/biorender/5a32c43541f3060014913ac5/20180308183409/image/virus-round-2.png&quot;,&quot;size&quot;:{&quot;x&quot;:96,&quot;y&quot;:96},&quot;isPremium&quot;:false},&quot;source&quot;:{&quot;id&quot;:&quot;5a32c43541f3060014913ac5&quot;,&quot;type&quot;:&quot;ASSETS&quot;},&quot;pathStyles&quot;:[{&quot;type&quot;:&quot;FILL&quot;,&quot;fillStyle&quot;:&quot;rgb(0,0,0)&quot;}],&quot;isLocked&quot;:false,&quot;parent&quot;:{&quot;type&quot;:&quot;CHILD&quot;,&quot;parentId&quot;:&quot;04b6aa6f-31a0-4c7b-be78-12f520f06f49&quot;,&quot;order&quot;:&quot;11&quot;}},&quot;4496b98d-5694-4cd7-add3-457de281248a&quot;:{&quot;type&quot;:&quot;FIGURE_OBJECT&quot;,&quot;id&quot;:&quot;4496b98d-5694-4cd7-add3-457de281248a&quot;,&quot;name&quot;:&quot;Virus (round 2)&quot;,&quot;relativeTransform&quot;:{&quot;translate&quot;:{&quot;x&quot;:14.8199286386906,&quot;y&quot;:-68.30989594137428},&quot;rotate&quot;:0,&quot;skewX&quot;:0,&quot;scale&quot;:{&quot;x&quot;:0.0903741294160818,&quot;y&quot;:0.0903741294160818}},&quot;opacity&quot;:1,&quot;image&quot;:{&quot;url&quot;:&quot;https://icons.biorender.com/biorender/5a32c43541f3060014913ac5/20180308183409/image/virus-round-2.png&quot;,&quot;size&quot;:{&quot;x&quot;:96,&quot;y&quot;:96},&quot;isPremium&quot;:false},&quot;source&quot;:{&quot;id&quot;:&quot;5a32c43541f3060014913ac5&quot;,&quot;type&quot;:&quot;ASSETS&quot;},&quot;pathStyles&quot;:[{&quot;type&quot;:&quot;FILL&quot;,&quot;fillStyle&quot;:&quot;rgb(0,0,0)&quot;}],&quot;isLocked&quot;:false,&quot;parent&quot;:{&quot;type&quot;:&quot;CHILD&quot;,&quot;parentId&quot;:&quot;04b6aa6f-31a0-4c7b-be78-12f520f06f49&quot;,&quot;order&quot;:&quot;12&quot;}},&quot;8dcd8037-107a-4432-8dfd-cc4cf98d3d1f&quot;:{&quot;type&quot;:&quot;FIGURE_OBJECT&quot;,&quot;id&quot;:&quot;8dcd8037-107a-4432-8dfd-cc4cf98d3d1f&quot;,&quot;name&quot;:&quot;Virus (round 2)&quot;,&quot;relativeTransform&quot;:{&quot;translate&quot;:{&quot;x&quot;:8.650601447018387,&quot;y&quot;:-71.05181913767306},&quot;rotate&quot;:0,&quot;skewX&quot;:0,&quot;scale&quot;:{&quot;x&quot;:0.0903741294160818,&quot;y&quot;:0.0903741294160818}},&quot;opacity&quot;:1,&quot;image&quot;:{&quot;url&quot;:&quot;https://icons.biorender.com/biorender/5a32c43541f3060014913ac5/20180308183409/image/virus-round-2.png&quot;,&quot;size&quot;:{&quot;x&quot;:96,&quot;y&quot;:96},&quot;isPremium&quot;:false},&quot;source&quot;:{&quot;id&quot;:&quot;5a32c43541f3060014913ac5&quot;,&quot;type&quot;:&quot;ASSETS&quot;},&quot;pathStyles&quot;:[{&quot;type&quot;:&quot;FILL&quot;,&quot;fillStyle&quot;:&quot;rgb(0,0,0)&quot;}],&quot;isLocked&quot;:false,&quot;parent&quot;:{&quot;type&quot;:&quot;CHILD&quot;,&quot;parentId&quot;:&quot;04b6aa6f-31a0-4c7b-be78-12f520f06f49&quot;,&quot;order&quot;:&quot;15&quot;}},&quot;397d5702-462a-4767-aec6-4d3220f0f1af&quot;:{&quot;type&quot;:&quot;FIGURE_OBJECT&quot;,&quot;id&quot;:&quot;397d5702-462a-4767-aec6-4d3220f0f1af&quot;,&quot;name&quot;:&quot;HIV (genome 1)&quot;,&quot;relativeTransform&quot;:{&quot;translate&quot;:{&quot;x&quot;:15.320760636884968,&quot;y&quot;:-53.87717738558866},&quot;rotate&quot;:-1.5707963267948966,&quot;skewX&quot;:0,&quot;scale&quot;:{&quot;x&quot;:0.0780115647919339,&quot;y&quot;:0.0780115647919339}},&quot;opacity&quot;:1,&quot;image&quot;:{&quot;url&quot;:&quot;https://icons.biorender.com/biorender/5cf1809048bc020400d6b414/hiv-genome-1.png&quot;,&quot;size&quot;:{&quot;x&quot;:125,&quot;y&quot;:250},&quot;isPremium&quot;:false},&quot;source&quot;:{&quot;id&quot;:&quot;5cf1805348bc020400d6b40b&quot;,&quot;type&quot;:&quot;ASSETS&quot;},&quot;pathStyles&quot;:[{&quot;type&quot;:&quot;FILL&quot;,&quot;fillStyle&quot;:&quot;rgb(0,0,0)&quot;}],&quot;isLocked&quot;:false,&quot;parent&quot;:{&quot;type&quot;:&quot;CHILD&quot;,&quot;parentId&quot;:&quot;04b6aa6f-31a0-4c7b-be78-12f520f06f49&quot;,&quot;order&quot;:&quot;16&quot;}},&quot;d72a4f6d-3b51-4799-a061-8a6a4bfa2302&quot;:{&quot;type&quot;:&quot;FIGURE_OBJECT&quot;,&quot;id&quot;:&quot;d72a4f6d-3b51-4799-a061-8a6a4bfa2302&quot;,&quot;name&quot;:&quot;Stem cell (hematopoietic)&quot;,&quot;relativeTransform&quot;:{&quot;translate&quot;:{&quot;x&quot;:77.87363087323605,&quot;y&quot;:7.0151904902952325},&quot;rotate&quot;:0,&quot;skewX&quot;:0,&quot;scale&quot;:{&quot;x&quot;:0.0606584820906398,&quot;y&quot;:0.0606584820906398}},&quot;opacity&quot;:1,&quot;image&quot;:{&quot;url&quot;:&quot;https://icons.biorender.com/biorender/5b4df95d4f626900144a414e/20181107171134/image/stem-cell-hematopoietic.png&quot;,&quot;size&quot;:{&quot;x&quot;:493,&quot;y&quot;:494},&quot;isPremium&quot;:false},&quot;source&quot;:{&quot;id&quot;:&quot;5b4df95d4f626900144a414e&quot;,&quot;type&quot;:&quot;ASSETS&quot;},&quot;pathStyles&quot;:[{&quot;type&quot;:&quot;FILL&quot;,&quot;fillStyle&quot;:&quot;rgb(0,0,0)&quot;}],&quot;isLocked&quot;:false,&quot;parent&quot;:{&quot;type&quot;:&quot;CHILD&quot;,&quot;parentId&quot;:&quot;04b6aa6f-31a0-4c7b-be78-12f520f06f49&quot;,&quot;order&quot;:&quot;17&quot;}},&quot;fa0f9758-693b-4d52-9088-182a9b5f1757&quot;:{&quot;type&quot;:&quot;FIGURE_OBJECT&quot;,&quot;id&quot;:&quot;fa0f9758-693b-4d52-9088-182a9b5f1757&quot;,&quot;relativeTransform&quot;:{&quot;translate&quot;:{&quot;x&quot;:-101.21033926909364,&quot;y&quot;:-56.467454586092686},&quot;rotate&quot;:0,&quot;skewX&quot;:0,&quot;scale&quot;:{&quot;x&quot;:1,&quot;y&quot;:1}},&quot;opacity&quot;:1,&quot;path&quot;:{&quot;type&quot;:&quot;POLY_LINE&quot;,&quot;points&quot;:[{&quot;x&quot;:-10.502975768799956,&quot;y&quot;:0},{&quot;x&quot;:10.50297576880007,&quot;y&quot;:0}],&quot;closed&quot;:false},&quot;pathStyles&quot;:[{&quot;type&quot;:&quot;FILL&quot;,&quot;fillStyle&quot;:&quot;transparent&quot;},{&quot;type&quot;:&quot;STROKE&quot;,&quot;strokeStyle&quot;:&quot;#232323&quot;,&quot;lineWidth&quot;:1,&quot;lineJoin&quot;:&quot;round&quot;}],&quot;pathMarkers&quot;:{&quot;markerEnd&quot;:{&quot;type&quot;:&quot;PATH&quot;,&quot;units&quot;:{&quot;type&quot;:&quot;STROKE_WIDTH&quot;,&quot;scale&quot;:0.7},&quot;orient&quot;:{&quot;type&quot;:&quot;CLIPPED_CHORD&quot;},&quot;clipDistance&quot;:4,&quot;name&quot;:&quot;arrow&quot;,&quot;relativeTransform&quot;:{&quot;translate&quot;:{&quot;x&quot;:0,&quot;y&quot;:0},&quot;rotate&quot;:0,&quot;skewX&quot;:0,&quot;scale&quot;:{&quot;x&quot;:1,&quot;y&quot;:1}},&quot;path&quot;:{&quot;type&quot;:&quot;SPLINE&quot;,&quot;spline&quot;:{&quot;points&quot;:[{&quot;x&quot;:0,&quot;y&quot;:0,&quot;isEndPoint&quot;:true},{&quot;x&quot;:-5,&quot;y&quot;:-2.5,&quot;isEndPoint&quot;:true},{&quot;x&quot;:-5,&quot;y&quot;:2.5,&quot;isEndPoint&quot;:true}],&quot;closed&quot;:true}},&quot;pathStyles&quot;:[{&quot;type&quot;:&quot;FILL&quot;,&quot;fillStyle&quot;:&quot;context-stroke-flat&quot;}]}},&quot;isLocked&quot;:false,&quot;parent&quot;:{&quot;type&quot;:&quot;CHILD&quot;,&quot;parentId&quot;:&quot;04b6aa6f-31a0-4c7b-be78-12f520f06f49&quot;,&quot;order&quot;:&quot;2&quot;}},&quot;c42f2ef0-a18d-4499-838f-cdf6da962ae8&quot;:{&quot;type&quot;:&quot;FIGURE_OBJECT&quot;,&quot;id&quot;:&quot;c42f2ef0-a18d-4499-838f-cdf6da962ae8&quot;,&quot;relativeTransform&quot;:{&quot;translate&quot;:{&quot;x&quot;:-29.09182525011157,&quot;y&quot;:-80.51494043929279},&quot;rotate&quot;:0,&quot;skewX&quot;:0,&quot;scale&quot;:{&quot;x&quot;:1,&quot;y&quot;:1}},&quot;opacity&quot;:1,&quot;path&quot;:{&quot;type&quot;:&quot;POLY_LINE&quot;,&quot;points&quot;:[{&quot;x&quot;:26.468677044743302,&quot;y&quot;:7.943166595227353},{&quot;x&quot;:0.2627767423339851,&quot;y&quot;:-7.943166595227353},{&quot;x&quot;:-26.468677044743433,&quot;y&quot;:7.943166595227353}],&quot;closed&quot;:false},&quot;pathStyles&quot;:[{&quot;type&quot;:&quot;FILL&quot;,&quot;fillStyle&quot;:&quot;transparent&quot;},{&quot;type&quot;:&quot;STROKE&quot;,&quot;strokeStyle&quot;:&quot;rgba(192,56,48,1)&quot;,&quot;lineWidth&quot;:1,&quot;lineJoin&quot;:&quot;round&quot;,&quot;dashArray&quot;:[1,1]}],&quot;pathSmoothing&quot;:{&quot;type&quot;:&quot;CATMULL_SMOOTHING&quot;,&quot;smoothing&quot;:0.2},&quot;pathMarkers&quot;:{&quot;markerEnd&quot;:{&quot;type&quot;:&quot;PATH&quot;,&quot;units&quot;:{&quot;type&quot;:&quot;STROKE_WIDTH&quot;,&quot;scale&quot;:0.7},&quot;orient&quot;:{&quot;type&quot;:&quot;CLIPPED_CHORD&quot;},&quot;clipDistance&quot;:4,&quot;name&quot;:&quot;arrow&quot;,&quot;relativeTransform&quot;:{&quot;translate&quot;:{&quot;x&quot;:0,&quot;y&quot;:0},&quot;rotate&quot;:0,&quot;skewX&quot;:0,&quot;scale&quot;:{&quot;x&quot;:1,&quot;y&quot;:1}},&quot;path&quot;:{&quot;type&quot;:&quot;SPLINE&quot;,&quot;spline&quot;:{&quot;points&quot;:[{&quot;x&quot;:0,&quot;y&quot;:0,&quot;isEndPoint&quot;:true},{&quot;x&quot;:-5,&quot;y&quot;:-2.5,&quot;isEndPoint&quot;:true},{&quot;x&quot;:-5,&quot;y&quot;:2.5,&quot;isEndPoint&quot;:true}],&quot;closed&quot;:true}},&quot;pathStyles&quot;:[{&quot;type&quot;:&quot;FILL&quot;,&quot;fillStyle&quot;:&quot;context-stroke-flat&quot;}]}},&quot;isLocked&quot;:false,&quot;parent&quot;:{&quot;type&quot;:&quot;CHILD&quot;,&quot;parentId&quot;:&quot;04b6aa6f-31a0-4c7b-be78-12f520f06f49&quot;,&quot;order&quot;:&quot;21&quot;}},&quot;44b6eee6-4c78-479e-9fa2-95b63f15fe6c&quot;:{&quot;type&quot;:&quot;FIGURE_OBJECT&quot;,&quot;id&quot;:&quot;44b6eee6-4c78-479e-9fa2-95b63f15fe6c&quot;,&quot;relativeTransform&quot;:{&quot;translate&quot;:{&quot;x&quot;:46.07630292229357,&quot;y&quot;:-61.39129445552365},&quot;rotate&quot;:0,&quot;skewX&quot;:0,&quot;scale&quot;:{&quot;x&quot;:1,&quot;y&quot;:1}},&quot;opacity&quot;:1,&quot;path&quot;:{&quot;type&quot;:&quot;POLY_LINE&quot;,&quot;points&quot;:[{&quot;x&quot;:11.420447431298726,&quot;y&quot;:0},{&quot;x&quot;:-11.420447431298726,&quot;y&quot;:0}],&quot;closed&quot;:false},&quot;pathStyles&quot;:[{&quot;type&quot;:&quot;FILL&quot;,&quot;fillStyle&quot;:&quot;transparent&quot;},{&quot;type&quot;:&quot;STROKE&quot;,&quot;strokeStyle&quot;:&quot;#232323&quot;,&quot;lineWidth&quot;:1,&quot;lineJoin&quot;:&quot;round&quot;}],&quot;pathMarkers&quot;:{&quot;markerEnd&quot;:{&quot;type&quot;:&quot;PATH&quot;,&quot;units&quot;:{&quot;type&quot;:&quot;STROKE_WIDTH&quot;,&quot;scale&quot;:0.7},&quot;orient&quot;:{&quot;type&quot;:&quot;CLIPPED_CHORD&quot;},&quot;clipDistance&quot;:4,&quot;name&quot;:&quot;arrow&quot;,&quot;relativeTransform&quot;:{&quot;translate&quot;:{&quot;x&quot;:0,&quot;y&quot;:0},&quot;rotate&quot;:0,&quot;skewX&quot;:0,&quot;scale&quot;:{&quot;x&quot;:1,&quot;y&quot;:1}},&quot;path&quot;:{&quot;type&quot;:&quot;SPLINE&quot;,&quot;spline&quot;:{&quot;points&quot;:[{&quot;x&quot;:0,&quot;y&quot;:0,&quot;isEndPoint&quot;:true},{&quot;x&quot;:-5,&quot;y&quot;:-2.5,&quot;isEndPoint&quot;:true},{&quot;x&quot;:-5,&quot;y&quot;:2.5,&quot;isEndPoint&quot;:true}],&quot;closed&quot;:true}},&quot;pathStyles&quot;:[{&quot;type&quot;:&quot;FILL&quot;,&quot;fillStyle&quot;:&quot;context-stroke-flat&quot;}]}},&quot;isLocked&quot;:false,&quot;parent&quot;:{&quot;type&quot;:&quot;CHILD&quot;,&quot;parentId&quot;:&quot;04b6aa6f-31a0-4c7b-be78-12f520f06f49&quot;,&quot;order&quot;:&quot;22&quot;}},&quot;6e7a1eda-a85f-4386-8a25-3f58e0fa156a&quot;:{&quot;type&quot;:&quot;FIGURE_OBJECT&quot;,&quot;id&quot;:&quot;6e7a1eda-a85f-4386-8a25-3f58e0fa156a&quot;,&quot;relativeTransform&quot;:{&quot;translate&quot;:{&quot;x&quot;:103.82182715349346,&quot;y&quot;:6.502499999999827},&quot;rotate&quot;:0,&quot;skewX&quot;:0,&quot;scale&quot;:{&quot;x&quot;:1,&quot;y&quot;:1}},&quot;opacity&quot;:1,&quot;path&quot;:{&quot;type&quot;:&quot;POLY_LINE&quot;,&quot;points&quot;:[{&quot;x&quot;:7.968366514805211,&quot;y&quot;:0},{&quot;x&quot;:-7.968366514804984,&quot;y&quot;:0}],&quot;closed&quot;:false},&quot;pathStyles&quot;:[{&quot;type&quot;:&quot;FILL&quot;,&quot;fillStyle&quot;:&quot;transparent&quot;},{&quot;type&quot;:&quot;STROKE&quot;,&quot;strokeStyle&quot;:&quot;#232323&quot;,&quot;lineWidth&quot;:1.1284461152882206,&quot;lineJoin&quot;:&quot;round&quot;}],&quot;pathMarkers&quot;:{&quot;markerEnd&quot;:{&quot;type&quot;:&quot;PATH&quot;,&quot;units&quot;:{&quot;type&quot;:&quot;STROKE_WIDTH&quot;,&quot;scale&quot;:0.7},&quot;orient&quot;:{&quot;type&quot;:&quot;CLIPPED_CHORD&quot;},&quot;clipDistance&quot;:4,&quot;name&quot;:&quot;arrow&quot;,&quot;relativeTransform&quot;:{&quot;translate&quot;:{&quot;x&quot;:0,&quot;y&quot;:0},&quot;rotate&quot;:0,&quot;skewX&quot;:0,&quot;scale&quot;:{&quot;x&quot;:1,&quot;y&quot;:1}},&quot;path&quot;:{&quot;type&quot;:&quot;SPLINE&quot;,&quot;spline&quot;:{&quot;points&quot;:[{&quot;x&quot;:0,&quot;y&quot;:0,&quot;isEndPoint&quot;:true},{&quot;x&quot;:-5,&quot;y&quot;:-2.5,&quot;isEndPoint&quot;:true},{&quot;x&quot;:-5,&quot;y&quot;:2.5,&quot;isEndPoint&quot;:true}],&quot;closed&quot;:true}},&quot;pathStyles&quot;:[{&quot;type&quot;:&quot;FILL&quot;,&quot;fillStyle&quot;:&quot;context-stroke-flat&quot;}]}},&quot;isLocked&quot;:false,&quot;parent&quot;:{&quot;type&quot;:&quot;CHILD&quot;,&quot;parentId&quot;:&quot;04b6aa6f-31a0-4c7b-be78-12f520f06f49&quot;,&quot;order&quot;:&quot;25&quot;}},&quot;e10aaeea-391c-4eaf-ae99-1e87398b6583&quot;:{&quot;type&quot;:&quot;FIGURE_OBJECT&quot;,&quot;id&quot;:&quot;e10aaeea-391c-4eaf-ae99-1e87398b6583&quot;,&quot;relativeTransform&quot;:{&quot;translate&quot;:{&quot;x&quot;:-68.62931503789353,&quot;y&quot;:-28.160999999999945},&quot;rotate&quot;:0,&quot;skewX&quot;:0,&quot;scale&quot;:{&quot;x&quot;:1,&quot;y&quot;:1}},&quot;opacity&quot;:1,&quot;path&quot;:{&quot;type&quot;:&quot;POLY_LINE&quot;,&quot;points&quot;:[{&quot;x&quot;:0,&quot;y&quot;:-5.246052677750754},{&quot;x&quot;:0,&quot;y&quot;:5.246052677750754}],&quot;closed&quot;:false},&quot;pathStyles&quot;:[{&quot;type&quot;:&quot;FILL&quot;,&quot;fillStyle&quot;:&quot;transparent&quot;},{&quot;type&quot;:&quot;STROKE&quot;,&quot;strokeStyle&quot;:&quot;#232323&quot;,&quot;lineWidth&quot;:1.0027568922305852,&quot;lineJoin&quot;:&quot;round&quot;}],&quot;pathMarkers&quot;:{&quot;markerEnd&quot;:{&quot;type&quot;:&quot;PATH&quot;,&quot;units&quot;:{&quot;type&quot;:&quot;STROKE_WIDTH&quot;,&quot;scale&quot;:0.7},&quot;orient&quot;:{&quot;type&quot;:&quot;CLIPPED_CHORD&quot;},&quot;clipDistance&quot;:4,&quot;name&quot;:&quot;arrow&quot;,&quot;relativeTransform&quot;:{&quot;translate&quot;:{&quot;x&quot;:0,&quot;y&quot;:0},&quot;rotate&quot;:0,&quot;skewX&quot;:0,&quot;scale&quot;:{&quot;x&quot;:1,&quot;y&quot;:1}},&quot;path&quot;:{&quot;type&quot;:&quot;SPLINE&quot;,&quot;spline&quot;:{&quot;points&quot;:[{&quot;x&quot;:0,&quot;y&quot;:0,&quot;isEndPoint&quot;:true},{&quot;x&quot;:-5,&quot;y&quot;:-2.5,&quot;isEndPoint&quot;:true},{&quot;x&quot;:-5,&quot;y&quot;:2.5,&quot;isEndPoint&quot;:true}],&quot;closed&quot;:true}},&quot;pathStyles&quot;:[{&quot;type&quot;:&quot;FILL&quot;,&quot;fillStyle&quot;:&quot;context-stroke-flat&quot;}]}},&quot;isLocked&quot;:false,&quot;parent&quot;:{&quot;type&quot;:&quot;CHILD&quot;,&quot;parentId&quot;:&quot;04b6aa6f-31a0-4c7b-be78-12f520f06f49&quot;,&quot;order&quot;:&quot;26&quot;}},&quot;51d1e211-b335-4517-a829-1ea250a029a0&quot;:{&quot;type&quot;:&quot;FIGURE_OBJECT&quot;,&quot;id&quot;:&quot;51d1e211-b335-4517-a829-1ea250a029a0&quot;,&quot;relativeTransform&quot;:{&quot;translate&quot;:{&quot;x&quot;:14.483315037893446,&quot;y&quot;:-28.160999999999945},&quot;rotate&quot;:0,&quot;skewX&quot;:0,&quot;scale&quot;:{&quot;x&quot;:1,&quot;y&quot;:1}},&quot;opacity&quot;:1,&quot;path&quot;:{&quot;type&quot;:&quot;POLY_LINE&quot;,&quot;points&quot;:[{&quot;x&quot;:0,&quot;y&quot;:-5.246052677750754},{&quot;x&quot;:0,&quot;y&quot;:5.246052677750754}],&quot;closed&quot;:false},&quot;pathStyles&quot;:[{&quot;type&quot;:&quot;FILL&quot;,&quot;fillStyle&quot;:&quot;transparent&quot;},{&quot;type&quot;:&quot;STROKE&quot;,&quot;strokeStyle&quot;:&quot;#232323&quot;,&quot;lineWidth&quot;:1.0027568922305852,&quot;lineJoin&quot;:&quot;round&quot;}],&quot;pathMarkers&quot;:{&quot;markerEnd&quot;:{&quot;type&quot;:&quot;PATH&quot;,&quot;units&quot;:{&quot;type&quot;:&quot;STROKE_WIDTH&quot;,&quot;scale&quot;:0.7},&quot;orient&quot;:{&quot;type&quot;:&quot;CLIPPED_CHORD&quot;},&quot;clipDistance&quot;:4,&quot;name&quot;:&quot;arrow&quot;,&quot;relativeTransform&quot;:{&quot;translate&quot;:{&quot;x&quot;:0,&quot;y&quot;:0},&quot;rotate&quot;:0,&quot;skewX&quot;:0,&quot;scale&quot;:{&quot;x&quot;:1,&quot;y&quot;:1}},&quot;path&quot;:{&quot;type&quot;:&quot;SPLINE&quot;,&quot;spline&quot;:{&quot;points&quot;:[{&quot;x&quot;:0,&quot;y&quot;:0,&quot;isEndPoint&quot;:true},{&quot;x&quot;:-5,&quot;y&quot;:-2.5,&quot;isEndPoint&quot;:true},{&quot;x&quot;:-5,&quot;y&quot;:2.5,&quot;isEndPoint&quot;:true}],&quot;closed&quot;:true}},&quot;pathStyles&quot;:[{&quot;type&quot;:&quot;FILL&quot;,&quot;fillStyle&quot;:&quot;context-stroke-flat&quot;}]}},&quot;isLocked&quot;:false,&quot;parent&quot;:{&quot;type&quot;:&quot;CHILD&quot;,&quot;parentId&quot;:&quot;04b6aa6f-31a0-4c7b-be78-12f520f06f49&quot;,&quot;order&quot;:&quot;27&quot;}},&quot;810e58f3-df9f-40c1-b248-f0b043409964&quot;:{&quot;type&quot;:&quot;FIGURE_OBJECT&quot;,&quot;id&quot;:&quot;810e58f3-df9f-40c1-b248-f0b043409964&quot;,&quot;relativeTransform&quot;:{&quot;translate&quot;:{&quot;x&quot;:77.87331503789356,&quot;y&quot;:28.73199999999997},&quot;rotate&quot;:0,&quot;skewX&quot;:0,&quot;scale&quot;:{&quot;x&quot;:1,&quot;y&quot;:1}},&quot;opacity&quot;:1,&quot;path&quot;:{&quot;type&quot;:&quot;POLY_LINE&quot;,&quot;points&quot;:[{&quot;x&quot;:0,&quot;y&quot;:-5.246052677750754},{&quot;x&quot;:0,&quot;y&quot;:5.246052677750754}],&quot;closed&quot;:false},&quot;pathStyles&quot;:[{&quot;type&quot;:&quot;FILL&quot;,&quot;fillStyle&quot;:&quot;transparent&quot;},{&quot;type&quot;:&quot;STROKE&quot;,&quot;strokeStyle&quot;:&quot;#232323&quot;,&quot;lineWidth&quot;:1.0027568922305852,&quot;lineJoin&quot;:&quot;round&quot;}],&quot;pathMarkers&quot;:{&quot;markerEnd&quot;:{&quot;type&quot;:&quot;PATH&quot;,&quot;units&quot;:{&quot;type&quot;:&quot;STROKE_WIDTH&quot;,&quot;scale&quot;:0.7},&quot;orient&quot;:{&quot;type&quot;:&quot;CLIPPED_CHORD&quot;},&quot;clipDistance&quot;:4,&quot;name&quot;:&quot;arrow&quot;,&quot;relativeTransform&quot;:{&quot;translate&quot;:{&quot;x&quot;:0,&quot;y&quot;:0},&quot;rotate&quot;:0,&quot;skewX&quot;:0,&quot;scale&quot;:{&quot;x&quot;:1,&quot;y&quot;:1}},&quot;path&quot;:{&quot;type&quot;:&quot;SPLINE&quot;,&quot;spline&quot;:{&quot;points&quot;:[{&quot;x&quot;:0,&quot;y&quot;:0,&quot;isEndPoint&quot;:true},{&quot;x&quot;:-5,&quot;y&quot;:-2.5,&quot;isEndPoint&quot;:true},{&quot;x&quot;:-5,&quot;y&quot;:2.5,&quot;isEndPoint&quot;:true}],&quot;closed&quot;:true}},&quot;pathStyles&quot;:[{&quot;type&quot;:&quot;FILL&quot;,&quot;fillStyle&quot;:&quot;context-stroke-flat&quot;}]}},&quot;isLocked&quot;:false,&quot;parent&quot;:{&quot;type&quot;:&quot;CHILD&quot;,&quot;parentId&quot;:&quot;04b6aa6f-31a0-4c7b-be78-12f520f06f49&quot;,&quot;order&quot;:&quot;3&quot;}},&quot;f48dc465-06f9-482e-b6ae-13c34906d07d&quot;:{&quot;type&quot;:&quot;FIGURE_OBJECT&quot;,&quot;id&quot;:&quot;f48dc465-06f9-482e-b6ae-13c34906d07d&quot;,&quot;relativeTransform&quot;:{&quot;translate&quot;:{&quot;x&quot;:14.483315037893446,&quot;y&quot;:37},&quot;rotate&quot;:0,&quot;skewX&quot;:0,&quot;scale&quot;:{&quot;x&quot;:1,&quot;y&quot;:1}},&quot;opacity&quot;:1,&quot;path&quot;:{&quot;type&quot;:&quot;POLY_LINE&quot;,&quot;points&quot;:[{&quot;x&quot;:0,&quot;y&quot;:-5.246052677750754},{&quot;x&quot;:0,&quot;y&quot;:5.246052677750754}],&quot;closed&quot;:false},&quot;pathStyles&quot;:[{&quot;type&quot;:&quot;FILL&quot;,&quot;fillStyle&quot;:&quot;transparent&quot;},{&quot;type&quot;:&quot;STROKE&quot;,&quot;strokeStyle&quot;:&quot;#232323&quot;,&quot;lineWidth&quot;:1.0027568922305852,&quot;lineJoin&quot;:&quot;round&quot;}],&quot;pathMarkers&quot;:{&quot;markerEnd&quot;:{&quot;type&quot;:&quot;PATH&quot;,&quot;units&quot;:{&quot;type&quot;:&quot;STROKE_WIDTH&quot;,&quot;scale&quot;:0.7},&quot;orient&quot;:{&quot;type&quot;:&quot;CLIPPED_CHORD&quot;},&quot;clipDistance&quot;:4,&quot;name&quot;:&quot;arrow&quot;,&quot;relativeTransform&quot;:{&quot;translate&quot;:{&quot;x&quot;:0,&quot;y&quot;:0},&quot;rotate&quot;:0,&quot;skewX&quot;:0,&quot;scale&quot;:{&quot;x&quot;:1,&quot;y&quot;:1}},&quot;path&quot;:{&quot;type&quot;:&quot;SPLINE&quot;,&quot;spline&quot;:{&quot;points&quot;:[{&quot;x&quot;:0,&quot;y&quot;:0,&quot;isEndPoint&quot;:true},{&quot;x&quot;:-5,&quot;y&quot;:-2.5,&quot;isEndPoint&quot;:true},{&quot;x&quot;:-5,&quot;y&quot;:2.5,&quot;isEndPoint&quot;:true}],&quot;closed&quot;:true}},&quot;pathStyles&quot;:[{&quot;type&quot;:&quot;FILL&quot;,&quot;fillStyle&quot;:&quot;context-stroke-flat&quot;}]}},&quot;isLocked&quot;:false,&quot;parent&quot;:{&quot;type&quot;:&quot;CHILD&quot;,&quot;parentId&quot;:&quot;04b6aa6f-31a0-4c7b-be78-12f520f06f49&quot;,&quot;order&quot;:&quot;32&quot;}},&quot;5876b995-f8ba-4be9-9f69-3a4db3e55260&quot;:{&quot;type&quot;:&quot;FIGURE_OBJECT&quot;,&quot;id&quot;:&quot;5876b995-f8ba-4be9-9f69-3a4db3e55260&quot;,&quot;relativeTransform&quot;:{&quot;translate&quot;:{&quot;x&quot;:-25.682684962106492,&quot;y&quot;:-56.466999999999985},&quot;rotate&quot;:0,&quot;skewX&quot;:0,&quot;scale&quot;:{&quot;x&quot;:1,&quot;y&quot;:1}},&quot;opacity&quot;:1,&quot;path&quot;:{&quot;type&quot;:&quot;POLY_LINE&quot;,&quot;points&quot;:[{&quot;x&quot;:-20.055301220180127,&quot;y&quot;:0},{&quot;x&quot;:16,&quot;y&quot;:0}],&quot;closed&quot;:false},&quot;pathStyles&quot;:[{&quot;type&quot;:&quot;FILL&quot;,&quot;fillStyle&quot;:&quot;transparent&quot;},{&quot;type&quot;:&quot;STROKE&quot;,&quot;strokeStyle&quot;:&quot;rgba(192,56,48,1)&quot;,&quot;lineWidth&quot;:1,&quot;lineJoin&quot;:&quot;round&quot;}],&quot;pathMarkers&quot;:{&quot;markerEnd&quot;:{&quot;type&quot;:&quot;PATH&quot;,&quot;units&quot;:{&quot;type&quot;:&quot;STROKE_WIDTH&quot;,&quot;scale&quot;:0.7},&quot;orient&quot;:{&quot;type&quot;:&quot;CLIPPED_CHORD&quot;},&quot;clipDistance&quot;:4,&quot;name&quot;:&quot;arrow&quot;,&quot;relativeTransform&quot;:{&quot;translate&quot;:{&quot;x&quot;:0,&quot;y&quot;:0},&quot;rotate&quot;:0,&quot;skewX&quot;:0,&quot;scale&quot;:{&quot;x&quot;:1,&quot;y&quot;:1}},&quot;path&quot;:{&quot;type&quot;:&quot;SPLINE&quot;,&quot;spline&quot;:{&quot;points&quot;:[{&quot;x&quot;:0,&quot;y&quot;:0,&quot;isEndPoint&quot;:true},{&quot;x&quot;:-5,&quot;y&quot;:-2.5,&quot;isEndPoint&quot;:true},{&quot;x&quot;:-5,&quot;y&quot;:2.5,&quot;isEndPoint&quot;:true}],&quot;closed&quot;:true}},&quot;pathStyles&quot;:[{&quot;type&quot;:&quot;FILL&quot;,&quot;fillStyle&quot;:&quot;context-stroke-flat&quot;}]}},&quot;isLocked&quot;:false,&quot;parent&quot;:{&quot;type&quot;:&quot;CHILD&quot;,&quot;parentId&quot;:&quot;04b6aa6f-31a0-4c7b-be78-12f520f06f49&quot;,&quot;order&quot;:&quot;35&quot;}},&quot;a6a8e401-3f92-46f0-a5db-9ce7e0fe1e7c&quot;:{&quot;type&quot;:&quot;FIGURE_OBJECT&quot;,&quot;id&quot;:&quot;a6a8e401-3f92-46f0-a5db-9ce7e0fe1e7c&quot;,&quot;name&quot;:&quot;HIV 2&quot;,&quot;relativeTransform&quot;:{&quot;translate&quot;:{&quot;x&quot;:-27.857555571061344,&quot;y&quot;:-89.848366215655},&quot;rotate&quot;:0,&quot;skewX&quot;:0,&quot;scale&quot;:{&quot;x&quot;:1,&quot;y&quot;:1}},&quot;opacity&quot;:1,&quot;source&quot;:{&quot;type&quot;:&quot;ASSETS&quot;},&quot;pathStyles&quot;:[{&quot;type&quot;:&quot;FILL&quot;,&quot;fillStyle&quot;:&quot;rgb(0,0,0)&quot;}],&quot;isLocked&quot;:false,&quot;parent&quot;:{&quot;type&quot;:&quot;CHILD&quot;,&quot;parentId&quot;:&quot;04b6aa6f-31a0-4c7b-be78-12f520f06f49&quot;,&quot;order&quot;:&quot;4&quot;}},&quot;9983c715-e2f5-47e3-8a33-f3fa929a0f68&quot;:{&quot;type&quot;:&quot;FIGURE_OBJECT&quot;,&quot;id&quot;:&quot;9983c715-e2f5-47e3-8a33-f3fa929a0f68&quot;,&quot;relativeTransform&quot;:{&quot;translate&quot;:{&quot;x&quot;:-0.11244456019253679,&quot;y&quot;:-0.13634843511258854},&quot;rotate&quot;:0,&quot;skewX&quot;:0,&quot;scale&quot;:{&quot;x&quot;:1,&quot;y&quot;:1}},&quot;opacity&quot;:1,&quot;path&quot;:{&quot;type&quot;:&quot;ELLIPSE&quot;,&quot;size&quot;:{&quot;x&quot;:14.974819511426444,&quot;y&quot;:14.974819511426444}},&quot;pathStyles&quot;:[{&quot;type&quot;:&quot;FILL&quot;,&quot;fillStyle&quot;:&quot;rgba(255,235,235,1)&quot;},{&quot;type&quot;:&quot;STROKE&quot;,&quot;strokeStyle&quot;:&quot;transparent&quot;,&quot;lineWidth&quot;:0,&quot;lineJoin&quot;:&quot;round&quot;}],&quot;isLocked&quot;:false,&quot;parent&quot;:{&quot;type&quot;:&quot;CHILD&quot;,&quot;parentId&quot;:&quot;a6a8e401-3f92-46f0-a5db-9ce7e0fe1e7c&quot;,&quot;order&quot;:&quot;05&quot;}},&quot;d0fd1ede-3a79-4c0d-ae0e-3d0b638f4293&quot;:{&quot;type&quot;:&quot;FIGURE_OBJECT&quot;,&quot;id&quot;:&quot;d0fd1ede-3a79-4c0d-ae0e-3d0b638f4293&quot;,&quot;name&quot;:&quot;Viral envelope 2&quot;,&quot;relativeTransform&quot;:{&quot;translate&quot;:{&quot;x&quot;:0.030165332107646492,&quot;y&quot;:-0.05406920702789009},&quot;rotate&quot;:0,&quot;skewX&quot;:0,&quot;scale&quot;:{&quot;x&quot;:0.045821361887397,&quot;y&quot;:0.045821361887397}},&quot;opacity&quot;:1,&quot;image&quot;:{&quot;url&quot;:&quot;https://icons.biorender.com/biorender/5d3f050e4d6c910004dc43b0/viral-envelope-2.png&quot;,&quot;size&quot;:{&quot;x&quot;:354,&quot;y&quot;:354},&quot;isPremium&quot;:false},&quot;source&quot;:{&quot;id&quot;:&quot;5a5fe6b379d76e0014432c83&quot;,&quot;type&quot;:&quot;ASSETS&quot;},&quot;pathStyles&quot;:[{&quot;type&quot;:&quot;FILL&quot;,&quot;fillStyle&quot;:&quot;rgb(0,0,0)&quot;}],&quot;isLocked&quot;:false,&quot;parent&quot;:{&quot;type&quot;:&quot;CHILD&quot;,&quot;parentId&quot;:&quot;a6a8e401-3f92-46f0-a5db-9ce7e0fe1e7c&quot;,&quot;order&quot;:&quot;1&quot;}},&quot;7f1cc686-e967-416b-9b44-2d3f7c37e122&quot;:{&quot;type&quot;:&quot;FIGURE_OBJECT&quot;,&quot;id&quot;:&quot;7f1cc686-e967-416b-9b44-2d3f7c37e122&quot;,&quot;name&quot;:&quot;Viral glycoprotein (gp120-gp41)&quot;,&quot;relativeTransform&quot;:{&quot;translate&quot;:{&quot;x&quot;:0.05536033412986274,&quot;y&quot;:-8.748389686416456},&quot;rotate&quot;:0,&quot;skewX&quot;:0,&quot;scale&quot;:{&quot;x&quot;:0.0111955535172267,&quot;y&quot;:0.0111955535172267}},&quot;opacity&quot;:1,&quot;image&quot;:{&quot;url&quot;:&quot;https://icons.biorender.com/biorender/5a5fae0079d76e0014432c70/viral-glycoprotein-gp120-gp41.png&quot;,&quot;size&quot;:{&quot;x&quot;:217,&quot;y&quot;:340},&quot;isPremium&quot;:false},&quot;source&quot;:{&quot;id&quot;:&quot;5a5fadde79d76e0014432c64&quot;,&quot;type&quot;:&quot;ASSETS&quot;},&quot;pathStyles&quot;:[{&quot;type&quot;:&quot;FILL&quot;,&quot;fillStyle&quot;:&quot;rgb(0,0,0)&quot;}],&quot;isLocked&quot;:false,&quot;parent&quot;:{&quot;type&quot;:&quot;CHILD&quot;,&quot;parentId&quot;:&quot;a6a8e401-3f92-46f0-a5db-9ce7e0fe1e7c&quot;,&quot;order&quot;:&quot;15&quot;}},&quot;ffcf3d47-b216-4821-abc3-ddb111e9bedf&quot;:{&quot;type&quot;:&quot;FIGURE_OBJECT&quot;,&quot;id&quot;:&quot;ffcf3d47-b216-4821-abc3-ddb111e9bedf&quot;,&quot;name&quot;:&quot;Viral glycoprotein (gp120-gp41)&quot;,&quot;relativeTransform&quot;:{&quot;translate&quot;:{&quot;x&quot;:6.773885951567568,&quot;y&quot;:-5.460061126375523},&quot;rotate&quot;:0.9945917742805775,&quot;skewX&quot;:5.410520681182421e-17,&quot;scale&quot;:{&quot;x&quot;:0.0111955535172267,&quot;y&quot;:0.0111955535172267}},&quot;opacity&quot;:1,&quot;image&quot;:{&quot;url&quot;:&quot;https://icons.biorender.com/biorender/5a5fae0079d76e0014432c70/viral-glycoprotein-gp120-gp41.png&quot;,&quot;size&quot;:{&quot;x&quot;:217,&quot;y&quot;:340},&quot;isPremium&quot;:false},&quot;source&quot;:{&quot;id&quot;:&quot;5a5fadde79d76e0014432c64&quot;,&quot;type&quot;:&quot;ASSETS&quot;},&quot;pathStyles&quot;:[{&quot;type&quot;:&quot;FILL&quot;,&quot;fillStyle&quot;:&quot;rgb(0,0,0)&quot;}],&quot;isLocked&quot;:false,&quot;parent&quot;:{&quot;type&quot;:&quot;CHILD&quot;,&quot;parentId&quot;:&quot;a6a8e401-3f92-46f0-a5db-9ce7e0fe1e7c&quot;,&quot;order&quot;:&quot;2&quot;}},&quot;c67751d3-5a8a-48f9-b0d7-4e038e946343&quot;:{&quot;type&quot;:&quot;FIGURE_OBJECT&quot;,&quot;id&quot;:&quot;c67751d3-5a8a-48f9-b0d7-4e038e946343&quot;,&quot;name&quot;:&quot;Viral glycoprotein (gp120-gp41)&quot;,&quot;relativeTransform&quot;:{&quot;translate&quot;:{&quot;x&quot;:8.465576366890016,&quot;y&quot;:1.8939523517295949},&quot;rotate&quot;:1.8466724621533726,&quot;skewX&quot;:1.6231562043547263e-16,&quot;scale&quot;:{&quot;x&quot;:0.0111955535172267,&quot;y&quot;:0.0111955535172266}},&quot;opacity&quot;:1,&quot;image&quot;:{&quot;url&quot;:&quot;https://icons.biorender.com/biorender/5a5fae0079d76e0014432c70/viral-glycoprotein-gp120-gp41.png&quot;,&quot;size&quot;:{&quot;x&quot;:217,&quot;y&quot;:340},&quot;isPremium&quot;:false},&quot;source&quot;:{&quot;id&quot;:&quot;5a5fadde79d76e0014432c64&quot;,&quot;type&quot;:&quot;ASSETS&quot;},&quot;pathStyles&quot;:[{&quot;type&quot;:&quot;FILL&quot;,&quot;fillStyle&quot;:&quot;rgb(0,0,0)&quot;}],&quot;isLocked&quot;:false,&quot;parent&quot;:{&quot;type&quot;:&quot;CHILD&quot;,&quot;parentId&quot;:&quot;a6a8e401-3f92-46f0-a5db-9ce7e0fe1e7c&quot;,&quot;order&quot;:&quot;25&quot;}},&quot;f3a5fa3a-9544-4e4d-a8f4-a9cb1115067a&quot;:{&quot;type&quot;:&quot;FIGURE_OBJECT&quot;,&quot;id&quot;:&quot;f3a5fa3a-9544-4e4d-a8f4-a9cb1115067a&quot;,&quot;name&quot;:&quot;Viral glycoprotein (gp120-gp41)&quot;,&quot;relativeTransform&quot;:{&quot;translate&quot;:{&quot;x&quot;:4.4667697272366755,&quot;y&quot;:7.76259147872502},&quot;rotate&quot;:2.569499875935172,&quot;skewX&quot;:-5.410520681182421e-17,&quot;scale&quot;:{&quot;x&quot;:0.0111955535172267,&quot;y&quot;:0.0111955535172267}},&quot;opacity&quot;:1,&quot;image&quot;:{&quot;url&quot;:&quot;https://icons.biorender.com/biorender/5a5fae0079d76e0014432c70/viral-glycoprotein-gp120-gp41.png&quot;,&quot;size&quot;:{&quot;x&quot;:217,&quot;y&quot;:340},&quot;isPremium&quot;:false},&quot;source&quot;:{&quot;id&quot;:&quot;5a5fadde79d76e0014432c64&quot;,&quot;type&quot;:&quot;ASSETS&quot;},&quot;pathStyles&quot;:[{&quot;type&quot;:&quot;FILL&quot;,&quot;fillStyle&quot;:&quot;rgb(0,0,0)&quot;}],&quot;isLocked&quot;:false,&quot;parent&quot;:{&quot;type&quot;:&quot;CHILD&quot;,&quot;parentId&quot;:&quot;a6a8e401-3f92-46f0-a5db-9ce7e0fe1e7c&quot;,&quot;order&quot;:&quot;3&quot;}},&quot;e18141c3-64c1-4d31-abce-61e7c944676f&quot;:{&quot;type&quot;:&quot;FIGURE_OBJECT&quot;,&quot;id&quot;:&quot;e18141c3-64c1-4d31-abce-61e7c944676f&quot;,&quot;name&quot;:&quot;Viral glycoprotein (gp120-gp41)&quot;,&quot;relativeTransform&quot;:{&quot;translate&quot;:{&quot;x&quot;:-2.784514026200389,&quot;y&quot;:8.417663480899426},&quot;rotate&quot;:-2.7190936569638366,&quot;skewX&quot;:5.410520681182421e-17,&quot;scale&quot;:{&quot;x&quot;:0.0111955535172267,&quot;y&quot;:0.0111955535172267}},&quot;opacity&quot;:1,&quot;image&quot;:{&quot;url&quot;:&quot;https://icons.biorender.com/biorender/5a5fae0079d76e0014432c70/viral-glycoprotein-gp120-gp41.png&quot;,&quot;size&quot;:{&quot;x&quot;:217,&quot;y&quot;:340},&quot;isPremium&quot;:false},&quot;source&quot;:{&quot;id&quot;:&quot;5a5fadde79d76e0014432c64&quot;,&quot;type&quot;:&quot;ASSETS&quot;},&quot;pathStyles&quot;:[{&quot;type&quot;:&quot;FILL&quot;,&quot;fillStyle&quot;:&quot;rgb(0,0,0)&quot;}],&quot;isLocked&quot;:false,&quot;parent&quot;:{&quot;type&quot;:&quot;CHILD&quot;,&quot;parentId&quot;:&quot;a6a8e401-3f92-46f0-a5db-9ce7e0fe1e7c&quot;,&quot;order&quot;:&quot;5&quot;}},&quot;7ee7ca6f-f906-4352-ba38-4275cf5f1849&quot;:{&quot;type&quot;:&quot;FIGURE_OBJECT&quot;,&quot;id&quot;:&quot;7ee7ca6f-f906-4352-ba38-4275cf5f1849&quot;,&quot;name&quot;:&quot;Viral glycoprotein (gp120-gp41)&quot;,&quot;relativeTransform&quot;:{&quot;translate&quot;:{&quot;x&quot;:-8.452795880170907,&quot;y&quot;:2.9866431552006087},&quot;rotate&quot;:-1.8670129690910418,&quot;skewX&quot;:0,&quot;scale&quot;:{&quot;x&quot;:0.0111955535172267,&quot;y&quot;:0.0111955535172267}},&quot;opacity&quot;:1,&quot;image&quot;:{&quot;url&quot;:&quot;https://icons.biorender.com/biorender/5a5fae0079d76e0014432c70/viral-glycoprotein-gp120-gp41.png&quot;,&quot;size&quot;:{&quot;x&quot;:217,&quot;y&quot;:340},&quot;isPremium&quot;:false},&quot;source&quot;:{&quot;id&quot;:&quot;5a5fadde79d76e0014432c64&quot;,&quot;type&quot;:&quot;ASSETS&quot;},&quot;pathStyles&quot;:[{&quot;type&quot;:&quot;FILL&quot;,&quot;fillStyle&quot;:&quot;rgb(0,0,0)&quot;}],&quot;isLocked&quot;:false,&quot;parent&quot;:{&quot;type&quot;:&quot;CHILD&quot;,&quot;parentId&quot;:&quot;a6a8e401-3f92-46f0-a5db-9ce7e0fe1e7c&quot;,&quot;order&quot;:&quot;55&quot;}},&quot;2aabe3e7-e46d-428d-86c9-a2d7e6238ded&quot;:{&quot;type&quot;:&quot;FIGURE_OBJECT&quot;,&quot;id&quot;:&quot;2aabe3e7-e46d-428d-86c9-a2d7e6238ded&quot;,&quot;name&quot;:&quot;Viral glycoprotein (gp120-gp41)&quot;,&quot;relativeTransform&quot;:{&quot;translate&quot;:{&quot;x&quot;:-7.887522300687056,&quot;y&quot;:-4.597355342105644},&quot;rotate&quot;:-1.0993273943372315,&quot;skewX&quot;:-7.033676885537148e-16,&quot;scale&quot;:{&quot;x&quot;:0.0111955535172267,&quot;y&quot;:0.0111955535172267}},&quot;opacity&quot;:1,&quot;image&quot;:{&quot;url&quot;:&quot;https://icons.biorender.com/biorender/5a5fae0079d76e0014432c70/viral-glycoprotein-gp120-gp41.png&quot;,&quot;size&quot;:{&quot;x&quot;:217,&quot;y&quot;:340},&quot;isPremium&quot;:false},&quot;source&quot;:{&quot;id&quot;:&quot;5a5fadde79d76e0014432c64&quot;,&quot;type&quot;:&quot;ASSETS&quot;},&quot;pathStyles&quot;:[{&quot;type&quot;:&quot;FILL&quot;,&quot;fillStyle&quot;:&quot;rgb(0,0,0)&quot;}],&quot;isLocked&quot;:false,&quot;parent&quot;:{&quot;type&quot;:&quot;CHILD&quot;,&quot;parentId&quot;:&quot;a6a8e401-3f92-46f0-a5db-9ce7e0fe1e7c&quot;,&quot;order&quot;:&quot;6&quot;}},&quot;98e1d53b-6567-4305-929a-cabf80c3dce4&quot;:{&quot;type&quot;:&quot;FIGURE_OBJECT&quot;,&quot;id&quot;:&quot;98e1d53b-6567-4305-929a-cabf80c3dce4&quot;,&quot;name&quot;:&quot;Viral capsid (with organelles)&quot;,&quot;relativeTransform&quot;:{&quot;translate&quot;:{&quot;x&quot;:0.1307627589387912,&quot;y&quot;:-0.20069141956608316},&quot;rotate&quot;:0,&quot;skewX&quot;:0,&quot;scale&quot;:{&quot;x&quot;:0.0249973922080835,&quot;y&quot;:0.0249973922080835}},&quot;opacity&quot;:1,&quot;image&quot;:{&quot;url&quot;:&quot;https://icons.biorender.com/biorender/5a5faecde2cabd001483dbc3/viral-capsid-with-organelles.png&quot;,&quot;size&quot;:{&quot;x&quot;:233,&quot;y&quot;:343},&quot;isPremium&quot;:false},&quot;source&quot;:{&quot;id&quot;:&quot;5a5fae72e2cabd001483dbbd&quot;,&quot;type&quot;:&quot;ASSETS&quot;},&quot;pathStyles&quot;:[{&quot;type&quot;:&quot;FILL&quot;,&quot;fillStyle&quot;:&quot;rgb(0,0,0)&quot;}],&quot;isLocked&quot;:false,&quot;parent&quot;:{&quot;type&quot;:&quot;CHILD&quot;,&quot;parentId&quot;:&quot;a6a8e401-3f92-46f0-a5db-9ce7e0fe1e7c&quot;,&quot;order&quot;:&quot;65&quot;}},&quot;e8b99651-9f94-4db9-a244-0e1f20fef99b&quot;:{&quot;type&quot;:&quot;FIGURE_OBJECT&quot;,&quot;id&quot;:&quot;e8b99651-9f94-4db9-a244-0e1f20fef99b&quot;,&quot;name&quot;:&quot;HIV (protease)&quot;,&quot;relativeTransform&quot;:{&quot;translate&quot;:{&quot;x&quot;:4.146881383106334,&quot;y&quot;:-2.4545566820323006},&quot;rotate&quot;:0,&quot;skewX&quot;:0,&quot;scale&quot;:{&quot;x&quot;:0.0054814838720823,&quot;y&quot;:0.0054814838720823}},&quot;opacity&quot;:1,&quot;image&quot;:{&quot;url&quot;:&quot;https://icons.biorender.com/biorender/5cf1811848bc020400d6b439/hiv-protease.png&quot;,&quot;size&quot;:{&quot;x&quot;:200,&quot;y&quot;:150},&quot;isPremium&quot;:false},&quot;source&quot;:{&quot;id&quot;:&quot;5cf180e848bc020400d6b42f&quot;,&quot;type&quot;:&quot;ASSETS&quot;},&quot;pathStyles&quot;:[{&quot;type&quot;:&quot;FILL&quot;,&quot;fillStyle&quot;:&quot;rgb(0,0,0)&quot;}],&quot;isLocked&quot;:false,&quot;parent&quot;:{&quot;type&quot;:&quot;CHILD&quot;,&quot;parentId&quot;:&quot;a6a8e401-3f92-46f0-a5db-9ce7e0fe1e7c&quot;,&quot;order&quot;:&quot;7&quot;}},&quot;8be68505-30e7-48d9-809d-b46d39514230&quot;:{&quot;type&quot;:&quot;FIGURE_OBJECT&quot;,&quot;id&quot;:&quot;8be68505-30e7-48d9-809d-b46d39514230&quot;,&quot;name&quot;:&quot;HIV (protease)&quot;,&quot;relativeTransform&quot;:{&quot;translate&quot;:{&quot;x&quot;:-4.39605332717987,&quot;y&quot;:-1.9138646117611802},&quot;rotate&quot;:0,&quot;skewX&quot;:0,&quot;scale&quot;:{&quot;x&quot;:0.0054814838720823,&quot;y&quot;:0.0054814838720823}},&quot;opacity&quot;:1,&quot;image&quot;:{&quot;url&quot;:&quot;https://icons.biorender.com/biorender/5cf1811848bc020400d6b439/hiv-protease.png&quot;,&quot;size&quot;:{&quot;x&quot;:200,&quot;y&quot;:150},&quot;isPremium&quot;:false},&quot;source&quot;:{&quot;id&quot;:&quot;5cf180e848bc020400d6b42f&quot;,&quot;type&quot;:&quot;ASSETS&quot;},&quot;pathStyles&quot;:[{&quot;type&quot;:&quot;FILL&quot;,&quot;fillStyle&quot;:&quot;rgb(0,0,0)&quot;}],&quot;isLocked&quot;:false,&quot;parent&quot;:{&quot;type&quot;:&quot;CHILD&quot;,&quot;parentId&quot;:&quot;a6a8e401-3f92-46f0-a5db-9ce7e0fe1e7c&quot;,&quot;order&quot;:&quot;75&quot;}},&quot;e0fcef8c-f45c-43ef-b10f-d3bea0ddbb9c&quot;:{&quot;type&quot;:&quot;FIGURE_OBJECT&quot;,&quot;id&quot;:&quot;e0fcef8c-f45c-43ef-b10f-d3bea0ddbb9c&quot;,&quot;name&quot;:&quot;HIV integrase&quot;,&quot;relativeTransform&quot;:{&quot;translate&quot;:{&quot;x&quot;:-3.7723190726999403,&quot;y&quot;:3.4044424206700272},&quot;rotate&quot;:0,&quot;skewX&quot;:0,&quot;scale&quot;:{&quot;x&quot;:0.0073932898547115,&quot;y&quot;:0.0073932898547115}},&quot;opacity&quot;:1,&quot;image&quot;:{&quot;url&quot;:&quot;https://icons.biorender.com/biorender/5cf180e848bc020400d6b42d/hiv-integrase.png&quot;,&quot;size&quot;:{&quot;x&quot;:200,&quot;y&quot;:175},&quot;isPremium&quot;:false},&quot;source&quot;:{&quot;id&quot;:&quot;5cf180b348bc020400d6b423&quot;,&quot;type&quot;:&quot;ASSETS&quot;},&quot;pathStyles&quot;:[{&quot;type&quot;:&quot;FILL&quot;,&quot;fillStyle&quot;:&quot;rgb(0,0,0)&quot;}],&quot;isLocked&quot;:false,&quot;parent&quot;:{&quot;type&quot;:&quot;CHILD&quot;,&quot;parentId&quot;:&quot;a6a8e401-3f92-46f0-a5db-9ce7e0fe1e7c&quot;,&quot;order&quot;:&quot;8&quot;}},&quot;d1cab169-877b-4150-a9dd-193428cf0070&quot;:{&quot;type&quot;:&quot;FIGURE_OBJECT&quot;,&quot;id&quot;:&quot;d1cab169-877b-4150-a9dd-193428cf0070&quot;,&quot;relativeTransform&quot;:{&quot;translate&quot;:{&quot;x&quot;:-10.932684962106494,&quot;y&quot;:-28.101893830709173},&quot;rotate&quot;:0,&quot;skewX&quot;:0,&quot;scale&quot;:{&quot;x&quot;:1,&quot;y&quot;:1}},&quot;opacity&quot;:1,&quot;path&quot;:{&quot;type&quot;:&quot;POLY_LINE&quot;,&quot;points&quot;:[{&quot;x&quot;:2.75,&quot;y&quot;:18.813541861580006},{&quot;x&quot;:-2.75,&quot;y&quot;:0.0021591257157069776},{&quot;x&quot;:8.253623084530147,&quot;y&quot;:-14.178911895659866}],&quot;closed&quot;:false},&quot;pathStyles&quot;:[{&quot;type&quot;:&quot;FILL&quot;,&quot;fillStyle&quot;:&quot;transparent&quot;},{&quot;type&quot;:&quot;STROKE&quot;,&quot;strokeStyle&quot;:&quot;rgba(192,56,48,1)&quot;,&quot;lineWidth&quot;:1,&quot;lineJoin&quot;:&quot;round&quot;,&quot;dashArray&quot;:[1,1]}],&quot;pathSmoothing&quot;:{&quot;type&quot;:&quot;CATMULL_SMOOTHING&quot;,&quot;smoothing&quot;:0.2},&quot;pathMarkers&quot;:{&quot;markerEnd&quot;:{&quot;type&quot;:&quot;PATH&quot;,&quot;units&quot;:{&quot;type&quot;:&quot;STROKE_WIDTH&quot;,&quot;scale&quot;:1.4},&quot;orient&quot;:{&quot;type&quot;:&quot;AUTO_START_REVERSE&quot;},&quot;name&quot;:&quot;inhib&quot;,&quot;relativeTransform&quot;:{&quot;translate&quot;:{&quot;x&quot;:0,&quot;y&quot;:0},&quot;rotate&quot;:0,&quot;skewX&quot;:0,&quot;scale&quot;:{&quot;x&quot;:1,&quot;y&quot;:1}},&quot;path&quot;:{&quot;type&quot;:&quot;SPLINE&quot;,&quot;spline&quot;:{&quot;points&quot;:[{&quot;x&quot;:0,&quot;y&quot;:3,&quot;isEndPoint&quot;:true},{&quot;x&quot;:0,&quot;y&quot;:-3,&quot;isEndPoint&quot;:true}],&quot;closed&quot;:false}},&quot;pathStyles&quot;:[{&quot;type&quot;:&quot;STROKE&quot;,&quot;strokeStyle&quot;:&quot;context-stroke-flat&quot;,&quot;lineWidth&quot;:1,&quot;lineJoin&quot;:&quot;round&quot;}]}},&quot;isLocked&quot;:false,&quot;parent&quot;:{&quot;type&quot;:&quot;CHILD&quot;,&quot;parentId&quot;:&quot;04b6aa6f-31a0-4c7b-be78-12f520f06f49&quot;,&quot;order&quot;:&quot;45&quot;}},&quot;60fb3899-836e-4437-a003-5adf8650d656&quot;:{&quot;type&quot;:&quot;FIGURE_OBJECT&quot;,&quot;id&quot;:&quot;60fb3899-836e-4437-a003-5adf8650d656&quot;,&quot;relativeTransform&quot;:{&quot;translate&quot;:{&quot;x&quot;:41.15567859047116,&quot;y&quot;:-33.910828959080845},&quot;rotate&quot;:0,&quot;skewX&quot;:0,&quot;scale&quot;:{&quot;x&quot;:1,&quot;y&quot;:1}},&quot;opacity&quot;:1,&quot;path&quot;:{&quot;type&quot;:&quot;POLY_LINE&quot;,&quot;points&quot;:[{&quot;x&quot;:-11.450989879940607,&quot;y&quot;:-10.520314573570772},{&quot;x&quot;:6.161636447422325,&quot;y&quot;:-6.589171040919155},{&quot;x&quot;:11.161636447422325,&quot;y&quot;:11.410828959080845}],&quot;closed&quot;:false},&quot;pathStyles&quot;:[{&quot;type&quot;:&quot;FILL&quot;,&quot;fillStyle&quot;:&quot;transparent&quot;},{&quot;type&quot;:&quot;STROKE&quot;,&quot;strokeStyle&quot;:&quot;rgba(90,170,70,1)&quot;,&quot;lineWidth&quot;:1,&quot;lineJoin&quot;:&quot;round&quot;,&quot;dashArray&quot;:[1,1]}],&quot;pathSmoothing&quot;:{&quot;type&quot;:&quot;CATMULL_SMOOTHING&quot;,&quot;smoothing&quot;:0.2},&quot;pathMarkers&quot;:{&quot;markerEnd&quot;:{&quot;type&quot;:&quot;PATH&quot;,&quot;units&quot;:{&quot;type&quot;:&quot;STROKE_WIDTH&quot;,&quot;scale&quot;:0.7},&quot;orient&quot;:{&quot;type&quot;:&quot;CLIPPED_CHORD&quot;},&quot;clipDistance&quot;:4,&quot;name&quot;:&quot;arrow&quot;,&quot;relativeTransform&quot;:{&quot;translate&quot;:{&quot;x&quot;:0,&quot;y&quot;:0},&quot;rotate&quot;:0,&quot;skewX&quot;:0,&quot;scale&quot;:{&quot;x&quot;:1,&quot;y&quot;:1}},&quot;path&quot;:{&quot;type&quot;:&quot;SPLINE&quot;,&quot;spline&quot;:{&quot;points&quot;:[{&quot;x&quot;:0,&quot;y&quot;:0,&quot;isEndPoint&quot;:true},{&quot;x&quot;:-5,&quot;y&quot;:-2.5,&quot;isEndPoint&quot;:true},{&quot;x&quot;:-5,&quot;y&quot;:2.5,&quot;isEndPoint&quot;:true}],&quot;closed&quot;:true}},&quot;pathStyles&quot;:[{&quot;type&quot;:&quot;FILL&quot;,&quot;fillStyle&quot;:&quot;context-stroke-flat&quot;}]}},&quot;isLocked&quot;:false,&quot;parent&quot;:{&quot;type&quot;:&quot;CHILD&quot;,&quot;parentId&quot;:&quot;04b6aa6f-31a0-4c7b-be78-12f520f06f49&quot;,&quot;order&quot;:&quot;5&quot;}},&quot;07c4cb08-0ce6-42f3-8ab8-de6230e3a698&quot;:{&quot;type&quot;:&quot;FIGURE_OBJECT&quot;,&quot;id&quot;:&quot;07c4cb08-0ce6-42f3-8ab8-de6230e3a698&quot;,&quot;relativeTransform&quot;:{&quot;translate&quot;:{&quot;x&quot;:63.04131503789342,&quot;y&quot;:-13.908000000000015},&quot;rotate&quot;:-0.8415544190416225,&quot;skewX&quot;:0,&quot;scale&quot;:{&quot;x&quot;:0.9999999999999999,&quot;y&quot;:1}},&quot;opacity&quot;:1,&quot;path&quot;:{&quot;type&quot;:&quot;ARC&quot;,&quot;size&quot;:{&quot;x&quot;:23.084401781962974,&quot;y&quot;:23.084401781962974},&quot;startAngle&quot;:2.412350745836501,&quot;sweepAngle&quot;:4.918032112539683},&quot;pathStyles&quot;:[{&quot;type&quot;:&quot;FILL&quot;,&quot;fillStyle&quot;:&quot;transparent&quot;},{&quot;type&quot;:&quot;STROKE&quot;,&quot;strokeStyle&quot;:&quot;#232323&quot;,&quot;lineWidth&quot;:1,&quot;lineJoin&quot;:&quot;round&quot;}],&quot;pathMarkers&quot;:{&quot;markerStart&quot;:{&quot;type&quot;:&quot;PATH&quot;,&quot;units&quot;:{&quot;type&quot;:&quot;STROKE_WIDTH&quot;,&quot;scale&quot;:0.7},&quot;orient&quot;:{&quot;type&quot;:&quot;CLIPPED_CHORD&quot;},&quot;clipDistance&quot;:4,&quot;name&quot;:&quot;arrow&quot;,&quot;relativeTransform&quot;:{&quot;translate&quot;:{&quot;x&quot;:0,&quot;y&quot;:0},&quot;rotate&quot;:0,&quot;skewX&quot;:0,&quot;scale&quot;:{&quot;x&quot;:1,&quot;y&quot;:1}},&quot;path&quot;:{&quot;type&quot;:&quot;SPLINE&quot;,&quot;spline&quot;:{&quot;points&quot;:[{&quot;x&quot;:0,&quot;y&quot;:0,&quot;isEndPoint&quot;:true},{&quot;x&quot;:-5,&quot;y&quot;:-2.5,&quot;isEndPoint&quot;:true},{&quot;x&quot;:-5,&quot;y&quot;:2.5,&quot;isEndPoint&quot;:true}],&quot;closed&quot;:true}},&quot;pathStyles&quot;:[{&quot;type&quot;:&quot;FILL&quot;,&quot;fillStyle&quot;:&quot;context-stroke-flat&quot;}]}},&quot;isLocked&quot;:false,&quot;parent&quot;:{&quot;type&quot;:&quot;CHILD&quot;,&quot;parentId&quot;:&quot;04b6aa6f-31a0-4c7b-be78-12f520f06f49&quot;,&quot;order&quot;:&quot;51&quot;}},&quot;f6c734f4-b2be-454d-8742-9fa551a1669e&quot;:{&quot;type&quot;:&quot;FIGURE_OBJECT&quot;,&quot;id&quot;:&quot;f6c734f4-b2be-454d-8742-9fa551a1669e&quot;,&quot;relativeTransform&quot;:{&quot;translate&quot;:{&quot;x&quot;:44.58731503789347,&quot;y&quot;:-13.099000000000046},&quot;rotate&quot;:0,&quot;skewX&quot;:0,&quot;scale&quot;:{&quot;x&quot;:1,&quot;y&quot;:1}},&quot;opacity&quot;:1,&quot;path&quot;:{&quot;type&quot;:&quot;POLY_LINE&quot;,&quot;points&quot;:[{&quot;x&quot;:8.162856656817667,&quot;y&quot;:-6.6091051739437034},{&quot;x&quot;:-8.162856656817667,&quot;y&quot;:6.60910517394359}],&quot;closed&quot;:false},&quot;pathStyles&quot;:[{&quot;type&quot;:&quot;FILL&quot;,&quot;fillStyle&quot;:&quot;transparent&quot;},{&quot;type&quot;:&quot;STROKE&quot;,&quot;strokeStyle&quot;:&quot;#232323&quot;,&quot;lineWidth&quot;:1,&quot;lineJoin&quot;:&quot;round&quot;}],&quot;pathMarkers&quot;:{&quot;markerEnd&quot;:{&quot;type&quot;:&quot;PATH&quot;,&quot;units&quot;:{&quot;type&quot;:&quot;STROKE_WIDTH&quot;,&quot;scale&quot;:0.7},&quot;orient&quot;:{&quot;type&quot;:&quot;CLIPPED_CHORD&quot;},&quot;clipDistance&quot;:4,&quot;name&quot;:&quot;arrow&quot;,&quot;relativeTransform&quot;:{&quot;translate&quot;:{&quot;x&quot;:0,&quot;y&quot;:0},&quot;rotate&quot;:0,&quot;skewX&quot;:0,&quot;scale&quot;:{&quot;x&quot;:1,&quot;y&quot;:1}},&quot;path&quot;:{&quot;type&quot;:&quot;SPLINE&quot;,&quot;spline&quot;:{&quot;points&quot;:[{&quot;x&quot;:0,&quot;y&quot;:0,&quot;isEndPoint&quot;:true},{&quot;x&quot;:-5,&quot;y&quot;:-2.5,&quot;isEndPoint&quot;:true},{&quot;x&quot;:-5,&quot;y&quot;:2.5,&quot;isEndPoint&quot;:true}],&quot;closed&quot;:true}},&quot;pathStyles&quot;:[{&quot;type&quot;:&quot;FILL&quot;,&quot;fillStyle&quot;:&quot;context-stroke-flat&quot;}]}},&quot;isLocked&quot;:false,&quot;parent&quot;:{&quot;type&quot;:&quot;CHILD&quot;,&quot;parentId&quot;:&quot;04b6aa6f-31a0-4c7b-be78-12f520f06f49&quot;,&quot;order&quot;:&quot;52&quot;}},&quot;16df4484-b135-4da7-9e37-8c3cabc4b2d6&quot;:{&quot;type&quot;:&quot;FIGURE_OBJECT&quot;,&quot;id&quot;:&quot;16df4484-b135-4da7-9e37-8c3cabc4b2d6&quot;,&quot;relativeTransform&quot;:{&quot;translate&quot;:{&quot;x&quot;:-101.71069949523283,&quot;y&quot;:-63.62800000000003},&quot;rotate&quot;:0,&quot;skewX&quot;:0,&quot;scale&quot;:{&quot;x&quot;:1,&quot;y&quot;:1}},&quot;opacity&quot;:1,&quot;pathStyles&quot;:[{&quot;type&quot;:&quot;FILL&quot;,&quot;fillStyle&quot;:&quot;#232323&quot;}],&quot;text&quot;:{&quot;textData&quot;:{&quot;lineSpacing&quot;:&quot;normal&quot;,&quot;alignment&quot;:&quot;center&quot;,&quot;lines&quot;:[{&quot;runs&quot;:[{&quot;style&quot;:{&quot;fontFamily&quot;:&quot;Roboto&quot;,&quot;fontSize&quot;:8,&quot;color&quot;:&quot;#232323&quot;,&quot;fontWeight&quot;:&quot;normal&quot;,&quot;fontStyle&quot;:&quot;normal&quot;,&quot;decoration&quot;:&quot;none&quot;,&quot;script&quot;:&quot;none&quot;},&quot;range&quot;:[0,0]}],&quot;text&quot;:&quot;λ&quot;,&quot;baseStyle&quot;:{&quot;fontFamily&quot;:&quot;Roboto&quot;,&quot;fontSize&quot;:8,&quot;color&quot;:&quot;#232323&quot;,&quot;fontWeight&quot;:&quot;normal&quot;,&quot;fontStyle&quot;:&quot;normal&quot;,&quot;decoration&quot;:&quot;none&quot;,&quot;script&quot;:&quot;none&quot;}}],&quot;verticalAlign&quot;:&quot;TOP&quot;},&quot;size&quot;:{&quot;x&quot;:21.015231085321513,&quot;y&quot;:9.04},&quot;targetSize&quot;:{&quot;x&quot;:21.015231085321513,&quot;y&quot;:9.04},&quot;format&quot;:&quot;BETTER_TEXT&quot;,&quot;verticalAlign&quot;:&quot;TOP&quot;},&quot;isLocked&quot;:false,&quot;parent&quot;:{&quot;type&quot;:&quot;CHILD&quot;,&quot;parentId&quot;:&quot;04b6aa6f-31a0-4c7b-be78-12f520f06f49&quot;,&quot;order&quot;:&quot;55&quot;}},&quot;8ace04d5-de67-4e4c-b2ba-c5c27e750ac6&quot;:{&quot;type&quot;:&quot;FIGURE_OBJECT&quot;,&quot;id&quot;:&quot;8ace04d5-de67-4e4c-b2ba-c5c27e750ac6&quot;,&quot;relativeTransform&quot;:{&quot;translate&quot;:{&quot;x&quot;:-29.083039128773134,&quot;y&quot;:-49.63499999999998},&quot;rotate&quot;:0,&quot;skewX&quot;:0,&quot;scale&quot;:{&quot;x&quot;:1,&quot;y&quot;:1}},&quot;opacity&quot;:1,&quot;pathStyles&quot;:[{&quot;type&quot;:&quot;FILL&quot;,&quot;fillStyle&quot;:&quot;#232323&quot;}],&quot;text&quot;:{&quot;textData&quot;:{&quot;lineSpacing&quot;:&quot;normal&quot;,&quot;alignment&quot;:&quot;center&quot;,&quot;lines&quot;:[{&quot;runs&quot;:[{&quot;style&quot;:{&quot;fontFamily&quot;:&quot;Roboto&quot;,&quot;fontSize&quot;:8,&quot;color&quot;:&quot;rgba(192,56,48,1)&quot;,&quot;fontWeight&quot;:&quot;normal&quot;,&quot;fontStyle&quot;:&quot;normal&quot;,&quot;decoration&quot;:&quot;none&quot;,&quot;script&quot;:&quot;none&quot;},&quot;range&quot;:[0,0]},{&quot;style&quot;:{&quot;fontFamily&quot;:&quot;Roboto&quot;,&quot;fontSize&quot;:8,&quot;color&quot;:&quot;rgba(192,56,48,1)&quot;,&quot;fontWeight&quot;:&quot;normal&quot;,&quot;fontStyle&quot;:&quot;italic&quot;,&quot;decoration&quot;:&quot;none&quot;,&quot;script&quot;:&quot;none&quot;},&quot;range&quot;:[1,4]},{&quot;style&quot;:{&quot;fontFamily&quot;:&quot;Roboto&quot;,&quot;fontSize&quot;:8.032128514056225,&quot;color&quot;:&quot;rgba(192,56,48,1)&quot;,&quot;fontWeight&quot;:&quot;normal&quot;,&quot;fontStyle&quot;:&quot;italic&quot;,&quot;decoration&quot;:&quot;none&quot;,&quot;script&quot;:&quot;sub&quot;},&quot;range&quot;:[5,5]},{&quot;style&quot;:{&quot;fontFamily&quot;:&quot;Roboto&quot;,&quot;fontSize&quot;:8,&quot;color&quot;:&quot;rgba(192,56,48,1)&quot;,&quot;fontWeight&quot;:&quot;normal&quot;,&quot;fontStyle&quot;:&quot;italic&quot;,&quot;decoration&quot;:&quot;none&quot;,&quot;script&quot;:&quot;none&quot;},&quot;range&quot;:[6,13]}],&quot;text&quot;:&quot;β(E,NE,t-    )&quot;,&quot;baseStyle&quot;:{&quot;fontFamily&quot;:&quot;Roboto&quot;,&quot;fontSize&quot;:8,&quot;color&quot;:&quot;rgba(192,56,48,1)&quot;,&quot;fontWeight&quot;:&quot;normal&quot;,&quot;fontStyle&quot;:&quot;italic&quot;,&quot;decoration&quot;:&quot;none&quot;,&quot;script&quot;:&quot;none&quot;}}],&quot;verticalAlign&quot;:&quot;TOP&quot;,&quot;_lastCaretLocation&quot;:{&quot;lineIndex&quot;:0,&quot;runIndex&quot;:3,&quot;charIndex&quot;:13}},&quot;size&quot;:{&quot;x&quot;:42.733795166015625,&quot;y&quot;:9.04},&quot;targetSize&quot;:{&quot;x&quot;:40.307291666666664,&quot;y&quot;:9.04},&quot;format&quot;:&quot;BETTER_TEXT&quot;,&quot;verticalAlign&quot;:&quot;TOP&quot;},&quot;isLocked&quot;:false,&quot;parent&quot;:{&quot;type&quot;:&quot;CHILD&quot;,&quot;parentId&quot;:&quot;04b6aa6f-31a0-4c7b-be78-12f520f06f49&quot;,&quot;order&quot;:&quot;56&quot;}},&quot;2176ff30-de03-4c27-97c5-16dafee282b1&quot;:{&quot;type&quot;:&quot;FIGURE_OBJECT&quot;,&quot;id&quot;:&quot;2176ff30-de03-4c27-97c5-16dafee282b1&quot;,&quot;relativeTransform&quot;:{&quot;translate&quot;:{&quot;x&quot;:-8.108041976285982,&quot;y&quot;:-87.92799999999998},&quot;rotate&quot;:0,&quot;skewX&quot;:0,&quot;scale&quot;:{&quot;x&quot;:1,&quot;y&quot;:1}},&quot;opacity&quot;:1,&quot;pathStyles&quot;:[{&quot;type&quot;:&quot;FILL&quot;,&quot;fillStyle&quot;:&quot;#232323&quot;}],&quot;text&quot;:{&quot;textData&quot;:{&quot;lineSpacing&quot;:&quot;normal&quot;,&quot;alignment&quot;:&quot;center&quot;,&quot;lines&quot;:[{&quot;runs&quot;:[{&quot;style&quot;:{&quot;fontFamily&quot;:&quot;Roboto&quot;,&quot;fontSize&quot;:8,&quot;color&quot;:&quot;#232323&quot;,&quot;fontWeight&quot;:&quot;normal&quot;,&quot;fontStyle&quot;:&quot;italic&quot;,&quot;decoration&quot;:&quot;none&quot;,&quot;script&quot;:&quot;none&quot;},&quot;range&quot;:[0,0]}],&quot;text&quot;:&quot;k&quot;,&quot;baseStyle&quot;:{&quot;fontFamily&quot;:&quot;Roboto&quot;,&quot;fontSize&quot;:8,&quot;color&quot;:&quot;#232323&quot;,&quot;fontWeight&quot;:&quot;normal&quot;,&quot;fontStyle&quot;:&quot;italic&quot;,&quot;decoration&quot;:&quot;none&quot;,&quot;script&quot;:&quot;none&quot;}}],&quot;verticalAlign&quot;:&quot;TOP&quot;},&quot;size&quot;:{&quot;x&quot;:21.015231085321513,&quot;y&quot;:9.04},&quot;targetSize&quot;:{&quot;x&quot;:21.015231085321513,&quot;y&quot;:9.04},&quot;format&quot;:&quot;BETTER_TEXT&quot;,&quot;verticalAlign&quot;:&quot;TOP&quot;},&quot;isLocked&quot;:false,&quot;parent&quot;:{&quot;type&quot;:&quot;CHILD&quot;,&quot;parentId&quot;:&quot;04b6aa6f-31a0-4c7b-be78-12f520f06f49&quot;,&quot;order&quot;:&quot;57&quot;}},&quot;4a9a9543-ea86-458e-af1a-218522d74410&quot;:{&quot;type&quot;:&quot;FIGURE_OBJECT&quot;,&quot;id&quot;:&quot;4a9a9543-ea86-458e-af1a-218522d74410&quot;,&quot;relativeTransform&quot;:{&quot;translate&quot;:{&quot;x&quot;:-27.8576575189467,&quot;y&quot;:-73.21899999999994},&quot;rotate&quot;:0,&quot;skewX&quot;:0,&quot;scale&quot;:{&quot;x&quot;:1,&quot;y&quot;:1}},&quot;opacity&quot;:1,&quot;path&quot;:{&quot;type&quot;:&quot;POLY_LINE&quot;,&quot;points&quot;:[{&quot;x&quot;:0,&quot;y&quot;:-5.246052677750754},{&quot;x&quot;:0,&quot;y&quot;:5.246052677750754}],&quot;closed&quot;:false},&quot;pathStyles&quot;:[{&quot;type&quot;:&quot;FILL&quot;,&quot;fillStyle&quot;:&quot;transparent&quot;},{&quot;type&quot;:&quot;STROKE&quot;,&quot;strokeStyle&quot;:&quot;#232323&quot;,&quot;lineWidth&quot;:1.0027568922305852,&quot;lineJoin&quot;:&quot;round&quot;}],&quot;pathMarkers&quot;:{&quot;markerEnd&quot;:{&quot;type&quot;:&quot;PATH&quot;,&quot;units&quot;:{&quot;type&quot;:&quot;STROKE_WIDTH&quot;,&quot;scale&quot;:0.7},&quot;orient&quot;:{&quot;type&quot;:&quot;CLIPPED_CHORD&quot;},&quot;clipDistance&quot;:4,&quot;name&quot;:&quot;arrow&quot;,&quot;relativeTransform&quot;:{&quot;translate&quot;:{&quot;x&quot;:0,&quot;y&quot;:0},&quot;rotate&quot;:0,&quot;skewX&quot;:0,&quot;scale&quot;:{&quot;x&quot;:1,&quot;y&quot;:1}},&quot;path&quot;:{&quot;type&quot;:&quot;SPLINE&quot;,&quot;spline&quot;:{&quot;points&quot;:[{&quot;x&quot;:0,&quot;y&quot;:0,&quot;isEndPoint&quot;:true},{&quot;x&quot;:-5,&quot;y&quot;:-2.5,&quot;isEndPoint&quot;:true},{&quot;x&quot;:-5,&quot;y&quot;:2.5,&quot;isEndPoint&quot;:true}],&quot;closed&quot;:true}},&quot;pathStyles&quot;:[{&quot;type&quot;:&quot;FILL&quot;,&quot;fillStyle&quot;:&quot;context-stroke-flat&quot;}]}},&quot;isLocked&quot;:false,&quot;parent&quot;:{&quot;type&quot;:&quot;CHILD&quot;,&quot;parentId&quot;:&quot;04b6aa6f-31a0-4c7b-be78-12f520f06f49&quot;,&quot;order&quot;:&quot;6&quot;}},&quot;9eab6601-8b74-4c8f-b4c1-b9f09eb0a96e&quot;:{&quot;type&quot;:&quot;FIGURE_OBJECT&quot;,&quot;id&quot;:&quot;9eab6601-8b74-4c8f-b4c1-b9f09eb0a96e&quot;,&quot;relativeTransform&quot;:{&quot;translate&quot;:{&quot;x&quot;:53.89122491934442,&quot;y&quot;:-45.31615840930301},&quot;rotate&quot;:0,&quot;skewX&quot;:0,&quot;scale&quot;:{&quot;x&quot;:1,&quot;y&quot;:1}},&quot;opacity&quot;:1,&quot;pathStyles&quot;:[{&quot;type&quot;:&quot;FILL&quot;,&quot;fillStyle&quot;:&quot;#232323&quot;}],&quot;text&quot;:{&quot;textData&quot;:{&quot;lineSpacing&quot;:&quot;normal&quot;,&quot;alignment&quot;:&quot;center&quot;,&quot;lines&quot;:[{&quot;runs&quot;:[{&quot;style&quot;:{&quot;fontFamily&quot;:&quot;Roboto&quot;,&quot;fontSize&quot;:8,&quot;color&quot;:&quot;#232323&quot;,&quot;fontWeight&quot;:&quot;normal&quot;,&quot;fontStyle&quot;:&quot;italic&quot;,&quot;decoration&quot;:&quot;none&quot;,&quot;script&quot;:&quot;none&quot;},&quot;range&quot;:[0,0]},{&quot;style&quot;:{&quot;fontFamily&quot;:&quot;Roboto&quot;,&quot;fontSize&quot;:8,&quot;color&quot;:&quot;#232323&quot;,&quot;fontWeight&quot;:&quot;normal&quot;,&quot;fontStyle&quot;:&quot;italic&quot;,&quot;decoration&quot;:&quot;none&quot;,&quot;script&quot;:&quot;sub&quot;},&quot;range&quot;:[1,1]}],&quot;text&quot;:&quot;ta&quot;,&quot;baseStyle&quot;:{&quot;fontFamily&quot;:&quot;Roboto&quot;,&quot;fontSize&quot;:8,&quot;color&quot;:&quot;#232323&quot;,&quot;fontWeight&quot;:&quot;normal&quot;,&quot;fontStyle&quot;:&quot;italic&quot;,&quot;decoration&quot;:&quot;none&quot;,&quot;script&quot;:&quot;none&quot;}}],&quot;verticalAlign&quot;:&quot;TOP&quot;},&quot;size&quot;:{&quot;x&quot;:21.015231085321513,&quot;y&quot;:9.04},&quot;targetSize&quot;:{&quot;x&quot;:21.015231085321513,&quot;y&quot;:9.04},&quot;format&quot;:&quot;BETTER_TEXT&quot;,&quot;verticalAlign&quot;:&quot;TOP&quot;},&quot;isLocked&quot;:false,&quot;parent&quot;:{&quot;type&quot;:&quot;CHILD&quot;,&quot;parentId&quot;:&quot;04b6aa6f-31a0-4c7b-be78-12f520f06f49&quot;,&quot;order&quot;:&quot;61&quot;}},&quot;307ef3ee-52b2-4779-af61-4a0bed0a43a9&quot;:{&quot;type&quot;:&quot;FIGURE_OBJECT&quot;,&quot;id&quot;:&quot;307ef3ee-52b2-4779-af61-4a0bed0a43a9&quot;,&quot;relativeTransform&quot;:{&quot;translate&quot;:{&quot;x&quot;:103.6649305805542,&quot;y&quot;:-1.741999999999944},&quot;rotate&quot;:0,&quot;skewX&quot;:0,&quot;scale&quot;:{&quot;x&quot;:1,&quot;y&quot;:1}},&quot;opacity&quot;:1,&quot;pathStyles&quot;:[{&quot;type&quot;:&quot;FILL&quot;,&quot;fillStyle&quot;:&quot;#232323&quot;}],&quot;text&quot;:{&quot;textData&quot;:{&quot;lineSpacing&quot;:&quot;normal&quot;,&quot;alignment&quot;:&quot;center&quot;,&quot;lines&quot;:[{&quot;runs&quot;:[{&quot;style&quot;:{&quot;fontFamily&quot;:&quot;Roboto&quot;,&quot;fontSize&quot;:8,&quot;color&quot;:&quot;#232323&quot;,&quot;fontWeight&quot;:&quot;normal&quot;,&quot;fontStyle&quot;:&quot;italic&quot;,&quot;decoration&quot;:&quot;none&quot;,&quot;script&quot;:&quot;none&quot;},&quot;range&quot;:[0,0]}],&quot;text&quot;:&quot;m&quot;,&quot;baseStyle&quot;:{&quot;fontFamily&quot;:&quot;Roboto&quot;,&quot;fontSize&quot;:8,&quot;color&quot;:&quot;#232323&quot;,&quot;fontWeight&quot;:&quot;normal&quot;,&quot;fontStyle&quot;:&quot;italic&quot;,&quot;decoration&quot;:&quot;none&quot;,&quot;script&quot;:&quot;none&quot;}}],&quot;verticalAlign&quot;:&quot;TOP&quot;},&quot;size&quot;:{&quot;x&quot;:21.015231085321513,&quot;y&quot;:9.04},&quot;targetSize&quot;:{&quot;x&quot;:21.015231085321513,&quot;y&quot;:9.04},&quot;format&quot;:&quot;BETTER_TEXT&quot;,&quot;verticalAlign&quot;:&quot;TOP&quot;},&quot;isLocked&quot;:false,&quot;parent&quot;:{&quot;type&quot;:&quot;CHILD&quot;,&quot;parentId&quot;:&quot;04b6aa6f-31a0-4c7b-be78-12f520f06f49&quot;,&quot;order&quot;:&quot;62&quot;}},&quot;11eba5a1-5975-47db-9b44-6202b2638f3e&quot;:{&quot;type&quot;:&quot;FIGURE_OBJECT&quot;,&quot;id&quot;:&quot;11eba5a1-5975-47db-9b44-6202b2638f3e&quot;,&quot;relativeTransform&quot;:{&quot;translate&quot;:{&quot;x&quot;:-23.221041976286035,&quot;y&quot;:-73.403},&quot;rotate&quot;:0,&quot;skewX&quot;:0,&quot;scale&quot;:{&quot;x&quot;:1,&quot;y&quot;:1}},&quot;opacity&quot;:1,&quot;pathStyles&quot;:[{&quot;type&quot;:&quot;FILL&quot;,&quot;fillStyle&quot;:&quot;#232323&quot;}],&quot;text&quot;:{&quot;textData&quot;:{&quot;lineSpacing&quot;:&quot;normal&quot;,&quot;alignment&quot;:&quot;center&quot;,&quot;lines&quot;:[{&quot;runs&quot;:[{&quot;style&quot;:{&quot;fontFamily&quot;:&quot;Roboto&quot;,&quot;fontSize&quot;:8,&quot;color&quot;:&quot;#232323&quot;,&quot;fontWeight&quot;:&quot;normal&quot;,&quot;fontStyle&quot;:&quot;italic&quot;,&quot;decoration&quot;:&quot;none&quot;,&quot;script&quot;:&quot;none&quot;},&quot;range&quot;:[0,0]}],&quot;text&quot;:&quot;c&quot;,&quot;baseStyle&quot;:{&quot;fontFamily&quot;:&quot;Roboto&quot;,&quot;fontSize&quot;:8,&quot;color&quot;:&quot;#232323&quot;,&quot;fontWeight&quot;:&quot;normal&quot;,&quot;fontStyle&quot;:&quot;italic&quot;,&quot;decoration&quot;:&quot;none&quot;,&quot;script&quot;:&quot;none&quot;}}],&quot;verticalAlign&quot;:&quot;TOP&quot;},&quot;size&quot;:{&quot;x&quot;:21.015231085321513,&quot;y&quot;:9.04},&quot;targetSize&quot;:{&quot;x&quot;:21.015231085321513,&quot;y&quot;:9.04},&quot;format&quot;:&quot;BETTER_TEXT&quot;,&quot;verticalAlign&quot;:&quot;TOP&quot;},&quot;isLocked&quot;:false,&quot;parent&quot;:{&quot;type&quot;:&quot;CHILD&quot;,&quot;parentId&quot;:&quot;04b6aa6f-31a0-4c7b-be78-12f520f06f49&quot;,&quot;order&quot;:&quot;65&quot;}},&quot;48a94ac5-9f42-4190-9573-b8bcc4f46d33&quot;:{&quot;type&quot;:&quot;FIGURE_OBJECT&quot;,&quot;id&quot;:&quot;48a94ac5-9f42-4190-9573-b8bcc4f46d33&quot;,&quot;relativeTransform&quot;:{&quot;translate&quot;:{&quot;x&quot;:-61.81469949523272,&quot;y&quot;:-29.01499999999997},&quot;rotate&quot;:0,&quot;skewX&quot;:0,&quot;scale&quot;:{&quot;x&quot;:1,&quot;y&quot;:1}},&quot;opacity&quot;:1,&quot;pathStyles&quot;:[{&quot;type&quot;:&quot;FILL&quot;,&quot;fillStyle&quot;:&quot;#232323&quot;}],&quot;text&quot;:{&quot;textData&quot;:{&quot;lineSpacing&quot;:&quot;normal&quot;,&quot;alignment&quot;:&quot;center&quot;,&quot;lines&quot;:[{&quot;runs&quot;:[{&quot;style&quot;:{&quot;fontFamily&quot;:&quot;Roboto&quot;,&quot;fontSize&quot;:8,&quot;color&quot;:&quot;#232323&quot;,&quot;fontWeight&quot;:&quot;normal&quot;,&quot;fontStyle&quot;:&quot;italic&quot;,&quot;decoration&quot;:&quot;none&quot;,&quot;script&quot;:&quot;none&quot;},&quot;range&quot;:[0,0]},{&quot;style&quot;:{&quot;fontFamily&quot;:&quot;Roboto&quot;,&quot;fontSize&quot;:8.032128514056225,&quot;color&quot;:&quot;#232323&quot;,&quot;fontWeight&quot;:&quot;normal&quot;,&quot;fontStyle&quot;:&quot;italic&quot;,&quot;decoration&quot;:&quot;none&quot;,&quot;script&quot;:&quot;sub&quot;},&quot;range&quot;:[1,1]}],&quot;text&quot;:&quot;dT&quot;,&quot;baseStyle&quot;:{&quot;fontFamily&quot;:&quot;Roboto&quot;,&quot;fontSize&quot;:8,&quot;color&quot;:&quot;#232323&quot;,&quot;fontWeight&quot;:&quot;normal&quot;,&quot;fontStyle&quot;:&quot;italic&quot;,&quot;decoration&quot;:&quot;none&quot;,&quot;script&quot;:&quot;none&quot;}}],&quot;verticalAlign&quot;:&quot;TOP&quot;},&quot;size&quot;:{&quot;x&quot;:21.015231085321513,&quot;y&quot;:9.04},&quot;targetSize&quot;:{&quot;x&quot;:21.015231085321513,&quot;y&quot;:9.04},&quot;format&quot;:&quot;BETTER_TEXT&quot;,&quot;verticalAlign&quot;:&quot;TOP&quot;},&quot;isLocked&quot;:false,&quot;parent&quot;:{&quot;type&quot;:&quot;CHILD&quot;,&quot;parentId&quot;:&quot;04b6aa6f-31a0-4c7b-be78-12f520f06f49&quot;,&quot;order&quot;:&quot;66&quot;}},&quot;fda3229f-ca5f-420b-ab5d-21b7b306ea35&quot;:{&quot;type&quot;:&quot;FIGURE_OBJECT&quot;,&quot;id&quot;:&quot;fda3229f-ca5f-420b-ab5d-21b7b306ea35&quot;,&quot;relativeTransform&quot;:{&quot;translate&quot;:{&quot;x&quot;:20.926930580554128,&quot;y&quot;:-29.01499999999997},&quot;rotate&quot;:0,&quot;skewX&quot;:0,&quot;scale&quot;:{&quot;x&quot;:1,&quot;y&quot;:1}},&quot;opacity&quot;:1,&quot;pathStyles&quot;:[{&quot;type&quot;:&quot;FILL&quot;,&quot;fillStyle&quot;:&quot;#232323&quot;}],&quot;text&quot;:{&quot;textData&quot;:{&quot;lineSpacing&quot;:&quot;normal&quot;,&quot;alignment&quot;:&quot;center&quot;,&quot;lines&quot;:[{&quot;runs&quot;:[{&quot;style&quot;:{&quot;fontFamily&quot;:&quot;Roboto&quot;,&quot;fontSize&quot;:8,&quot;color&quot;:&quot;#232323&quot;,&quot;fontWeight&quot;:&quot;normal&quot;,&quot;fontStyle&quot;:&quot;italic&quot;,&quot;decoration&quot;:&quot;none&quot;,&quot;script&quot;:&quot;none&quot;},&quot;range&quot;:[0,0]},{&quot;style&quot;:{&quot;fontFamily&quot;:&quot;Roboto&quot;,&quot;fontSize&quot;:8.032128514056225,&quot;color&quot;:&quot;#232323&quot;,&quot;fontWeight&quot;:&quot;normal&quot;,&quot;fontStyle&quot;:&quot;italic&quot;,&quot;decoration&quot;:&quot;none&quot;,&quot;script&quot;:&quot;sub&quot;},&quot;range&quot;:[1,1]}],&quot;text&quot;:&quot;dI&quot;,&quot;baseStyle&quot;:{&quot;fontFamily&quot;:&quot;Roboto&quot;,&quot;fontSize&quot;:8,&quot;color&quot;:&quot;#232323&quot;,&quot;fontWeight&quot;:&quot;normal&quot;,&quot;fontStyle&quot;:&quot;italic&quot;,&quot;decoration&quot;:&quot;none&quot;,&quot;script&quot;:&quot;none&quot;}}],&quot;verticalAlign&quot;:&quot;TOP&quot;},&quot;size&quot;:{&quot;x&quot;:21.015231085321513,&quot;y&quot;:9.04},&quot;targetSize&quot;:{&quot;x&quot;:21.015231085321513,&quot;y&quot;:9.04},&quot;format&quot;:&quot;BETTER_TEXT&quot;,&quot;verticalAlign&quot;:&quot;TOP&quot;},&quot;isLocked&quot;:false,&quot;parent&quot;:{&quot;type&quot;:&quot;CHILD&quot;,&quot;parentId&quot;:&quot;04b6aa6f-31a0-4c7b-be78-12f520f06f49&quot;,&quot;order&quot;:&quot;67&quot;}},&quot;501af07e-06ad-4f09-94eb-faad3224d8d5&quot;:{&quot;type&quot;:&quot;FIGURE_OBJECT&quot;,&quot;id&quot;:&quot;501af07e-06ad-4f09-94eb-faad3224d8d5&quot;,&quot;relativeTransform&quot;:{&quot;translate&quot;:{&quot;x&quot;:84.37993058055434,&quot;y&quot;:26.517999999999933},&quot;rotate&quot;:0,&quot;skewX&quot;:0,&quot;scale&quot;:{&quot;x&quot;:1,&quot;y&quot;:1}},&quot;opacity&quot;:1,&quot;pathStyles&quot;:[{&quot;type&quot;:&quot;FILL&quot;,&quot;fillStyle&quot;:&quot;#232323&quot;}],&quot;text&quot;:{&quot;textData&quot;:{&quot;lineSpacing&quot;:&quot;normal&quot;,&quot;alignment&quot;:&quot;center&quot;,&quot;lines&quot;:[{&quot;runs&quot;:[{&quot;style&quot;:{&quot;fontFamily&quot;:&quot;Roboto&quot;,&quot;fontSize&quot;:8,&quot;color&quot;:&quot;#232323&quot;,&quot;fontWeight&quot;:&quot;normal&quot;,&quot;fontStyle&quot;:&quot;italic&quot;,&quot;decoration&quot;:&quot;none&quot;,&quot;script&quot;:&quot;none&quot;},&quot;range&quot;:[0,0]},{&quot;style&quot;:{&quot;fontFamily&quot;:&quot;Roboto&quot;,&quot;fontSize&quot;:8.032128514056225,&quot;color&quot;:&quot;#232323&quot;,&quot;fontWeight&quot;:&quot;normal&quot;,&quot;fontStyle&quot;:&quot;italic&quot;,&quot;decoration&quot;:&quot;none&quot;,&quot;script&quot;:&quot;sub&quot;},&quot;range&quot;:[1,1]}],&quot;text&quot;:&quot;dP&quot;,&quot;baseStyle&quot;:{&quot;fontFamily&quot;:&quot;Roboto&quot;,&quot;fontSize&quot;:8,&quot;color&quot;:&quot;#232323&quot;,&quot;fontWeight&quot;:&quot;normal&quot;,&quot;fontStyle&quot;:&quot;italic&quot;,&quot;decoration&quot;:&quot;none&quot;,&quot;script&quot;:&quot;none&quot;}}],&quot;verticalAlign&quot;:&quot;TOP&quot;},&quot;size&quot;:{&quot;x&quot;:21.015231085321513,&quot;y&quot;:9.04},&quot;targetSize&quot;:{&quot;x&quot;:21.015231085321513,&quot;y&quot;:9.04},&quot;format&quot;:&quot;BETTER_TEXT&quot;,&quot;verticalAlign&quot;:&quot;TOP&quot;},&quot;isLocked&quot;:false,&quot;parent&quot;:{&quot;type&quot;:&quot;CHILD&quot;,&quot;parentId&quot;:&quot;04b6aa6f-31a0-4c7b-be78-12f520f06f49&quot;,&quot;order&quot;:&quot;7&quot;}},&quot;42c600c0-89ef-4265-b792-0cfe484354a2&quot;:{&quot;type&quot;:&quot;FIGURE_OBJECT&quot;,&quot;id&quot;:&quot;42c600c0-89ef-4265-b792-0cfe484354a2&quot;,&quot;relativeTransform&quot;:{&quot;translate&quot;:{&quot;x&quot;:18.926930580554128,&quot;y&quot;:42.49900000000004},&quot;rotate&quot;:0,&quot;skewX&quot;:0,&quot;scale&quot;:{&quot;x&quot;:1,&quot;y&quot;:1}},&quot;opacity&quot;:1,&quot;pathStyles&quot;:[{&quot;type&quot;:&quot;FILL&quot;,&quot;fillStyle&quot;:&quot;#232323&quot;}],&quot;text&quot;:{&quot;textData&quot;:{&quot;lineSpacing&quot;:&quot;normal&quot;,&quot;alignment&quot;:&quot;center&quot;,&quot;lines&quot;:[{&quot;runs&quot;:[{&quot;style&quot;:{&quot;fontFamily&quot;:&quot;Roboto&quot;,&quot;fontSize&quot;:8,&quot;color&quot;:&quot;#232323&quot;,&quot;fontWeight&quot;:&quot;normal&quot;,&quot;fontStyle&quot;:&quot;italic&quot;,&quot;decoration&quot;:&quot;none&quot;,&quot;script&quot;:&quot;none&quot;},&quot;range&quot;:[0,0]},{&quot;style&quot;:{&quot;fontFamily&quot;:&quot;Roboto&quot;,&quot;fontSize&quot;:8.032128514056225,&quot;color&quot;:&quot;#232323&quot;,&quot;fontWeight&quot;:&quot;normal&quot;,&quot;fontStyle&quot;:&quot;italic&quot;,&quot;decoration&quot;:&quot;none&quot;,&quot;script&quot;:&quot;sub&quot;},&quot;range&quot;:[1,1]}],&quot;text&quot;:&quot;dE&quot;,&quot;baseStyle&quot;:{&quot;fontFamily&quot;:&quot;Roboto&quot;,&quot;fontSize&quot;:8,&quot;color&quot;:&quot;#232323&quot;,&quot;fontWeight&quot;:&quot;normal&quot;,&quot;fontStyle&quot;:&quot;italic&quot;,&quot;decoration&quot;:&quot;none&quot;,&quot;script&quot;:&quot;none&quot;}}],&quot;verticalAlign&quot;:&quot;TOP&quot;},&quot;size&quot;:{&quot;x&quot;:21.015231085321513,&quot;y&quot;:9.04},&quot;targetSize&quot;:{&quot;x&quot;:21.015231085321513,&quot;y&quot;:9.04},&quot;format&quot;:&quot;BETTER_TEXT&quot;,&quot;verticalAlign&quot;:&quot;TOP&quot;},&quot;isLocked&quot;:false,&quot;parent&quot;:{&quot;type&quot;:&quot;CHILD&quot;,&quot;parentId&quot;:&quot;04b6aa6f-31a0-4c7b-be78-12f520f06f49&quot;,&quot;order&quot;:&quot;71&quot;}},&quot;58cc9bca-8237-4084-91b2-90f6649ebeb0&quot;:{&quot;type&quot;:&quot;FIGURE_OBJECT&quot;,&quot;id&quot;:&quot;58cc9bca-8237-4084-91b2-90f6649ebeb0&quot;,&quot;relativeTransform&quot;:{&quot;translate&quot;:{&quot;x&quot;:66.75050253789355,&quot;y&quot;:-31.319000000000056},&quot;rotate&quot;:0,&quot;skewX&quot;:0,&quot;scale&quot;:{&quot;x&quot;:1,&quot;y&quot;:1}},&quot;opacity&quot;:1,&quot;pathStyles&quot;:[{&quot;type&quot;:&quot;FILL&quot;,&quot;fillStyle&quot;:&quot;#232323&quot;}],&quot;text&quot;:{&quot;textData&quot;:{&quot;lineSpacing&quot;:&quot;normal&quot;,&quot;alignment&quot;:&quot;center&quot;,&quot;lines&quot;:[{&quot;runs&quot;:[{&quot;style&quot;:{&quot;fontFamily&quot;:&quot;Roboto&quot;,&quot;fontSize&quot;:8,&quot;color&quot;:&quot;#232323&quot;,&quot;fontWeight&quot;:&quot;normal&quot;,&quot;fontStyle&quot;:&quot;italic&quot;,&quot;decoration&quot;:&quot;none&quot;,&quot;script&quot;:&quot;none&quot;},&quot;range&quot;:[0,4]},{&quot;style&quot;:{&quot;fontFamily&quot;:&quot;Roboto&quot;,&quot;fontSize&quot;:8.032128514056225,&quot;color&quot;:&quot;#232323&quot;,&quot;fontWeight&quot;:&quot;normal&quot;,&quot;fontStyle&quot;:&quot;italic&quot;,&quot;decoration&quot;:&quot;none&quot;,&quot;script&quot;:&quot;sub&quot;},&quot;range&quot;:[5,5]},{&quot;style&quot;:{&quot;fontFamily&quot;:&quot;Roboto&quot;,&quot;fontSize&quot;:8,&quot;color&quot;:&quot;#232323&quot;,&quot;fontWeight&quot;:&quot;normal&quot;,&quot;fontStyle&quot;:&quot;italic&quot;,&quot;decoration&quot;:&quot;none&quot;,&quot;script&quot;:&quot;none&quot;},&quot;range&quot;:[6,6]}],&quot;text&quot;:&quot;p(V,NP)&quot;,&quot;baseStyle&quot;:{&quot;fontFamily&quot;:&quot;Roboto&quot;,&quot;fontSize&quot;:8,&quot;color&quot;:&quot;#232323&quot;,&quot;fontWeight&quot;:&quot;normal&quot;,&quot;fontStyle&quot;:&quot;italic&quot;,&quot;decoration&quot;:&quot;none&quot;,&quot;script&quot;:&quot;none&quot;}}],&quot;verticalAlign&quot;:&quot;TOP&quot;},&quot;size&quot;:{&quot;x&quot;:35.484375,&quot;y&quot;:9.04},&quot;targetSize&quot;:{&quot;x&quot;:35.484375,&quot;y&quot;:9.04},&quot;format&quot;:&quot;BETTER_TEXT&quot;,&quot;verticalAlign&quot;:&quot;TOP&quot;},&quot;isLocked&quot;:false,&quot;parent&quot;:{&quot;type&quot;:&quot;CHILD&quot;,&quot;parentId&quot;:&quot;04b6aa6f-31a0-4c7b-be78-12f520f06f49&quot;,&quot;order&quot;:&quot;72&quot;}},&quot;24a86048-6c18-4450-a6ec-7b5396542d2a&quot;:{&quot;type&quot;:&quot;FIGURE_OBJECT&quot;,&quot;id&quot;:&quot;24a86048-6c18-4450-a6ec-7b5396542d2a&quot;,&quot;relativeTransform&quot;:{&quot;translate&quot;:{&quot;x&quot;:38.15493058055417,&quot;y&quot;:-15.84099999999999},&quot;rotate&quot;:0,&quot;skewX&quot;:0,&quot;scale&quot;:{&quot;x&quot;:1,&quot;y&quot;:1}},&quot;opacity&quot;:1,&quot;pathStyles&quot;:[{&quot;type&quot;:&quot;FILL&quot;,&quot;fillStyle&quot;:&quot;#232323&quot;}],&quot;text&quot;:{&quot;textData&quot;:{&quot;lineSpacing&quot;:&quot;normal&quot;,&quot;alignment&quot;:&quot;center&quot;,&quot;lines&quot;:[{&quot;runs&quot;:[{&quot;style&quot;:{&quot;fontFamily&quot;:&quot;Roboto&quot;,&quot;fontSize&quot;:8,&quot;color&quot;:&quot;#232323&quot;,&quot;fontWeight&quot;:&quot;normal&quot;,&quot;fontStyle&quot;:&quot;italic&quot;,&quot;decoration&quot;:&quot;none&quot;,&quot;script&quot;:&quot;none&quot;},&quot;range&quot;:[0,0]}],&quot;text&quot;:&quot;f&quot;,&quot;baseStyle&quot;:{&quot;fontFamily&quot;:&quot;Roboto&quot;,&quot;fontSize&quot;:8,&quot;color&quot;:&quot;#232323&quot;,&quot;fontWeight&quot;:&quot;normal&quot;,&quot;fontStyle&quot;:&quot;italic&quot;,&quot;decoration&quot;:&quot;none&quot;,&quot;script&quot;:&quot;none&quot;}}],&quot;verticalAlign&quot;:&quot;TOP&quot;},&quot;size&quot;:{&quot;x&quot;:21.015231085321513,&quot;y&quot;:9.04},&quot;targetSize&quot;:{&quot;x&quot;:21.015231085321513,&quot;y&quot;:9.04},&quot;format&quot;:&quot;BETTER_TEXT&quot;,&quot;verticalAlign&quot;:&quot;TOP&quot;},&quot;isLocked&quot;:false,&quot;parent&quot;:{&quot;type&quot;:&quot;CHILD&quot;,&quot;parentId&quot;:&quot;04b6aa6f-31a0-4c7b-be78-12f520f06f49&quot;,&quot;order&quot;:&quot;75&quot;}},&quot;7ccc938d-13d4-4951-bd8d-199850307129&quot;:{&quot;type&quot;:&quot;FIGURE_OBJECT&quot;,&quot;id&quot;:&quot;7ccc938d-13d4-4951-bd8d-199850307129&quot;,&quot;relativeTransform&quot;:{&quot;translate&quot;:{&quot;x&quot;:59.515930580554276,&quot;y&quot;:-12.504999999999978},&quot;rotate&quot;:0,&quot;skewX&quot;:0,&quot;scale&quot;:{&quot;x&quot;:1,&quot;y&quot;:1}},&quot;opacity&quot;:1,&quot;pathStyles&quot;:[{&quot;type&quot;:&quot;FILL&quot;,&quot;fillStyle&quot;:&quot;#232323&quot;}],&quot;text&quot;:{&quot;textData&quot;:{&quot;lineSpacing&quot;:&quot;normal&quot;,&quot;alignment&quot;:&quot;center&quot;,&quot;lines&quot;:[{&quot;runs&quot;:[{&quot;style&quot;:{&quot;fontFamily&quot;:&quot;Roboto&quot;,&quot;fontSize&quot;:8,&quot;color&quot;:&quot;#232323&quot;,&quot;fontWeight&quot;:&quot;normal&quot;,&quot;fontStyle&quot;:&quot;italic&quot;,&quot;decoration&quot;:&quot;none&quot;,&quot;script&quot;:&quot;none&quot;},&quot;range&quot;:[0,2]}],&quot;text&quot;:&quot;1-f&quot;,&quot;baseStyle&quot;:{&quot;fontFamily&quot;:&quot;Roboto&quot;,&quot;fontSize&quot;:8,&quot;color&quot;:&quot;#232323&quot;,&quot;fontWeight&quot;:&quot;normal&quot;,&quot;fontStyle&quot;:&quot;italic&quot;,&quot;decoration&quot;:&quot;none&quot;,&quot;script&quot;:&quot;none&quot;}}],&quot;verticalAlign&quot;:&quot;TOP&quot;},&quot;size&quot;:{&quot;x&quot;:21.015231085321513,&quot;y&quot;:9.04},&quot;targetSize&quot;:{&quot;x&quot;:21.015231085321513,&quot;y&quot;:9.04},&quot;format&quot;:&quot;BETTER_TEXT&quot;,&quot;verticalAlign&quot;:&quot;TOP&quot;},&quot;isLocked&quot;:false,&quot;parent&quot;:{&quot;type&quot;:&quot;CHILD&quot;,&quot;parentId&quot;:&quot;04b6aa6f-31a0-4c7b-be78-12f520f06f49&quot;,&quot;order&quot;:&quot;76&quot;}},&quot;3703ec26-016c-409d-8979-563faa83a516&quot;:{&quot;type&quot;:&quot;FIGURE_OBJECT&quot;,&quot;id&quot;:&quot;3703ec26-016c-409d-8979-563faa83a516&quot;,&quot;name&quot;:&quot;Clock&quot;,&quot;relativeTransform&quot;:{&quot;translate&quot;:{&quot;x&quot;:47.82173597453488,&quot;y&quot;:-54.279928405201936},&quot;rotate&quot;:0,&quot;skewX&quot;:0,&quot;scale&quot;:{&quot;x&quot;:0.0335447122929452,&quot;y&quot;:0.0335447122929452}},&quot;opacity&quot;:1,&quot;image&quot;:{&quot;url&quot;:&quot;https://icons.biorender.com/biorender/5a6f5847b5d37c00144d92d2/20180129172254/image/clock.png&quot;,&quot;size&quot;:{&quot;x&quot;:354,&quot;y&quot;:354},&quot;isPremium&quot;:false},&quot;source&quot;:{&quot;id&quot;:&quot;5a6f5847b5d37c00144d92d2&quot;,&quot;type&quot;:&quot;ASSETS&quot;},&quot;pathStyles&quot;:[{&quot;type&quot;:&quot;FILL&quot;,&quot;fillStyle&quot;:&quot;rgb(0,0,0)&quot;}],&quot;isLocked&quot;:false,&quot;parent&quot;:{&quot;type&quot;:&quot;CHILD&quot;,&quot;parentId&quot;:&quot;04b6aa6f-31a0-4c7b-be78-12f520f06f49&quot;,&quot;order&quot;:&quot;99&quot;}},&quot;707b8ed7-5cd3-4464-94f0-00fb6e242d85&quot;:{&quot;type&quot;:&quot;FIGURE_OBJECT&quot;,&quot;id&quot;:&quot;707b8ed7-5cd3-4464-94f0-00fb6e242d85&quot;,&quot;relativeTransform&quot;:{&quot;translate&quot;:{&quot;x&quot;:-80.26512677987817,&quot;y&quot;:-55.69633333333329},&quot;rotate&quot;:0,&quot;skewX&quot;:0,&quot;scale&quot;:{&quot;x&quot;:1,&quot;y&quot;:1}},&quot;opacity&quot;:1,&quot;pathStyles&quot;:[{&quot;type&quot;:&quot;FILL&quot;,&quot;fillStyle&quot;:&quot;rgba(254,254,254,1)&quot;}],&quot;text&quot;:{&quot;textData&quot;:{&quot;lineSpacing&quot;:&quot;normal&quot;,&quot;alignment&quot;:&quot;center&quot;,&quot;lines&quot;:[{&quot;runs&quot;:[{&quot;style&quot;:{&quot;fontFamily&quot;:&quot;Liberation Serif&quot;,&quot;fontSize&quot;:10.666666666666666,&quot;color&quot;:&quot;rgba(254,254,254,1)&quot;,&quot;fontWeight&quot;:&quot;bold&quot;,&quot;fontStyle&quot;:&quot;normal&quot;,&quot;decoration&quot;:&quot;none&quot;,&quot;script&quot;:&quot;none&quot;},&quot;range&quot;:[0,0]}],&quot;text&quot;:&quot;T&quot;,&quot;baseStyle&quot;:{&quot;fontFamily&quot;:&quot;Liberation Serif&quot;,&quot;fontSize&quot;:10.666666666666666,&quot;color&quot;:&quot;rgba(254,254,254,1)&quot;,&quot;fontWeight&quot;:&quot;bold&quot;,&quot;fontStyle&quot;:&quot;normal&quot;,&quot;decoration&quot;:&quot;none&quot;,&quot;script&quot;:&quot;none&quot;}}],&quot;verticalAlign&quot;:&quot;TOP&quot;},&quot;size&quot;:{&quot;x&quot;:20.02437651603078,&quot;y&quot;:12.053333333333331},&quot;targetSize&quot;:{&quot;x&quot;:20.02437651603078,&quot;y&quot;:12.053333333333331},&quot;format&quot;:&quot;BETTER_TEXT&quot;,&quot;verticalAlign&quot;:&quot;TOP&quot;},&quot;isLocked&quot;:false,&quot;parent&quot;:{&quot;type&quot;:&quot;CHILD&quot;,&quot;parentId&quot;:&quot;04b6aa6f-31a0-4c7b-be78-12f520f06f49&quot;,&quot;order&quot;:&quot;8&quot;}},&quot;a59c5401-a996-49dc-a98e-ee802acce316&quot;:{&quot;type&quot;:&quot;FIGURE_OBJECT&quot;,&quot;id&quot;:&quot;a59c5401-a996-49dc-a98e-ee802acce316&quot;,&quot;relativeTransform&quot;:{&quot;translate&quot;:{&quot;x&quot;:-0.5924967040911338,&quot;y&quot;:-55.34933333333331},&quot;rotate&quot;:0,&quot;skewX&quot;:0,&quot;scale&quot;:{&quot;x&quot;:1,&quot;y&quot;:1}},&quot;opacity&quot;:1,&quot;pathStyles&quot;:[{&quot;type&quot;:&quot;FILL&quot;,&quot;fillStyle&quot;:&quot;rgba(254,254,254,1)&quot;}],&quot;text&quot;:{&quot;textData&quot;:{&quot;lineSpacing&quot;:&quot;normal&quot;,&quot;alignment&quot;:&quot;center&quot;,&quot;lines&quot;:[{&quot;runs&quot;:[{&quot;style&quot;:{&quot;fontFamily&quot;:&quot;Liberation Serif&quot;,&quot;fontSize&quot;:10.666666666666666,&quot;color&quot;:&quot;rgba(254,254,254,1)&quot;,&quot;fontWeight&quot;:&quot;bold&quot;,&quot;fontStyle&quot;:&quot;normal&quot;,&quot;decoration&quot;:&quot;none&quot;,&quot;script&quot;:&quot;none&quot;},&quot;range&quot;:[0,0]}],&quot;text&quot;:&quot;I&quot;,&quot;baseStyle&quot;:{&quot;fontFamily&quot;:&quot;Liberation Serif&quot;,&quot;fontSize&quot;:10.666666666666666,&quot;color&quot;:&quot;rgba(254,254,254,1)&quot;,&quot;fontWeight&quot;:&quot;bold&quot;,&quot;fontStyle&quot;:&quot;normal&quot;,&quot;decoration&quot;:&quot;none&quot;,&quot;script&quot;:&quot;none&quot;}}],&quot;verticalAlign&quot;:&quot;TOP&quot;},&quot;size&quot;:{&quot;x&quot;:20.02437651603078,&quot;y&quot;:12.053333333333331},&quot;targetSize&quot;:{&quot;x&quot;:20.02437651603078,&quot;y&quot;:12.053333333333331},&quot;format&quot;:&quot;BETTER_TEXT&quot;,&quot;verticalAlign&quot;:&quot;TOP&quot;},&quot;isLocked&quot;:false,&quot;parent&quot;:{&quot;type&quot;:&quot;CHILD&quot;,&quot;parentId&quot;:&quot;04b6aa6f-31a0-4c7b-be78-12f520f06f49&quot;,&quot;order&quot;:&quot;82&quot;}},&quot;82c9cadb-46f5-4bef-8044-99ed5ec2b97b&quot;:{&quot;type&quot;:&quot;FIGURE_OBJECT&quot;,&quot;id&quot;:&quot;82c9cadb-46f5-4bef-8044-99ed5ec2b97b&quot;,&quot;relativeTransform&quot;:{&quot;translate&quot;:{&quot;x&quot;:77.373503295909,&quot;y&quot;:8.026666666666666},&quot;rotate&quot;:0,&quot;skewX&quot;:0,&quot;scale&quot;:{&quot;x&quot;:1,&quot;y&quot;:1}},&quot;opacity&quot;:1,&quot;pathStyles&quot;:[{&quot;type&quot;:&quot;FILL&quot;,&quot;fillStyle&quot;:&quot;rgba(254,254,254,1)&quot;}],&quot;text&quot;:{&quot;textData&quot;:{&quot;lineSpacing&quot;:&quot;normal&quot;,&quot;alignment&quot;:&quot;center&quot;,&quot;lines&quot;:[{&quot;runs&quot;:[{&quot;style&quot;:{&quot;fontFamily&quot;:&quot;Liberation Serif&quot;,&quot;fontSize&quot;:10.666666666666666,&quot;color&quot;:&quot;rgba(254,254,254,1)&quot;,&quot;fontWeight&quot;:&quot;bold&quot;,&quot;fontStyle&quot;:&quot;normal&quot;,&quot;decoration&quot;:&quot;none&quot;,&quot;script&quot;:&quot;none&quot;},&quot;range&quot;:[0,0]}],&quot;text&quot;:&quot;P&quot;,&quot;baseStyle&quot;:{&quot;fontFamily&quot;:&quot;Liberation Serif&quot;,&quot;fontSize&quot;:10.666666666666666,&quot;color&quot;:&quot;rgba(254,254,254,1)&quot;,&quot;fontWeight&quot;:&quot;bold&quot;,&quot;fontStyle&quot;:&quot;normal&quot;,&quot;decoration&quot;:&quot;none&quot;,&quot;script&quot;:&quot;none&quot;}}],&quot;verticalAlign&quot;:&quot;TOP&quot;},&quot;size&quot;:{&quot;x&quot;:20.02437651603078,&quot;y&quot;:12.053333333333331},&quot;targetSize&quot;:{&quot;x&quot;:20.02437651603078,&quot;y&quot;:12.053333333333331},&quot;format&quot;:&quot;BETTER_TEXT&quot;,&quot;verticalAlign&quot;:&quot;TOP&quot;},&quot;isLocked&quot;:false,&quot;parent&quot;:{&quot;type&quot;:&quot;CHILD&quot;,&quot;parentId&quot;:&quot;04b6aa6f-31a0-4c7b-be78-12f520f06f49&quot;,&quot;order&quot;:&quot;85&quot;}},&quot;a21799a6-828a-483d-96fd-d484403b0a72&quot;:{&quot;type&quot;:&quot;FIGURE_OBJECT&quot;,&quot;id&quot;:&quot;a21799a6-828a-483d-96fd-d484403b0a72&quot;,&quot;relativeTransform&quot;:{&quot;translate&quot;:{&quot;x&quot;:11.379503295908851,&quot;y&quot;:11.68666666666652},&quot;rotate&quot;:0,&quot;skewX&quot;:0,&quot;scale&quot;:{&quot;x&quot;:1,&quot;y&quot;:1}},&quot;opacity&quot;:1,&quot;pathStyles&quot;:[{&quot;type&quot;:&quot;FILL&quot;,&quot;fillStyle&quot;:&quot;rgba(254,254,254,1)&quot;}],&quot;text&quot;:{&quot;textData&quot;:{&quot;lineSpacing&quot;:&quot;normal&quot;,&quot;alignment&quot;:&quot;center&quot;,&quot;lines&quot;:[{&quot;runs&quot;:[{&quot;style&quot;:{&quot;fontFamily&quot;:&quot;Liberation Serif&quot;,&quot;fontSize&quot;:10.666666666666666,&quot;color&quot;:&quot;rgba(254,254,254,1)&quot;,&quot;fontWeight&quot;:&quot;bold&quot;,&quot;fontStyle&quot;:&quot;normal&quot;,&quot;decoration&quot;:&quot;none&quot;,&quot;script&quot;:&quot;none&quot;},&quot;range&quot;:[0,0]}],&quot;text&quot;:&quot;E&quot;,&quot;baseStyle&quot;:{&quot;fontFamily&quot;:&quot;Liberation Serif&quot;,&quot;fontSize&quot;:10.666666666666666,&quot;color&quot;:&quot;rgba(254,254,254,1)&quot;,&quot;fontWeight&quot;:&quot;bold&quot;,&quot;fontStyle&quot;:&quot;normal&quot;,&quot;decoration&quot;:&quot;none&quot;,&quot;script&quot;:&quot;none&quot;}}],&quot;verticalAlign&quot;:&quot;TOP&quot;},&quot;size&quot;:{&quot;x&quot;:20.02437651603078,&quot;y&quot;:12.053333333333331},&quot;targetSize&quot;:{&quot;x&quot;:20.02437651603078,&quot;y&quot;:12.053333333333331},&quot;format&quot;:&quot;BETTER_TEXT&quot;,&quot;verticalAlign&quot;:&quot;TOP&quot;},&quot;isLocked&quot;:false,&quot;parent&quot;:{&quot;type&quot;:&quot;CHILD&quot;,&quot;parentId&quot;:&quot;04b6aa6f-31a0-4c7b-be78-12f520f06f49&quot;,&quot;order&quot;:&quot;9&quot;}},&quot;9c204ce2-3e56-4f9d-88d3-5500f7af432a&quot;:{&quot;type&quot;:&quot;FIGURE_OBJECT&quot;,&quot;id&quot;:&quot;9c204ce2-3e56-4f9d-88d3-5500f7af432a&quot;,&quot;relativeTransform&quot;:{&quot;translate&quot;:{&quot;x&quot;:-42.70046926093134,&quot;y&quot;:-92.36633333333324},&quot;rotate&quot;:0,&quot;skewX&quot;:0,&quot;scale&quot;:{&quot;x&quot;:1,&quot;y&quot;:1}},&quot;opacity&quot;:1,&quot;pathStyles&quot;:[{&quot;type&quot;:&quot;FILL&quot;,&quot;fillStyle&quot;:&quot;rgba(23,23,23,1)&quot;}],&quot;text&quot;:{&quot;textData&quot;:{&quot;lineSpacing&quot;:&quot;normal&quot;,&quot;alignment&quot;:&quot;center&quot;,&quot;lines&quot;:[{&quot;runs&quot;:[{&quot;style&quot;:{&quot;fontFamily&quot;:&quot;Liberation Serif&quot;,&quot;fontSize&quot;:10.666666666666666,&quot;color&quot;:&quot;rgba(23,23,23,1)&quot;,&quot;fontWeight&quot;:&quot;bold&quot;,&quot;fontStyle&quot;:&quot;normal&quot;,&quot;decoration&quot;:&quot;none&quot;,&quot;script&quot;:&quot;none&quot;},&quot;range&quot;:[0,0]}],&quot;text&quot;:&quot;V&quot;,&quot;baseStyle&quot;:{&quot;fontFamily&quot;:&quot;Liberation Serif&quot;,&quot;fontSize&quot;:10.666666666666666,&quot;color&quot;:&quot;rgba(23,23,23,1)&quot;,&quot;fontWeight&quot;:&quot;bold&quot;,&quot;fontStyle&quot;:&quot;normal&quot;,&quot;decoration&quot;:&quot;none&quot;,&quot;script&quot;:&quot;none&quot;}}],&quot;verticalAlign&quot;:&quot;TOP&quot;},&quot;size&quot;:{&quot;x&quot;:20.02437651603078,&quot;y&quot;:12.053333333333331},&quot;targetSize&quot;:{&quot;x&quot;:20.02437651603078,&quot;y&quot;:12.053333333333331},&quot;format&quot;:&quot;BETTER_TEXT&quot;,&quot;verticalAlign&quot;:&quot;TOP&quot;},&quot;isLocked&quot;:false,&quot;parent&quot;:{&quot;type&quot;:&quot;CHILD&quot;,&quot;parentId&quot;:&quot;04b6aa6f-31a0-4c7b-be78-12f520f06f49&quot;,&quot;order&quot;:&quot;95&quot;}},&quot;9a6b457d-16ad-4e22-a7fd-71a104e8a5a0&quot;:{&quot;type&quot;:&quot;FIGURE_OBJECT&quot;,&quot;id&quot;:&quot;9a6b457d-16ad-4e22-a7fd-71a104e8a5a0&quot;,&quot;relativeTransform&quot;:{&quot;translate&quot;:{&quot;x&quot;:0,&quot;y&quot;:0},&quot;rotate&quot;:0,&quot;skewX&quot;:0,&quot;scale&quot;:{&quot;x&quot;:1,&quot;y&quot;:1}},&quot;path&quot;:{&quot;type&quot;:&quot;RECT&quot;,&quot;size&quot;:{&quot;x&quot;:226.77165354330708,&quot;y&quot;:264.56692913385825}},&quot;pathStyles&quot;:[{&quot;type&quot;:&quot;FILL&quot;,&quot;fillStyle&quot;:&quot;rgba(0,0,0,0)&quot;}],&quot;parent&quot;:{&quot;type&quot;:&quot;FRAME&quot;,&quot;parentId&quot;:&quot;04b6aa6f-31a0-4c7b-be78-12f520f06f49&quot;,&quot;order&quot;:&quot;5&quot;}},&quot;458c93b5-0369-4320-822c-66a80f6429cc&quot;:{&quot;type&quot;:&quot;FIGURE_OBJECT&quot;,&quot;id&quot;:&quot;458c93b5-0369-4320-822c-66a80f6429cc&quot;,&quot;relativeTransform&quot;:{&quot;translate&quot;:{&quot;x&quot;:74.41164468314092,&quot;y&quot;:-51.15995654833036},&quot;rotate&quot;:0,&quot;skewX&quot;:0,&quot;scale&quot;:{&quot;x&quot;:1,&quot;y&quot;:1}},&quot;opacity&quot;:1,&quot;pathStyles&quot;:[{&quot;type&quot;:&quot;FILL&quot;,&quot;fillStyle&quot;:&quot;rgba(254,254,254,1)&quot;}],&quot;text&quot;:{&quot;textData&quot;:{&quot;lineSpacing&quot;:&quot;normal&quot;,&quot;alignment&quot;:&quot;center&quot;,&quot;lines&quot;:[{&quot;runs&quot;:[{&quot;style&quot;:{&quot;fontFamily&quot;:&quot;Liberation Serif&quot;,&quot;fontSize&quot;:10.666666666666666,&quot;color&quot;:&quot;rgba(254,254,254,1)&quot;,&quot;fontWeight&quot;:&quot;bold&quot;,&quot;fontStyle&quot;:&quot;normal&quot;,&quot;decoration&quot;:&quot;none&quot;,&quot;script&quot;:&quot;none&quot;},&quot;range&quot;:[0,0]}],&quot;text&quot;:&quot;L&quot;}],&quot;verticalAlign&quot;:&quot;TOP&quot;,&quot;_lastCaretLocation&quot;:{&quot;lineIndex&quot;:0,&quot;runIndex&quot;:-1,&quot;charIndex&quot;:-1,&quot;endOfLine&quot;:true}},&quot;size&quot;:{&quot;x&quot;:20.02437651603078,&quot;y&quot;:12.053333333333331},&quot;targetSize&quot;:{&quot;x&quot;:20.02437651603078,&quot;y&quot;:12.053333333333331},&quot;format&quot;:&quot;BETTER_TEXT&quot;,&quot;verticalAlign&quot;:&quot;TOP&quot;},&quot;isLocked&quot;:false,&quot;parent&quot;:{&quot;type&quot;:&quot;CHILD&quot;,&quot;parentId&quot;:&quot;04b6aa6f-31a0-4c7b-be78-12f520f06f49&quot;,&quot;order&quot;:&quot;97&quot;}},&quot;0fea4203-9a7c-4834-a03e-7a2072ed6587&quot;:{&quot;type&quot;:&quot;FIGURE_OBJECT&quot;,&quot;id&quot;:&quot;0fea4203-9a7c-4834-a03e-7a2072ed6587&quot;,&quot;relativeTransform&quot;:{&quot;translate&quot;:{&quot;x&quot;:46.655042770719554,&quot;y&quot;:-55.43925329078401},&quot;rotate&quot;:0,&quot;skewX&quot;:0,&quot;scale&quot;:{&quot;x&quot;:1,&quot;y&quot;:1}},&quot;opacity&quot;:1,&quot;path&quot;:{&quot;type&quot;:&quot;POLY_LINE&quot;,&quot;points&quot;:[{&quot;x&quot;:11.420447431298726,&quot;y&quot;:0},{&quot;x&quot;:-11.420447431298726,&quot;y&quot;:0}],&quot;closed&quot;:false},&quot;pathStyles&quot;:[{&quot;type&quot;:&quot;FILL&quot;,&quot;fillStyle&quot;:&quot;transparent&quot;},{&quot;type&quot;:&quot;STROKE&quot;,&quot;strokeStyle&quot;:&quot;#232323&quot;,&quot;lineWidth&quot;:1,&quot;lineJoin&quot;:&quot;round&quot;}],&quot;pathMarkers&quot;:{&quot;markerEnd&quot;:{&quot;type&quot;:&quot;PATH&quot;,&quot;units&quot;:{&quot;type&quot;:&quot;STROKE_WIDTH&quot;,&quot;scale&quot;:0.7},&quot;orient&quot;:{&quot;type&quot;:&quot;AUTO_START_REVERSE&quot;},&quot;name&quot;:&quot;inhib&quot;,&quot;relativeTransform&quot;:{&quot;translate&quot;:{&quot;x&quot;:0,&quot;y&quot;:0},&quot;rotate&quot;:0,&quot;skewX&quot;:0,&quot;scale&quot;:{&quot;x&quot;:1,&quot;y&quot;:1}},&quot;path&quot;:{&quot;type&quot;:&quot;SPLINE&quot;,&quot;spline&quot;:{&quot;points&quot;:[{&quot;x&quot;:0,&quot;y&quot;:3,&quot;isEndPoint&quot;:true},{&quot;x&quot;:0,&quot;y&quot;:-3,&quot;isEndPoint&quot;:true}],&quot;closed&quot;:false}},&quot;pathStyles&quot;:[{&quot;type&quot;:&quot;STROKE&quot;,&quot;strokeStyle&quot;:&quot;context-stroke-flat&quot;,&quot;lineWidth&quot;:1,&quot;lineJoin&quot;:&quot;round&quot;}]},&quot;markerStart&quot;:{&quot;type&quot;:&quot;PATH&quot;,&quot;units&quot;:{&quot;type&quot;:&quot;STROKE_WIDTH&quot;,&quot;scale&quot;:0.7},&quot;orient&quot;:{&quot;type&quot;:&quot;AUTO_START_REVERSE&quot;},&quot;name&quot;:&quot;inhib&quot;,&quot;relativeTransform&quot;:{&quot;translate&quot;:{&quot;x&quot;:0,&quot;y&quot;:0},&quot;rotate&quot;:0,&quot;skewX&quot;:0,&quot;scale&quot;:{&quot;x&quot;:1,&quot;y&quot;:1}},&quot;path&quot;:{&quot;type&quot;:&quot;SPLINE&quot;,&quot;spline&quot;:{&quot;points&quot;:[{&quot;x&quot;:0,&quot;y&quot;:3,&quot;isEndPoint&quot;:true},{&quot;x&quot;:0,&quot;y&quot;:-3,&quot;isEndPoint&quot;:true}],&quot;closed&quot;:false}},&quot;pathStyles&quot;:[{&quot;type&quot;:&quot;STROKE&quot;,&quot;strokeStyle&quot;:&quot;context-stroke-flat&quot;,&quot;lineWidth&quot;:1,&quot;lineJoin&quot;:&quot;round&quot;}]}},&quot;isLocked&quot;:false,&quot;parent&quot;:{&quot;type&quot;:&quot;CHILD&quot;,&quot;parentId&quot;:&quot;04b6aa6f-31a0-4c7b-be78-12f520f06f49&quot;,&quot;order&quot;:&quot;98&quot;}},&quot;ec1a832f-7c85-4a30-8718-4f56465cfed3&quot;:{&quot;type&quot;:&quot;FIGURE_OBJECT&quot;,&quot;id&quot;:&quot;ec1a832f-7c85-4a30-8718-4f56465cfed3&quot;,&quot;relativeTransform&quot;:{&quot;translate&quot;:{&quot;x&quot;:47.488362547143886,&quot;y&quot;:-66.410896916484},&quot;rotate&quot;:0,&quot;skewX&quot;:0,&quot;scale&quot;:{&quot;x&quot;:1,&quot;y&quot;:1}},&quot;opacity&quot;:1,&quot;pathStyles&quot;:[{&quot;type&quot;:&quot;FILL&quot;,&quot;fillStyle&quot;:&quot;#232323&quot;}],&quot;text&quot;:{&quot;textData&quot;:{&quot;lineSpacing&quot;:&quot;normal&quot;,&quot;alignment&quot;:&quot;center&quot;,&quot;lines&quot;:[{&quot;runs&quot;:[{&quot;style&quot;:{&quot;fontFamily&quot;:&quot;Roboto&quot;,&quot;fontSize&quot;:8,&quot;color&quot;:&quot;#232323&quot;,&quot;fontWeight&quot;:&quot;normal&quot;,&quot;fontStyle&quot;:&quot;italic&quot;,&quot;decoration&quot;:&quot;none&quot;,&quot;script&quot;:&quot;none&quot;},&quot;range&quot;:[0,0]}],&quot;text&quot;:&quot;a&quot;}],&quot;verticalAlign&quot;:&quot;TOP&quot;,&quot;_lastCaretLocation&quot;:{&quot;lineIndex&quot;:0,&quot;runIndex&quot;:-1,&quot;charIndex&quot;:-1,&quot;endOfLine&quot;:true}},&quot;size&quot;:{&quot;x&quot;:21.015231085321513,&quot;y&quot;:9.04},&quot;targetSize&quot;:{&quot;x&quot;:21.015231085321513,&quot;y&quot;:9.04},&quot;format&quot;:&quot;BETTER_TEXT&quot;,&quot;verticalAlign&quot;:&quot;TOP&quot;},&quot;isLocked&quot;:false,&quot;parent&quot;:{&quot;type&quot;:&quot;CHILD&quot;,&quot;parentId&quot;:&quot;04b6aa6f-31a0-4c7b-be78-12f520f06f49&quot;,&quot;order&quot;:&quot;995&quot;}},&quot;bddf6853-7300-4144-9f56-b62277887ef7&quot;:{&quot;id&quot;:&quot;bddf6853-7300-4144-9f56-b62277887ef7&quot;,&quot;type&quot;:&quot;FIGURE_OBJECT&quot;,&quot;document&quot;:{&quot;type&quot;:&quot;DOCUMENT_GROUP&quot;,&quot;canvasType&quot;:&quot;FIGURE&quot;,&quot;units&quot;:&quot;cm&quot;}}}}"/>
+</p:tagLst>
+</file>
+
+<file path=ppt/tags/tag89.xml><?xml version="1.0" encoding="utf-8"?>
+<p:tagLst xmlns:a="http://schemas.openxmlformats.org/drawingml/2006/main" xmlns:r="http://schemas.openxmlformats.org/officeDocument/2006/relationships" xmlns:p="http://schemas.openxmlformats.org/presentationml/2006/main">
+  <p:tag name="ID" val="68efc908cb5715304cea89b6"/>
+  <p:tag name="FIGURESLIDEID" val="04b6aa6f-31a0-4c7b-be78-12f520f06f49"/>
+  <p:tag name="SELECTIONIDS" val="fa0f9758-693b-4d52-9088-182a9b5f1757"/>
+  <p:tag name="TRANSPARENTBACKGROUND" val="true"/>
+  <p:tag name="VERSION" val="1760545859457"/>
+  <p:tag name="TITLE" val="HIV immune model with time delay"/>
+  <p:tag name="CREATORNAME" val="Alison Hill"/>
+  <p:tag name="DATEINSERTED" val="1760545859599"/>
+  <p:tag name="DPI" val="300"/>
+  <p:tag name="BIOJSON" val="{&quot;id&quot;:&quot;bddf6853-7300-4144-9f56-b62277887ef7&quot;,&quot;objects&quot;:{&quot;fa0f9758-693b-4d52-9088-182a9b5f1757&quot;:{&quot;type&quot;:&quot;FIGURE_OBJECT&quot;,&quot;id&quot;:&quot;fa0f9758-693b-4d52-9088-182a9b5f1757&quot;,&quot;relativeTransform&quot;:{&quot;translate&quot;:{&quot;x&quot;:-101.21033926909364,&quot;y&quot;:-56.467454586092686},&quot;rotate&quot;:0,&quot;skewX&quot;:0,&quot;scale&quot;:{&quot;x&quot;:1,&quot;y&quot;:1}},&quot;opacity&quot;:1,&quot;path&quot;:{&quot;type&quot;:&quot;POLY_LINE&quot;,&quot;points&quot;:[{&quot;x&quot;:-10.502975768799956,&quot;y&quot;:0},{&quot;x&quot;:10.50297576880007,&quot;y&quot;:0}],&quot;closed&quot;:false},&quot;pathStyles&quot;:[{&quot;type&quot;:&quot;FILL&quot;,&quot;fillStyle&quot;:&quot;transparent&quot;},{&quot;type&quot;:&quot;STROKE&quot;,&quot;strokeStyle&quot;:&quot;#232323&quot;,&quot;lineWidth&quot;:1,&quot;lineJoin&quot;:&quot;round&quot;}],&quot;pathMarkers&quot;:{&quot;markerEnd&quot;:{&quot;type&quot;:&quot;PATH&quot;,&quot;units&quot;:{&quot;type&quot;:&quot;STROKE_WIDTH&quot;,&quot;scale&quot;:0.7},&quot;orient&quot;:{&quot;type&quot;:&quot;CLIPPED_CHORD&quot;},&quot;clipDistance&quot;:4,&quot;name&quot;:&quot;arrow&quot;,&quot;relativeTransform&quot;:{&quot;translate&quot;:{&quot;x&quot;:0,&quot;y&quot;:0},&quot;rotate&quot;:0,&quot;skewX&quot;:0,&quot;scale&quot;:{&quot;x&quot;:1,&quot;y&quot;:1}},&quot;path&quot;:{&quot;type&quot;:&quot;SPLINE&quot;,&quot;spline&quot;:{&quot;points&quot;:[{&quot;x&quot;:0,&quot;y&quot;:0,&quot;isEndPoint&quot;:true},{&quot;x&quot;:-5,&quot;y&quot;:-2.5,&quot;isEndPoint&quot;:true},{&quot;x&quot;:-5,&quot;y&quot;:2.5,&quot;isEndPoint&quot;:true}],&quot;closed&quot;:true}},&quot;pathStyles&quot;:[{&quot;type&quot;:&quot;FILL&quot;,&quot;fillStyle&quot;:&quot;context-stroke-flat&quot;}]}},&quot;isLocked&quot;:false,&quot;parent&quot;:{&quot;type&quot;:&quot;CHILD&quot;,&quot;parentId&quot;:&quot;04b6aa6f-31a0-4c7b-be78-12f520f06f49&quot;,&quot;order&quot;:&quot;2&quot;}},&quot;04b6aa6f-31a0-4c7b-be78-12f520f06f49&quot;:{&quot;type&quot;:&quot;FIGURE_OBJECT&quot;,&quot;id&quot;:&quot;04b6aa6f-31a0-4c7b-be78-12f520f06f49&quot;,&quot;document&quot;:{&quot;type&quot;:&quot;FIGURE&quot;,&quot;canvasType&quot;:&quot;FIGURE&quot;,&quot;units&quot;:&quot;cm&quot;},&quot;relativeTransform&quot;:{&quot;translate&quot;:{&quot;x&quot;:0,&quot;y&quot;:0},&quot;rotate&quot;:0,&quot;skewX&quot;:0,&quot;scale&quot;:{&quot;x&quot;:1,&quot;y&quot;:1}},&quot;isLocked&quot;:false,&quot;parent&quot;:{&quot;type&quot;:&quot;DOCUMENT&quot;,&quot;parentId&quot;:&quot;bddf6853-7300-4144-9f56-b62277887ef7&quot;,&quot;order&quot;:&quot;5&quot;}},&quot;bddf6853-7300-4144-9f56-b62277887ef7&quot;:{&quot;id&quot;:&quot;bddf6853-7300-4144-9f56-b62277887ef7&quot;,&quot;type&quot;:&quot;FIGURE_OBJECT&quot;,&quot;document&quot;:{&quot;type&quot;:&quot;DOCUMENT_GROUP&quot;,&quot;canvasType&quot;:&quot;FIGURE&quot;,&quot;units&quot;:&quot;cm&quot;}}}}"/>
+</p:tagLst>
+</file>
+
 <file path=ppt/tags/tag9.xml><?xml version="1.0" encoding="utf-8"?>
 <p:tagLst xmlns:a="http://schemas.openxmlformats.org/drawingml/2006/main" xmlns:r="http://schemas.openxmlformats.org/officeDocument/2006/relationships" xmlns:p="http://schemas.openxmlformats.org/presentationml/2006/main">
   <p:tag name="ID" val="68efc908cb5715304cea89b6"/>
@@ -11774,6 +15537,156 @@
   <p:tag name="DATEINSERTED" val="1760545859599"/>
   <p:tag name="DPI" val="300"/>
   <p:tag name="BIOJSON" val="{&quot;id&quot;:&quot;bddf6853-7300-4144-9f56-b62277887ef7&quot;,&quot;objects&quot;:{&quot;fe804b54-45fb-422b-b258-593c973b3aa3&quot;:{&quot;type&quot;:&quot;FIGURE_OBJECT&quot;,&quot;id&quot;:&quot;fe804b54-45fb-422b-b258-593c973b3aa3&quot;,&quot;name&quot;:&quot;Virus (round 2)&quot;,&quot;relativeTransform&quot;:{&quot;translate&quot;:{&quot;x&quot;:4.537716652569866,&quot;y&quot;:-63.511530347851235},&quot;rotate&quot;:0,&quot;skewX&quot;:0,&quot;scale&quot;:{&quot;x&quot;:0.0903741294160818,&quot;y&quot;:0.0903741294160818}},&quot;opacity&quot;:1,&quot;image&quot;:{&quot;url&quot;:&quot;https://icons.biorender.com/biorender/5a32c43541f3060014913ac5/20180308183409/image/virus-round-2.png&quot;,&quot;size&quot;:{&quot;x&quot;:96,&quot;y&quot;:96},&quot;isPremium&quot;:false},&quot;source&quot;:{&quot;id&quot;:&quot;5a32c43541f3060014913ac5&quot;,&quot;type&quot;:&quot;ASSETS&quot;},&quot;pathStyles&quot;:[{&quot;type&quot;:&quot;FILL&quot;,&quot;fillStyle&quot;:&quot;rgb(0,0,0)&quot;}],&quot;isLocked&quot;:false,&quot;parent&quot;:{&quot;type&quot;:&quot;CHILD&quot;,&quot;parentId&quot;:&quot;04b6aa6f-31a0-4c7b-be78-12f520f06f49&quot;,&quot;order&quot;:&quot;11&quot;}},&quot;04b6aa6f-31a0-4c7b-be78-12f520f06f49&quot;:{&quot;type&quot;:&quot;FIGURE_OBJECT&quot;,&quot;id&quot;:&quot;04b6aa6f-31a0-4c7b-be78-12f520f06f49&quot;,&quot;document&quot;:{&quot;type&quot;:&quot;FIGURE&quot;,&quot;canvasType&quot;:&quot;FIGURE&quot;,&quot;units&quot;:&quot;cm&quot;},&quot;relativeTransform&quot;:{&quot;translate&quot;:{&quot;x&quot;:0,&quot;y&quot;:0},&quot;rotate&quot;:0,&quot;skewX&quot;:0,&quot;scale&quot;:{&quot;x&quot;:1,&quot;y&quot;:1}},&quot;isLocked&quot;:false,&quot;parent&quot;:{&quot;type&quot;:&quot;DOCUMENT&quot;,&quot;parentId&quot;:&quot;bddf6853-7300-4144-9f56-b62277887ef7&quot;,&quot;order&quot;:&quot;5&quot;}},&quot;bddf6853-7300-4144-9f56-b62277887ef7&quot;:{&quot;id&quot;:&quot;bddf6853-7300-4144-9f56-b62277887ef7&quot;,&quot;type&quot;:&quot;FIGURE_OBJECT&quot;,&quot;document&quot;:{&quot;type&quot;:&quot;DOCUMENT_GROUP&quot;,&quot;canvasType&quot;:&quot;FIGURE&quot;,&quot;units&quot;:&quot;cm&quot;}}}}"/>
+</p:tagLst>
+</file>
+
+<file path=ppt/tags/tag90.xml><?xml version="1.0" encoding="utf-8"?>
+<p:tagLst xmlns:a="http://schemas.openxmlformats.org/drawingml/2006/main" xmlns:r="http://schemas.openxmlformats.org/officeDocument/2006/relationships" xmlns:p="http://schemas.openxmlformats.org/presentationml/2006/main">
+  <p:tag name="ID" val="68efc908cb5715304cea89b6"/>
+  <p:tag name="FIGURESLIDEID" val="04b6aa6f-31a0-4c7b-be78-12f520f06f49"/>
+  <p:tag name="SELECTIONIDS" val="fa0f9758-693b-4d52-9088-182a9b5f1757"/>
+  <p:tag name="TRANSPARENTBACKGROUND" val="true"/>
+  <p:tag name="VERSION" val="1760545859457"/>
+  <p:tag name="TITLE" val="HIV immune model with time delay"/>
+  <p:tag name="CREATORNAME" val="Alison Hill"/>
+  <p:tag name="DATEINSERTED" val="1760545859599"/>
+  <p:tag name="DPI" val="300"/>
+  <p:tag name="BIOJSON" val="{&quot;id&quot;:&quot;bddf6853-7300-4144-9f56-b62277887ef7&quot;,&quot;objects&quot;:{&quot;fa0f9758-693b-4d52-9088-182a9b5f1757&quot;:{&quot;type&quot;:&quot;FIGURE_OBJECT&quot;,&quot;id&quot;:&quot;fa0f9758-693b-4d52-9088-182a9b5f1757&quot;,&quot;relativeTransform&quot;:{&quot;translate&quot;:{&quot;x&quot;:-101.21033926909364,&quot;y&quot;:-56.467454586092686},&quot;rotate&quot;:0,&quot;skewX&quot;:0,&quot;scale&quot;:{&quot;x&quot;:1,&quot;y&quot;:1}},&quot;opacity&quot;:1,&quot;path&quot;:{&quot;type&quot;:&quot;POLY_LINE&quot;,&quot;points&quot;:[{&quot;x&quot;:-10.502975768799956,&quot;y&quot;:0},{&quot;x&quot;:10.50297576880007,&quot;y&quot;:0}],&quot;closed&quot;:false},&quot;pathStyles&quot;:[{&quot;type&quot;:&quot;FILL&quot;,&quot;fillStyle&quot;:&quot;transparent&quot;},{&quot;type&quot;:&quot;STROKE&quot;,&quot;strokeStyle&quot;:&quot;#232323&quot;,&quot;lineWidth&quot;:1,&quot;lineJoin&quot;:&quot;round&quot;}],&quot;pathMarkers&quot;:{&quot;markerEnd&quot;:{&quot;type&quot;:&quot;PATH&quot;,&quot;units&quot;:{&quot;type&quot;:&quot;STROKE_WIDTH&quot;,&quot;scale&quot;:0.7},&quot;orient&quot;:{&quot;type&quot;:&quot;CLIPPED_CHORD&quot;},&quot;clipDistance&quot;:4,&quot;name&quot;:&quot;arrow&quot;,&quot;relativeTransform&quot;:{&quot;translate&quot;:{&quot;x&quot;:0,&quot;y&quot;:0},&quot;rotate&quot;:0,&quot;skewX&quot;:0,&quot;scale&quot;:{&quot;x&quot;:1,&quot;y&quot;:1}},&quot;path&quot;:{&quot;type&quot;:&quot;SPLINE&quot;,&quot;spline&quot;:{&quot;points&quot;:[{&quot;x&quot;:0,&quot;y&quot;:0,&quot;isEndPoint&quot;:true},{&quot;x&quot;:-5,&quot;y&quot;:-2.5,&quot;isEndPoint&quot;:true},{&quot;x&quot;:-5,&quot;y&quot;:2.5,&quot;isEndPoint&quot;:true}],&quot;closed&quot;:true}},&quot;pathStyles&quot;:[{&quot;type&quot;:&quot;FILL&quot;,&quot;fillStyle&quot;:&quot;context-stroke-flat&quot;}]}},&quot;isLocked&quot;:false,&quot;parent&quot;:{&quot;type&quot;:&quot;CHILD&quot;,&quot;parentId&quot;:&quot;04b6aa6f-31a0-4c7b-be78-12f520f06f49&quot;,&quot;order&quot;:&quot;2&quot;}},&quot;04b6aa6f-31a0-4c7b-be78-12f520f06f49&quot;:{&quot;type&quot;:&quot;FIGURE_OBJECT&quot;,&quot;id&quot;:&quot;04b6aa6f-31a0-4c7b-be78-12f520f06f49&quot;,&quot;document&quot;:{&quot;type&quot;:&quot;FIGURE&quot;,&quot;canvasType&quot;:&quot;FIGURE&quot;,&quot;units&quot;:&quot;cm&quot;},&quot;relativeTransform&quot;:{&quot;translate&quot;:{&quot;x&quot;:0,&quot;y&quot;:0},&quot;rotate&quot;:0,&quot;skewX&quot;:0,&quot;scale&quot;:{&quot;x&quot;:1,&quot;y&quot;:1}},&quot;isLocked&quot;:false,&quot;parent&quot;:{&quot;type&quot;:&quot;DOCUMENT&quot;,&quot;parentId&quot;:&quot;bddf6853-7300-4144-9f56-b62277887ef7&quot;,&quot;order&quot;:&quot;5&quot;}},&quot;bddf6853-7300-4144-9f56-b62277887ef7&quot;:{&quot;id&quot;:&quot;bddf6853-7300-4144-9f56-b62277887ef7&quot;,&quot;type&quot;:&quot;FIGURE_OBJECT&quot;,&quot;document&quot;:{&quot;type&quot;:&quot;DOCUMENT_GROUP&quot;,&quot;canvasType&quot;:&quot;FIGURE&quot;,&quot;units&quot;:&quot;cm&quot;}}}}"/>
+</p:tagLst>
+</file>
+
+<file path=ppt/tags/tag91.xml><?xml version="1.0" encoding="utf-8"?>
+<p:tagLst xmlns:a="http://schemas.openxmlformats.org/drawingml/2006/main" xmlns:r="http://schemas.openxmlformats.org/officeDocument/2006/relationships" xmlns:p="http://schemas.openxmlformats.org/presentationml/2006/main">
+  <p:tag name="ID" val="68efc908cb5715304cea89b6"/>
+  <p:tag name="FIGURESLIDEID" val="04b6aa6f-31a0-4c7b-be78-12f520f06f49"/>
+  <p:tag name="SELECTIONIDS" val="288426fa-6f46-492a-b902-28e01152cfe3"/>
+  <p:tag name="TRANSPARENTBACKGROUND" val="true"/>
+  <p:tag name="VERSION" val="1760545859457"/>
+  <p:tag name="TITLE" val="HIV immune model with time delay"/>
+  <p:tag name="CREATORNAME" val="Alison Hill"/>
+  <p:tag name="DATEINSERTED" val="1760545859599"/>
+  <p:tag name="DPI" val="300"/>
+  <p:tag name="BIOJSON" val="{&quot;id&quot;:&quot;bddf6853-7300-4144-9f56-b62277887ef7&quot;,&quot;objects&quot;:{&quot;288426fa-6f46-492a-b902-28e01152cfe3&quot;:{&quot;type&quot;:&quot;FIGURE_OBJECT&quot;,&quot;id&quot;:&quot;288426fa-6f46-492a-b902-28e01152cfe3&quot;,&quot;name&quot;:&quot;Stem cell (hematopoietic)&quot;,&quot;relativeTransform&quot;:{&quot;translate&quot;:{&quot;x&quot;:74.67248732370832,&quot;y&quot;:-59.34713234633817},&quot;rotate&quot;:0,&quot;skewX&quot;:0,&quot;scale&quot;:{&quot;x&quot;:0.0575463378734887,&quot;y&quot;:0.0575463378734887}},&quot;opacity&quot;:1,&quot;image&quot;:{&quot;url&quot;:&quot;https://icons.biorender.com/biorender/5be31cc96f3d0b12005a9ca4/stem-cell-hematopoietic.png&quot;,&quot;size&quot;:{&quot;x&quot;:493,&quot;y&quot;:494},&quot;isPremium&quot;:false},&quot;source&quot;:{&quot;id&quot;:&quot;5b4df95d4f626900144a414e&quot;,&quot;type&quot;:&quot;ASSETS&quot;},&quot;pathStyles&quot;:[{&quot;type&quot;:&quot;FILL&quot;,&quot;fillStyle&quot;:&quot;rgb(0,0,0)&quot;}],&quot;isLocked&quot;:false,&quot;parent&quot;:{&quot;type&quot;:&quot;CHILD&quot;,&quot;parentId&quot;:&quot;04b6aa6f-31a0-4c7b-be78-12f520f06f49&quot;,&quot;order&quot;:&quot;01&quot;}},&quot;04b6aa6f-31a0-4c7b-be78-12f520f06f49&quot;:{&quot;type&quot;:&quot;FIGURE_OBJECT&quot;,&quot;id&quot;:&quot;04b6aa6f-31a0-4c7b-be78-12f520f06f49&quot;,&quot;document&quot;:{&quot;type&quot;:&quot;FIGURE&quot;,&quot;canvasType&quot;:&quot;FIGURE&quot;,&quot;units&quot;:&quot;cm&quot;},&quot;relativeTransform&quot;:{&quot;translate&quot;:{&quot;x&quot;:0,&quot;y&quot;:0},&quot;rotate&quot;:0,&quot;skewX&quot;:0,&quot;scale&quot;:{&quot;x&quot;:1,&quot;y&quot;:1}},&quot;isLocked&quot;:false,&quot;parent&quot;:{&quot;type&quot;:&quot;DOCUMENT&quot;,&quot;parentId&quot;:&quot;bddf6853-7300-4144-9f56-b62277887ef7&quot;,&quot;order&quot;:&quot;5&quot;}},&quot;bddf6853-7300-4144-9f56-b62277887ef7&quot;:{&quot;id&quot;:&quot;bddf6853-7300-4144-9f56-b62277887ef7&quot;,&quot;type&quot;:&quot;FIGURE_OBJECT&quot;,&quot;document&quot;:{&quot;type&quot;:&quot;DOCUMENT_GROUP&quot;,&quot;canvasType&quot;:&quot;FIGURE&quot;,&quot;units&quot;:&quot;cm&quot;}}}}"/>
+</p:tagLst>
+</file>
+
+<file path=ppt/tags/tag92.xml><?xml version="1.0" encoding="utf-8"?>
+<p:tagLst xmlns:a="http://schemas.openxmlformats.org/drawingml/2006/main" xmlns:r="http://schemas.openxmlformats.org/officeDocument/2006/relationships" xmlns:p="http://schemas.openxmlformats.org/presentationml/2006/main">
+  <p:tag name="ID" val="68efc908cb5715304cea89b6"/>
+  <p:tag name="FIGURESLIDEID" val="04b6aa6f-31a0-4c7b-be78-12f520f06f49"/>
+  <p:tag name="SELECTIONIDS" val="1a1c6c70-961b-464a-962f-5ab84984cd3e"/>
+  <p:tag name="TRANSPARENTBACKGROUND" val="true"/>
+  <p:tag name="VERSION" val="1760545859457"/>
+  <p:tag name="TITLE" val="HIV immune model with time delay"/>
+  <p:tag name="CREATORNAME" val="Alison Hill"/>
+  <p:tag name="DATEINSERTED" val="1760545859599"/>
+  <p:tag name="DPI" val="300"/>
+  <p:tag name="BIOJSON" val="{&quot;id&quot;:&quot;bddf6853-7300-4144-9f56-b62277887ef7&quot;,&quot;objects&quot;:{&quot;1a1c6c70-961b-464a-962f-5ab84984cd3e&quot;:{&quot;type&quot;:&quot;FIGURE_OBJECT&quot;,&quot;id&quot;:&quot;1a1c6c70-961b-464a-962f-5ab84984cd3e&quot;,&quot;name&quot;:&quot;T-cell&quot;,&quot;relativeTransform&quot;:{&quot;translate&quot;:{&quot;x&quot;:-68.12941817911282,&quot;y&quot;:-55.60714422874835},&quot;rotate&quot;:0,&quot;skewX&quot;:0,&quot;scale&quot;:{&quot;x&quot;:0.2687396314554266,&quot;y&quot;:0.2687396314554266}},&quot;opacity&quot;:1,&quot;image&quot;:{&quot;url&quot;:&quot;https://icons.biorender.com/biorender/5d8a294d977db30004d0ce2d/lymphocyte-t-cell-1.png&quot;,&quot;size&quot;:{&quot;x&quot;:154,&quot;y&quot;:154},&quot;isPremium&quot;:false},&quot;source&quot;:{&quot;id&quot;:&quot;5be1c5ed779980120020cbbe&quot;,&quot;type&quot;:&quot;ASSETS&quot;},&quot;pathStyles&quot;:[{&quot;type&quot;:&quot;FILL&quot;,&quot;fillStyle&quot;:&quot;rgb(0,0,0)&quot;}],&quot;isLocked&quot;:false,&quot;parent&quot;:{&quot;type&quot;:&quot;CHILD&quot;,&quot;parentId&quot;:&quot;04b6aa6f-31a0-4c7b-be78-12f520f06f49&quot;,&quot;order&quot;:&quot;02&quot;}},&quot;04b6aa6f-31a0-4c7b-be78-12f520f06f49&quot;:{&quot;type&quot;:&quot;FIGURE_OBJECT&quot;,&quot;id&quot;:&quot;04b6aa6f-31a0-4c7b-be78-12f520f06f49&quot;,&quot;document&quot;:{&quot;type&quot;:&quot;FIGURE&quot;,&quot;canvasType&quot;:&quot;FIGURE&quot;,&quot;units&quot;:&quot;cm&quot;},&quot;relativeTransform&quot;:{&quot;translate&quot;:{&quot;x&quot;:0,&quot;y&quot;:0},&quot;rotate&quot;:0,&quot;skewX&quot;:0,&quot;scale&quot;:{&quot;x&quot;:1,&quot;y&quot;:1}},&quot;isLocked&quot;:false,&quot;parent&quot;:{&quot;type&quot;:&quot;DOCUMENT&quot;,&quot;parentId&quot;:&quot;bddf6853-7300-4144-9f56-b62277887ef7&quot;,&quot;order&quot;:&quot;5&quot;}},&quot;bddf6853-7300-4144-9f56-b62277887ef7&quot;:{&quot;id&quot;:&quot;bddf6853-7300-4144-9f56-b62277887ef7&quot;,&quot;type&quot;:&quot;FIGURE_OBJECT&quot;,&quot;document&quot;:{&quot;type&quot;:&quot;DOCUMENT_GROUP&quot;,&quot;canvasType&quot;:&quot;FIGURE&quot;,&quot;units&quot;:&quot;cm&quot;}}}}"/>
+</p:tagLst>
+</file>
+
+<file path=ppt/tags/tag93.xml><?xml version="1.0" encoding="utf-8"?>
+<p:tagLst xmlns:a="http://schemas.openxmlformats.org/drawingml/2006/main" xmlns:r="http://schemas.openxmlformats.org/officeDocument/2006/relationships" xmlns:p="http://schemas.openxmlformats.org/presentationml/2006/main">
+  <p:tag name="ID" val="68efc908cb5715304cea89b6"/>
+  <p:tag name="FIGURESLIDEID" val="04b6aa6f-31a0-4c7b-be78-12f520f06f49"/>
+  <p:tag name="SELECTIONIDS" val="14bb4d4a-a0c7-4ed5-9298-6290b47e86d6"/>
+  <p:tag name="TRANSPARENTBACKGROUND" val="true"/>
+  <p:tag name="VERSION" val="1760545859457"/>
+  <p:tag name="TITLE" val="HIV immune model with time delay"/>
+  <p:tag name="CREATORNAME" val="Alison Hill"/>
+  <p:tag name="DATEINSERTED" val="1760545859599"/>
+  <p:tag name="DPI" val="300"/>
+  <p:tag name="BIOJSON" val="{&quot;id&quot;:&quot;bddf6853-7300-4144-9f56-b62277887ef7&quot;,&quot;objects&quot;:{&quot;14bb4d4a-a0c7-4ed5-9298-6290b47e86d6&quot;:{&quot;type&quot;:&quot;FIGURE_OBJECT&quot;,&quot;id&quot;:&quot;14bb4d4a-a0c7-4ed5-9298-6290b47e86d6&quot;,&quot;name&quot;:&quot;T-cell&quot;,&quot;relativeTransform&quot;:{&quot;translate&quot;:{&quot;x&quot;:12.762907785639692,&quot;y&quot;:-55.60714422874835},&quot;rotate&quot;:0,&quot;skewX&quot;:0,&quot;scale&quot;:{&quot;x&quot;:0.2687396314554266,&quot;y&quot;:0.2687396314554266}},&quot;opacity&quot;:1,&quot;image&quot;:{&quot;url&quot;:&quot;https://icons.biorender.com/biorender/5d8a294d977db30004d0ce2d/lymphocyte-t-cell-1.png&quot;,&quot;size&quot;:{&quot;x&quot;:154,&quot;y&quot;:154},&quot;isPremium&quot;:false},&quot;source&quot;:{&quot;id&quot;:&quot;5be1c5ed779980120020cbbe&quot;,&quot;type&quot;:&quot;ASSETS&quot;},&quot;pathStyles&quot;:[{&quot;type&quot;:&quot;FILL&quot;,&quot;fillStyle&quot;:&quot;rgb(0,0,0)&quot;}],&quot;isLocked&quot;:false,&quot;parent&quot;:{&quot;type&quot;:&quot;CHILD&quot;,&quot;parentId&quot;:&quot;04b6aa6f-31a0-4c7b-be78-12f520f06f49&quot;,&quot;order&quot;:&quot;05&quot;}},&quot;04b6aa6f-31a0-4c7b-be78-12f520f06f49&quot;:{&quot;type&quot;:&quot;FIGURE_OBJECT&quot;,&quot;id&quot;:&quot;04b6aa6f-31a0-4c7b-be78-12f520f06f49&quot;,&quot;document&quot;:{&quot;type&quot;:&quot;FIGURE&quot;,&quot;canvasType&quot;:&quot;FIGURE&quot;,&quot;units&quot;:&quot;cm&quot;},&quot;relativeTransform&quot;:{&quot;translate&quot;:{&quot;x&quot;:0,&quot;y&quot;:0},&quot;rotate&quot;:0,&quot;skewX&quot;:0,&quot;scale&quot;:{&quot;x&quot;:1,&quot;y&quot;:1}},&quot;isLocked&quot;:false,&quot;parent&quot;:{&quot;type&quot;:&quot;DOCUMENT&quot;,&quot;parentId&quot;:&quot;bddf6853-7300-4144-9f56-b62277887ef7&quot;,&quot;order&quot;:&quot;5&quot;}},&quot;bddf6853-7300-4144-9f56-b62277887ef7&quot;:{&quot;id&quot;:&quot;bddf6853-7300-4144-9f56-b62277887ef7&quot;,&quot;type&quot;:&quot;FIGURE_OBJECT&quot;,&quot;document&quot;:{&quot;type&quot;:&quot;DOCUMENT_GROUP&quot;,&quot;canvasType&quot;:&quot;FIGURE&quot;,&quot;units&quot;:&quot;cm&quot;}}}}"/>
+</p:tagLst>
+</file>
+
+<file path=ppt/tags/tag94.xml><?xml version="1.0" encoding="utf-8"?>
+<p:tagLst xmlns:a="http://schemas.openxmlformats.org/drawingml/2006/main" xmlns:r="http://schemas.openxmlformats.org/officeDocument/2006/relationships" xmlns:p="http://schemas.openxmlformats.org/presentationml/2006/main">
+  <p:tag name="ID" val="68efc908cb5715304cea89b6"/>
+  <p:tag name="FIGURESLIDEID" val="04b6aa6f-31a0-4c7b-be78-12f520f06f49"/>
+  <p:tag name="SELECTIONIDS" val="0d6f7d38-39a3-4597-b305-0d8642dbc2fb"/>
+  <p:tag name="TRANSPARENTBACKGROUND" val="true"/>
+  <p:tag name="VERSION" val="1760545859457"/>
+  <p:tag name="TITLE" val="HIV immune model with time delay"/>
+  <p:tag name="CREATORNAME" val="Alison Hill"/>
+  <p:tag name="DATEINSERTED" val="1760545859599"/>
+  <p:tag name="DPI" val="300"/>
+  <p:tag name="BIOJSON" val="{&quot;id&quot;:&quot;bddf6853-7300-4144-9f56-b62277887ef7&quot;,&quot;objects&quot;:{&quot;0d6f7d38-39a3-4597-b305-0d8642dbc2fb&quot;:{&quot;type&quot;:&quot;FIGURE_OBJECT&quot;,&quot;id&quot;:&quot;0d6f7d38-39a3-4597-b305-0d8642dbc2fb&quot;,&quot;relativeTransform&quot;:{&quot;translate&quot;:{&quot;x&quot;:4.150315037892902,&quot;y&quot;:11.0325454139072},&quot;rotate&quot;:0,&quot;skewX&quot;:0,&quot;scale&quot;:{&quot;x&quot;:1,&quot;y&quot;:1}},&quot;opacity&quot;:1,&quot;source&quot;:{&quot;type&quot;:&quot;ASSETS&quot;},&quot;pathStyles&quot;:[{&quot;type&quot;:&quot;FILL&quot;,&quot;fillStyle&quot;:&quot;rgb(0,0,0)&quot;}],&quot;isLocked&quot;:false,&quot;parent&quot;:{&quot;type&quot;:&quot;CHILD&quot;,&quot;parentId&quot;:&quot;04b6aa6f-31a0-4c7b-be78-12f520f06f49&quot;,&quot;order&quot;:&quot;06&quot;}},&quot;6fa71bee-ffac-46bb-8ef4-8e7ce849a4c8&quot;:{&quot;type&quot;:&quot;FIGURE_OBJECT&quot;,&quot;id&quot;:&quot;6fa71bee-ffac-46bb-8ef4-8e7ce849a4c8&quot;,&quot;name&quot;:&quot;T-cell&quot;,&quot;relativeTransform&quot;:{&quot;translate&quot;:{&quot;x&quot;:0.3119725496105623,&quot;y&quot;:-0.12685726317057444},&quot;rotate&quot;:0,&quot;skewX&quot;:0,&quot;scale&quot;:{&quot;x&quot;:0.2424211863090582,&quot;y&quot;:0.2424211863090582}},&quot;opacity&quot;:1,&quot;image&quot;:{&quot;url&quot;:&quot;https://icons.biorender.com/biorender/5d8a294d977db30004d0ce2a/lymphocyte-t-cell-1.png&quot;,&quot;size&quot;:{&quot;x&quot;:154,&quot;y&quot;:154},&quot;isPremium&quot;:false},&quot;source&quot;:{&quot;id&quot;:&quot;5be1c5ed779980120020cbbe&quot;,&quot;type&quot;:&quot;ASSETS&quot;},&quot;pathStyles&quot;:[{&quot;type&quot;:&quot;FILL&quot;,&quot;fillStyle&quot;:&quot;rgb(0,0,0)&quot;}],&quot;isLocked&quot;:false,&quot;parent&quot;:{&quot;type&quot;:&quot;CHILD&quot;,&quot;parentId&quot;:&quot;0d6f7d38-39a3-4597-b305-0d8642dbc2fb&quot;,&quot;order&quot;:&quot;1&quot;}},&quot;dde7720a-1432-4954-8e38-9acd37df52e9&quot;:{&quot;type&quot;:&quot;FIGURE_OBJECT&quot;,&quot;id&quot;:&quot;dde7720a-1432-4954-8e38-9acd37df52e9&quot;,&quot;name&quot;:&quot;T cell receptor (TCR)&quot;,&quot;relativeTransform&quot;:{&quot;translate&quot;:{&quot;x&quot;:-0.8852936010236063,&quot;y&quot;:-18.68175793088635},&quot;rotate&quot;:0,&quot;skewX&quot;:0,&quot;scale&quot;:{&quot;x&quot;:0.0661215623963933,&quot;y&quot;:0.0661215623963932}},&quot;opacity&quot;:1,&quot;image&quot;:{&quot;url&quot;:&quot;https://icons.biorender.com/biorender/5d9b3f39dd52690004bb5493/20191007134110/image/t-cell-receptor.png&quot;,&quot;size&quot;:{&quot;x&quot;:88,&quot;y&quot;:250},&quot;isPremium&quot;:false},&quot;source&quot;:{&quot;id&quot;:&quot;5d9b3f39dd52690004bb5493&quot;,&quot;type&quot;:&quot;ASSETS&quot;},&quot;pathStyles&quot;:[{&quot;type&quot;:&quot;FILL&quot;,&quot;fillStyle&quot;:&quot;rgb(0,0,0)&quot;}],&quot;isLocked&quot;:false,&quot;parent&quot;:{&quot;type&quot;:&quot;CHILD&quot;,&quot;parentId&quot;:&quot;0d6f7d38-39a3-4597-b305-0d8642dbc2fb&quot;,&quot;order&quot;:&quot;2&quot;}},&quot;78fe3484-d96e-4893-8e20-25d8ef751870&quot;:{&quot;type&quot;:&quot;FIGURE_OBJECT&quot;,&quot;id&quot;:&quot;78fe3484-d96e-4893-8e20-25d8ef751870&quot;,&quot;name&quot;:&quot;T cell receptor (TCR)&quot;,&quot;relativeTransform&quot;:{&quot;translate&quot;:{&quot;x&quot;:-1.2974534754998883,&quot;y&quot;:18.79207397509158},&quot;rotate&quot;:0,&quot;skewX&quot;:0,&quot;scale&quot;:{&quot;x&quot;:0.0652390340427497,&quot;y&quot;:-0.0652390340427497}},&quot;opacity&quot;:1,&quot;image&quot;:{&quot;url&quot;:&quot;https://icons.biorender.com/biorender/5d9b3f39dd52690004bb5493/20191007134110/image/t-cell-receptor.png&quot;,&quot;size&quot;:{&quot;x&quot;:88,&quot;y&quot;:250},&quot;isPremium&quot;:false},&quot;source&quot;:{&quot;id&quot;:&quot;5d9b3f39dd52690004bb5493&quot;,&quot;type&quot;:&quot;ASSETS&quot;},&quot;pathStyles&quot;:[{&quot;type&quot;:&quot;FILL&quot;,&quot;fillStyle&quot;:&quot;rgb(0,0,0)&quot;}],&quot;isLocked&quot;:false,&quot;parent&quot;:{&quot;type&quot;:&quot;CHILD&quot;,&quot;parentId&quot;:&quot;0d6f7d38-39a3-4597-b305-0d8642dbc2fb&quot;,&quot;order&quot;:&quot;3&quot;}},&quot;79ad385e-20f7-40d7-8174-ab1252db91c0&quot;:{&quot;type&quot;:&quot;FIGURE_OBJECT&quot;,&quot;id&quot;:&quot;79ad385e-20f7-40d7-8174-ab1252db91c0&quot;,&quot;name&quot;:&quot;T cell receptor (TCR)&quot;,&quot;relativeTransform&quot;:{&quot;translate&quot;:{&quot;x&quot;:16.75570208020622,&quot;y&quot;:11.95709645647959},&quot;rotate&quot;:-1.0370071059922472,&quot;skewX&quot;:-2.3038346126325146e-16,&quot;scale&quot;:{&quot;x&quot;:0.0613637741540065,&quot;y&quot;:-0.0613637741540065}},&quot;opacity&quot;:1,&quot;image&quot;:{&quot;url&quot;:&quot;https://icons.biorender.com/biorender/5d9b3f39dd52690004bb5493/20191007134110/image/t-cell-receptor.png&quot;,&quot;size&quot;:{&quot;x&quot;:88,&quot;y&quot;:250},&quot;isPremium&quot;:false},&quot;source&quot;:{&quot;id&quot;:&quot;5d9b3f39dd52690004bb5493&quot;,&quot;type&quot;:&quot;ASSETS&quot;},&quot;pathStyles&quot;:[{&quot;type&quot;:&quot;FILL&quot;,&quot;fillStyle&quot;:&quot;rgb(0,0,0)&quot;}],&quot;isLocked&quot;:false,&quot;parent&quot;:{&quot;type&quot;:&quot;CHILD&quot;,&quot;parentId&quot;:&quot;0d6f7d38-39a3-4597-b305-0d8642dbc2fb&quot;,&quot;order&quot;:&quot;5&quot;}},&quot;1f28497b-f730-4008-8a67-5ae76742bea6&quot;:{&quot;type&quot;:&quot;FIGURE_OBJECT&quot;,&quot;id&quot;:&quot;1f28497b-f730-4008-8a67-5ae76742bea6&quot;,&quot;name&quot;:&quot;T cell receptor (TCR)&quot;,&quot;relativeTransform&quot;:{&quot;translate&quot;:{&quot;x&quot;:-16.644707784699733,&quot;y&quot;:9.715382074685863},&quot;rotate&quot;:-2.104585547597546,&quot;skewX&quot;:-5.061454830783556e-16,&quot;scale&quot;:{&quot;x&quot;:0.0621305387747826,&quot;y&quot;:0.0621305387747826}},&quot;opacity&quot;:1,&quot;image&quot;:{&quot;url&quot;:&quot;https://icons.biorender.com/biorender/5d9b3f39dd52690004bb5493/20191007134110/image/t-cell-receptor.png&quot;,&quot;size&quot;:{&quot;x&quot;:88,&quot;y&quot;:250},&quot;isPremium&quot;:false},&quot;source&quot;:{&quot;id&quot;:&quot;5d9b3f39dd52690004bb5493&quot;,&quot;type&quot;:&quot;ASSETS&quot;},&quot;pathStyles&quot;:[{&quot;type&quot;:&quot;FILL&quot;,&quot;fillStyle&quot;:&quot;rgb(0,0,0)&quot;}],&quot;isLocked&quot;:false,&quot;parent&quot;:{&quot;type&quot;:&quot;CHILD&quot;,&quot;parentId&quot;:&quot;0d6f7d38-39a3-4597-b305-0d8642dbc2fb&quot;,&quot;order&quot;:&quot;6&quot;}},&quot;51018087-a224-4b7a-a519-633ccb0d4ab0&quot;:{&quot;type&quot;:&quot;FIGURE_OBJECT&quot;,&quot;id&quot;:&quot;51018087-a224-4b7a-a519-633ccb0d4ab0&quot;,&quot;name&quot;:&quot;T cell receptor (TCR)&quot;,&quot;relativeTransform&quot;:{&quot;translate&quot;:{&quot;x&quot;:17.321252694012962,&quot;y&quot;:-10.962832032887846},&quot;rotate&quot;:1.0370071059922465,&quot;skewX&quot;:0,&quot;scale&quot;:{&quot;x&quot;:0.0689416604822267,&quot;y&quot;:0.0689416604822267}},&quot;opacity&quot;:1,&quot;image&quot;:{&quot;url&quot;:&quot;/api/legacy-url/tr7ui1snneahevcecp6v/1570455670/svg&quot;,&quot;size&quot;:{&quot;x&quot;:88,&quot;y&quot;:250},&quot;isPremium&quot;:false,&quot;isSignedURL&quot;:true},&quot;source&quot;:{&quot;id&quot;:&quot;5d9b3f39dd52690004bb5493&quot;,&quot;type&quot;:&quot;UNKNOWN&quot;,&quot;version&quot;:&quot;1570455670&quot;,&quot;legacyId&quot;:&quot;tr7ui1snneahevcecp6v&quot;,&quot;format&quot;:&quot;svg&quot;},&quot;pathStyles&quot;:[{&quot;type&quot;:&quot;FILL&quot;,&quot;fillStyle&quot;:&quot;rgb(0,0,0)&quot;}],&quot;isLocked&quot;:false,&quot;parent&quot;:{&quot;type&quot;:&quot;CHILD&quot;,&quot;parentId&quot;:&quot;0d6f7d38-39a3-4597-b305-0d8642dbc2fb&quot;,&quot;order&quot;:&quot;7&quot;}},&quot;61c8c969-1a7e-4bcc-a21c-bd31bf0c6240&quot;:{&quot;type&quot;:&quot;FIGURE_OBJECT&quot;,&quot;id&quot;:&quot;61c8c969-1a7e-4bcc-a21c-bd31bf0c6240&quot;,&quot;name&quot;:&quot;T cell receptor (TCR)&quot;,&quot;relativeTransform&quot;:{&quot;translate&quot;:{&quot;x&quot;:-17.61381825840124,&quot;y&quot;:-9.229769614009845},&quot;rotate&quot;:2.1045855475975466,&quot;skewX&quot;:3.8920842319473546e-16,&quot;scale&quot;:{&quot;x&quot;:0.0666911184362663,&quot;y&quot;:-0.0666911184362664}},&quot;opacity&quot;:1,&quot;image&quot;:{&quot;url&quot;:&quot;https://icons.biorender.com/biorender/5d9b3f39dd52690004bb5493/20191007134110/image/t-cell-receptor.png&quot;,&quot;size&quot;:{&quot;x&quot;:88,&quot;y&quot;:250},&quot;isPremium&quot;:false},&quot;source&quot;:{&quot;id&quot;:&quot;5d9b3f39dd52690004bb5493&quot;,&quot;type&quot;:&quot;ASSETS&quot;},&quot;pathStyles&quot;:[{&quot;type&quot;:&quot;FILL&quot;,&quot;fillStyle&quot;:&quot;rgb(0,0,0)&quot;}],&quot;isLocked&quot;:false,&quot;parent&quot;:{&quot;type&quot;:&quot;CHILD&quot;,&quot;parentId&quot;:&quot;0d6f7d38-39a3-4597-b305-0d8642dbc2fb&quot;,&quot;order&quot;:&quot;8&quot;}},&quot;04b6aa6f-31a0-4c7b-be78-12f520f06f49&quot;:{&quot;type&quot;:&quot;FIGURE_OBJECT&quot;,&quot;id&quot;:&quot;04b6aa6f-31a0-4c7b-be78-12f520f06f49&quot;,&quot;document&quot;:{&quot;type&quot;:&quot;FIGURE&quot;,&quot;canvasType&quot;:&quot;FIGURE&quot;,&quot;units&quot;:&quot;cm&quot;},&quot;relativeTransform&quot;:{&quot;translate&quot;:{&quot;x&quot;:0,&quot;y&quot;:0},&quot;rotate&quot;:0,&quot;skewX&quot;:0,&quot;scale&quot;:{&quot;x&quot;:1,&quot;y&quot;:1}},&quot;isLocked&quot;:false,&quot;parent&quot;:{&quot;type&quot;:&quot;DOCUMENT&quot;,&quot;parentId&quot;:&quot;bddf6853-7300-4144-9f56-b62277887ef7&quot;,&quot;order&quot;:&quot;5&quot;}},&quot;bddf6853-7300-4144-9f56-b62277887ef7&quot;:{&quot;id&quot;:&quot;bddf6853-7300-4144-9f56-b62277887ef7&quot;,&quot;type&quot;:&quot;FIGURE_OBJECT&quot;,&quot;document&quot;:{&quot;type&quot;:&quot;DOCUMENT_GROUP&quot;,&quot;canvasType&quot;:&quot;FIGURE&quot;,&quot;units&quot;:&quot;cm&quot;}}}}"/>
+</p:tagLst>
+</file>
+
+<file path=ppt/tags/tag95.xml><?xml version="1.0" encoding="utf-8"?>
+<p:tagLst xmlns:a="http://schemas.openxmlformats.org/drawingml/2006/main" xmlns:r="http://schemas.openxmlformats.org/officeDocument/2006/relationships" xmlns:p="http://schemas.openxmlformats.org/presentationml/2006/main">
+  <p:tag name="ID" val="68efc908cb5715304cea89b6"/>
+  <p:tag name="FIGURESLIDEID" val="04b6aa6f-31a0-4c7b-be78-12f520f06f49"/>
+  <p:tag name="SELECTIONIDS" val="876312f1-7fa9-45d0-9976-e81a9e92f805"/>
+  <p:tag name="TRANSPARENTBACKGROUND" val="true"/>
+  <p:tag name="VERSION" val="1760545859457"/>
+  <p:tag name="TITLE" val="HIV immune model with time delay"/>
+  <p:tag name="CREATORNAME" val="Alison Hill"/>
+  <p:tag name="DATEINSERTED" val="1760545859599"/>
+  <p:tag name="DPI" val="300"/>
+  <p:tag name="BIOJSON" val="{&quot;id&quot;:&quot;bddf6853-7300-4144-9f56-b62277887ef7&quot;,&quot;objects&quot;:{&quot;876312f1-7fa9-45d0-9976-e81a9e92f805&quot;:{&quot;type&quot;:&quot;FIGURE_OBJECT&quot;,&quot;id&quot;:&quot;876312f1-7fa9-45d0-9976-e81a9e92f805&quot;,&quot;name&quot;:&quot;Lymphocyte (B-cell, with antibodies)&quot;,&quot;relativeTransform&quot;:{&quot;translate&quot;:{&quot;x&quot;:25.230111897938485,&quot;y&quot;:10.877659394450689},&quot;rotate&quot;:0,&quot;skewX&quot;:0,&quot;scale&quot;:{&quot;x&quot;:1.0333278524933518,&quot;y&quot;:1.0333278524933518}},&quot;opacity&quot;:1,&quot;source&quot;:{&quot;type&quot;:&quot;ASSETS&quot;},&quot;pathStyles&quot;:[{&quot;type&quot;:&quot;FILL&quot;,&quot;fillStyle&quot;:&quot;rgb(0,0,0)&quot;}],&quot;isLocked&quot;:false,&quot;parent&quot;:{&quot;type&quot;:&quot;CHILD&quot;,&quot;parentId&quot;:&quot;04b6aa6f-31a0-4c7b-be78-12f520f06f49&quot;,&quot;order&quot;:&quot;07&quot;}},&quot;72e89f1b-fb3d-46be-a3a5-5d1c755890c4&quot;:{&quot;type&quot;:&quot;FIGURE_OBJECT&quot;,&quot;id&quot;:&quot;72e89f1b-fb3d-46be-a3a5-5d1c755890c4&quot;,&quot;name&quot;:&quot;B-cell&quot;,&quot;relativeTransform&quot;:{&quot;translate&quot;:{&quot;x&quot;:-0.550257629908824,&quot;y&quot;:-0.253333238293024},&quot;rotate&quot;:0,&quot;skewX&quot;:0,&quot;scale&quot;:{&quot;x&quot;:0.2111110319108605,&quot;y&quot;:0.2111110319108606}},&quot;opacity&quot;:1,&quot;image&quot;:{&quot;url&quot;:&quot;https://icons.biorender.com/biorender/5d8a2bc2977db30004d0ce75/lymphocyte-b-cell-1.png&quot;,&quot;size&quot;:{&quot;x&quot;:154,&quot;y&quot;:154},&quot;isPremium&quot;:false},&quot;source&quot;:{&quot;id&quot;:&quot;5be1c4badf7f0b120034ba5b&quot;,&quot;type&quot;:&quot;ASSETS&quot;},&quot;pathStyles&quot;:[{&quot;type&quot;:&quot;FILL&quot;,&quot;fillStyle&quot;:&quot;rgb(0,0,0)&quot;}],&quot;isLocked&quot;:false,&quot;parent&quot;:{&quot;type&quot;:&quot;CHILD&quot;,&quot;parentId&quot;:&quot;876312f1-7fa9-45d0-9976-e81a9e92f805&quot;,&quot;order&quot;:&quot;1&quot;}},&quot;17ef2fb8-202d-42cf-8380-d24cc28408aa&quot;:{&quot;type&quot;:&quot;FIGURE_OBJECT&quot;,&quot;id&quot;:&quot;17ef2fb8-202d-42cf-8380-d24cc28408aa&quot;,&quot;name&quot;:&quot;Antibody (membrane-bound)&quot;,&quot;relativeTransform&quot;:{&quot;translate&quot;:{&quot;x&quot;:1.4601689662885016,&quot;y&quot;:-19.811958379326988},&quot;rotate&quot;:0,&quot;skewX&quot;:0,&quot;scale&quot;:{&quot;x&quot;:0.0422222063821721,&quot;y&quot;:0.04547006841157}},&quot;opacity&quot;:1,&quot;image&quot;:{&quot;url&quot;:&quot;https://icons.cdn.biorender.com/biorender/5b43adeb813b770014a88b5a/5b43ad65813b770014a88b4e.png&quot;,&quot;size&quot;:{&quot;x&quot;:182,&quot;y&quot;:269},&quot;isPremium&quot;:false},&quot;source&quot;:{&quot;type&quot;:&quot;ASSETS&quot;,&quot;id&quot;:&quot;5b43adeb813b770014a88b5a&quot;},&quot;pathStyles&quot;:[{&quot;type&quot;:&quot;FILL&quot;,&quot;fillStyle&quot;:&quot;rgb(0,0,0)&quot;}],&quot;isLocked&quot;:false,&quot;parent&quot;:{&quot;type&quot;:&quot;CHILD&quot;,&quot;parentId&quot;:&quot;876312f1-7fa9-45d0-9976-e81a9e92f805&quot;,&quot;order&quot;:&quot;2&quot;}},&quot;ba96c701-90b6-4ebd-a687-580ff38632fb&quot;:{&quot;type&quot;:&quot;FIGURE_OBJECT&quot;,&quot;id&quot;:&quot;ba96c701-90b6-4ebd-a687-580ff38632fb&quot;,&quot;name&quot;:&quot;Antibody (membrane-bound)&quot;,&quot;relativeTransform&quot;:{&quot;translate&quot;:{&quot;x&quot;:17.37606798753494,&quot;y&quot;:-9.254894171066649},&quot;rotate&quot;:1.023112007519076,&quot;skewX&quot;:0,&quot;scale&quot;:{&quot;x&quot;:0.0422222063821721,&quot;y&quot;:0.04547006841157}},&quot;opacity&quot;:1,&quot;image&quot;:{&quot;url&quot;:&quot;https://icons.cdn.biorender.com/biorender/5b43adeb813b770014a88b5a/5b43ad65813b770014a88b4e.png&quot;,&quot;size&quot;:{&quot;x&quot;:182,&quot;y&quot;:269},&quot;isPremium&quot;:false},&quot;source&quot;:{&quot;type&quot;:&quot;ASSETS&quot;,&quot;id&quot;:&quot;5b43adeb813b770014a88b5a&quot;},&quot;pathStyles&quot;:[{&quot;type&quot;:&quot;FILL&quot;,&quot;fillStyle&quot;:&quot;rgb(0,0,0)&quot;}],&quot;isLocked&quot;:false,&quot;parent&quot;:{&quot;type&quot;:&quot;CHILD&quot;,&quot;parentId&quot;:&quot;876312f1-7fa9-45d0-9976-e81a9e92f805&quot;,&quot;order&quot;:&quot;3&quot;}},&quot;0135405e-7640-48c5-81d7-3bca8c49fb79&quot;:{&quot;type&quot;:&quot;FIGURE_OBJECT&quot;,&quot;id&quot;:&quot;0135405e-7640-48c5-81d7-3bca8c49fb79&quot;,&quot;name&quot;:&quot;Antibody (membrane-bound)&quot;,&quot;relativeTransform&quot;:{&quot;translate&quot;:{&quot;x&quot;:15.100188238976168,&quot;y&quot;:12.668364972609636},&quot;rotate&quot;:2.2080160366980266,&quot;skewX&quot;:-2.426007660272118e-16,&quot;scale&quot;:{&quot;x&quot;:0.0422222063821721,&quot;y&quot;:0.04547006841157}},&quot;opacity&quot;:1,&quot;image&quot;:{&quot;url&quot;:&quot;https://icons.cdn.biorender.com/biorender/5b43adeb813b770014a88b5a/5b43ad65813b770014a88b4e.png&quot;,&quot;size&quot;:{&quot;x&quot;:182,&quot;y&quot;:269},&quot;isPremium&quot;:false},&quot;source&quot;:{&quot;type&quot;:&quot;ASSETS&quot;,&quot;id&quot;:&quot;5b43adeb813b770014a88b5a&quot;},&quot;pathStyles&quot;:[{&quot;type&quot;:&quot;FILL&quot;,&quot;fillStyle&quot;:&quot;rgb(0,0,0)&quot;}],&quot;isLocked&quot;:false,&quot;parent&quot;:{&quot;type&quot;:&quot;CHILD&quot;,&quot;parentId&quot;:&quot;876312f1-7fa9-45d0-9976-e81a9e92f805&quot;,&quot;order&quot;:&quot;5&quot;}},&quot;fe992898-3c7a-458f-8069-6cb728fda7d3&quot;:{&quot;type&quot;:&quot;FIGURE_OBJECT&quot;,&quot;id&quot;:&quot;fe992898-3c7a-458f-8069-6cb728fda7d3&quot;,&quot;name&quot;:&quot;Antibody (membrane-bound)&quot;,&quot;relativeTransform&quot;:{&quot;translate&quot;:{&quot;x&quot;:0.81059656040873,&quot;y&quot;:19.811958379326875},&quot;rotate&quot;:3.141592653589793,&quot;skewX&quot;:0,&quot;scale&quot;:{&quot;x&quot;:0.0422222063821721,&quot;y&quot;:0.04547006841157}},&quot;opacity&quot;:1,&quot;image&quot;:{&quot;url&quot;:&quot;https://icons.cdn.biorender.com/biorender/5b43adeb813b770014a88b5a/5b43ad65813b770014a88b4e.png&quot;,&quot;size&quot;:{&quot;x&quot;:182,&quot;y&quot;:269},&quot;isPremium&quot;:false},&quot;source&quot;:{&quot;type&quot;:&quot;ASSETS&quot;,&quot;id&quot;:&quot;5b43adeb813b770014a88b5a&quot;},&quot;pathStyles&quot;:[{&quot;type&quot;:&quot;FILL&quot;,&quot;fillStyle&quot;:&quot;rgb(0,0,0)&quot;}],&quot;isLocked&quot;:false,&quot;parent&quot;:{&quot;type&quot;:&quot;CHILD&quot;,&quot;parentId&quot;:&quot;876312f1-7fa9-45d0-9976-e81a9e92f805&quot;,&quot;order&quot;:&quot;6&quot;}},&quot;56be51c1-dbd5-4e6f-a628-89f29372d92d&quot;:{&quot;type&quot;:&quot;FIGURE_OBJECT&quot;,&quot;id&quot;:&quot;56be51c1-dbd5-4e6f-a628-89f29372d92d&quot;,&quot;name&quot;:&quot;Antibody (membrane-bound)&quot;,&quot;relativeTransform&quot;:{&quot;translate&quot;:{&quot;x&quot;:-17.376067987535023,&quot;y&quot;:-9.25489446820495},&quot;rotate&quot;:2.1184806460707173,&quot;skewX&quot;:6.108652381980153e-17,&quot;scale&quot;:{&quot;x&quot;:0.0422222063821721,&quot;y&quot;:-0.04547006841157}},&quot;opacity&quot;:1,&quot;image&quot;:{&quot;url&quot;:&quot;https://icons.cdn.biorender.com/biorender/5b43adeb813b770014a88b5a/5b43ad65813b770014a88b4e.png&quot;,&quot;size&quot;:{&quot;x&quot;:182,&quot;y&quot;:269},&quot;isPremium&quot;:false},&quot;source&quot;:{&quot;type&quot;:&quot;ASSETS&quot;,&quot;id&quot;:&quot;5b43adeb813b770014a88b5a&quot;},&quot;pathStyles&quot;:[{&quot;type&quot;:&quot;FILL&quot;,&quot;fillStyle&quot;:&quot;rgb(0,0,0)&quot;}],&quot;isLocked&quot;:false,&quot;parent&quot;:{&quot;type&quot;:&quot;CHILD&quot;,&quot;parentId&quot;:&quot;876312f1-7fa9-45d0-9976-e81a9e92f805&quot;,&quot;order&quot;:&quot;7&quot;}},&quot;c72ed26e-6181-47b2-877f-bf06e0750649&quot;:{&quot;type&quot;:&quot;FIGURE_OBJECT&quot;,&quot;id&quot;:&quot;c72ed26e-6181-47b2-877f-bf06e0750649&quot;,&quot;name&quot;:&quot;Antibody (membrane-bound)&quot;,&quot;relativeTransform&quot;:{&quot;translate&quot;:{&quot;x&quot;:-16.405104185699972,&quot;y&quot;:12.34238014183602},&quot;rotate&quot;:0.9335766168917671,&quot;skewX&quot;:-8.517206749732328e-16,&quot;scale&quot;:{&quot;x&quot;:0.0422222063821721,&quot;y&quot;:-0.04547006841157}},&quot;opacity&quot;:1,&quot;image&quot;:{&quot;url&quot;:&quot;https://icons.cdn.biorender.com/biorender/5b43adeb813b770014a88b5a/5b43ad65813b770014a88b4e.png&quot;,&quot;size&quot;:{&quot;x&quot;:182,&quot;y&quot;:269},&quot;isPremium&quot;:false},&quot;source&quot;:{&quot;type&quot;:&quot;ASSETS&quot;,&quot;id&quot;:&quot;5b43adeb813b770014a88b5a&quot;},&quot;pathStyles&quot;:[{&quot;type&quot;:&quot;FILL&quot;,&quot;fillStyle&quot;:&quot;rgb(0,0,0)&quot;}],&quot;isLocked&quot;:false,&quot;parent&quot;:{&quot;type&quot;:&quot;CHILD&quot;,&quot;parentId&quot;:&quot;876312f1-7fa9-45d0-9976-e81a9e92f805&quot;,&quot;order&quot;:&quot;8&quot;}},&quot;04b6aa6f-31a0-4c7b-be78-12f520f06f49&quot;:{&quot;type&quot;:&quot;FIGURE_OBJECT&quot;,&quot;id&quot;:&quot;04b6aa6f-31a0-4c7b-be78-12f520f06f49&quot;,&quot;document&quot;:{&quot;type&quot;:&quot;FIGURE&quot;,&quot;canvasType&quot;:&quot;FIGURE&quot;,&quot;units&quot;:&quot;cm&quot;},&quot;relativeTransform&quot;:{&quot;translate&quot;:{&quot;x&quot;:0,&quot;y&quot;:0},&quot;rotate&quot;:0,&quot;skewX&quot;:0,&quot;scale&quot;:{&quot;x&quot;:1,&quot;y&quot;:1}},&quot;isLocked&quot;:false,&quot;parent&quot;:{&quot;type&quot;:&quot;DOCUMENT&quot;,&quot;parentId&quot;:&quot;bddf6853-7300-4144-9f56-b62277887ef7&quot;,&quot;order&quot;:&quot;5&quot;}},&quot;bddf6853-7300-4144-9f56-b62277887ef7&quot;:{&quot;id&quot;:&quot;bddf6853-7300-4144-9f56-b62277887ef7&quot;,&quot;type&quot;:&quot;FIGURE_OBJECT&quot;,&quot;document&quot;:{&quot;type&quot;:&quot;DOCUMENT_GROUP&quot;,&quot;canvasType&quot;:&quot;FIGURE&quot;,&quot;units&quot;:&quot;cm&quot;}}}}"/>
+</p:tagLst>
+</file>
+
+<file path=ppt/tags/tag96.xml><?xml version="1.0" encoding="utf-8"?>
+<p:tagLst xmlns:a="http://schemas.openxmlformats.org/drawingml/2006/main" xmlns:r="http://schemas.openxmlformats.org/officeDocument/2006/relationships" xmlns:p="http://schemas.openxmlformats.org/presentationml/2006/main">
+  <p:tag name="ID" val="68efc908cb5715304cea89b6"/>
+  <p:tag name="FIGURESLIDEID" val="04b6aa6f-31a0-4c7b-be78-12f520f06f49"/>
+  <p:tag name="SELECTIONIDS" val="8832a431-aedd-48e5-a0b4-fbab37677e06"/>
+  <p:tag name="TRANSPARENTBACKGROUND" val="true"/>
+  <p:tag name="VERSION" val="1760545859457"/>
+  <p:tag name="TITLE" val="HIV immune model with time delay"/>
+  <p:tag name="CREATORNAME" val="Alison Hill"/>
+  <p:tag name="DATEINSERTED" val="1760545859599"/>
+  <p:tag name="DPI" val="300"/>
+  <p:tag name="BIOJSON" val="{&quot;id&quot;:&quot;bddf6853-7300-4144-9f56-b62277887ef7&quot;,&quot;objects&quot;:{&quot;8832a431-aedd-48e5-a0b4-fbab37677e06&quot;:{&quot;type&quot;:&quot;FIGURE_OBJECT&quot;,&quot;id&quot;:&quot;8832a431-aedd-48e5-a0b4-fbab37677e06&quot;,&quot;name&quot;:&quot;HIV (genome 1)&quot;,&quot;relativeTransform&quot;:{&quot;translate&quot;:{&quot;x&quot;:74.67276063688507,&quot;y&quot;:-59.346800600585716},&quot;rotate&quot;:-1.5707963267948966,&quot;skewX&quot;:0,&quot;scale&quot;:{&quot;x&quot;:0.0780115647919339,&quot;y&quot;:0.0780115647919339}},&quot;opacity&quot;:1,&quot;image&quot;:{&quot;url&quot;:&quot;https://icons.biorender.com/biorender/5cf1809048bc020400d6b414/hiv-genome-1.png&quot;,&quot;size&quot;:{&quot;x&quot;:125,&quot;y&quot;:250},&quot;isPremium&quot;:false},&quot;source&quot;:{&quot;id&quot;:&quot;5cf1805348bc020400d6b40b&quot;,&quot;type&quot;:&quot;ASSETS&quot;},&quot;pathStyles&quot;:[{&quot;type&quot;:&quot;FILL&quot;,&quot;fillStyle&quot;:&quot;rgb(0,0,0)&quot;}],&quot;isLocked&quot;:false,&quot;parent&quot;:{&quot;type&quot;:&quot;CHILD&quot;,&quot;parentId&quot;:&quot;04b6aa6f-31a0-4c7b-be78-12f520f06f49&quot;,&quot;order&quot;:&quot;1&quot;}},&quot;04b6aa6f-31a0-4c7b-be78-12f520f06f49&quot;:{&quot;type&quot;:&quot;FIGURE_OBJECT&quot;,&quot;id&quot;:&quot;04b6aa6f-31a0-4c7b-be78-12f520f06f49&quot;,&quot;document&quot;:{&quot;type&quot;:&quot;FIGURE&quot;,&quot;canvasType&quot;:&quot;FIGURE&quot;,&quot;units&quot;:&quot;cm&quot;},&quot;relativeTransform&quot;:{&quot;translate&quot;:{&quot;x&quot;:0,&quot;y&quot;:0},&quot;rotate&quot;:0,&quot;skewX&quot;:0,&quot;scale&quot;:{&quot;x&quot;:1,&quot;y&quot;:1}},&quot;isLocked&quot;:false,&quot;parent&quot;:{&quot;type&quot;:&quot;DOCUMENT&quot;,&quot;parentId&quot;:&quot;bddf6853-7300-4144-9f56-b62277887ef7&quot;,&quot;order&quot;:&quot;5&quot;}},&quot;bddf6853-7300-4144-9f56-b62277887ef7&quot;:{&quot;id&quot;:&quot;bddf6853-7300-4144-9f56-b62277887ef7&quot;,&quot;type&quot;:&quot;FIGURE_OBJECT&quot;,&quot;document&quot;:{&quot;type&quot;:&quot;DOCUMENT_GROUP&quot;,&quot;canvasType&quot;:&quot;FIGURE&quot;,&quot;units&quot;:&quot;cm&quot;}}}}"/>
+</p:tagLst>
+</file>
+
+<file path=ppt/tags/tag97.xml><?xml version="1.0" encoding="utf-8"?>
+<p:tagLst xmlns:a="http://schemas.openxmlformats.org/drawingml/2006/main" xmlns:r="http://schemas.openxmlformats.org/officeDocument/2006/relationships" xmlns:p="http://schemas.openxmlformats.org/presentationml/2006/main">
+  <p:tag name="ID" val="68efc908cb5715304cea89b6"/>
+  <p:tag name="FIGURESLIDEID" val="04b6aa6f-31a0-4c7b-be78-12f520f06f49"/>
+  <p:tag name="SELECTIONIDS" val="fe804b54-45fb-422b-b258-593c973b3aa3"/>
+  <p:tag name="TRANSPARENTBACKGROUND" val="true"/>
+  <p:tag name="VERSION" val="1760545859457"/>
+  <p:tag name="TITLE" val="HIV immune model with time delay"/>
+  <p:tag name="CREATORNAME" val="Alison Hill"/>
+  <p:tag name="DATEINSERTED" val="1760545859599"/>
+  <p:tag name="DPI" val="300"/>
+  <p:tag name="BIOJSON" val="{&quot;id&quot;:&quot;bddf6853-7300-4144-9f56-b62277887ef7&quot;,&quot;objects&quot;:{&quot;fe804b54-45fb-422b-b258-593c973b3aa3&quot;:{&quot;type&quot;:&quot;FIGURE_OBJECT&quot;,&quot;id&quot;:&quot;fe804b54-45fb-422b-b258-593c973b3aa3&quot;,&quot;name&quot;:&quot;Virus (round 2)&quot;,&quot;relativeTransform&quot;:{&quot;translate&quot;:{&quot;x&quot;:4.537716652569866,&quot;y&quot;:-63.511530347851235},&quot;rotate&quot;:0,&quot;skewX&quot;:0,&quot;scale&quot;:{&quot;x&quot;:0.0903741294160818,&quot;y&quot;:0.0903741294160818}},&quot;opacity&quot;:1,&quot;image&quot;:{&quot;url&quot;:&quot;https://icons.biorender.com/biorender/5a32c43541f3060014913ac5/20180308183409/image/virus-round-2.png&quot;,&quot;size&quot;:{&quot;x&quot;:96,&quot;y&quot;:96},&quot;isPremium&quot;:false},&quot;source&quot;:{&quot;id&quot;:&quot;5a32c43541f3060014913ac5&quot;,&quot;type&quot;:&quot;ASSETS&quot;},&quot;pathStyles&quot;:[{&quot;type&quot;:&quot;FILL&quot;,&quot;fillStyle&quot;:&quot;rgb(0,0,0)&quot;}],&quot;isLocked&quot;:false,&quot;parent&quot;:{&quot;type&quot;:&quot;CHILD&quot;,&quot;parentId&quot;:&quot;04b6aa6f-31a0-4c7b-be78-12f520f06f49&quot;,&quot;order&quot;:&quot;11&quot;}},&quot;04b6aa6f-31a0-4c7b-be78-12f520f06f49&quot;:{&quot;type&quot;:&quot;FIGURE_OBJECT&quot;,&quot;id&quot;:&quot;04b6aa6f-31a0-4c7b-be78-12f520f06f49&quot;,&quot;document&quot;:{&quot;type&quot;:&quot;FIGURE&quot;,&quot;canvasType&quot;:&quot;FIGURE&quot;,&quot;units&quot;:&quot;cm&quot;},&quot;relativeTransform&quot;:{&quot;translate&quot;:{&quot;x&quot;:0,&quot;y&quot;:0},&quot;rotate&quot;:0,&quot;skewX&quot;:0,&quot;scale&quot;:{&quot;x&quot;:1,&quot;y&quot;:1}},&quot;isLocked&quot;:false,&quot;parent&quot;:{&quot;type&quot;:&quot;DOCUMENT&quot;,&quot;parentId&quot;:&quot;bddf6853-7300-4144-9f56-b62277887ef7&quot;,&quot;order&quot;:&quot;5&quot;}},&quot;bddf6853-7300-4144-9f56-b62277887ef7&quot;:{&quot;id&quot;:&quot;bddf6853-7300-4144-9f56-b62277887ef7&quot;,&quot;type&quot;:&quot;FIGURE_OBJECT&quot;,&quot;document&quot;:{&quot;type&quot;:&quot;DOCUMENT_GROUP&quot;,&quot;canvasType&quot;:&quot;FIGURE&quot;,&quot;units&quot;:&quot;cm&quot;}}}}"/>
+</p:tagLst>
+</file>
+
+<file path=ppt/tags/tag98.xml><?xml version="1.0" encoding="utf-8"?>
+<p:tagLst xmlns:a="http://schemas.openxmlformats.org/drawingml/2006/main" xmlns:r="http://schemas.openxmlformats.org/officeDocument/2006/relationships" xmlns:p="http://schemas.openxmlformats.org/presentationml/2006/main">
+  <p:tag name="ID" val="68efc908cb5715304cea89b6"/>
+  <p:tag name="FIGURESLIDEID" val="04b6aa6f-31a0-4c7b-be78-12f520f06f49"/>
+  <p:tag name="SELECTIONIDS" val="4496b98d-5694-4cd7-add3-457de281248a"/>
+  <p:tag name="TRANSPARENTBACKGROUND" val="true"/>
+  <p:tag name="VERSION" val="1760545859457"/>
+  <p:tag name="TITLE" val="HIV immune model with time delay"/>
+  <p:tag name="CREATORNAME" val="Alison Hill"/>
+  <p:tag name="DATEINSERTED" val="1760545859599"/>
+  <p:tag name="DPI" val="300"/>
+  <p:tag name="BIOJSON" val="{&quot;id&quot;:&quot;bddf6853-7300-4144-9f56-b62277887ef7&quot;,&quot;objects&quot;:{&quot;4496b98d-5694-4cd7-add3-457de281248a&quot;:{&quot;type&quot;:&quot;FIGURE_OBJECT&quot;,&quot;id&quot;:&quot;4496b98d-5694-4cd7-add3-457de281248a&quot;,&quot;name&quot;:&quot;Virus (round 2)&quot;,&quot;relativeTransform&quot;:{&quot;translate&quot;:{&quot;x&quot;:14.8199286386906,&quot;y&quot;:-68.30989594137428},&quot;rotate&quot;:0,&quot;skewX&quot;:0,&quot;scale&quot;:{&quot;x&quot;:0.0903741294160818,&quot;y&quot;:0.0903741294160818}},&quot;opacity&quot;:1,&quot;image&quot;:{&quot;url&quot;:&quot;https://icons.biorender.com/biorender/5a32c43541f3060014913ac5/20180308183409/image/virus-round-2.png&quot;,&quot;size&quot;:{&quot;x&quot;:96,&quot;y&quot;:96},&quot;isPremium&quot;:false},&quot;source&quot;:{&quot;id&quot;:&quot;5a32c43541f3060014913ac5&quot;,&quot;type&quot;:&quot;ASSETS&quot;},&quot;pathStyles&quot;:[{&quot;type&quot;:&quot;FILL&quot;,&quot;fillStyle&quot;:&quot;rgb(0,0,0)&quot;}],&quot;isLocked&quot;:false,&quot;parent&quot;:{&quot;type&quot;:&quot;CHILD&quot;,&quot;parentId&quot;:&quot;04b6aa6f-31a0-4c7b-be78-12f520f06f49&quot;,&quot;order&quot;:&quot;12&quot;}},&quot;04b6aa6f-31a0-4c7b-be78-12f520f06f49&quot;:{&quot;type&quot;:&quot;FIGURE_OBJECT&quot;,&quot;id&quot;:&quot;04b6aa6f-31a0-4c7b-be78-12f520f06f49&quot;,&quot;document&quot;:{&quot;type&quot;:&quot;FIGURE&quot;,&quot;canvasType&quot;:&quot;FIGURE&quot;,&quot;units&quot;:&quot;cm&quot;},&quot;relativeTransform&quot;:{&quot;translate&quot;:{&quot;x&quot;:0,&quot;y&quot;:0},&quot;rotate&quot;:0,&quot;skewX&quot;:0,&quot;scale&quot;:{&quot;x&quot;:1,&quot;y&quot;:1}},&quot;isLocked&quot;:false,&quot;parent&quot;:{&quot;type&quot;:&quot;DOCUMENT&quot;,&quot;parentId&quot;:&quot;bddf6853-7300-4144-9f56-b62277887ef7&quot;,&quot;order&quot;:&quot;5&quot;}},&quot;bddf6853-7300-4144-9f56-b62277887ef7&quot;:{&quot;id&quot;:&quot;bddf6853-7300-4144-9f56-b62277887ef7&quot;,&quot;type&quot;:&quot;FIGURE_OBJECT&quot;,&quot;document&quot;:{&quot;type&quot;:&quot;DOCUMENT_GROUP&quot;,&quot;canvasType&quot;:&quot;FIGURE&quot;,&quot;units&quot;:&quot;cm&quot;}}}}"/>
+</p:tagLst>
+</file>
+
+<file path=ppt/tags/tag99.xml><?xml version="1.0" encoding="utf-8"?>
+<p:tagLst xmlns:a="http://schemas.openxmlformats.org/drawingml/2006/main" xmlns:r="http://schemas.openxmlformats.org/officeDocument/2006/relationships" xmlns:p="http://schemas.openxmlformats.org/presentationml/2006/main">
+  <p:tag name="ID" val="68efc908cb5715304cea89b6"/>
+  <p:tag name="FIGURESLIDEID" val="04b6aa6f-31a0-4c7b-be78-12f520f06f49"/>
+  <p:tag name="SELECTIONIDS" val="8dcd8037-107a-4432-8dfd-cc4cf98d3d1f"/>
+  <p:tag name="TRANSPARENTBACKGROUND" val="true"/>
+  <p:tag name="VERSION" val="1760545859457"/>
+  <p:tag name="TITLE" val="HIV immune model with time delay"/>
+  <p:tag name="CREATORNAME" val="Alison Hill"/>
+  <p:tag name="DATEINSERTED" val="1760545859599"/>
+  <p:tag name="DPI" val="300"/>
+  <p:tag name="BIOJSON" val="{&quot;id&quot;:&quot;bddf6853-7300-4144-9f56-b62277887ef7&quot;,&quot;objects&quot;:{&quot;8dcd8037-107a-4432-8dfd-cc4cf98d3d1f&quot;:{&quot;type&quot;:&quot;FIGURE_OBJECT&quot;,&quot;id&quot;:&quot;8dcd8037-107a-4432-8dfd-cc4cf98d3d1f&quot;,&quot;name&quot;:&quot;Virus (round 2)&quot;,&quot;relativeTransform&quot;:{&quot;translate&quot;:{&quot;x&quot;:8.650601447018387,&quot;y&quot;:-71.05181913767306},&quot;rotate&quot;:0,&quot;skewX&quot;:0,&quot;scale&quot;:{&quot;x&quot;:0.0903741294160818,&quot;y&quot;:0.0903741294160818}},&quot;opacity&quot;:1,&quot;image&quot;:{&quot;url&quot;:&quot;https://icons.biorender.com/biorender/5a32c43541f3060014913ac5/20180308183409/image/virus-round-2.png&quot;,&quot;size&quot;:{&quot;x&quot;:96,&quot;y&quot;:96},&quot;isPremium&quot;:false},&quot;source&quot;:{&quot;id&quot;:&quot;5a32c43541f3060014913ac5&quot;,&quot;type&quot;:&quot;ASSETS&quot;},&quot;pathStyles&quot;:[{&quot;type&quot;:&quot;FILL&quot;,&quot;fillStyle&quot;:&quot;rgb(0,0,0)&quot;}],&quot;isLocked&quot;:false,&quot;parent&quot;:{&quot;type&quot;:&quot;CHILD&quot;,&quot;parentId&quot;:&quot;04b6aa6f-31a0-4c7b-be78-12f520f06f49&quot;,&quot;order&quot;:&quot;15&quot;}},&quot;04b6aa6f-31a0-4c7b-be78-12f520f06f49&quot;:{&quot;type&quot;:&quot;FIGURE_OBJECT&quot;,&quot;id&quot;:&quot;04b6aa6f-31a0-4c7b-be78-12f520f06f49&quot;,&quot;document&quot;:{&quot;type&quot;:&quot;FIGURE&quot;,&quot;canvasType&quot;:&quot;FIGURE&quot;,&quot;units&quot;:&quot;cm&quot;},&quot;relativeTransform&quot;:{&quot;translate&quot;:{&quot;x&quot;:0,&quot;y&quot;:0},&quot;rotate&quot;:0,&quot;skewX&quot;:0,&quot;scale&quot;:{&quot;x&quot;:1,&quot;y&quot;:1}},&quot;isLocked&quot;:false,&quot;parent&quot;:{&quot;type&quot;:&quot;DOCUMENT&quot;,&quot;parentId&quot;:&quot;bddf6853-7300-4144-9f56-b62277887ef7&quot;,&quot;order&quot;:&quot;5&quot;}},&quot;bddf6853-7300-4144-9f56-b62277887ef7&quot;:{&quot;id&quot;:&quot;bddf6853-7300-4144-9f56-b62277887ef7&quot;,&quot;type&quot;:&quot;FIGURE_OBJECT&quot;,&quot;document&quot;:{&quot;type&quot;:&quot;DOCUMENT_GROUP&quot;,&quot;canvasType&quot;:&quot;FIGURE&quot;,&quot;units&quot;:&quot;cm&quot;}}}}"/>
 </p:tagLst>
 </file>
 
